--- a/Entrega-P1/Apresentacao_P1.pptx
+++ b/Entrega-P1/Apresentacao_P1.pptx
@@ -1559,7 +1559,7 @@
     <p:bg>
       <p:bgPr>
         <a:solidFill>
-          <a:srgbClr val="F4F8FB"/>
+          <a:srgbClr val="FFFFFF"/>
         </a:solidFill>
       </p:bgPr>
     </p:bg>
@@ -1579,40 +1579,15 @@
       </p:grpSpPr>
       <p:sp>
         <p:nvSpPr>
-          <p:cNvPr id="2" name="Shape 0"/>
-          <p:cNvSpPr/>
-          <p:nvPr/>
-        </p:nvSpPr>
-        <p:spPr>
-          <a:xfrm>
-            <a:off x="0" y="0"/>
-            <a:ext cx="95250" cy="6858000"/>
-          </a:xfrm>
-          <a:prstGeom prst="rect">
-            <a:avLst/>
-          </a:prstGeom>
-          <a:solidFill>
-            <a:schemeClr val="accent1"/>
-          </a:solidFill>
-          <a:ln w="12700">
-            <a:solidFill>
-              <a:schemeClr val="accent1"/>
-            </a:solidFill>
-            <a:prstDash val="solid"/>
-          </a:ln>
-        </p:spPr>
-      </p:sp>
-      <p:sp>
-        <p:nvSpPr>
-          <p:cNvPr id="3" name="Text 1"/>
+          <p:cNvPr id="2" name="Text 0"/>
           <p:cNvSpPr/>
           <p:nvPr>
-            <p:ph idx="101" type="body" hasCustomPrompt="1"/>
+            <p:ph idx="100" type="body" hasCustomPrompt="1"/>
           </p:nvPr>
         </p:nvSpPr>
         <p:spPr>
           <a:xfrm>
-            <a:off x="685800" y="1676400"/>
+            <a:off x="685800" y="2038350"/>
             <a:ext cx="10820400" cy="228600"/>
           </a:xfrm>
           <a:prstGeom prst="rect">
@@ -1626,9 +1601,9 @@
           <a:lstStyle>
             <a:lvl1pPr algn="l" indent="0" marL="0">
               <a:buNone/>
-              <a:defRPr lang="en-US" sz="1350" b="1" spc="190" kern="0" dirty="0">
-                <a:solidFill>
-                  <a:schemeClr val="accent2"/>
+              <a:defRPr lang="en-US" sz="1275" b="1" spc="150" kern="0" dirty="0">
+                <a:solidFill>
+                  <a:schemeClr val="tx2"/>
                 </a:solidFill>
               </a:defRPr>
             </a:lvl1pPr>
@@ -1638,29 +1613,29 @@
               <a:buNone/>
             </a:pPr>
             <a:r>
-              <a:rPr lang="en-US" sz="1350" b="1" spc="190" kern="0" dirty="0">
-                <a:solidFill>
-                  <a:schemeClr val="accent2"/>
+              <a:rPr lang="en-US" sz="1275" b="1" spc="150" kern="0" dirty="0">
+                <a:solidFill>
+                  <a:schemeClr val="tx2"/>
                 </a:solidFill>
               </a:rPr>
-              <a:t>SEÇÃO</a:t>
-            </a:r>
-            <a:endParaRPr lang="en-US" sz="1350" dirty="0"/>
+              <a:t>DISCIPLINA</a:t>
+            </a:r>
+            <a:endParaRPr lang="en-US" sz="1275" dirty="0"/>
           </a:p>
         </p:txBody>
       </p:sp>
       <p:sp>
         <p:nvSpPr>
-          <p:cNvPr id="4" name="Text 1"/>
+          <p:cNvPr id="3" name="Text 0"/>
           <p:cNvSpPr/>
           <p:nvPr>
-            <p:ph idx="102" type="title" hasCustomPrompt="1"/>
+            <p:ph idx="101" type="title" hasCustomPrompt="1"/>
           </p:nvPr>
         </p:nvSpPr>
         <p:spPr>
           <a:xfrm>
-            <a:off x="685800" y="1943100"/>
-            <a:ext cx="10820400" cy="1485900"/>
+            <a:off x="685800" y="2324100"/>
+            <a:ext cx="10820400" cy="685800"/>
           </a:xfrm>
           <a:prstGeom prst="rect">
             <a:avLst/>
@@ -1673,7 +1648,7 @@
           <a:lstStyle>
             <a:lvl1pPr algn="l" indent="0" marL="0">
               <a:buNone/>
-              <a:defRPr lang="en-US" sz="5100" b="1" dirty="0">
+              <a:defRPr lang="en-US" sz="4400" b="1" dirty="0">
                 <a:solidFill>
                   <a:schemeClr val="accent1"/>
                 </a:solidFill>
@@ -1685,14 +1660,14 @@
               <a:buNone/>
             </a:pPr>
             <a:r>
-              <a:rPr lang="en-US" sz="5100" b="1" dirty="0">
+              <a:rPr lang="en-US" sz="4400" b="1" dirty="0">
                 <a:solidFill>
                   <a:schemeClr val="accent1"/>
                 </a:solidFill>
               </a:rPr>
               <a:t>Título</a:t>
             </a:r>
-            <a:endParaRPr lang="en-US" sz="5100" dirty="0"/>
+            <a:endParaRPr lang="en-US" sz="4400" dirty="0"/>
           </a:p>
         </p:txBody>
       </p:sp>
@@ -1730,41 +1705,16 @@
       </p:grpSpPr>
       <p:sp>
         <p:nvSpPr>
-          <p:cNvPr id="2" name="Shape 0"/>
-          <p:cNvSpPr/>
-          <p:nvPr/>
-        </p:nvSpPr>
-        <p:spPr>
-          <a:xfrm>
-            <a:off x="0" y="0"/>
-            <a:ext cx="95250" cy="6858000"/>
-          </a:xfrm>
-          <a:prstGeom prst="rect">
-            <a:avLst/>
-          </a:prstGeom>
-          <a:solidFill>
-            <a:schemeClr val="accent1"/>
-          </a:solidFill>
-          <a:ln w="12700">
-            <a:solidFill>
-              <a:schemeClr val="accent1"/>
-            </a:solidFill>
-            <a:prstDash val="solid"/>
-          </a:ln>
-        </p:spPr>
-      </p:sp>
-      <p:sp>
-        <p:nvSpPr>
-          <p:cNvPr id="3" name="Text 1"/>
+          <p:cNvPr id="2" name="Text 0"/>
           <p:cNvSpPr/>
           <p:nvPr>
-            <p:ph idx="101" type="body" hasCustomPrompt="1"/>
+            <p:ph idx="100" type="body" hasCustomPrompt="1"/>
           </p:nvPr>
         </p:nvSpPr>
         <p:spPr>
           <a:xfrm>
             <a:off x="685800" y="514350"/>
-            <a:ext cx="10820400" cy="228600"/>
+            <a:ext cx="10820400" cy="209550"/>
           </a:xfrm>
           <a:prstGeom prst="rect">
             <a:avLst/>
@@ -1777,9 +1727,9 @@
           <a:lstStyle>
             <a:lvl1pPr algn="l" indent="0" marL="0">
               <a:buNone/>
-              <a:defRPr lang="en-US" sz="1350" b="1" spc="190" kern="0" dirty="0">
-                <a:solidFill>
-                  <a:schemeClr val="accent2"/>
+              <a:defRPr lang="en-US" sz="1200" b="1" spc="150" kern="0" dirty="0">
+                <a:solidFill>
+                  <a:schemeClr val="tx2"/>
                 </a:solidFill>
               </a:defRPr>
             </a:lvl1pPr>
@@ -1789,29 +1739,29 @@
               <a:buNone/>
             </a:pPr>
             <a:r>
-              <a:rPr lang="en-US" sz="1350" b="1" spc="190" kern="0" dirty="0">
-                <a:solidFill>
-                  <a:schemeClr val="accent2"/>
+              <a:rPr lang="en-US" sz="1200" b="1" spc="150" kern="0" dirty="0">
+                <a:solidFill>
+                  <a:schemeClr val="tx2"/>
                 </a:solidFill>
               </a:rPr>
               <a:t>SEÇÃO</a:t>
             </a:r>
-            <a:endParaRPr lang="en-US" sz="1350" dirty="0"/>
+            <a:endParaRPr lang="en-US" sz="1200" dirty="0"/>
           </a:p>
         </p:txBody>
       </p:sp>
       <p:sp>
         <p:nvSpPr>
-          <p:cNvPr id="4" name="Text 1"/>
+          <p:cNvPr id="3" name="Text 0"/>
           <p:cNvSpPr/>
           <p:nvPr>
-            <p:ph idx="102" type="title" hasCustomPrompt="1"/>
+            <p:ph idx="101" type="title" hasCustomPrompt="1"/>
           </p:nvPr>
         </p:nvSpPr>
         <p:spPr>
           <a:xfrm>
             <a:off x="685800" y="762000"/>
-            <a:ext cx="10820400" cy="514350"/>
+            <a:ext cx="10820400" cy="495300"/>
           </a:xfrm>
           <a:prstGeom prst="rect">
             <a:avLst/>
@@ -1824,7 +1774,7 @@
           <a:lstStyle>
             <a:lvl1pPr algn="l" indent="0" marL="0">
               <a:buNone/>
-              <a:defRPr lang="en-US" sz="3300" b="1" dirty="0">
+              <a:defRPr lang="en-US" sz="3000" b="1" dirty="0">
                 <a:solidFill>
                   <a:schemeClr val="accent1"/>
                 </a:solidFill>
@@ -1836,14 +1786,50 @@
               <a:buNone/>
             </a:pPr>
             <a:r>
-              <a:rPr lang="en-US" sz="3300" b="1" dirty="0">
+              <a:rPr lang="en-US" sz="3000" b="1" dirty="0">
                 <a:solidFill>
                   <a:schemeClr val="accent1"/>
                 </a:solidFill>
               </a:rPr>
               <a:t>Título</a:t>
             </a:r>
-            <a:endParaRPr lang="en-US" sz="3300" dirty="0"/>
+            <a:endParaRPr lang="en-US" sz="3000" dirty="0"/>
+          </a:p>
+        </p:txBody>
+      </p:sp>
+      <p:sp>
+        <p:nvSpPr>
+          <p:cNvPr id="4" name="Text 0"/>
+          <p:cNvSpPr/>
+          <p:nvPr/>
+        </p:nvSpPr>
+        <p:spPr>
+          <a:xfrm>
+            <a:off x="3238500" y="6477000"/>
+            <a:ext cx="5715000" cy="209550"/>
+          </a:xfrm>
+          <a:prstGeom prst="rect">
+            <a:avLst/>
+          </a:prstGeom>
+          <a:noFill/>
+          <a:ln/>
+        </p:spPr>
+        <p:txBody>
+          <a:bodyPr wrap="square" lIns="0" tIns="0" rIns="0" bIns="0" rtlCol="0" anchor="t"/>
+          <a:lstStyle/>
+          <a:p>
+            <a:pPr algn="ctr" indent="0" marL="0">
+              <a:buNone/>
+            </a:pPr>
+            <a:r>
+              <a:rPr lang="en-US" sz="1050" dirty="0">
+                <a:solidFill>
+                  <a:schemeClr val="tx2"/>
+                </a:solidFill>
+              </a:rPr>
+              <a:t>PCS 3858 · Auditor Visual de Medicação · P1</a:t>
+            </a:r>
+            <a:endParaRPr lang="en-US" sz="1050" dirty="0"/>
           </a:p>
         </p:txBody>
       </p:sp>
@@ -1875,7 +1861,7 @@
           <a:bodyPr lIns="0" tIns="0" rIns="0" bIns="0"/>
           <a:lstStyle>
             <a:lvl1pPr>
-              <a:defRPr sz="1125">
+              <a:defRPr sz="1050">
                 <a:solidFill>
                   <a:schemeClr val="tx2"/>
                 </a:solidFill>
@@ -1887,202 +1873,6 @@
             <a:fld id="{F7021451-1387-4CA6-816F-3879F97B5CBC}" type="slidenum">
               <a:rPr b="0" lang="en-US"/>
               <a:t>1003</a:t>
-            </a:fld>
-            <a:endParaRPr lang="en-US"/>
-          </a:p>
-        </p:txBody>
-      </p:sp>
-    </p:spTree>
-  </p:cSld>
-  <p:clrMapOvr>
-    <a:masterClrMapping/>
-  </p:clrMapOvr>
-</p:sldLayout>
-</file>
-
-<file path=ppt/slideLayouts/slideLayout4.xml><?xml version="1.0" encoding="utf-8"?>
-<p:sldLayout xmlns:a="http://schemas.openxmlformats.org/drawingml/2006/main" xmlns:r="http://schemas.openxmlformats.org/officeDocument/2006/relationships" xmlns:p="http://schemas.openxmlformats.org/presentationml/2006/main" preserve="1">
-  <p:cSld name="CONTEUDO_TITULO_2_LINHAS">
-    <p:bg>
-      <p:bgPr>
-        <a:solidFill>
-          <a:srgbClr val="FFFFFF"/>
-        </a:solidFill>
-      </p:bgPr>
-    </p:bg>
-    <p:spTree>
-      <p:nvGrpSpPr>
-        <p:cNvPr id="1" name=""/>
-        <p:cNvGrpSpPr/>
-        <p:nvPr/>
-      </p:nvGrpSpPr>
-      <p:grpSpPr>
-        <a:xfrm>
-          <a:off x="0" y="0"/>
-          <a:ext cx="0" cy="0"/>
-          <a:chOff x="0" y="0"/>
-          <a:chExt cx="0" cy="0"/>
-        </a:xfrm>
-      </p:grpSpPr>
-      <p:sp>
-        <p:nvSpPr>
-          <p:cNvPr id="2" name="Shape 0"/>
-          <p:cNvSpPr/>
-          <p:nvPr/>
-        </p:nvSpPr>
-        <p:spPr>
-          <a:xfrm>
-            <a:off x="0" y="0"/>
-            <a:ext cx="95250" cy="6858000"/>
-          </a:xfrm>
-          <a:prstGeom prst="rect">
-            <a:avLst/>
-          </a:prstGeom>
-          <a:solidFill>
-            <a:schemeClr val="accent1"/>
-          </a:solidFill>
-          <a:ln w="12700">
-            <a:solidFill>
-              <a:schemeClr val="accent1"/>
-            </a:solidFill>
-            <a:prstDash val="solid"/>
-          </a:ln>
-        </p:spPr>
-      </p:sp>
-      <p:sp>
-        <p:nvSpPr>
-          <p:cNvPr id="3" name="Text 1"/>
-          <p:cNvSpPr/>
-          <p:nvPr>
-            <p:ph idx="101" type="body" hasCustomPrompt="1"/>
-          </p:nvPr>
-        </p:nvSpPr>
-        <p:spPr>
-          <a:xfrm>
-            <a:off x="685800" y="514350"/>
-            <a:ext cx="10820400" cy="228600"/>
-          </a:xfrm>
-          <a:prstGeom prst="rect">
-            <a:avLst/>
-          </a:prstGeom>
-          <a:noFill/>
-          <a:ln/>
-        </p:spPr>
-        <p:txBody>
-          <a:bodyPr wrap="square" rtlCol="0"/>
-          <a:lstStyle>
-            <a:lvl1pPr algn="l" indent="0" marL="0">
-              <a:buNone/>
-              <a:defRPr lang="en-US" sz="1350" b="1" spc="190" kern="0" dirty="0">
-                <a:solidFill>
-                  <a:schemeClr val="accent2"/>
-                </a:solidFill>
-              </a:defRPr>
-            </a:lvl1pPr>
-          </a:lstStyle>
-          <a:p>
-            <a:pPr algn="l" indent="0" marL="0">
-              <a:buNone/>
-            </a:pPr>
-            <a:r>
-              <a:rPr lang="en-US" sz="1350" b="1" spc="190" kern="0" dirty="0">
-                <a:solidFill>
-                  <a:schemeClr val="accent2"/>
-                </a:solidFill>
-              </a:rPr>
-              <a:t>SEÇÃO</a:t>
-            </a:r>
-            <a:endParaRPr lang="en-US" sz="1350" dirty="0"/>
-          </a:p>
-        </p:txBody>
-      </p:sp>
-      <p:sp>
-        <p:nvSpPr>
-          <p:cNvPr id="4" name="Text 1"/>
-          <p:cNvSpPr/>
-          <p:nvPr>
-            <p:ph idx="102" type="title" hasCustomPrompt="1"/>
-          </p:nvPr>
-        </p:nvSpPr>
-        <p:spPr>
-          <a:xfrm>
-            <a:off x="685800" y="762000"/>
-            <a:ext cx="10820400" cy="990600"/>
-          </a:xfrm>
-          <a:prstGeom prst="rect">
-            <a:avLst/>
-          </a:prstGeom>
-          <a:noFill/>
-          <a:ln/>
-        </p:spPr>
-        <p:txBody>
-          <a:bodyPr wrap="square" rtlCol="0"/>
-          <a:lstStyle>
-            <a:lvl1pPr algn="l" indent="0" marL="0">
-              <a:buNone/>
-              <a:defRPr lang="en-US" sz="3300" b="1" dirty="0">
-                <a:solidFill>
-                  <a:schemeClr val="accent1"/>
-                </a:solidFill>
-              </a:defRPr>
-            </a:lvl1pPr>
-          </a:lstStyle>
-          <a:p>
-            <a:pPr algn="l" indent="0" marL="0">
-              <a:buNone/>
-            </a:pPr>
-            <a:r>
-              <a:rPr lang="en-US" sz="3300" b="1" dirty="0">
-                <a:solidFill>
-                  <a:schemeClr val="accent1"/>
-                </a:solidFill>
-              </a:rPr>
-              <a:t>Título</a:t>
-            </a:r>
-            <a:endParaRPr lang="en-US" sz="3300" dirty="0"/>
-          </a:p>
-        </p:txBody>
-      </p:sp>
-      <p:sp>
-        <p:nvSpPr>
-          <p:cNvPr id="25" name="Slide Number Placeholder 0"/>
-          <p:cNvSpPr>
-            <a:spLocks noGrp="1"/>
-          </p:cNvSpPr>
-          <p:nvPr>
-            <p:ph type="sldNum" sz="quarter" idx="4294967295"/>
-          </p:nvPr>
-        </p:nvSpPr>
-        <p:spPr>
-          <a:xfrm>
-            <a:off x="10553700" y="6477000"/>
-            <a:ext cx="952500" cy="209550"/>
-          </a:xfrm>
-          <a:prstGeom prst="rect">
-            <a:avLst/>
-          </a:prstGeom>
-          <a:extLst>
-            <a:ext uri="{C572A759-6A51-4108-AA02-DFA0A04FC94B}">
-              <ma14:wrappingTextBoxFlag xmlns:ma14="http://schemas.microsoft.com/office/mac/drawingml/2011/main" val="0"/>
-            </a:ext>
-          </a:extLst>
-        </p:spPr>
-        <p:txBody>
-          <a:bodyPr lIns="0" tIns="0" rIns="0" bIns="0"/>
-          <a:lstStyle>
-            <a:lvl1pPr>
-              <a:defRPr sz="1125">
-                <a:solidFill>
-                  <a:schemeClr val="tx2"/>
-                </a:solidFill>
-              </a:defRPr>
-            </a:lvl1pPr>
-          </a:lstStyle>
-          <a:p>
-            <a:pPr algn="r"/>
-            <a:fld id="{F7021451-1387-4CA6-816F-3879F97B5CBC}" type="slidenum">
-              <a:rPr b="0" lang="en-US"/>
-              <a:t>1004</a:t>
             </a:fld>
             <a:endParaRPr lang="en-US"/>
           </a:p>
@@ -2141,7 +1931,7 @@
           <a:bodyPr lIns="0" tIns="0" rIns="0" bIns="0"/>
           <a:lstStyle>
             <a:lvl1pPr>
-              <a:defRPr sz="1125">
+              <a:defRPr sz="1050">
                 <a:solidFill>
                   <a:schemeClr val="tx2"/>
                 </a:solidFill>
@@ -2165,7 +1955,6 @@
     <p:sldLayoutId id="2147483649" r:id="rId1"/>
     <p:sldLayoutId id="2147483650" r:id="rId2"/>
     <p:sldLayoutId id="2147483651" r:id="rId3"/>
-    <p:sldLayoutId id="2147483652" r:id="rId4"/>
   </p:sldLayoutIdLst>
   <p:hf sldNum="0" hdr="0" ftr="0" dt="0"/>
   <p:txStyles>
@@ -2440,15 +2229,87 @@
       </p:grpSpPr>
       <p:sp>
         <p:nvSpPr>
-          <p:cNvPr id="2" name="Text 1"/>
+          <p:cNvPr id="2" name="Text 0"/>
+          <p:cNvSpPr txBox="1"/>
+          <p:nvPr/>
+        </p:nvSpPr>
+        <p:spPr>
+          <a:xfrm>
+            <a:off x="685800" y="609600"/>
+            <a:ext cx="10820400" cy="247650"/>
+          </a:xfrm>
+          <a:prstGeom prst="rect">
+            <a:avLst/>
+          </a:prstGeom>
+          <a:noFill/>
+          <a:ln/>
+        </p:spPr>
+        <p:txBody>
+          <a:bodyPr wrap="square" lIns="0" tIns="0" rIns="0" bIns="0" rtlCol="0" anchor="t"/>
+          <a:lstStyle/>
+          <a:p>
+            <a:pPr indent="0" marL="0">
+              <a:buNone/>
+            </a:pPr>
+            <a:r>
+              <a:rPr lang="en-US" sz="1500" b="1" dirty="0">
+                <a:solidFill>
+                  <a:schemeClr val="tx1"/>
+                </a:solidFill>
+              </a:rPr>
+              <a:t>ESCOLA POLITÉCNICA DA UNIVERSIDADE DE SÃO PAULO</a:t>
+            </a:r>
+            <a:endParaRPr lang="en-US" sz="1500" dirty="0"/>
+          </a:p>
+        </p:txBody>
+      </p:sp>
+      <p:sp>
+        <p:nvSpPr>
+          <p:cNvPr id="3" name="Text 1"/>
+          <p:cNvSpPr txBox="1"/>
+          <p:nvPr/>
+        </p:nvSpPr>
+        <p:spPr>
+          <a:xfrm>
+            <a:off x="685800" y="876300"/>
+            <a:ext cx="10820400" cy="228600"/>
+          </a:xfrm>
+          <a:prstGeom prst="rect">
+            <a:avLst/>
+          </a:prstGeom>
+          <a:noFill/>
+          <a:ln/>
+        </p:spPr>
+        <p:txBody>
+          <a:bodyPr wrap="square" lIns="0" tIns="0" rIns="0" bIns="0" rtlCol="0" anchor="t"/>
+          <a:lstStyle/>
+          <a:p>
+            <a:pPr indent="0" marL="0">
+              <a:buNone/>
+            </a:pPr>
+            <a:r>
+              <a:rPr lang="en-US" sz="1350" dirty="0">
+                <a:solidFill>
+                  <a:schemeClr val="tx2"/>
+                </a:solidFill>
+              </a:rPr>
+              <a:t>Departamento de Engenharia de Computação e Sistemas Digitais (PCS)</a:t>
+            </a:r>
+            <a:endParaRPr lang="en-US" sz="1350" dirty="0"/>
+          </a:p>
+        </p:txBody>
+      </p:sp>
+      <p:sp>
+        <p:nvSpPr>
+          <p:cNvPr id="4" name="Text 0"/>
           <p:cNvSpPr/>
           <p:nvPr>
-            <p:ph idx="101" type="body" hasCustomPrompt="1"/>
+            <p:ph idx="100" type="body" hasCustomPrompt="1"/>
           </p:nvPr>
         </p:nvSpPr>
         <p:spPr>
           <a:xfrm>
-            <a:off x="685800" y="1676400"/>
+            <a:off x="685800" y="2038350"/>
             <a:ext cx="10820400" cy="228600"/>
           </a:xfrm>
           <a:prstGeom prst="rect">
@@ -2465,29 +2326,29 @@
               <a:buNone/>
             </a:pPr>
             <a:r>
-              <a:rPr lang="en-US" sz="1350" b="1" spc="190" kern="0" dirty="0">
-                <a:solidFill>
-                  <a:schemeClr val="accent2"/>
+              <a:rPr lang="en-US" sz="1275" b="1" spc="150" kern="0" dirty="0">
+                <a:solidFill>
+                  <a:schemeClr val="tx2"/>
                 </a:solidFill>
               </a:rPr>
-              <a:t>PCS 3858 · LABORATÓRIO DE SISTEMAS EMBARCADOS · TURMA 3 · P1</a:t>
-            </a:r>
-            <a:endParaRPr lang="en-US" sz="1350" dirty="0"/>
+              <a:t>PCS 3858 — LABORATÓRIO DE SISTEMAS EMBARCADOS · TURMA 3 · APRESENTAÇÃO P1</a:t>
+            </a:r>
+            <a:endParaRPr lang="en-US" sz="1275" dirty="0"/>
           </a:p>
         </p:txBody>
       </p:sp>
       <p:sp>
         <p:nvSpPr>
-          <p:cNvPr id="3" name="Text 1"/>
+          <p:cNvPr id="5" name="Text 0"/>
           <p:cNvSpPr/>
           <p:nvPr>
-            <p:ph idx="102" type="title" hasCustomPrompt="1"/>
+            <p:ph idx="101" type="title" hasCustomPrompt="1"/>
           </p:nvPr>
         </p:nvSpPr>
         <p:spPr>
           <a:xfrm>
-            <a:off x="685800" y="1943100"/>
-            <a:ext cx="10820400" cy="1485900"/>
+            <a:off x="685800" y="2324100"/>
+            <a:ext cx="10820400" cy="685800"/>
           </a:xfrm>
           <a:prstGeom prst="rect">
             <a:avLst/>
@@ -2503,41 +2364,136 @@
               <a:buNone/>
             </a:pPr>
             <a:r>
-              <a:rPr lang="en-US" sz="5100" b="1" dirty="0">
+              <a:rPr lang="en-US" sz="4400" b="1" dirty="0">
                 <a:solidFill>
                   <a:schemeClr val="accent1"/>
                 </a:solidFill>
               </a:rPr>
-              <a:t>Auditor Visual</a:t>
-            </a:r>
-            <a:endParaRPr lang="en-US" sz="5100" dirty="0"/>
-          </a:p>
-          <a:p>
-            <a:pPr algn="l" indent="0" marL="0">
-              <a:buNone/>
-            </a:pPr>
-            <a:r>
-              <a:rPr lang="en-US" sz="5100" b="1" dirty="0">
-                <a:solidFill>
-                  <a:schemeClr val="accent1"/>
-                </a:solidFill>
-              </a:rPr>
-              <a:t>de Medicação</a:t>
-            </a:r>
-            <a:endParaRPr lang="en-US" sz="5100" dirty="0"/>
+              <a:t>Auditor Visual de Medicação</a:t>
+            </a:r>
+            <a:endParaRPr lang="en-US" sz="4400" dirty="0"/>
           </a:p>
         </p:txBody>
       </p:sp>
       <p:sp>
         <p:nvSpPr>
-          <p:cNvPr id="4" name="Text 2"/>
+          <p:cNvPr id="6" name="Text 4"/>
           <p:cNvSpPr txBox="1"/>
           <p:nvPr/>
         </p:nvSpPr>
         <p:spPr>
           <a:xfrm>
-            <a:off x="685800" y="3505200"/>
-            <a:ext cx="8572500" cy="723900"/>
+            <a:off x="685800" y="3067050"/>
+            <a:ext cx="9334500" cy="666750"/>
+          </a:xfrm>
+          <a:prstGeom prst="rect">
+            <a:avLst/>
+          </a:prstGeom>
+          <a:noFill/>
+          <a:ln/>
+        </p:spPr>
+        <p:txBody>
+          <a:bodyPr wrap="square" lIns="0" tIns="0" rIns="0" bIns="0" rtlCol="0" anchor="t"/>
+          <a:lstStyle/>
+          <a:p>
+            <a:pPr indent="0" marL="0">
+              <a:lnSpc>
+                <a:spcPct val="110000"/>
+              </a:lnSpc>
+              <a:buNone/>
+            </a:pPr>
+            <a:r>
+              <a:rPr lang="en-US" sz="1950" dirty="0">
+                <a:solidFill>
+                  <a:schemeClr val="tx2"/>
+                </a:solidFill>
+              </a:rPr>
+              <a:t>Sistema embarcado com ESP32-CAM para verificar a retirada da dose diária de um porta-comprimidos e notificar o cuidador pelo Telegram</a:t>
+            </a:r>
+            <a:endParaRPr lang="en-US" sz="1950" dirty="0"/>
+          </a:p>
+        </p:txBody>
+      </p:sp>
+      <p:sp>
+        <p:nvSpPr>
+          <p:cNvPr id="7" name="Text 5"/>
+          <p:cNvSpPr txBox="1"/>
+          <p:nvPr/>
+        </p:nvSpPr>
+        <p:spPr>
+          <a:xfrm>
+            <a:off x="685800" y="4248150"/>
+            <a:ext cx="10820400" cy="800100"/>
+          </a:xfrm>
+          <a:prstGeom prst="rect">
+            <a:avLst/>
+          </a:prstGeom>
+          <a:noFill/>
+          <a:ln/>
+        </p:spPr>
+        <p:txBody>
+          <a:bodyPr wrap="square" lIns="0" tIns="0" rIns="0" bIns="0" rtlCol="0" anchor="t"/>
+          <a:lstStyle/>
+          <a:p>
+            <a:pPr indent="0" marL="0">
+              <a:spcAft>
+                <a:spcPts val="300"/>
+              </a:spcAft>
+              <a:buNone/>
+            </a:pPr>
+            <a:r>
+              <a:rPr lang="en-US" sz="1500" dirty="0">
+                <a:solidFill>
+                  <a:schemeClr val="tx1"/>
+                </a:solidFill>
+              </a:rPr>
+              <a:t>Gabriel Dias Tambelli — NUSP 12551370</a:t>
+            </a:r>
+            <a:endParaRPr lang="en-US" sz="1500" dirty="0"/>
+          </a:p>
+          <a:p>
+            <a:pPr indent="0" marL="0">
+              <a:spcAft>
+                <a:spcPts val="300"/>
+              </a:spcAft>
+              <a:buNone/>
+            </a:pPr>
+            <a:r>
+              <a:rPr lang="en-US" sz="1500" dirty="0">
+                <a:solidFill>
+                  <a:schemeClr val="tx1"/>
+                </a:solidFill>
+              </a:rPr>
+              <a:t>Henrique Murakami de Paula — NUSP 12551154</a:t>
+            </a:r>
+            <a:endParaRPr lang="en-US" sz="1500" dirty="0"/>
+          </a:p>
+          <a:p>
+            <a:pPr indent="0" marL="0">
+              <a:buNone/>
+            </a:pPr>
+            <a:r>
+              <a:rPr lang="en-US" sz="1500" dirty="0">
+                <a:solidFill>
+                  <a:schemeClr val="tx1"/>
+                </a:solidFill>
+              </a:rPr>
+              <a:t>Juliana Marcarini Carloni — NUSP 12553538</a:t>
+            </a:r>
+            <a:endParaRPr lang="en-US" sz="1500" dirty="0"/>
+          </a:p>
+        </p:txBody>
+      </p:sp>
+      <p:sp>
+        <p:nvSpPr>
+          <p:cNvPr id="8" name="Text 6"/>
+          <p:cNvSpPr txBox="1"/>
+          <p:nvPr/>
+        </p:nvSpPr>
+        <p:spPr>
+          <a:xfrm>
+            <a:off x="685800" y="5334000"/>
+            <a:ext cx="10820400" cy="228600"/>
           </a:xfrm>
           <a:prstGeom prst="rect">
             <a:avLst/>
@@ -2553,27 +2509,27 @@
               <a:buNone/>
             </a:pPr>
             <a:r>
-              <a:rPr lang="en-US" sz="2100" dirty="0">
-                <a:solidFill>
-                  <a:schemeClr val="tx2"/>
+              <a:rPr lang="en-US" sz="1350" dirty="0">
+                <a:solidFill>
+                  <a:schemeClr val="tx1"/>
                 </a:solidFill>
               </a:rPr>
-              <a:t>Um ESP32 com câmera verifica se a dose do dia foi retirada do porta-comprimidos e avisa o cuidador pelo Telegram.</a:t>
-            </a:r>
-            <a:endParaRPr lang="en-US" sz="2100" dirty="0"/>
+              <a:t>Prof. Dr. Carlos Eduardo Cugnasca</a:t>
+            </a:r>
+            <a:endParaRPr lang="en-US" sz="1350" dirty="0"/>
           </a:p>
         </p:txBody>
       </p:sp>
       <p:sp>
         <p:nvSpPr>
-          <p:cNvPr id="5" name="Text 3"/>
+          <p:cNvPr id="9" name="Text 7"/>
           <p:cNvSpPr txBox="1"/>
           <p:nvPr/>
         </p:nvSpPr>
         <p:spPr>
           <a:xfrm>
-            <a:off x="685800" y="4591050"/>
-            <a:ext cx="10820400" cy="285750"/>
+            <a:off x="685800" y="5581650"/>
+            <a:ext cx="10820400" cy="228600"/>
           </a:xfrm>
           <a:prstGeom prst="rect">
             <a:avLst/>
@@ -2589,48 +2545,12 @@
               <a:buNone/>
             </a:pPr>
             <a:r>
-              <a:rPr lang="en-US" sz="1650" dirty="0">
-                <a:solidFill>
-                  <a:schemeClr val="tx1"/>
+              <a:rPr lang="en-US" sz="1350" dirty="0">
+                <a:solidFill>
+                  <a:schemeClr val="tx2"/>
                 </a:solidFill>
               </a:rPr>
-              <a:t>Gabriel Dias Tambelli · Henrique Murakami de Paula · Juliana Marcarini Carloni</a:t>
-            </a:r>
-            <a:endParaRPr lang="en-US" sz="1650" dirty="0"/>
-          </a:p>
-        </p:txBody>
-      </p:sp>
-      <p:sp>
-        <p:nvSpPr>
-          <p:cNvPr id="6" name="Text 4"/>
-          <p:cNvSpPr txBox="1"/>
-          <p:nvPr/>
-        </p:nvSpPr>
-        <p:spPr>
-          <a:xfrm>
-            <a:off x="685800" y="4953000"/>
-            <a:ext cx="10820400" cy="247650"/>
-          </a:xfrm>
-          <a:prstGeom prst="rect">
-            <a:avLst/>
-          </a:prstGeom>
-          <a:noFill/>
-          <a:ln/>
-        </p:spPr>
-        <p:txBody>
-          <a:bodyPr wrap="square" lIns="0" tIns="0" rIns="0" bIns="0" rtlCol="0" anchor="t"/>
-          <a:lstStyle/>
-          <a:p>
-            <a:pPr indent="0" marL="0">
-              <a:buNone/>
-            </a:pPr>
-            <a:r>
-              <a:rPr lang="en-US" sz="1350" dirty="0">
-                <a:solidFill>
-                  <a:schemeClr val="tx2"/>
-                </a:solidFill>
-              </a:rPr>
-              <a:t>Prof. Dr. Carlos Eduardo Cugnasca · 16/10/2026</a:t>
+              <a:t>São Paulo, 16 de outubro de 2026</a:t>
             </a:r>
             <a:endParaRPr lang="en-US" sz="1350" dirty="0"/>
           </a:p>
@@ -2663,16 +2583,16 @@
       </p:grpSpPr>
       <p:sp>
         <p:nvSpPr>
-          <p:cNvPr id="2" name="Text 1"/>
+          <p:cNvPr id="2" name="Text 0"/>
           <p:cNvSpPr/>
           <p:nvPr>
-            <p:ph idx="101" type="body" hasCustomPrompt="1"/>
+            <p:ph idx="100" type="body" hasCustomPrompt="1"/>
           </p:nvPr>
         </p:nvSpPr>
         <p:spPr>
           <a:xfrm>
             <a:off x="685800" y="514350"/>
-            <a:ext cx="10820400" cy="228600"/>
+            <a:ext cx="10820400" cy="209550"/>
           </a:xfrm>
           <a:prstGeom prst="rect">
             <a:avLst/>
@@ -2688,29 +2608,29 @@
               <a:buNone/>
             </a:pPr>
             <a:r>
-              <a:rPr lang="en-US" sz="1350" b="1" spc="190" kern="0" dirty="0">
-                <a:solidFill>
-                  <a:schemeClr val="accent2"/>
+              <a:rPr lang="en-US" sz="1200" b="1" spc="150" kern="0" dirty="0">
+                <a:solidFill>
+                  <a:schemeClr val="tx2"/>
                 </a:solidFill>
               </a:rPr>
-              <a:t>PROTÓTIPO E RESULTADOS</a:t>
-            </a:r>
-            <a:endParaRPr lang="en-US" sz="1350" dirty="0"/>
+              <a:t>3 · RESULTADOS</a:t>
+            </a:r>
+            <a:endParaRPr lang="en-US" sz="1200" dirty="0"/>
           </a:p>
         </p:txBody>
       </p:sp>
       <p:sp>
         <p:nvSpPr>
-          <p:cNvPr id="3" name="Text 1"/>
+          <p:cNvPr id="3" name="Text 0"/>
           <p:cNvSpPr/>
           <p:nvPr>
-            <p:ph idx="102" type="title" hasCustomPrompt="1"/>
+            <p:ph idx="101" type="title" hasCustomPrompt="1"/>
           </p:nvPr>
         </p:nvSpPr>
         <p:spPr>
           <a:xfrm>
             <a:off x="685800" y="762000"/>
-            <a:ext cx="10820400" cy="514350"/>
+            <a:ext cx="10820400" cy="495300"/>
           </a:xfrm>
           <a:prstGeom prst="rect">
             <a:avLst/>
@@ -2726,14 +2646,14 @@
               <a:buNone/>
             </a:pPr>
             <a:r>
-              <a:rPr lang="en-US" sz="3300" b="1" dirty="0">
+              <a:rPr lang="en-US" sz="3000" b="1" dirty="0">
                 <a:solidFill>
                   <a:schemeClr val="accent1"/>
                 </a:solidFill>
               </a:rPr>
-              <a:t>Funcionando na placa</a:t>
-            </a:r>
-            <a:endParaRPr lang="en-US" sz="3300" dirty="0"/>
+              <a:t>Protótipo e resultados obtidos</a:t>
+            </a:r>
+            <a:endParaRPr lang="en-US" sz="3000" dirty="0"/>
           </a:p>
         </p:txBody>
       </p:sp>
@@ -2746,7 +2666,7 @@
         <p:spPr>
           <a:xfrm>
             <a:off x="685800" y="6477000"/>
-            <a:ext cx="2857500" cy="209550"/>
+            <a:ext cx="2476500" cy="209550"/>
           </a:xfrm>
           <a:prstGeom prst="rect">
             <a:avLst/>
@@ -2762,14 +2682,14 @@
               <a:buNone/>
             </a:pPr>
             <a:r>
-              <a:rPr lang="en-US" sz="1125" b="1" dirty="0">
-                <a:solidFill>
-                  <a:schemeClr val="accent2"/>
+              <a:rPr lang="en-US" sz="1050" b="1" dirty="0">
+                <a:solidFill>
+                  <a:schemeClr val="tx2"/>
                 </a:solidFill>
               </a:rPr>
               <a:t>Henrique</a:t>
             </a:r>
-            <a:endParaRPr lang="en-US" sz="1125" dirty="0"/>
+            <a:endParaRPr lang="en-US" sz="1050" dirty="0"/>
           </a:p>
         </p:txBody>
       </p:sp>
@@ -2782,12 +2702,10 @@
         <p:spPr>
           <a:xfrm>
             <a:off x="685800" y="1485900"/>
-            <a:ext cx="3467100" cy="3143250"/>
+            <a:ext cx="3467100" cy="2952750"/>
           </a:xfrm>
-          <a:prstGeom prst="roundRect">
-            <a:avLst>
-              <a:gd name="adj" fmla="val 2424"/>
-            </a:avLst>
+          <a:prstGeom prst="rect">
+            <a:avLst/>
           </a:prstGeom>
           <a:solidFill>
             <a:schemeClr val="bg1"/>
@@ -2816,8 +2734,8 @@
         </p:blipFill>
         <p:spPr>
           <a:xfrm>
-            <a:off x="1240631" y="1485900"/>
-            <a:ext cx="2357438" cy="3143250"/>
+            <a:off x="1312069" y="1485900"/>
+            <a:ext cx="2214563" cy="2952750"/>
           </a:xfrm>
           <a:prstGeom prst="rect">
             <a:avLst/>
@@ -2826,19 +2744,53 @@
       </p:pic>
       <p:sp>
         <p:nvSpPr>
-          <p:cNvPr id="7" name="Shape 4"/>
+          <p:cNvPr id="7" name="Text 4"/>
+          <p:cNvSpPr txBox="1"/>
+          <p:nvPr/>
+        </p:nvSpPr>
+        <p:spPr>
+          <a:xfrm>
+            <a:off x="685800" y="4514850"/>
+            <a:ext cx="3467100" cy="209550"/>
+          </a:xfrm>
+          <a:prstGeom prst="rect">
+            <a:avLst/>
+          </a:prstGeom>
+          <a:noFill/>
+          <a:ln/>
+        </p:spPr>
+        <p:txBody>
+          <a:bodyPr wrap="square" lIns="0" tIns="0" rIns="0" bIns="0" rtlCol="0" anchor="t"/>
+          <a:lstStyle/>
+          <a:p>
+            <a:pPr indent="0" marL="0">
+              <a:buNone/>
+            </a:pPr>
+            <a:r>
+              <a:rPr lang="en-US" sz="1200" dirty="0">
+                <a:solidFill>
+                  <a:schemeClr val="tx2"/>
+                </a:solidFill>
+              </a:rPr>
+              <a:t>Figura 5 — Protótipo em bancada.</a:t>
+            </a:r>
+            <a:endParaRPr lang="en-US" sz="1200" dirty="0"/>
+          </a:p>
+        </p:txBody>
+      </p:sp>
+      <p:sp>
+        <p:nvSpPr>
+          <p:cNvPr id="8" name="Shape 5"/>
           <p:cNvSpPr/>
           <p:nvPr/>
         </p:nvSpPr>
         <p:spPr>
           <a:xfrm>
             <a:off x="4362450" y="1485900"/>
-            <a:ext cx="3467100" cy="3143250"/>
+            <a:ext cx="3467100" cy="2952750"/>
           </a:xfrm>
-          <a:prstGeom prst="roundRect">
-            <a:avLst>
-              <a:gd name="adj" fmla="val 2424"/>
-            </a:avLst>
+          <a:prstGeom prst="rect">
+            <a:avLst/>
           </a:prstGeom>
           <a:solidFill>
             <a:schemeClr val="bg1"/>
@@ -2853,7 +2805,7 @@
       </p:sp>
       <p:pic>
         <p:nvPicPr>
-          <p:cNvPr id="8" name="Image 1" descr="Avisos no Telegram">    </p:cNvPr>
+          <p:cNvPr id="9" name="Image 1" descr="Avisos no Telegram">    </p:cNvPr>
           <p:cNvPicPr>
             <a:picLocks noChangeAspect="1"/>
           </p:cNvPicPr>
@@ -2867,8 +2819,8 @@
         </p:blipFill>
         <p:spPr>
           <a:xfrm>
-            <a:off x="5219517" y="1485900"/>
-            <a:ext cx="1752966" cy="3143250"/>
+            <a:off x="5272637" y="1485900"/>
+            <a:ext cx="1646726" cy="2952750"/>
           </a:xfrm>
           <a:prstGeom prst="rect">
             <a:avLst/>
@@ -2877,14 +2829,14 @@
       </p:pic>
       <p:sp>
         <p:nvSpPr>
-          <p:cNvPr id="9" name="Text 5"/>
+          <p:cNvPr id="10" name="Text 6"/>
           <p:cNvSpPr txBox="1"/>
           <p:nvPr/>
         </p:nvSpPr>
         <p:spPr>
           <a:xfrm>
-            <a:off x="8039100" y="1428750"/>
-            <a:ext cx="3467100" cy="876300"/>
+            <a:off x="4362450" y="4514850"/>
+            <a:ext cx="3467100" cy="209550"/>
           </a:xfrm>
           <a:prstGeom prst="rect">
             <a:avLst/>
@@ -2900,44 +2852,782 @@
               <a:buNone/>
             </a:pPr>
             <a:r>
-              <a:rPr lang="en-US" sz="3750" b="1" dirty="0">
-                <a:solidFill>
-                  <a:schemeClr val="accent1"/>
+              <a:rPr lang="en-US" sz="1200" dirty="0">
+                <a:solidFill>
+                  <a:schemeClr val="tx2"/>
                 </a:solidFill>
               </a:rPr>
-              <a:t>168–220 ms</a:t>
-            </a:r>
-            <a:endParaRPr lang="en-US" sz="1800" dirty="0"/>
-          </a:p>
-          <a:p>
-            <a:pPr indent="0" marL="0">
-              <a:spcBef>
-                <a:spcPts val="300"/>
-              </a:spcBef>
-              <a:buNone/>
-            </a:pPr>
-            <a:r>
-              <a:rPr lang="en-US" sz="1425" dirty="0">
-                <a:solidFill>
-                  <a:schemeClr val="tx1"/>
-                </a:solidFill>
-              </a:rPr>
-              <a:t>por leitura (meta: 2 s)</a:t>
-            </a:r>
-            <a:endParaRPr lang="en-US" sz="1800" dirty="0"/>
+              <a:t>Figura 6 — Avisos recebidos no Telegram.</a:t>
+            </a:r>
+            <a:endParaRPr lang="en-US" sz="1200" dirty="0"/>
           </a:p>
         </p:txBody>
       </p:sp>
+      <p:graphicFrame>
+        <p:nvGraphicFramePr>
+          <p:cNvPr id="11" name="Table 0"/>
+          <p:cNvGraphicFramePr>
+            <a:graphicFrameLocks noGrp="1"/>
+          </p:cNvGraphicFramePr>
+          <p:nvPr>
+            <p:extLst>
+              <p:ext uri="{D42A27DB-BD31-4B8C-83A1-F6EECF244321}">
+                <p14:modId xmlns:p14="http://schemas.microsoft.com/office/powerpoint/2010/main" val="1579011935"/>
+              </p:ext>
+            </p:extLst>
+          </p:nvPr>
+        </p:nvGraphicFramePr>
+        <p:xfrm>
+          <a:off x="8039100" y="1485900"/>
+          <a:ext cx="3467100" cy="914400"/>
+        </p:xfrm>
+        <a:graphic>
+          <a:graphicData uri="http://schemas.openxmlformats.org/drawingml/2006/table">
+            <a:tbl>
+              <a:tblPr/>
+              <a:tblGrid>
+                <a:gridCol w="2133600"/>
+                <a:gridCol w="1333500"/>
+              </a:tblGrid>
+              <a:tr h="419100">
+                <a:tc>
+                  <a:txBody>
+                    <a:bodyPr/>
+                    <a:lstStyle/>
+                    <a:p>
+                      <a:pPr indent="0" marL="0">
+                        <a:buNone/>
+                      </a:pPr>
+                      <a:r>
+                        <a:rPr lang="en-US" sz="1275" b="1" dirty="0">
+                          <a:solidFill>
+                            <a:schemeClr val="tx1"/>
+                          </a:solidFill>
+                        </a:rPr>
+                        <a:t>Medida</a:t>
+                      </a:r>
+                      <a:endParaRPr lang="en-US" sz="1275" dirty="0"/>
+                    </a:p>
+                  </a:txBody>
+                  <a:tcPr marL="88900" marR="88900" marT="50800" marB="50800" anchor="ctr">
+                    <a:lnL w="9525" cap="flat" cmpd="sng" algn="ctr">
+                      <a:solidFill>
+                        <a:srgbClr val="C9D1DA"/>
+                      </a:solidFill>
+                      <a:prstDash val="solid"/>
+                      <a:round/>
+                      <a:headEnd type="none" w="med" len="med"/>
+                      <a:tailEnd type="none" w="med" len="med"/>
+                    </a:lnL>
+                    <a:lnR w="9525" cap="flat" cmpd="sng" algn="ctr">
+                      <a:solidFill>
+                        <a:srgbClr val="C9D1DA"/>
+                      </a:solidFill>
+                      <a:prstDash val="solid"/>
+                      <a:round/>
+                      <a:headEnd type="none" w="med" len="med"/>
+                      <a:tailEnd type="none" w="med" len="med"/>
+                    </a:lnR>
+                    <a:lnT w="9525" cap="flat" cmpd="sng" algn="ctr">
+                      <a:solidFill>
+                        <a:srgbClr val="C9D1DA"/>
+                      </a:solidFill>
+                      <a:prstDash val="solid"/>
+                      <a:round/>
+                      <a:headEnd type="none" w="med" len="med"/>
+                      <a:tailEnd type="none" w="med" len="med"/>
+                    </a:lnT>
+                    <a:lnB w="9525" cap="flat" cmpd="sng" algn="ctr">
+                      <a:solidFill>
+                        <a:srgbClr val="C9D1DA"/>
+                      </a:solidFill>
+                      <a:prstDash val="solid"/>
+                      <a:round/>
+                      <a:headEnd type="none" w="med" len="med"/>
+                      <a:tailEnd type="none" w="med" len="med"/>
+                    </a:lnB>
+                    <a:solidFill>
+                      <a:schemeClr val="bg2"/>
+                    </a:solidFill>
+                  </a:tcPr>
+                </a:tc>
+                <a:tc>
+                  <a:txBody>
+                    <a:bodyPr/>
+                    <a:lstStyle/>
+                    <a:p>
+                      <a:pPr indent="0" marL="0">
+                        <a:buNone/>
+                      </a:pPr>
+                      <a:r>
+                        <a:rPr lang="en-US" sz="1275" b="1" dirty="0">
+                          <a:solidFill>
+                            <a:schemeClr val="tx1"/>
+                          </a:solidFill>
+                        </a:rPr>
+                        <a:t>Resultado</a:t>
+                      </a:r>
+                      <a:endParaRPr lang="en-US" sz="1275" dirty="0"/>
+                    </a:p>
+                  </a:txBody>
+                  <a:tcPr marL="88900" marR="88900" marT="50800" marB="50800" anchor="ctr">
+                    <a:lnL w="9525" cap="flat" cmpd="sng" algn="ctr">
+                      <a:solidFill>
+                        <a:srgbClr val="C9D1DA"/>
+                      </a:solidFill>
+                      <a:prstDash val="solid"/>
+                      <a:round/>
+                      <a:headEnd type="none" w="med" len="med"/>
+                      <a:tailEnd type="none" w="med" len="med"/>
+                    </a:lnL>
+                    <a:lnR w="9525" cap="flat" cmpd="sng" algn="ctr">
+                      <a:solidFill>
+                        <a:srgbClr val="C9D1DA"/>
+                      </a:solidFill>
+                      <a:prstDash val="solid"/>
+                      <a:round/>
+                      <a:headEnd type="none" w="med" len="med"/>
+                      <a:tailEnd type="none" w="med" len="med"/>
+                    </a:lnR>
+                    <a:lnT w="9525" cap="flat" cmpd="sng" algn="ctr">
+                      <a:solidFill>
+                        <a:srgbClr val="C9D1DA"/>
+                      </a:solidFill>
+                      <a:prstDash val="solid"/>
+                      <a:round/>
+                      <a:headEnd type="none" w="med" len="med"/>
+                      <a:tailEnd type="none" w="med" len="med"/>
+                    </a:lnT>
+                    <a:lnB w="9525" cap="flat" cmpd="sng" algn="ctr">
+                      <a:solidFill>
+                        <a:srgbClr val="C9D1DA"/>
+                      </a:solidFill>
+                      <a:prstDash val="solid"/>
+                      <a:round/>
+                      <a:headEnd type="none" w="med" len="med"/>
+                      <a:tailEnd type="none" w="med" len="med"/>
+                    </a:lnB>
+                    <a:solidFill>
+                      <a:schemeClr val="bg2"/>
+                    </a:solidFill>
+                  </a:tcPr>
+                </a:tc>
+              </a:tr>
+              <a:tr h="419100">
+                <a:tc>
+                  <a:txBody>
+                    <a:bodyPr/>
+                    <a:lstStyle/>
+                    <a:p>
+                      <a:pPr indent="0" marL="0">
+                        <a:buNone/>
+                      </a:pPr>
+                      <a:r>
+                        <a:rPr lang="en-US" sz="1275" dirty="0">
+                          <a:solidFill>
+                            <a:schemeClr val="tx1"/>
+                          </a:solidFill>
+                        </a:rPr>
+                        <a:t>Leitura (meta: ≤ 2 s)</a:t>
+                      </a:r>
+                      <a:endParaRPr lang="en-US" sz="1275" dirty="0"/>
+                    </a:p>
+                  </a:txBody>
+                  <a:tcPr marL="88900" marR="88900" marT="50800" marB="50800" anchor="ctr">
+                    <a:lnL w="9525" cap="flat" cmpd="sng" algn="ctr">
+                      <a:solidFill>
+                        <a:srgbClr val="C9D1DA"/>
+                      </a:solidFill>
+                      <a:prstDash val="solid"/>
+                      <a:round/>
+                      <a:headEnd type="none" w="med" len="med"/>
+                      <a:tailEnd type="none" w="med" len="med"/>
+                    </a:lnL>
+                    <a:lnR w="9525" cap="flat" cmpd="sng" algn="ctr">
+                      <a:solidFill>
+                        <a:srgbClr val="C9D1DA"/>
+                      </a:solidFill>
+                      <a:prstDash val="solid"/>
+                      <a:round/>
+                      <a:headEnd type="none" w="med" len="med"/>
+                      <a:tailEnd type="none" w="med" len="med"/>
+                    </a:lnR>
+                    <a:lnT w="9525" cap="flat" cmpd="sng" algn="ctr">
+                      <a:solidFill>
+                        <a:srgbClr val="C9D1DA"/>
+                      </a:solidFill>
+                      <a:prstDash val="solid"/>
+                      <a:round/>
+                      <a:headEnd type="none" w="med" len="med"/>
+                      <a:tailEnd type="none" w="med" len="med"/>
+                    </a:lnT>
+                    <a:lnB w="9525" cap="flat" cmpd="sng" algn="ctr">
+                      <a:solidFill>
+                        <a:srgbClr val="C9D1DA"/>
+                      </a:solidFill>
+                      <a:prstDash val="solid"/>
+                      <a:round/>
+                      <a:headEnd type="none" w="med" len="med"/>
+                      <a:tailEnd type="none" w="med" len="med"/>
+                    </a:lnB>
+                  </a:tcPr>
+                </a:tc>
+                <a:tc>
+                  <a:txBody>
+                    <a:bodyPr/>
+                    <a:lstStyle/>
+                    <a:p>
+                      <a:pPr indent="0" marL="0">
+                        <a:buNone/>
+                      </a:pPr>
+                      <a:r>
+                        <a:rPr lang="en-US" sz="1275" b="1" dirty="0">
+                          <a:solidFill>
+                            <a:schemeClr val="tx1"/>
+                          </a:solidFill>
+                        </a:rPr>
+                        <a:t>168–220 ms</a:t>
+                      </a:r>
+                      <a:endParaRPr lang="en-US" sz="1275" dirty="0"/>
+                    </a:p>
+                  </a:txBody>
+                  <a:tcPr marL="88900" marR="88900" marT="50800" marB="50800" anchor="ctr">
+                    <a:lnL w="9525" cap="flat" cmpd="sng" algn="ctr">
+                      <a:solidFill>
+                        <a:srgbClr val="C9D1DA"/>
+                      </a:solidFill>
+                      <a:prstDash val="solid"/>
+                      <a:round/>
+                      <a:headEnd type="none" w="med" len="med"/>
+                      <a:tailEnd type="none" w="med" len="med"/>
+                    </a:lnL>
+                    <a:lnR w="9525" cap="flat" cmpd="sng" algn="ctr">
+                      <a:solidFill>
+                        <a:srgbClr val="C9D1DA"/>
+                      </a:solidFill>
+                      <a:prstDash val="solid"/>
+                      <a:round/>
+                      <a:headEnd type="none" w="med" len="med"/>
+                      <a:tailEnd type="none" w="med" len="med"/>
+                    </a:lnR>
+                    <a:lnT w="9525" cap="flat" cmpd="sng" algn="ctr">
+                      <a:solidFill>
+                        <a:srgbClr val="C9D1DA"/>
+                      </a:solidFill>
+                      <a:prstDash val="solid"/>
+                      <a:round/>
+                      <a:headEnd type="none" w="med" len="med"/>
+                      <a:tailEnd type="none" w="med" len="med"/>
+                    </a:lnT>
+                    <a:lnB w="9525" cap="flat" cmpd="sng" algn="ctr">
+                      <a:solidFill>
+                        <a:srgbClr val="C9D1DA"/>
+                      </a:solidFill>
+                      <a:prstDash val="solid"/>
+                      <a:round/>
+                      <a:headEnd type="none" w="med" len="med"/>
+                      <a:tailEnd type="none" w="med" len="med"/>
+                    </a:lnB>
+                  </a:tcPr>
+                </a:tc>
+              </a:tr>
+              <a:tr h="419100">
+                <a:tc>
+                  <a:txBody>
+                    <a:bodyPr/>
+                    <a:lstStyle/>
+                    <a:p>
+                      <a:pPr indent="0" marL="0">
+                        <a:buNone/>
+                      </a:pPr>
+                      <a:r>
+                        <a:rPr lang="en-US" sz="1275" dirty="0">
+                          <a:solidFill>
+                            <a:schemeClr val="tx1"/>
+                          </a:solidFill>
+                        </a:rPr>
+                        <a:t>Comando → foto no celular</a:t>
+                      </a:r>
+                      <a:endParaRPr lang="en-US" sz="1275" dirty="0"/>
+                    </a:p>
+                  </a:txBody>
+                  <a:tcPr marL="88900" marR="88900" marT="50800" marB="50800" anchor="ctr">
+                    <a:lnL w="9525" cap="flat" cmpd="sng" algn="ctr">
+                      <a:solidFill>
+                        <a:srgbClr val="C9D1DA"/>
+                      </a:solidFill>
+                      <a:prstDash val="solid"/>
+                      <a:round/>
+                      <a:headEnd type="none" w="med" len="med"/>
+                      <a:tailEnd type="none" w="med" len="med"/>
+                    </a:lnL>
+                    <a:lnR w="9525" cap="flat" cmpd="sng" algn="ctr">
+                      <a:solidFill>
+                        <a:srgbClr val="C9D1DA"/>
+                      </a:solidFill>
+                      <a:prstDash val="solid"/>
+                      <a:round/>
+                      <a:headEnd type="none" w="med" len="med"/>
+                      <a:tailEnd type="none" w="med" len="med"/>
+                    </a:lnR>
+                    <a:lnT w="9525" cap="flat" cmpd="sng" algn="ctr">
+                      <a:solidFill>
+                        <a:srgbClr val="C9D1DA"/>
+                      </a:solidFill>
+                      <a:prstDash val="solid"/>
+                      <a:round/>
+                      <a:headEnd type="none" w="med" len="med"/>
+                      <a:tailEnd type="none" w="med" len="med"/>
+                    </a:lnT>
+                    <a:lnB w="9525" cap="flat" cmpd="sng" algn="ctr">
+                      <a:solidFill>
+                        <a:srgbClr val="C9D1DA"/>
+                      </a:solidFill>
+                      <a:prstDash val="solid"/>
+                      <a:round/>
+                      <a:headEnd type="none" w="med" len="med"/>
+                      <a:tailEnd type="none" w="med" len="med"/>
+                    </a:lnB>
+                  </a:tcPr>
+                </a:tc>
+                <a:tc>
+                  <a:txBody>
+                    <a:bodyPr/>
+                    <a:lstStyle/>
+                    <a:p>
+                      <a:pPr indent="0" marL="0">
+                        <a:buNone/>
+                      </a:pPr>
+                      <a:r>
+                        <a:rPr lang="en-US" sz="1275" b="1" dirty="0">
+                          <a:solidFill>
+                            <a:schemeClr val="tx1"/>
+                          </a:solidFill>
+                        </a:rPr>
+                        <a:t>≈ 5 s</a:t>
+                      </a:r>
+                      <a:endParaRPr lang="en-US" sz="1275" dirty="0"/>
+                    </a:p>
+                  </a:txBody>
+                  <a:tcPr marL="88900" marR="88900" marT="50800" marB="50800" anchor="ctr">
+                    <a:lnL w="9525" cap="flat" cmpd="sng" algn="ctr">
+                      <a:solidFill>
+                        <a:srgbClr val="C9D1DA"/>
+                      </a:solidFill>
+                      <a:prstDash val="solid"/>
+                      <a:round/>
+                      <a:headEnd type="none" w="med" len="med"/>
+                      <a:tailEnd type="none" w="med" len="med"/>
+                    </a:lnL>
+                    <a:lnR w="9525" cap="flat" cmpd="sng" algn="ctr">
+                      <a:solidFill>
+                        <a:srgbClr val="C9D1DA"/>
+                      </a:solidFill>
+                      <a:prstDash val="solid"/>
+                      <a:round/>
+                      <a:headEnd type="none" w="med" len="med"/>
+                      <a:tailEnd type="none" w="med" len="med"/>
+                    </a:lnR>
+                    <a:lnT w="9525" cap="flat" cmpd="sng" algn="ctr">
+                      <a:solidFill>
+                        <a:srgbClr val="C9D1DA"/>
+                      </a:solidFill>
+                      <a:prstDash val="solid"/>
+                      <a:round/>
+                      <a:headEnd type="none" w="med" len="med"/>
+                      <a:tailEnd type="none" w="med" len="med"/>
+                    </a:lnT>
+                    <a:lnB w="9525" cap="flat" cmpd="sng" algn="ctr">
+                      <a:solidFill>
+                        <a:srgbClr val="C9D1DA"/>
+                      </a:solidFill>
+                      <a:prstDash val="solid"/>
+                      <a:round/>
+                      <a:headEnd type="none" w="med" len="med"/>
+                      <a:tailEnd type="none" w="med" len="med"/>
+                    </a:lnB>
+                  </a:tcPr>
+                </a:tc>
+              </a:tr>
+              <a:tr h="419100">
+                <a:tc>
+                  <a:txBody>
+                    <a:bodyPr/>
+                    <a:lstStyle/>
+                    <a:p>
+                      <a:pPr indent="0" marL="0">
+                        <a:buNone/>
+                      </a:pPr>
+                      <a:r>
+                        <a:rPr lang="en-US" sz="1275" dirty="0">
+                          <a:solidFill>
+                            <a:schemeClr val="tx1"/>
+                          </a:solidFill>
+                        </a:rPr>
+                        <a:t>Verificações automáticas</a:t>
+                      </a:r>
+                      <a:endParaRPr lang="en-US" sz="1275" dirty="0"/>
+                    </a:p>
+                  </a:txBody>
+                  <a:tcPr marL="88900" marR="88900" marT="50800" marB="50800" anchor="ctr">
+                    <a:lnL w="9525" cap="flat" cmpd="sng" algn="ctr">
+                      <a:solidFill>
+                        <a:srgbClr val="C9D1DA"/>
+                      </a:solidFill>
+                      <a:prstDash val="solid"/>
+                      <a:round/>
+                      <a:headEnd type="none" w="med" len="med"/>
+                      <a:tailEnd type="none" w="med" len="med"/>
+                    </a:lnL>
+                    <a:lnR w="9525" cap="flat" cmpd="sng" algn="ctr">
+                      <a:solidFill>
+                        <a:srgbClr val="C9D1DA"/>
+                      </a:solidFill>
+                      <a:prstDash val="solid"/>
+                      <a:round/>
+                      <a:headEnd type="none" w="med" len="med"/>
+                      <a:tailEnd type="none" w="med" len="med"/>
+                    </a:lnR>
+                    <a:lnT w="9525" cap="flat" cmpd="sng" algn="ctr">
+                      <a:solidFill>
+                        <a:srgbClr val="C9D1DA"/>
+                      </a:solidFill>
+                      <a:prstDash val="solid"/>
+                      <a:round/>
+                      <a:headEnd type="none" w="med" len="med"/>
+                      <a:tailEnd type="none" w="med" len="med"/>
+                    </a:lnT>
+                    <a:lnB w="9525" cap="flat" cmpd="sng" algn="ctr">
+                      <a:solidFill>
+                        <a:srgbClr val="C9D1DA"/>
+                      </a:solidFill>
+                      <a:prstDash val="solid"/>
+                      <a:round/>
+                      <a:headEnd type="none" w="med" len="med"/>
+                      <a:tailEnd type="none" w="med" len="med"/>
+                    </a:lnB>
+                  </a:tcPr>
+                </a:tc>
+                <a:tc>
+                  <a:txBody>
+                    <a:bodyPr/>
+                    <a:lstStyle/>
+                    <a:p>
+                      <a:pPr indent="0" marL="0">
+                        <a:buNone/>
+                      </a:pPr>
+                      <a:r>
+                        <a:rPr lang="en-US" sz="1275" b="1" dirty="0">
+                          <a:solidFill>
+                            <a:schemeClr val="tx1"/>
+                          </a:solidFill>
+                        </a:rPr>
+                        <a:t>429</a:t>
+                      </a:r>
+                      <a:pPr indent="0" marL="0">
+                        <a:buNone/>
+                      </a:pPr>
+                      <a:r>
+                        <a:rPr lang="en-US" sz="1275" dirty="0">
+                          <a:solidFill>
+                            <a:schemeClr val="tx1"/>
+                          </a:solidFill>
+                        </a:rPr>
+                        <a:t> aprovadas</a:t>
+                      </a:r>
+                      <a:endParaRPr lang="en-US" sz="1275" dirty="0"/>
+                    </a:p>
+                  </a:txBody>
+                  <a:tcPr marL="88900" marR="88900" marT="50800" marB="50800" anchor="ctr">
+                    <a:lnL w="9525" cap="flat" cmpd="sng" algn="ctr">
+                      <a:solidFill>
+                        <a:srgbClr val="C9D1DA"/>
+                      </a:solidFill>
+                      <a:prstDash val="solid"/>
+                      <a:round/>
+                      <a:headEnd type="none" w="med" len="med"/>
+                      <a:tailEnd type="none" w="med" len="med"/>
+                    </a:lnL>
+                    <a:lnR w="9525" cap="flat" cmpd="sng" algn="ctr">
+                      <a:solidFill>
+                        <a:srgbClr val="C9D1DA"/>
+                      </a:solidFill>
+                      <a:prstDash val="solid"/>
+                      <a:round/>
+                      <a:headEnd type="none" w="med" len="med"/>
+                      <a:tailEnd type="none" w="med" len="med"/>
+                    </a:lnR>
+                    <a:lnT w="9525" cap="flat" cmpd="sng" algn="ctr">
+                      <a:solidFill>
+                        <a:srgbClr val="C9D1DA"/>
+                      </a:solidFill>
+                      <a:prstDash val="solid"/>
+                      <a:round/>
+                      <a:headEnd type="none" w="med" len="med"/>
+                      <a:tailEnd type="none" w="med" len="med"/>
+                    </a:lnT>
+                    <a:lnB w="9525" cap="flat" cmpd="sng" algn="ctr">
+                      <a:solidFill>
+                        <a:srgbClr val="C9D1DA"/>
+                      </a:solidFill>
+                      <a:prstDash val="solid"/>
+                      <a:round/>
+                      <a:headEnd type="none" w="med" len="med"/>
+                      <a:tailEnd type="none" w="med" len="med"/>
+                    </a:lnB>
+                  </a:tcPr>
+                </a:tc>
+              </a:tr>
+              <a:tr h="419100">
+                <a:tc>
+                  <a:txBody>
+                    <a:bodyPr/>
+                    <a:lstStyle/>
+                    <a:p>
+                      <a:pPr indent="0" marL="0">
+                        <a:buNone/>
+                      </a:pPr>
+                      <a:r>
+                        <a:rPr lang="en-US" sz="1275" dirty="0">
+                          <a:solidFill>
+                            <a:schemeClr val="tx1"/>
+                          </a:solidFill>
+                        </a:rPr>
+                        <a:t>Integração contínua</a:t>
+                      </a:r>
+                      <a:endParaRPr lang="en-US" sz="1275" dirty="0"/>
+                    </a:p>
+                  </a:txBody>
+                  <a:tcPr marL="88900" marR="88900" marT="50800" marB="50800" anchor="ctr">
+                    <a:lnL w="9525" cap="flat" cmpd="sng" algn="ctr">
+                      <a:solidFill>
+                        <a:srgbClr val="C9D1DA"/>
+                      </a:solidFill>
+                      <a:prstDash val="solid"/>
+                      <a:round/>
+                      <a:headEnd type="none" w="med" len="med"/>
+                      <a:tailEnd type="none" w="med" len="med"/>
+                    </a:lnL>
+                    <a:lnR w="9525" cap="flat" cmpd="sng" algn="ctr">
+                      <a:solidFill>
+                        <a:srgbClr val="C9D1DA"/>
+                      </a:solidFill>
+                      <a:prstDash val="solid"/>
+                      <a:round/>
+                      <a:headEnd type="none" w="med" len="med"/>
+                      <a:tailEnd type="none" w="med" len="med"/>
+                    </a:lnR>
+                    <a:lnT w="9525" cap="flat" cmpd="sng" algn="ctr">
+                      <a:solidFill>
+                        <a:srgbClr val="C9D1DA"/>
+                      </a:solidFill>
+                      <a:prstDash val="solid"/>
+                      <a:round/>
+                      <a:headEnd type="none" w="med" len="med"/>
+                      <a:tailEnd type="none" w="med" len="med"/>
+                    </a:lnT>
+                    <a:lnB w="9525" cap="flat" cmpd="sng" algn="ctr">
+                      <a:solidFill>
+                        <a:srgbClr val="C9D1DA"/>
+                      </a:solidFill>
+                      <a:prstDash val="solid"/>
+                      <a:round/>
+                      <a:headEnd type="none" w="med" len="med"/>
+                      <a:tailEnd type="none" w="med" len="med"/>
+                    </a:lnB>
+                  </a:tcPr>
+                </a:tc>
+                <a:tc>
+                  <a:txBody>
+                    <a:bodyPr/>
+                    <a:lstStyle/>
+                    <a:p>
+                      <a:pPr indent="0" marL="0">
+                        <a:buNone/>
+                      </a:pPr>
+                      <a:r>
+                        <a:rPr lang="en-US" sz="1275" dirty="0">
+                          <a:solidFill>
+                            <a:schemeClr val="tx1"/>
+                          </a:solidFill>
+                        </a:rPr>
+                        <a:t>Ubuntu e macOS</a:t>
+                      </a:r>
+                      <a:endParaRPr lang="en-US" sz="1275" dirty="0"/>
+                    </a:p>
+                  </a:txBody>
+                  <a:tcPr marL="88900" marR="88900" marT="50800" marB="50800" anchor="ctr">
+                    <a:lnL w="9525" cap="flat" cmpd="sng" algn="ctr">
+                      <a:solidFill>
+                        <a:srgbClr val="C9D1DA"/>
+                      </a:solidFill>
+                      <a:prstDash val="solid"/>
+                      <a:round/>
+                      <a:headEnd type="none" w="med" len="med"/>
+                      <a:tailEnd type="none" w="med" len="med"/>
+                    </a:lnL>
+                    <a:lnR w="9525" cap="flat" cmpd="sng" algn="ctr">
+                      <a:solidFill>
+                        <a:srgbClr val="C9D1DA"/>
+                      </a:solidFill>
+                      <a:prstDash val="solid"/>
+                      <a:round/>
+                      <a:headEnd type="none" w="med" len="med"/>
+                      <a:tailEnd type="none" w="med" len="med"/>
+                    </a:lnR>
+                    <a:lnT w="9525" cap="flat" cmpd="sng" algn="ctr">
+                      <a:solidFill>
+                        <a:srgbClr val="C9D1DA"/>
+                      </a:solidFill>
+                      <a:prstDash val="solid"/>
+                      <a:round/>
+                      <a:headEnd type="none" w="med" len="med"/>
+                      <a:tailEnd type="none" w="med" len="med"/>
+                    </a:lnT>
+                    <a:lnB w="9525" cap="flat" cmpd="sng" algn="ctr">
+                      <a:solidFill>
+                        <a:srgbClr val="C9D1DA"/>
+                      </a:solidFill>
+                      <a:prstDash val="solid"/>
+                      <a:round/>
+                      <a:headEnd type="none" w="med" len="med"/>
+                      <a:tailEnd type="none" w="med" len="med"/>
+                    </a:lnB>
+                  </a:tcPr>
+                </a:tc>
+              </a:tr>
+              <a:tr h="419100">
+                <a:tc>
+                  <a:txBody>
+                    <a:bodyPr/>
+                    <a:lstStyle/>
+                    <a:p>
+                      <a:pPr indent="0" marL="0">
+                        <a:buNone/>
+                      </a:pPr>
+                      <a:r>
+                        <a:rPr lang="en-US" sz="1275" dirty="0">
+                          <a:solidFill>
+                            <a:schemeClr val="tx1"/>
+                          </a:solidFill>
+                        </a:rPr>
+                        <a:t>RAM estática / flash</a:t>
+                      </a:r>
+                      <a:endParaRPr lang="en-US" sz="1275" dirty="0"/>
+                    </a:p>
+                  </a:txBody>
+                  <a:tcPr marL="88900" marR="88900" marT="50800" marB="50800" anchor="ctr">
+                    <a:lnL w="9525" cap="flat" cmpd="sng" algn="ctr">
+                      <a:solidFill>
+                        <a:srgbClr val="C9D1DA"/>
+                      </a:solidFill>
+                      <a:prstDash val="solid"/>
+                      <a:round/>
+                      <a:headEnd type="none" w="med" len="med"/>
+                      <a:tailEnd type="none" w="med" len="med"/>
+                    </a:lnL>
+                    <a:lnR w="9525" cap="flat" cmpd="sng" algn="ctr">
+                      <a:solidFill>
+                        <a:srgbClr val="C9D1DA"/>
+                      </a:solidFill>
+                      <a:prstDash val="solid"/>
+                      <a:round/>
+                      <a:headEnd type="none" w="med" len="med"/>
+                      <a:tailEnd type="none" w="med" len="med"/>
+                    </a:lnR>
+                    <a:lnT w="9525" cap="flat" cmpd="sng" algn="ctr">
+                      <a:solidFill>
+                        <a:srgbClr val="C9D1DA"/>
+                      </a:solidFill>
+                      <a:prstDash val="solid"/>
+                      <a:round/>
+                      <a:headEnd type="none" w="med" len="med"/>
+                      <a:tailEnd type="none" w="med" len="med"/>
+                    </a:lnT>
+                    <a:lnB w="9525" cap="flat" cmpd="sng" algn="ctr">
+                      <a:solidFill>
+                        <a:srgbClr val="C9D1DA"/>
+                      </a:solidFill>
+                      <a:prstDash val="solid"/>
+                      <a:round/>
+                      <a:headEnd type="none" w="med" len="med"/>
+                      <a:tailEnd type="none" w="med" len="med"/>
+                    </a:lnB>
+                  </a:tcPr>
+                </a:tc>
+                <a:tc>
+                  <a:txBody>
+                    <a:bodyPr/>
+                    <a:lstStyle/>
+                    <a:p>
+                      <a:pPr indent="0" marL="0">
+                        <a:buNone/>
+                      </a:pPr>
+                      <a:r>
+                        <a:rPr lang="en-US" sz="1275" dirty="0">
+                          <a:solidFill>
+                            <a:schemeClr val="tx1"/>
+                          </a:solidFill>
+                        </a:rPr>
+                        <a:t>22,6% / 29,3%</a:t>
+                      </a:r>
+                      <a:endParaRPr lang="en-US" sz="1275" dirty="0"/>
+                    </a:p>
+                  </a:txBody>
+                  <a:tcPr marL="88900" marR="88900" marT="50800" marB="50800" anchor="ctr">
+                    <a:lnL w="9525" cap="flat" cmpd="sng" algn="ctr">
+                      <a:solidFill>
+                        <a:srgbClr val="C9D1DA"/>
+                      </a:solidFill>
+                      <a:prstDash val="solid"/>
+                      <a:round/>
+                      <a:headEnd type="none" w="med" len="med"/>
+                      <a:tailEnd type="none" w="med" len="med"/>
+                    </a:lnL>
+                    <a:lnR w="9525" cap="flat" cmpd="sng" algn="ctr">
+                      <a:solidFill>
+                        <a:srgbClr val="C9D1DA"/>
+                      </a:solidFill>
+                      <a:prstDash val="solid"/>
+                      <a:round/>
+                      <a:headEnd type="none" w="med" len="med"/>
+                      <a:tailEnd type="none" w="med" len="med"/>
+                    </a:lnR>
+                    <a:lnT w="9525" cap="flat" cmpd="sng" algn="ctr">
+                      <a:solidFill>
+                        <a:srgbClr val="C9D1DA"/>
+                      </a:solidFill>
+                      <a:prstDash val="solid"/>
+                      <a:round/>
+                      <a:headEnd type="none" w="med" len="med"/>
+                      <a:tailEnd type="none" w="med" len="med"/>
+                    </a:lnT>
+                    <a:lnB w="9525" cap="flat" cmpd="sng" algn="ctr">
+                      <a:solidFill>
+                        <a:srgbClr val="C9D1DA"/>
+                      </a:solidFill>
+                      <a:prstDash val="solid"/>
+                      <a:round/>
+                      <a:headEnd type="none" w="med" len="med"/>
+                      <a:tailEnd type="none" w="med" len="med"/>
+                    </a:lnB>
+                  </a:tcPr>
+                </a:tc>
+              </a:tr>
+            </a:tbl>
+          </a:graphicData>
+        </a:graphic>
+      </p:graphicFrame>
       <p:sp>
         <p:nvSpPr>
-          <p:cNvPr id="10" name="Text 6"/>
+          <p:cNvPr id="12" name="Text 7"/>
           <p:cNvSpPr txBox="1"/>
           <p:nvPr/>
         </p:nvSpPr>
         <p:spPr>
           <a:xfrm>
-            <a:off x="8039100" y="2362200"/>
-            <a:ext cx="3467100" cy="876300"/>
+            <a:off x="8039100" y="4095750"/>
+            <a:ext cx="3467100" cy="209550"/>
           </a:xfrm>
           <a:prstGeom prst="rect">
             <a:avLst/>
@@ -2953,97 +3643,27 @@
               <a:buNone/>
             </a:pPr>
             <a:r>
-              <a:rPr lang="en-US" sz="3750" b="1" dirty="0">
-                <a:solidFill>
-                  <a:schemeClr val="accent1"/>
+              <a:rPr lang="en-US" sz="1200" dirty="0">
+                <a:solidFill>
+                  <a:schemeClr val="tx2"/>
                 </a:solidFill>
               </a:rPr>
-              <a:t>~5 s</a:t>
-            </a:r>
-            <a:endParaRPr lang="en-US" sz="1800" dirty="0"/>
-          </a:p>
-          <a:p>
-            <a:pPr indent="0" marL="0">
-              <a:spcBef>
-                <a:spcPts val="300"/>
-              </a:spcBef>
-              <a:buNone/>
-            </a:pPr>
-            <a:r>
-              <a:rPr lang="en-US" sz="1425" dirty="0">
-                <a:solidFill>
-                  <a:schemeClr val="tx1"/>
-                </a:solidFill>
-              </a:rPr>
-              <a:t>do comando à foto no celular</a:t>
-            </a:r>
-            <a:endParaRPr lang="en-US" sz="1800" dirty="0"/>
+              <a:t>Tabela 3 — Medidas na placa e no PC.</a:t>
+            </a:r>
+            <a:endParaRPr lang="en-US" sz="1200" dirty="0"/>
           </a:p>
         </p:txBody>
       </p:sp>
       <p:sp>
         <p:nvSpPr>
-          <p:cNvPr id="11" name="Text 7"/>
+          <p:cNvPr id="13" name="Text 8"/>
           <p:cNvSpPr txBox="1"/>
           <p:nvPr/>
         </p:nvSpPr>
         <p:spPr>
           <a:xfrm>
-            <a:off x="8039100" y="3295650"/>
-            <a:ext cx="3467100" cy="1104900"/>
-          </a:xfrm>
-          <a:prstGeom prst="rect">
-            <a:avLst/>
-          </a:prstGeom>
-          <a:noFill/>
-          <a:ln/>
-        </p:spPr>
-        <p:txBody>
-          <a:bodyPr wrap="square" lIns="0" tIns="0" rIns="0" bIns="0" rtlCol="0" anchor="t"/>
-          <a:lstStyle/>
-          <a:p>
-            <a:pPr indent="0" marL="0">
-              <a:buNone/>
-            </a:pPr>
-            <a:r>
-              <a:rPr lang="en-US" sz="3750" b="1" dirty="0">
-                <a:solidFill>
-                  <a:schemeClr val="accent1"/>
-                </a:solidFill>
-              </a:rPr>
-              <a:t>429</a:t>
-            </a:r>
-            <a:endParaRPr lang="en-US" sz="1800" dirty="0"/>
-          </a:p>
-          <a:p>
-            <a:pPr indent="0" marL="0">
-              <a:spcBef>
-                <a:spcPts val="300"/>
-              </a:spcBef>
-              <a:buNone/>
-            </a:pPr>
-            <a:r>
-              <a:rPr lang="en-US" sz="1425" dirty="0">
-                <a:solidFill>
-                  <a:schemeClr val="tx1"/>
-                </a:solidFill>
-              </a:rPr>
-              <a:t>verificações automáticas + CI no Ubuntu e no macOS</a:t>
-            </a:r>
-            <a:endParaRPr lang="en-US" sz="1800" dirty="0"/>
-          </a:p>
-        </p:txBody>
-      </p:sp>
-      <p:sp>
-        <p:nvSpPr>
-          <p:cNvPr id="12" name="Text 8"/>
-          <p:cNvSpPr txBox="1"/>
-          <p:nvPr/>
-        </p:nvSpPr>
-        <p:spPr>
-          <a:xfrm>
-            <a:off x="685800" y="4800600"/>
-            <a:ext cx="10820400" cy="571500"/>
+            <a:off x="685800" y="4953000"/>
+            <a:ext cx="10820400" cy="1047750"/>
           </a:xfrm>
           <a:prstGeom prst="rect">
             <a:avLst/>
@@ -3059,6 +3679,9 @@
               <a:lnSpc>
                 <a:spcPct val="112000"/>
               </a:lnSpc>
+              <a:spcAft>
+                <a:spcPts val="600"/>
+              </a:spcAft>
               <a:buNone/>
             </a:pPr>
             <a:r>
@@ -3067,7 +3690,24 @@
                   <a:schemeClr val="tx1"/>
                 </a:solidFill>
               </a:rPr>
-              <a:t>Verificado na placa: Wi-Fi e SNTP, câmera, calibração, qualquer comprimido em qualquer posição e o ciclo agendado completo (⏰ → 🔔 → ✅). Vídeo e demonstração a seguir.</a:t>
+              <a:t>Verificado na placa: Wi-Fi e SNTP, câmera, calibração, detecção com comprimidos e posições diferentes e o ciclo agendado completo (início da janela → alerta → retirada com atraso). Vídeo e demonstração a seguir.</a:t>
+            </a:r>
+            <a:endParaRPr lang="en-US" sz="1425" dirty="0"/>
+          </a:p>
+          <a:p>
+            <a:pPr indent="0" marL="0">
+              <a:lnSpc>
+                <a:spcPct val="112000"/>
+              </a:lnSpc>
+              <a:buNone/>
+            </a:pPr>
+            <a:r>
+              <a:rPr lang="en-US" sz="1425" dirty="0">
+                <a:solidFill>
+                  <a:schemeClr val="tx2"/>
+                </a:solidFill>
+              </a:rPr>
+              <a:t>A detecção foi conferida em quatro leituras; o ensaio de acurácia (RNF03) está previsto.</a:t>
             </a:r>
             <a:endParaRPr lang="en-US" sz="1425" dirty="0"/>
           </a:p>
@@ -3101,7 +3741,7 @@
           <a:bodyPr lIns="0" tIns="0" rIns="0" bIns="0"/>
           <a:lstStyle>
             <a:lvl1pPr>
-              <a:defRPr sz="1125">
+              <a:defRPr sz="1050">
                 <a:solidFill>
                   <a:schemeClr val="tx2"/>
                 </a:solidFill>
@@ -3145,16 +3785,16 @@
       </p:grpSpPr>
       <p:sp>
         <p:nvSpPr>
-          <p:cNvPr id="2" name="Text 1"/>
+          <p:cNvPr id="2" name="Text 0"/>
           <p:cNvSpPr/>
           <p:nvPr>
-            <p:ph idx="101" type="body" hasCustomPrompt="1"/>
+            <p:ph idx="100" type="body" hasCustomPrompt="1"/>
           </p:nvPr>
         </p:nvSpPr>
         <p:spPr>
           <a:xfrm>
             <a:off x="685800" y="514350"/>
-            <a:ext cx="10820400" cy="228600"/>
+            <a:ext cx="10820400" cy="209550"/>
           </a:xfrm>
           <a:prstGeom prst="rect">
             <a:avLst/>
@@ -3170,29 +3810,29 @@
               <a:buNone/>
             </a:pPr>
             <a:r>
-              <a:rPr lang="en-US" sz="1350" b="1" spc="190" kern="0" dirty="0">
-                <a:solidFill>
-                  <a:schemeClr val="accent2"/>
+              <a:rPr lang="en-US" sz="1200" b="1" spc="150" kern="0" dirty="0">
+                <a:solidFill>
+                  <a:schemeClr val="tx2"/>
                 </a:solidFill>
               </a:rPr>
-              <a:t>PROBLEMAS ENFRENTADOS</a:t>
-            </a:r>
-            <a:endParaRPr lang="en-US" sz="1350" dirty="0"/>
+              <a:t>3 · RESULTADOS</a:t>
+            </a:r>
+            <a:endParaRPr lang="en-US" sz="1200" dirty="0"/>
           </a:p>
         </p:txBody>
       </p:sp>
       <p:sp>
         <p:nvSpPr>
-          <p:cNvPr id="3" name="Text 1"/>
+          <p:cNvPr id="3" name="Text 0"/>
           <p:cNvSpPr/>
           <p:nvPr>
-            <p:ph idx="102" type="title" hasCustomPrompt="1"/>
+            <p:ph idx="101" type="title" hasCustomPrompt="1"/>
           </p:nvPr>
         </p:nvSpPr>
         <p:spPr>
           <a:xfrm>
             <a:off x="685800" y="762000"/>
-            <a:ext cx="10820400" cy="514350"/>
+            <a:ext cx="10820400" cy="495300"/>
           </a:xfrm>
           <a:prstGeom prst="rect">
             <a:avLst/>
@@ -3208,14 +3848,14 @@
               <a:buNone/>
             </a:pPr>
             <a:r>
-              <a:rPr lang="en-US" sz="3300" b="1" dirty="0">
+              <a:rPr lang="en-US" sz="3000" b="1" dirty="0">
                 <a:solidFill>
                   <a:schemeClr val="accent1"/>
                 </a:solidFill>
               </a:rPr>
-              <a:t>O que a bancada nos ensinou</a:t>
-            </a:r>
-            <a:endParaRPr lang="en-US" sz="3300" dirty="0"/>
+              <a:t>Problemas enfrentados e soluções adotadas</a:t>
+            </a:r>
+            <a:endParaRPr lang="en-US" sz="3000" dirty="0"/>
           </a:p>
         </p:txBody>
       </p:sp>
@@ -3228,7 +3868,7 @@
         <p:spPr>
           <a:xfrm>
             <a:off x="685800" y="6477000"/>
-            <a:ext cx="2857500" cy="209550"/>
+            <a:ext cx="2476500" cy="209550"/>
           </a:xfrm>
           <a:prstGeom prst="rect">
             <a:avLst/>
@@ -3244,14 +3884,14 @@
               <a:buNone/>
             </a:pPr>
             <a:r>
-              <a:rPr lang="en-US" sz="1125" b="1" dirty="0">
-                <a:solidFill>
-                  <a:schemeClr val="accent2"/>
+              <a:rPr lang="en-US" sz="1050" b="1" dirty="0">
+                <a:solidFill>
+                  <a:schemeClr val="tx2"/>
                 </a:solidFill>
               </a:rPr>
               <a:t>Henrique</a:t>
             </a:r>
-            <a:endParaRPr lang="en-US" sz="1125" dirty="0"/>
+            <a:endParaRPr lang="en-US" sz="1050" dirty="0"/>
           </a:p>
         </p:txBody>
       </p:sp>
@@ -3358,7 +3998,7 @@
                             <a:schemeClr val="tx1"/>
                           </a:solidFill>
                         </a:rPr>
-                        <a:t>Causa</a:t>
+                        <a:t>Causa identificada</a:t>
                       </a:r>
                       <a:endParaRPr lang="en-US" sz="1350" dirty="0"/>
                     </a:p>
@@ -3419,7 +4059,7 @@
                             <a:schemeClr val="tx1"/>
                           </a:solidFill>
                         </a:rPr>
-                        <a:t>Solução</a:t>
+                        <a:t>Solução adotada</a:t>
                       </a:r>
                       <a:endParaRPr lang="en-US" sz="1350" dirty="0"/>
                     </a:p>
@@ -4907,7 +5547,7 @@
           <a:bodyPr lIns="0" tIns="0" rIns="0" bIns="0"/>
           <a:lstStyle>
             <a:lvl1pPr>
-              <a:defRPr sz="1125">
+              <a:defRPr sz="1050">
                 <a:solidFill>
                   <a:schemeClr val="tx2"/>
                 </a:solidFill>
@@ -4951,16 +5591,16 @@
       </p:grpSpPr>
       <p:sp>
         <p:nvSpPr>
-          <p:cNvPr id="2" name="Text 1"/>
+          <p:cNvPr id="2" name="Text 0"/>
           <p:cNvSpPr/>
           <p:nvPr>
-            <p:ph idx="101" type="body" hasCustomPrompt="1"/>
+            <p:ph idx="100" type="body" hasCustomPrompt="1"/>
           </p:nvPr>
         </p:nvSpPr>
         <p:spPr>
           <a:xfrm>
             <a:off x="685800" y="514350"/>
-            <a:ext cx="10820400" cy="228600"/>
+            <a:ext cx="10820400" cy="209550"/>
           </a:xfrm>
           <a:prstGeom prst="rect">
             <a:avLst/>
@@ -4976,29 +5616,29 @@
               <a:buNone/>
             </a:pPr>
             <a:r>
-              <a:rPr lang="en-US" sz="1350" b="1" spc="190" kern="0" dirty="0">
-                <a:solidFill>
-                  <a:schemeClr val="accent2"/>
+              <a:rPr lang="en-US" sz="1200" b="1" spc="150" kern="0" dirty="0">
+                <a:solidFill>
+                  <a:schemeClr val="tx2"/>
                 </a:solidFill>
               </a:rPr>
-              <a:t>CRONOGRAMA</a:t>
-            </a:r>
-            <a:endParaRPr lang="en-US" sz="1350" dirty="0"/>
+              <a:t>4 · PLANEJAMENTO</a:t>
+            </a:r>
+            <a:endParaRPr lang="en-US" sz="1200" dirty="0"/>
           </a:p>
         </p:txBody>
       </p:sp>
       <p:sp>
         <p:nvSpPr>
-          <p:cNvPr id="3" name="Text 1"/>
+          <p:cNvPr id="3" name="Text 0"/>
           <p:cNvSpPr/>
           <p:nvPr>
-            <p:ph idx="102" type="title" hasCustomPrompt="1"/>
+            <p:ph idx="101" type="title" hasCustomPrompt="1"/>
           </p:nvPr>
         </p:nvSpPr>
         <p:spPr>
           <a:xfrm>
             <a:off x="685800" y="762000"/>
-            <a:ext cx="10820400" cy="514350"/>
+            <a:ext cx="10820400" cy="495300"/>
           </a:xfrm>
           <a:prstGeom prst="rect">
             <a:avLst/>
@@ -5014,14 +5654,14 @@
               <a:buNone/>
             </a:pPr>
             <a:r>
-              <a:rPr lang="en-US" sz="3300" b="1" dirty="0">
+              <a:rPr lang="en-US" sz="3000" b="1" dirty="0">
                 <a:solidFill>
                   <a:schemeClr val="accent1"/>
                 </a:solidFill>
               </a:rPr>
-              <a:t>Adiantados na implementação; falta medir</a:t>
-            </a:r>
-            <a:endParaRPr lang="en-US" sz="3300" dirty="0"/>
+              <a:t>Cronograma e próximos passos</a:t>
+            </a:r>
+            <a:endParaRPr lang="en-US" sz="3000" dirty="0"/>
           </a:p>
         </p:txBody>
       </p:sp>
@@ -5034,7 +5674,7 @@
         <p:spPr>
           <a:xfrm>
             <a:off x="685800" y="6477000"/>
-            <a:ext cx="2857500" cy="209550"/>
+            <a:ext cx="2476500" cy="209550"/>
           </a:xfrm>
           <a:prstGeom prst="rect">
             <a:avLst/>
@@ -5050,14 +5690,14 @@
               <a:buNone/>
             </a:pPr>
             <a:r>
-              <a:rPr lang="en-US" sz="1125" b="1" dirty="0">
-                <a:solidFill>
-                  <a:schemeClr val="accent2"/>
+              <a:rPr lang="en-US" sz="1050" b="1" dirty="0">
+                <a:solidFill>
+                  <a:schemeClr val="tx2"/>
                 </a:solidFill>
               </a:rPr>
               <a:t>Henrique</a:t>
             </a:r>
-            <a:endParaRPr lang="en-US" sz="1125" dirty="0"/>
+            <a:endParaRPr lang="en-US" sz="1050" dirty="0"/>
           </a:p>
         </p:txBody>
       </p:sp>
@@ -5084,9 +5724,10 @@
             <a:tbl>
               <a:tblPr/>
               <a:tblGrid>
-                <a:gridCol w="952500"/>
-                <a:gridCol w="1428750"/>
-                <a:gridCol w="2838450"/>
+                <a:gridCol w="800100"/>
+                <a:gridCol w="1123950"/>
+                <a:gridCol w="2305050"/>
+                <a:gridCol w="990600"/>
               </a:tblGrid>
               <a:tr h="352425">
                 <a:tc>
@@ -5098,14 +5739,14 @@
                         <a:buNone/>
                       </a:pPr>
                       <a:r>
-                        <a:rPr lang="en-US" sz="1350" b="1" dirty="0">
+                        <a:rPr lang="en-US" sz="1275" b="1" dirty="0">
                           <a:solidFill>
                             <a:schemeClr val="tx1"/>
                           </a:solidFill>
                         </a:rPr>
                         <a:t>Data</a:t>
                       </a:r>
-                      <a:endParaRPr lang="en-US" sz="1350" dirty="0"/>
+                      <a:endParaRPr lang="en-US" sz="1275" dirty="0"/>
                     </a:p>
                   </a:txBody>
                   <a:tcPr marL="88900" marR="88900" marT="50800" marB="50800" anchor="ctr">
@@ -5159,14 +5800,14 @@
                         <a:buNone/>
                       </a:pPr>
                       <a:r>
-                        <a:rPr lang="en-US" sz="1350" b="1" dirty="0">
+                        <a:rPr lang="en-US" sz="1275" b="1" dirty="0">
                           <a:solidFill>
                             <a:schemeClr val="tx1"/>
                           </a:solidFill>
                         </a:rPr>
                         <a:t>Previsto</a:t>
                       </a:r>
-                      <a:endParaRPr lang="en-US" sz="1350" dirty="0"/>
+                      <a:endParaRPr lang="en-US" sz="1275" dirty="0"/>
                     </a:p>
                   </a:txBody>
                   <a:tcPr marL="88900" marR="88900" marT="50800" marB="50800" anchor="ctr">
@@ -5220,14 +5861,75 @@
                         <a:buNone/>
                       </a:pPr>
                       <a:r>
-                        <a:rPr lang="en-US" sz="1350" b="1" dirty="0">
+                        <a:rPr lang="en-US" sz="1275" b="1" dirty="0">
                           <a:solidFill>
                             <a:schemeClr val="tx1"/>
                           </a:solidFill>
                         </a:rPr>
                         <a:t>Realizado</a:t>
                       </a:r>
-                      <a:endParaRPr lang="en-US" sz="1350" dirty="0"/>
+                      <a:endParaRPr lang="en-US" sz="1275" dirty="0"/>
+                    </a:p>
+                  </a:txBody>
+                  <a:tcPr marL="88900" marR="88900" marT="50800" marB="50800" anchor="ctr">
+                    <a:lnL w="9525" cap="flat" cmpd="sng" algn="ctr">
+                      <a:solidFill>
+                        <a:srgbClr val="C9D1DA"/>
+                      </a:solidFill>
+                      <a:prstDash val="solid"/>
+                      <a:round/>
+                      <a:headEnd type="none" w="med" len="med"/>
+                      <a:tailEnd type="none" w="med" len="med"/>
+                    </a:lnL>
+                    <a:lnR w="9525" cap="flat" cmpd="sng" algn="ctr">
+                      <a:solidFill>
+                        <a:srgbClr val="C9D1DA"/>
+                      </a:solidFill>
+                      <a:prstDash val="solid"/>
+                      <a:round/>
+                      <a:headEnd type="none" w="med" len="med"/>
+                      <a:tailEnd type="none" w="med" len="med"/>
+                    </a:lnR>
+                    <a:lnT w="9525" cap="flat" cmpd="sng" algn="ctr">
+                      <a:solidFill>
+                        <a:srgbClr val="C9D1DA"/>
+                      </a:solidFill>
+                      <a:prstDash val="solid"/>
+                      <a:round/>
+                      <a:headEnd type="none" w="med" len="med"/>
+                      <a:tailEnd type="none" w="med" len="med"/>
+                    </a:lnT>
+                    <a:lnB w="9525" cap="flat" cmpd="sng" algn="ctr">
+                      <a:solidFill>
+                        <a:srgbClr val="C9D1DA"/>
+                      </a:solidFill>
+                      <a:prstDash val="solid"/>
+                      <a:round/>
+                      <a:headEnd type="none" w="med" len="med"/>
+                      <a:tailEnd type="none" w="med" len="med"/>
+                    </a:lnB>
+                    <a:solidFill>
+                      <a:schemeClr val="bg2"/>
+                    </a:solidFill>
+                  </a:tcPr>
+                </a:tc>
+                <a:tc>
+                  <a:txBody>
+                    <a:bodyPr/>
+                    <a:lstStyle/>
+                    <a:p>
+                      <a:pPr indent="0" marL="0">
+                        <a:buNone/>
+                      </a:pPr>
+                      <a:r>
+                        <a:rPr lang="en-US" sz="1275" b="1" dirty="0">
+                          <a:solidFill>
+                            <a:schemeClr val="tx1"/>
+                          </a:solidFill>
+                        </a:rPr>
+                        <a:t>Situação</a:t>
+                      </a:r>
+                      <a:endParaRPr lang="en-US" sz="1275" dirty="0"/>
                     </a:p>
                   </a:txBody>
                   <a:tcPr marL="88900" marR="88900" marT="50800" marB="50800" anchor="ctr">
@@ -5283,14 +5985,14 @@
                         <a:buNone/>
                       </a:pPr>
                       <a:r>
-                        <a:rPr lang="en-US" sz="1350" dirty="0">
+                        <a:rPr lang="en-US" sz="1275" dirty="0">
                           <a:solidFill>
                             <a:schemeClr val="tx1"/>
                           </a:solidFill>
                         </a:rPr>
                         <a:t>25/09</a:t>
                       </a:r>
-                      <a:endParaRPr lang="en-US" sz="1350" dirty="0"/>
+                      <a:endParaRPr lang="en-US" sz="1275" dirty="0"/>
                     </a:p>
                   </a:txBody>
                   <a:tcPr marL="88900" marR="88900" marT="50800" marB="50800" anchor="ctr">
@@ -5341,14 +6043,14 @@
                         <a:buNone/>
                       </a:pPr>
                       <a:r>
-                        <a:rPr lang="en-US" sz="1350" dirty="0">
+                        <a:rPr lang="en-US" sz="1275" dirty="0">
                           <a:solidFill>
                             <a:schemeClr val="tx1"/>
                           </a:solidFill>
                         </a:rPr>
                         <a:t>Requisitos</a:t>
                       </a:r>
-                      <a:endParaRPr lang="en-US" sz="1350" dirty="0"/>
+                      <a:endParaRPr lang="en-US" sz="1275" dirty="0"/>
                     </a:p>
                   </a:txBody>
                   <a:tcPr marL="88900" marR="88900" marT="50800" marB="50800" anchor="ctr">
@@ -5399,25 +6101,72 @@
                         <a:buNone/>
                       </a:pPr>
                       <a:r>
-                        <a:rPr lang="en-US" sz="1350" dirty="0">
+                        <a:rPr lang="en-US" sz="1275" dirty="0">
                           <a:solidFill>
                             <a:schemeClr val="tx1"/>
                           </a:solidFill>
                         </a:rPr>
-                        <a:t>+ firmware v1.0 </a:t>
+                        <a:t>+ firmware v1.0</a:t>
                       </a:r>
+                      <a:endParaRPr lang="en-US" sz="1275" dirty="0"/>
+                    </a:p>
+                  </a:txBody>
+                  <a:tcPr marL="88900" marR="88900" marT="50800" marB="50800" anchor="ctr">
+                    <a:lnL w="9525" cap="flat" cmpd="sng" algn="ctr">
+                      <a:solidFill>
+                        <a:srgbClr val="C9D1DA"/>
+                      </a:solidFill>
+                      <a:prstDash val="solid"/>
+                      <a:round/>
+                      <a:headEnd type="none" w="med" len="med"/>
+                      <a:tailEnd type="none" w="med" len="med"/>
+                    </a:lnL>
+                    <a:lnR w="9525" cap="flat" cmpd="sng" algn="ctr">
+                      <a:solidFill>
+                        <a:srgbClr val="C9D1DA"/>
+                      </a:solidFill>
+                      <a:prstDash val="solid"/>
+                      <a:round/>
+                      <a:headEnd type="none" w="med" len="med"/>
+                      <a:tailEnd type="none" w="med" len="med"/>
+                    </a:lnR>
+                    <a:lnT w="9525" cap="flat" cmpd="sng" algn="ctr">
+                      <a:solidFill>
+                        <a:srgbClr val="C9D1DA"/>
+                      </a:solidFill>
+                      <a:prstDash val="solid"/>
+                      <a:round/>
+                      <a:headEnd type="none" w="med" len="med"/>
+                      <a:tailEnd type="none" w="med" len="med"/>
+                    </a:lnT>
+                    <a:lnB w="9525" cap="flat" cmpd="sng" algn="ctr">
+                      <a:solidFill>
+                        <a:srgbClr val="C9D1DA"/>
+                      </a:solidFill>
+                      <a:prstDash val="solid"/>
+                      <a:round/>
+                      <a:headEnd type="none" w="med" len="med"/>
+                      <a:tailEnd type="none" w="med" len="med"/>
+                    </a:lnB>
+                  </a:tcPr>
+                </a:tc>
+                <a:tc>
+                  <a:txBody>
+                    <a:bodyPr/>
+                    <a:lstStyle/>
+                    <a:p>
                       <a:pPr indent="0" marL="0">
                         <a:buNone/>
                       </a:pPr>
                       <a:r>
-                        <a:rPr lang="en-US" sz="1350" b="1" dirty="0">
+                        <a:rPr lang="en-US" sz="1050" b="1" dirty="0">
                           <a:solidFill>
                             <a:schemeClr val="accent3"/>
                           </a:solidFill>
                         </a:rPr>
-                        <a:t>↑</a:t>
+                        <a:t>ADIANTADO</a:t>
                       </a:r>
-                      <a:endParaRPr lang="en-US" sz="1350" dirty="0"/>
+                      <a:endParaRPr lang="en-US" sz="1050" dirty="0"/>
                     </a:p>
                   </a:txBody>
                   <a:tcPr marL="88900" marR="88900" marT="50800" marB="50800" anchor="ctr">
@@ -5470,14 +6219,14 @@
                         <a:buNone/>
                       </a:pPr>
                       <a:r>
-                        <a:rPr lang="en-US" sz="1350" dirty="0">
+                        <a:rPr lang="en-US" sz="1275" dirty="0">
                           <a:solidFill>
                             <a:schemeClr val="tx1"/>
                           </a:solidFill>
                         </a:rPr>
                         <a:t>02/10</a:t>
                       </a:r>
-                      <a:endParaRPr lang="en-US" sz="1350" dirty="0"/>
+                      <a:endParaRPr lang="en-US" sz="1275" dirty="0"/>
                     </a:p>
                   </a:txBody>
                   <a:tcPr marL="88900" marR="88900" marT="50800" marB="50800" anchor="ctr">
@@ -5528,14 +6277,14 @@
                         <a:buNone/>
                       </a:pPr>
                       <a:r>
-                        <a:rPr lang="en-US" sz="1350" dirty="0">
+                        <a:rPr lang="en-US" sz="1275" dirty="0">
                           <a:solidFill>
                             <a:schemeClr val="tx1"/>
                           </a:solidFill>
                         </a:rPr>
                         <a:t>Arquitetura</a:t>
                       </a:r>
-                      <a:endParaRPr lang="en-US" sz="1350" dirty="0"/>
+                      <a:endParaRPr lang="en-US" sz="1275" dirty="0"/>
                     </a:p>
                   </a:txBody>
                   <a:tcPr marL="88900" marR="88900" marT="50800" marB="50800" anchor="ctr">
@@ -5586,25 +6335,72 @@
                         <a:buNone/>
                       </a:pPr>
                       <a:r>
-                        <a:rPr lang="en-US" sz="1350" dirty="0">
+                        <a:rPr lang="en-US" sz="1275" dirty="0">
                           <a:solidFill>
                             <a:schemeClr val="tx1"/>
                           </a:solidFill>
                         </a:rPr>
-                        <a:t>+ MVP com Telegram na placa </a:t>
+                        <a:t>+ MVP com Telegram na placa</a:t>
                       </a:r>
+                      <a:endParaRPr lang="en-US" sz="1275" dirty="0"/>
+                    </a:p>
+                  </a:txBody>
+                  <a:tcPr marL="88900" marR="88900" marT="50800" marB="50800" anchor="ctr">
+                    <a:lnL w="9525" cap="flat" cmpd="sng" algn="ctr">
+                      <a:solidFill>
+                        <a:srgbClr val="C9D1DA"/>
+                      </a:solidFill>
+                      <a:prstDash val="solid"/>
+                      <a:round/>
+                      <a:headEnd type="none" w="med" len="med"/>
+                      <a:tailEnd type="none" w="med" len="med"/>
+                    </a:lnL>
+                    <a:lnR w="9525" cap="flat" cmpd="sng" algn="ctr">
+                      <a:solidFill>
+                        <a:srgbClr val="C9D1DA"/>
+                      </a:solidFill>
+                      <a:prstDash val="solid"/>
+                      <a:round/>
+                      <a:headEnd type="none" w="med" len="med"/>
+                      <a:tailEnd type="none" w="med" len="med"/>
+                    </a:lnR>
+                    <a:lnT w="9525" cap="flat" cmpd="sng" algn="ctr">
+                      <a:solidFill>
+                        <a:srgbClr val="C9D1DA"/>
+                      </a:solidFill>
+                      <a:prstDash val="solid"/>
+                      <a:round/>
+                      <a:headEnd type="none" w="med" len="med"/>
+                      <a:tailEnd type="none" w="med" len="med"/>
+                    </a:lnT>
+                    <a:lnB w="9525" cap="flat" cmpd="sng" algn="ctr">
+                      <a:solidFill>
+                        <a:srgbClr val="C9D1DA"/>
+                      </a:solidFill>
+                      <a:prstDash val="solid"/>
+                      <a:round/>
+                      <a:headEnd type="none" w="med" len="med"/>
+                      <a:tailEnd type="none" w="med" len="med"/>
+                    </a:lnB>
+                  </a:tcPr>
+                </a:tc>
+                <a:tc>
+                  <a:txBody>
+                    <a:bodyPr/>
+                    <a:lstStyle/>
+                    <a:p>
                       <a:pPr indent="0" marL="0">
                         <a:buNone/>
                       </a:pPr>
                       <a:r>
-                        <a:rPr lang="en-US" sz="1350" b="1" dirty="0">
+                        <a:rPr lang="en-US" sz="1050" b="1" dirty="0">
                           <a:solidFill>
                             <a:schemeClr val="accent3"/>
                           </a:solidFill>
                         </a:rPr>
-                        <a:t>↑</a:t>
+                        <a:t>ADIANTADO</a:t>
                       </a:r>
-                      <a:endParaRPr lang="en-US" sz="1350" dirty="0"/>
+                      <a:endParaRPr lang="en-US" sz="1050" dirty="0"/>
                     </a:p>
                   </a:txBody>
                   <a:tcPr marL="88900" marR="88900" marT="50800" marB="50800" anchor="ctr">
@@ -5657,14 +6453,14 @@
                         <a:buNone/>
                       </a:pPr>
                       <a:r>
-                        <a:rPr lang="en-US" sz="1350" dirty="0">
+                        <a:rPr lang="en-US" sz="1275" dirty="0">
                           <a:solidFill>
                             <a:schemeClr val="tx1"/>
                           </a:solidFill>
                         </a:rPr>
                         <a:t>09/10</a:t>
                       </a:r>
-                      <a:endParaRPr lang="en-US" sz="1350" dirty="0"/>
+                      <a:endParaRPr lang="en-US" sz="1275" dirty="0"/>
                     </a:p>
                   </a:txBody>
                   <a:tcPr marL="88900" marR="88900" marT="50800" marB="50800" anchor="ctr">
@@ -5715,14 +6511,14 @@
                         <a:buNone/>
                       </a:pPr>
                       <a:r>
-                        <a:rPr lang="en-US" sz="1350" dirty="0">
+                        <a:rPr lang="en-US" sz="1275" dirty="0">
                           <a:solidFill>
                             <a:schemeClr val="tx1"/>
                           </a:solidFill>
                         </a:rPr>
                         <a:t>Firmware inicial</a:t>
                       </a:r>
-                      <a:endParaRPr lang="en-US" sz="1350" dirty="0"/>
+                      <a:endParaRPr lang="en-US" sz="1275" dirty="0"/>
                     </a:p>
                   </a:txBody>
                   <a:tcPr marL="88900" marR="88900" marT="50800" marB="50800" anchor="ctr">
@@ -5773,25 +6569,72 @@
                         <a:buNone/>
                       </a:pPr>
                       <a:r>
-                        <a:rPr lang="en-US" sz="1350" dirty="0">
+                        <a:rPr lang="en-US" sz="1275" dirty="0">
                           <a:solidFill>
                             <a:schemeClr val="tx1"/>
                           </a:solidFill>
                         </a:rPr>
-                        <a:t>Calibração, visão revista, macOS </a:t>
+                        <a:t>Calibração, visão revista, macOS</a:t>
                       </a:r>
+                      <a:endParaRPr lang="en-US" sz="1275" dirty="0"/>
+                    </a:p>
+                  </a:txBody>
+                  <a:tcPr marL="88900" marR="88900" marT="50800" marB="50800" anchor="ctr">
+                    <a:lnL w="9525" cap="flat" cmpd="sng" algn="ctr">
+                      <a:solidFill>
+                        <a:srgbClr val="C9D1DA"/>
+                      </a:solidFill>
+                      <a:prstDash val="solid"/>
+                      <a:round/>
+                      <a:headEnd type="none" w="med" len="med"/>
+                      <a:tailEnd type="none" w="med" len="med"/>
+                    </a:lnL>
+                    <a:lnR w="9525" cap="flat" cmpd="sng" algn="ctr">
+                      <a:solidFill>
+                        <a:srgbClr val="C9D1DA"/>
+                      </a:solidFill>
+                      <a:prstDash val="solid"/>
+                      <a:round/>
+                      <a:headEnd type="none" w="med" len="med"/>
+                      <a:tailEnd type="none" w="med" len="med"/>
+                    </a:lnR>
+                    <a:lnT w="9525" cap="flat" cmpd="sng" algn="ctr">
+                      <a:solidFill>
+                        <a:srgbClr val="C9D1DA"/>
+                      </a:solidFill>
+                      <a:prstDash val="solid"/>
+                      <a:round/>
+                      <a:headEnd type="none" w="med" len="med"/>
+                      <a:tailEnd type="none" w="med" len="med"/>
+                    </a:lnT>
+                    <a:lnB w="9525" cap="flat" cmpd="sng" algn="ctr">
+                      <a:solidFill>
+                        <a:srgbClr val="C9D1DA"/>
+                      </a:solidFill>
+                      <a:prstDash val="solid"/>
+                      <a:round/>
+                      <a:headEnd type="none" w="med" len="med"/>
+                      <a:tailEnd type="none" w="med" len="med"/>
+                    </a:lnB>
+                  </a:tcPr>
+                </a:tc>
+                <a:tc>
+                  <a:txBody>
+                    <a:bodyPr/>
+                    <a:lstStyle/>
+                    <a:p>
                       <a:pPr indent="0" marL="0">
                         <a:buNone/>
                       </a:pPr>
                       <a:r>
-                        <a:rPr lang="en-US" sz="1350" b="1" dirty="0">
+                        <a:rPr lang="en-US" sz="1050" b="1" dirty="0">
                           <a:solidFill>
                             <a:schemeClr val="accent3"/>
                           </a:solidFill>
                         </a:rPr>
-                        <a:t>↑</a:t>
+                        <a:t>ADIANTADO</a:t>
                       </a:r>
-                      <a:endParaRPr lang="en-US" sz="1350" dirty="0"/>
+                      <a:endParaRPr lang="en-US" sz="1050" dirty="0"/>
                     </a:p>
                   </a:txBody>
                   <a:tcPr marL="88900" marR="88900" marT="50800" marB="50800" anchor="ctr">
@@ -5844,14 +6687,14 @@
                         <a:buNone/>
                       </a:pPr>
                       <a:r>
-                        <a:rPr lang="en-US" sz="1350" dirty="0">
+                        <a:rPr lang="en-US" sz="1275" dirty="0">
                           <a:solidFill>
                             <a:schemeClr val="tx1"/>
                           </a:solidFill>
                         </a:rPr>
                         <a:t>30/10</a:t>
                       </a:r>
-                      <a:endParaRPr lang="en-US" sz="1350" dirty="0"/>
+                      <a:endParaRPr lang="en-US" sz="1275" dirty="0"/>
                     </a:p>
                   </a:txBody>
                   <a:tcPr marL="88900" marR="88900" marT="50800" marB="50800" anchor="ctr">
@@ -5902,14 +6745,14 @@
                         <a:buNone/>
                       </a:pPr>
                       <a:r>
-                        <a:rPr lang="en-US" sz="1350" dirty="0">
+                        <a:rPr lang="en-US" sz="1275" dirty="0">
                           <a:solidFill>
                             <a:schemeClr val="tx1"/>
                           </a:solidFill>
                         </a:rPr>
                         <a:t>Fluxo completo</a:t>
                       </a:r>
-                      <a:endParaRPr lang="en-US" sz="1350" dirty="0"/>
+                      <a:endParaRPr lang="en-US" sz="1275" dirty="0"/>
                     </a:p>
                   </a:txBody>
                   <a:tcPr marL="88900" marR="88900" marT="50800" marB="50800" anchor="ctr">
@@ -5960,25 +6803,72 @@
                         <a:buNone/>
                       </a:pPr>
                       <a:r>
-                        <a:rPr lang="en-US" sz="1350" dirty="0">
+                        <a:rPr lang="en-US" sz="1275" dirty="0">
                           <a:solidFill>
                             <a:schemeClr val="tx1"/>
                           </a:solidFill>
                         </a:rPr>
-                        <a:t>Já pronto </a:t>
+                        <a:t>Já pronto</a:t>
                       </a:r>
+                      <a:endParaRPr lang="en-US" sz="1275" dirty="0"/>
+                    </a:p>
+                  </a:txBody>
+                  <a:tcPr marL="88900" marR="88900" marT="50800" marB="50800" anchor="ctr">
+                    <a:lnL w="9525" cap="flat" cmpd="sng" algn="ctr">
+                      <a:solidFill>
+                        <a:srgbClr val="C9D1DA"/>
+                      </a:solidFill>
+                      <a:prstDash val="solid"/>
+                      <a:round/>
+                      <a:headEnd type="none" w="med" len="med"/>
+                      <a:tailEnd type="none" w="med" len="med"/>
+                    </a:lnL>
+                    <a:lnR w="9525" cap="flat" cmpd="sng" algn="ctr">
+                      <a:solidFill>
+                        <a:srgbClr val="C9D1DA"/>
+                      </a:solidFill>
+                      <a:prstDash val="solid"/>
+                      <a:round/>
+                      <a:headEnd type="none" w="med" len="med"/>
+                      <a:tailEnd type="none" w="med" len="med"/>
+                    </a:lnR>
+                    <a:lnT w="9525" cap="flat" cmpd="sng" algn="ctr">
+                      <a:solidFill>
+                        <a:srgbClr val="C9D1DA"/>
+                      </a:solidFill>
+                      <a:prstDash val="solid"/>
+                      <a:round/>
+                      <a:headEnd type="none" w="med" len="med"/>
+                      <a:tailEnd type="none" w="med" len="med"/>
+                    </a:lnT>
+                    <a:lnB w="9525" cap="flat" cmpd="sng" algn="ctr">
+                      <a:solidFill>
+                        <a:srgbClr val="C9D1DA"/>
+                      </a:solidFill>
+                      <a:prstDash val="solid"/>
+                      <a:round/>
+                      <a:headEnd type="none" w="med" len="med"/>
+                      <a:tailEnd type="none" w="med" len="med"/>
+                    </a:lnB>
+                  </a:tcPr>
+                </a:tc>
+                <a:tc>
+                  <a:txBody>
+                    <a:bodyPr/>
+                    <a:lstStyle/>
+                    <a:p>
                       <a:pPr indent="0" marL="0">
                         <a:buNone/>
                       </a:pPr>
                       <a:r>
-                        <a:rPr lang="en-US" sz="1350" b="1" dirty="0">
+                        <a:rPr lang="en-US" sz="1050" b="1" dirty="0">
                           <a:solidFill>
                             <a:schemeClr val="accent3"/>
                           </a:solidFill>
                         </a:rPr>
-                        <a:t>✓</a:t>
+                        <a:t>ANTECIPADO</a:t>
                       </a:r>
-                      <a:endParaRPr lang="en-US" sz="1350" dirty="0"/>
+                      <a:endParaRPr lang="en-US" sz="1050" dirty="0"/>
                     </a:p>
                   </a:txBody>
                   <a:tcPr marL="88900" marR="88900" marT="50800" marB="50800" anchor="ctr">
@@ -6031,14 +6921,14 @@
                         <a:buNone/>
                       </a:pPr>
                       <a:r>
-                        <a:rPr lang="en-US" sz="1350" dirty="0">
+                        <a:rPr lang="en-US" sz="1275" dirty="0">
                           <a:solidFill>
                             <a:schemeClr val="tx1"/>
                           </a:solidFill>
                         </a:rPr>
                         <a:t>13–27/11</a:t>
                       </a:r>
-                      <a:endParaRPr lang="en-US" sz="1350" dirty="0"/>
+                      <a:endParaRPr lang="en-US" sz="1275" dirty="0"/>
                     </a:p>
                   </a:txBody>
                   <a:tcPr marL="88900" marR="88900" marT="50800" marB="50800" anchor="ctr">
@@ -6089,14 +6979,14 @@
                         <a:buNone/>
                       </a:pPr>
                       <a:r>
-                        <a:rPr lang="en-US" sz="1350" dirty="0">
+                        <a:rPr lang="en-US" sz="1275" dirty="0">
                           <a:solidFill>
                             <a:schemeClr val="tx1"/>
                           </a:solidFill>
                         </a:rPr>
                         <a:t>Ensaios</a:t>
                       </a:r>
-                      <a:endParaRPr lang="en-US" sz="1350" dirty="0"/>
+                      <a:endParaRPr lang="en-US" sz="1275" dirty="0"/>
                     </a:p>
                   </a:txBody>
                   <a:tcPr marL="88900" marR="88900" marT="50800" marB="50800" anchor="ctr">
@@ -6147,25 +7037,72 @@
                         <a:buNone/>
                       </a:pPr>
                       <a:r>
-                        <a:rPr lang="en-US" sz="1350" dirty="0">
+                        <a:rPr lang="en-US" sz="1275" dirty="0">
                           <a:solidFill>
                             <a:schemeClr val="tx1"/>
                           </a:solidFill>
                         </a:rPr>
-                        <a:t>A executar </a:t>
+                        <a:t>A executar</a:t>
                       </a:r>
+                      <a:endParaRPr lang="en-US" sz="1275" dirty="0"/>
+                    </a:p>
+                  </a:txBody>
+                  <a:tcPr marL="88900" marR="88900" marT="50800" marB="50800" anchor="ctr">
+                    <a:lnL w="9525" cap="flat" cmpd="sng" algn="ctr">
+                      <a:solidFill>
+                        <a:srgbClr val="C9D1DA"/>
+                      </a:solidFill>
+                      <a:prstDash val="solid"/>
+                      <a:round/>
+                      <a:headEnd type="none" w="med" len="med"/>
+                      <a:tailEnd type="none" w="med" len="med"/>
+                    </a:lnL>
+                    <a:lnR w="9525" cap="flat" cmpd="sng" algn="ctr">
+                      <a:solidFill>
+                        <a:srgbClr val="C9D1DA"/>
+                      </a:solidFill>
+                      <a:prstDash val="solid"/>
+                      <a:round/>
+                      <a:headEnd type="none" w="med" len="med"/>
+                      <a:tailEnd type="none" w="med" len="med"/>
+                    </a:lnR>
+                    <a:lnT w="9525" cap="flat" cmpd="sng" algn="ctr">
+                      <a:solidFill>
+                        <a:srgbClr val="C9D1DA"/>
+                      </a:solidFill>
+                      <a:prstDash val="solid"/>
+                      <a:round/>
+                      <a:headEnd type="none" w="med" len="med"/>
+                      <a:tailEnd type="none" w="med" len="med"/>
+                    </a:lnT>
+                    <a:lnB w="9525" cap="flat" cmpd="sng" algn="ctr">
+                      <a:solidFill>
+                        <a:srgbClr val="C9D1DA"/>
+                      </a:solidFill>
+                      <a:prstDash val="solid"/>
+                      <a:round/>
+                      <a:headEnd type="none" w="med" len="med"/>
+                      <a:tailEnd type="none" w="med" len="med"/>
+                    </a:lnB>
+                  </a:tcPr>
+                </a:tc>
+                <a:tc>
+                  <a:txBody>
+                    <a:bodyPr/>
+                    <a:lstStyle/>
+                    <a:p>
                       <a:pPr indent="0" marL="0">
                         <a:buNone/>
                       </a:pPr>
                       <a:r>
-                        <a:rPr lang="en-US" sz="1350" b="1" dirty="0">
+                        <a:rPr lang="en-US" sz="1050" b="1" dirty="0">
                           <a:solidFill>
                             <a:schemeClr val="accent6"/>
                           </a:solidFill>
                         </a:rPr>
-                        <a:t>→</a:t>
+                        <a:t>PREVISTO</a:t>
                       </a:r>
-                      <a:endParaRPr lang="en-US" sz="1350" dirty="0"/>
+                      <a:endParaRPr lang="en-US" sz="1050" dirty="0"/>
                     </a:p>
                   </a:txBody>
                   <a:tcPr marL="88900" marR="88900" marT="50800" marB="50800" anchor="ctr">
@@ -6218,14 +7155,14 @@
                         <a:buNone/>
                       </a:pPr>
                       <a:r>
-                        <a:rPr lang="en-US" sz="1350" dirty="0">
+                        <a:rPr lang="en-US" sz="1275" dirty="0">
                           <a:solidFill>
                             <a:schemeClr val="tx1"/>
                           </a:solidFill>
                         </a:rPr>
                         <a:t>11/12</a:t>
                       </a:r>
-                      <a:endParaRPr lang="en-US" sz="1350" dirty="0"/>
+                      <a:endParaRPr lang="en-US" sz="1275" dirty="0"/>
                     </a:p>
                   </a:txBody>
                   <a:tcPr marL="88900" marR="88900" marT="50800" marB="50800" anchor="ctr">
@@ -6276,14 +7213,14 @@
                         <a:buNone/>
                       </a:pPr>
                       <a:r>
-                        <a:rPr lang="en-US" sz="1350" dirty="0">
+                        <a:rPr lang="en-US" sz="1275" dirty="0">
                           <a:solidFill>
                             <a:schemeClr val="tx1"/>
                           </a:solidFill>
                         </a:rPr>
                         <a:t>P2</a:t>
                       </a:r>
-                      <a:endParaRPr lang="en-US" sz="1350" dirty="0"/>
+                      <a:endParaRPr lang="en-US" sz="1275" dirty="0"/>
                     </a:p>
                   </a:txBody>
                   <a:tcPr marL="88900" marR="88900" marT="50800" marB="50800" anchor="ctr">
@@ -6334,25 +7271,72 @@
                         <a:buNone/>
                       </a:pPr>
                       <a:r>
-                        <a:rPr lang="en-US" sz="1350" dirty="0">
+                        <a:rPr lang="en-US" sz="1275" dirty="0">
                           <a:solidFill>
                             <a:schemeClr val="tx1"/>
                           </a:solidFill>
                         </a:rPr>
-                        <a:t>A executar </a:t>
+                        <a:t>A executar</a:t>
                       </a:r>
+                      <a:endParaRPr lang="en-US" sz="1275" dirty="0"/>
+                    </a:p>
+                  </a:txBody>
+                  <a:tcPr marL="88900" marR="88900" marT="50800" marB="50800" anchor="ctr">
+                    <a:lnL w="9525" cap="flat" cmpd="sng" algn="ctr">
+                      <a:solidFill>
+                        <a:srgbClr val="C9D1DA"/>
+                      </a:solidFill>
+                      <a:prstDash val="solid"/>
+                      <a:round/>
+                      <a:headEnd type="none" w="med" len="med"/>
+                      <a:tailEnd type="none" w="med" len="med"/>
+                    </a:lnL>
+                    <a:lnR w="9525" cap="flat" cmpd="sng" algn="ctr">
+                      <a:solidFill>
+                        <a:srgbClr val="C9D1DA"/>
+                      </a:solidFill>
+                      <a:prstDash val="solid"/>
+                      <a:round/>
+                      <a:headEnd type="none" w="med" len="med"/>
+                      <a:tailEnd type="none" w="med" len="med"/>
+                    </a:lnR>
+                    <a:lnT w="9525" cap="flat" cmpd="sng" algn="ctr">
+                      <a:solidFill>
+                        <a:srgbClr val="C9D1DA"/>
+                      </a:solidFill>
+                      <a:prstDash val="solid"/>
+                      <a:round/>
+                      <a:headEnd type="none" w="med" len="med"/>
+                      <a:tailEnd type="none" w="med" len="med"/>
+                    </a:lnT>
+                    <a:lnB w="9525" cap="flat" cmpd="sng" algn="ctr">
+                      <a:solidFill>
+                        <a:srgbClr val="C9D1DA"/>
+                      </a:solidFill>
+                      <a:prstDash val="solid"/>
+                      <a:round/>
+                      <a:headEnd type="none" w="med" len="med"/>
+                      <a:tailEnd type="none" w="med" len="med"/>
+                    </a:lnB>
+                  </a:tcPr>
+                </a:tc>
+                <a:tc>
+                  <a:txBody>
+                    <a:bodyPr/>
+                    <a:lstStyle/>
+                    <a:p>
                       <a:pPr indent="0" marL="0">
                         <a:buNone/>
                       </a:pPr>
                       <a:r>
-                        <a:rPr lang="en-US" sz="1350" b="1" dirty="0">
+                        <a:rPr lang="en-US" sz="1050" b="1" dirty="0">
                           <a:solidFill>
                             <a:schemeClr val="accent6"/>
                           </a:solidFill>
                         </a:rPr>
-                        <a:t>→</a:t>
+                        <a:t>PREVISTO</a:t>
                       </a:r>
-                      <a:endParaRPr lang="en-US" sz="1350" dirty="0"/>
+                      <a:endParaRPr lang="en-US" sz="1050" dirty="0"/>
                     </a:p>
                   </a:txBody>
                   <a:tcPr marL="88900" marR="88900" marT="50800" marB="50800" anchor="ctr">
@@ -6408,17 +7392,17 @@
         <p:spPr>
           <a:xfrm>
             <a:off x="6286500" y="1485900"/>
-            <a:ext cx="5219700" cy="2514600"/>
+            <a:ext cx="5219700" cy="2247900"/>
           </a:xfrm>
           <a:prstGeom prst="roundRect">
             <a:avLst>
-              <a:gd name="adj" fmla="val 4545"/>
+              <a:gd name="adj" fmla="val 1695"/>
             </a:avLst>
           </a:prstGeom>
           <a:solidFill>
             <a:schemeClr val="bg2"/>
           </a:solidFill>
-          <a:ln w="19050">
+          <a:ln w="15875">
             <a:solidFill>
               <a:schemeClr val="accent1"/>
             </a:solidFill>
@@ -6435,7 +7419,7 @@
               <a:buNone/>
             </a:pPr>
             <a:r>
-              <a:rPr lang="en-US" sz="1725" b="1" dirty="0">
+              <a:rPr lang="en-US" sz="1650" b="1" dirty="0">
                 <a:solidFill>
                   <a:schemeClr val="accent1"/>
                 </a:solidFill>
@@ -6482,7 +7466,7 @@
                   <a:schemeClr val="tx1"/>
                 </a:solidFill>
               </a:rPr>
-              <a:t>Testar vários comprimidos e posições na placa</a:t>
+              <a:t>Leituras com vários comprimidos e posições</a:t>
             </a:r>
             <a:endParaRPr lang="en-US" sz="1425" dirty="0"/>
           </a:p>
@@ -6503,7 +7487,7 @@
                   <a:schemeClr val="tx1"/>
                 </a:solidFill>
               </a:rPr>
-              <a:t>Acurácia: 30 + 30 leituras, 10 oclusões</a:t>
+              <a:t>Acurácia: 30 + 30 leituras e 10 oclusões (RNF03)</a:t>
             </a:r>
             <a:endParaRPr lang="en-US" sz="1425" dirty="0"/>
           </a:p>
@@ -6524,7 +7508,7 @@
                   <a:schemeClr val="tx1"/>
                 </a:solidFill>
               </a:rPr>
-              <a:t>20 ciclos e 24 h só na fonte</a:t>
+              <a:t>20 ciclos e 24 h só na fonte (RNF06, RNF07)</a:t>
             </a:r>
             <a:endParaRPr lang="en-US" sz="1425" dirty="0"/>
           </a:p>
@@ -6579,7 +7563,7 @@
           <a:bodyPr lIns="0" tIns="0" rIns="0" bIns="0"/>
           <a:lstStyle>
             <a:lvl1pPr>
-              <a:defRPr sz="1125">
+              <a:defRPr sz="1050">
                 <a:solidFill>
                   <a:schemeClr val="tx2"/>
                 </a:solidFill>
@@ -6623,16 +7607,16 @@
       </p:grpSpPr>
       <p:sp>
         <p:nvSpPr>
-          <p:cNvPr id="2" name="Text 1"/>
+          <p:cNvPr id="2" name="Text 0"/>
           <p:cNvSpPr/>
           <p:nvPr>
-            <p:ph idx="101" type="body" hasCustomPrompt="1"/>
+            <p:ph idx="100" type="body" hasCustomPrompt="1"/>
           </p:nvPr>
         </p:nvSpPr>
         <p:spPr>
           <a:xfrm>
             <a:off x="685800" y="514350"/>
-            <a:ext cx="10820400" cy="228600"/>
+            <a:ext cx="10820400" cy="209550"/>
           </a:xfrm>
           <a:prstGeom prst="rect">
             <a:avLst/>
@@ -6648,29 +7632,29 @@
               <a:buNone/>
             </a:pPr>
             <a:r>
-              <a:rPr lang="en-US" sz="1350" b="1" spc="190" kern="0" dirty="0">
-                <a:solidFill>
-                  <a:schemeClr val="accent2"/>
+              <a:rPr lang="en-US" sz="1200" b="1" spc="150" kern="0" dirty="0">
+                <a:solidFill>
+                  <a:schemeClr val="tx2"/>
                 </a:solidFill>
               </a:rPr>
-              <a:t>PROBLEMA E PROPOSTA</a:t>
-            </a:r>
-            <a:endParaRPr lang="en-US" sz="1350" dirty="0"/>
+              <a:t>1 · INTRODUÇÃO</a:t>
+            </a:r>
+            <a:endParaRPr lang="en-US" sz="1200" dirty="0"/>
           </a:p>
         </p:txBody>
       </p:sp>
       <p:sp>
         <p:nvSpPr>
-          <p:cNvPr id="3" name="Text 1"/>
+          <p:cNvPr id="3" name="Text 0"/>
           <p:cNvSpPr/>
           <p:nvPr>
-            <p:ph idx="102" type="title" hasCustomPrompt="1"/>
+            <p:ph idx="101" type="title" hasCustomPrompt="1"/>
           </p:nvPr>
         </p:nvSpPr>
         <p:spPr>
           <a:xfrm>
             <a:off x="685800" y="762000"/>
-            <a:ext cx="10820400" cy="990600"/>
+            <a:ext cx="10820400" cy="495300"/>
           </a:xfrm>
           <a:prstGeom prst="rect">
             <a:avLst/>
@@ -6686,14 +7670,14 @@
               <a:buNone/>
             </a:pPr>
             <a:r>
-              <a:rPr lang="en-US" sz="3300" b="1" dirty="0">
+              <a:rPr lang="en-US" sz="3000" b="1" dirty="0">
                 <a:solidFill>
                   <a:schemeClr val="accent1"/>
                 </a:solidFill>
               </a:rPr>
-              <a:t>Esquecer a dose é comum. O cuidador nem sempre está perto.</a:t>
-            </a:r>
-            <a:endParaRPr lang="en-US" sz="3300" dirty="0"/>
+              <a:t>Motivação e proposta do sistema</a:t>
+            </a:r>
+            <a:endParaRPr lang="en-US" sz="3000" dirty="0"/>
           </a:p>
         </p:txBody>
       </p:sp>
@@ -6706,7 +7690,7 @@
         <p:spPr>
           <a:xfrm>
             <a:off x="685800" y="6477000"/>
-            <a:ext cx="2857500" cy="209550"/>
+            <a:ext cx="2476500" cy="209550"/>
           </a:xfrm>
           <a:prstGeom prst="rect">
             <a:avLst/>
@@ -6722,14 +7706,14 @@
               <a:buNone/>
             </a:pPr>
             <a:r>
-              <a:rPr lang="en-US" sz="1125" b="1" dirty="0">
-                <a:solidFill>
-                  <a:schemeClr val="accent2"/>
+              <a:rPr lang="en-US" sz="1050" b="1" dirty="0">
+                <a:solidFill>
+                  <a:schemeClr val="tx2"/>
                 </a:solidFill>
               </a:rPr>
               <a:t>Gabriel</a:t>
             </a:r>
-            <a:endParaRPr lang="en-US" sz="1125" dirty="0"/>
+            <a:endParaRPr lang="en-US" sz="1050" dirty="0"/>
           </a:p>
         </p:txBody>
       </p:sp>
@@ -6741,8 +7725,8 @@
         </p:nvSpPr>
         <p:spPr>
           <a:xfrm>
-            <a:off x="685800" y="1952625"/>
-            <a:ext cx="5219700" cy="2476500"/>
+            <a:off x="685800" y="1485900"/>
+            <a:ext cx="5219700" cy="2857500"/>
           </a:xfrm>
           <a:prstGeom prst="rect">
             <a:avLst/>
@@ -6765,12 +7749,12 @@
               <a:buChar char="•"/>
             </a:pPr>
             <a:r>
-              <a:rPr lang="en-US" sz="1800" dirty="0">
+              <a:rPr lang="en-US" sz="1700" dirty="0">
                 <a:solidFill>
                   <a:schemeClr val="tx1"/>
                 </a:solidFill>
               </a:rPr>
-              <a:t>Mais de </a:t>
+              <a:t>A não adesão ao tratamento medicamentoso é frequente: mais de </a:t>
             </a:r>
             <a:pPr indent="0" marL="0">
               <a:lnSpc>
@@ -6782,7 +7766,7 @@
               <a:buNone/>
             </a:pPr>
             <a:r>
-              <a:rPr lang="en-US" sz="1800" b="1" dirty="0">
+              <a:rPr lang="en-US" sz="1700" b="1" dirty="0">
                 <a:solidFill>
                   <a:schemeClr val="tx1"/>
                 </a:solidFill>
@@ -6799,14 +7783,14 @@
               <a:buNone/>
             </a:pPr>
             <a:r>
-              <a:rPr lang="en-US" sz="1800" dirty="0">
+              <a:rPr lang="en-US" sz="1700" dirty="0">
                 <a:solidFill>
                   <a:schemeClr val="tx1"/>
                 </a:solidFill>
               </a:rPr>
-              <a:t> dos pacientes crônicos e idosos não seguem o tratamento como prescrito.</a:t>
-            </a:r>
-            <a:endParaRPr lang="en-US" sz="1800" dirty="0"/>
+              <a:t> dos pacientes crônicos e idosos não seguem a prescrição.</a:t>
+            </a:r>
+            <a:endParaRPr lang="en-US" sz="1700" dirty="0"/>
           </a:p>
           <a:p>
             <a:pPr marL="266700" indent="-266700">
@@ -6820,14 +7804,14 @@
               <a:buChar char="•"/>
             </a:pPr>
             <a:r>
-              <a:rPr lang="en-US" sz="1800" dirty="0">
+              <a:rPr lang="en-US" sz="1700" dirty="0">
                 <a:solidFill>
                   <a:schemeClr val="tx1"/>
                 </a:solidFill>
               </a:rPr>
-              <a:t>Dispensadores automáticos são caros e trocam a caixa que o paciente já usa.</a:t>
-            </a:r>
-            <a:endParaRPr lang="en-US" sz="1800" dirty="0"/>
+              <a:t>Dispensadores automáticos têm custo elevado e substituem o porta-comprimidos que o paciente já usa.</a:t>
+            </a:r>
+            <a:endParaRPr lang="en-US" sz="1700" dirty="0"/>
           </a:p>
           <a:p>
             <a:pPr marL="266700" indent="-266700">
@@ -6841,12 +7825,12 @@
               <a:buChar char="•"/>
             </a:pPr>
             <a:r>
-              <a:rPr lang="en-US" sz="1800" b="1" dirty="0">
+              <a:rPr lang="en-US" sz="1700" b="1" dirty="0">
                 <a:solidFill>
                   <a:schemeClr val="tx1"/>
                 </a:solidFill>
               </a:rPr>
-              <a:t>Nossa proposta:</a:t>
+              <a:t>Proposta:</a:t>
             </a:r>
             <a:pPr indent="0" marL="0">
               <a:lnSpc>
@@ -6858,14 +7842,14 @@
               <a:buNone/>
             </a:pPr>
             <a:r>
-              <a:rPr lang="en-US" sz="1800" dirty="0">
+              <a:rPr lang="en-US" sz="1700" dirty="0">
                 <a:solidFill>
                   <a:schemeClr val="tx1"/>
                 </a:solidFill>
               </a:rPr>
-              <a:t> um observador passivo sobre um porta-comprimidos comum.</a:t>
-            </a:r>
-            <a:endParaRPr lang="en-US" sz="1800" dirty="0"/>
+              <a:t> dispositivo passivo que observa, por câmera, um porta-comprimidos comum.</a:t>
+            </a:r>
+            <a:endParaRPr lang="en-US" sz="1700" dirty="0"/>
           </a:p>
         </p:txBody>
       </p:sp>
@@ -6877,18 +7861,18 @@
         </p:nvSpPr>
         <p:spPr>
           <a:xfrm>
-            <a:off x="6286500" y="1952625"/>
-            <a:ext cx="5219700" cy="3048000"/>
+            <a:off x="6286500" y="1485900"/>
+            <a:ext cx="5219700" cy="2857500"/>
           </a:xfrm>
           <a:prstGeom prst="roundRect">
             <a:avLst>
-              <a:gd name="adj" fmla="val 3750"/>
+              <a:gd name="adj" fmla="val 1333"/>
             </a:avLst>
           </a:prstGeom>
           <a:solidFill>
             <a:schemeClr val="bg2"/>
           </a:solidFill>
-          <a:ln w="19050">
+          <a:ln w="15875">
             <a:solidFill>
               <a:schemeClr val="accent1"/>
             </a:solidFill>
@@ -6905,12 +7889,12 @@
               <a:buNone/>
             </a:pPr>
             <a:r>
-              <a:rPr lang="en-US" sz="1725" b="1" dirty="0">
+              <a:rPr lang="en-US" sz="1650" b="1" dirty="0">
                 <a:solidFill>
                   <a:schemeClr val="accent1"/>
                 </a:solidFill>
               </a:rPr>
-              <a:t>O que o protótipo faz</a:t>
+              <a:t>Funções do protótipo</a:t>
             </a:r>
             <a:endParaRPr lang="en-US" sz="1425" dirty="0"/>
           </a:p>
@@ -6931,7 +7915,7 @@
                   <a:schemeClr val="tx1"/>
                 </a:solidFill>
               </a:rPr>
-              <a:t>No horário, observa o compartimento com a câmera.</a:t>
+              <a:t>Captura imagens do compartimento no horário programado.</a:t>
             </a:r>
             <a:endParaRPr lang="en-US" sz="1425" dirty="0"/>
           </a:p>
@@ -6952,7 +7936,7 @@
                   <a:schemeClr val="tx1"/>
                 </a:solidFill>
               </a:rPr>
-              <a:t>Decide: </a:t>
+              <a:t>Classifica o ciclo como </a:t>
             </a:r>
             <a:pPr algn="l" indent="0" marL="0">
               <a:lnSpc>
@@ -7037,7 +8021,7 @@
                   <a:schemeClr val="tx1"/>
                 </a:solidFill>
               </a:rPr>
-              <a:t>não foi possível ver</a:t>
+              <a:t>inconclusivo</a:t>
             </a:r>
             <a:pPr algn="l" indent="0" marL="0">
               <a:lnSpc>
@@ -7075,7 +8059,7 @@
                   <a:schemeClr val="tx1"/>
                 </a:solidFill>
               </a:rPr>
-              <a:t>Avisa o cuidador no celular, com foto quando é preciso conferir.</a:t>
+              <a:t>Notifica o cuidador pelo Telegram, com foto quando é necessária conferência.</a:t>
             </a:r>
             <a:endParaRPr lang="en-US" sz="1425" dirty="0"/>
           </a:p>
@@ -7092,7 +8076,7 @@
                   <a:schemeClr val="tx2"/>
                 </a:solidFill>
               </a:rPr>
-              <a:t>Não identifica o remédio nem comprova a ingestão: verifica o compartimento.</a:t>
+              <a:t>Limitação de escopo: o sistema verifica o compartimento; não identifica o medicamento nem comprova a ingestão.</a:t>
             </a:r>
             <a:endParaRPr lang="en-US" sz="1425" dirty="0"/>
           </a:p>
@@ -7126,7 +8110,7 @@
           <a:bodyPr lIns="0" tIns="0" rIns="0" bIns="0"/>
           <a:lstStyle>
             <a:lvl1pPr>
-              <a:defRPr sz="1125">
+              <a:defRPr sz="1050">
                 <a:solidFill>
                   <a:schemeClr val="tx2"/>
                 </a:solidFill>
@@ -7170,16 +8154,16 @@
       </p:grpSpPr>
       <p:sp>
         <p:nvSpPr>
-          <p:cNvPr id="2" name="Text 1"/>
+          <p:cNvPr id="2" name="Text 0"/>
           <p:cNvSpPr/>
           <p:nvPr>
-            <p:ph idx="101" type="body" hasCustomPrompt="1"/>
+            <p:ph idx="100" type="body" hasCustomPrompt="1"/>
           </p:nvPr>
         </p:nvSpPr>
         <p:spPr>
           <a:xfrm>
             <a:off x="685800" y="514350"/>
-            <a:ext cx="10820400" cy="228600"/>
+            <a:ext cx="10820400" cy="209550"/>
           </a:xfrm>
           <a:prstGeom prst="rect">
             <a:avLst/>
@@ -7195,29 +8179,29 @@
               <a:buNone/>
             </a:pPr>
             <a:r>
-              <a:rPr lang="en-US" sz="1350" b="1" spc="190" kern="0" dirty="0">
-                <a:solidFill>
-                  <a:schemeClr val="accent2"/>
+              <a:rPr lang="en-US" sz="1200" b="1" spc="150" kern="0" dirty="0">
+                <a:solidFill>
+                  <a:schemeClr val="tx2"/>
                 </a:solidFill>
               </a:rPr>
-              <a:t>ESPIRAL EVOLUCIONÁRIA</a:t>
-            </a:r>
-            <a:endParaRPr lang="en-US" sz="1350" dirty="0"/>
+              <a:t>1 · INTRODUÇÃO</a:t>
+            </a:r>
+            <a:endParaRPr lang="en-US" sz="1200" dirty="0"/>
           </a:p>
         </p:txBody>
       </p:sp>
       <p:sp>
         <p:nvSpPr>
-          <p:cNvPr id="3" name="Text 1"/>
+          <p:cNvPr id="3" name="Text 0"/>
           <p:cNvSpPr/>
           <p:nvPr>
-            <p:ph idx="102" type="title" hasCustomPrompt="1"/>
+            <p:ph idx="101" type="title" hasCustomPrompt="1"/>
           </p:nvPr>
         </p:nvSpPr>
         <p:spPr>
           <a:xfrm>
             <a:off x="685800" y="762000"/>
-            <a:ext cx="10820400" cy="514350"/>
+            <a:ext cx="10820400" cy="495300"/>
           </a:xfrm>
           <a:prstGeom prst="rect">
             <a:avLst/>
@@ -7233,14 +8217,14 @@
               <a:buNone/>
             </a:pPr>
             <a:r>
-              <a:rPr lang="en-US" sz="3300" b="1" dirty="0">
+              <a:rPr lang="en-US" sz="3000" b="1" dirty="0">
                 <a:solidFill>
                   <a:schemeClr val="accent1"/>
                 </a:solidFill>
               </a:rPr>
-              <a:t>O escopo evoluiu a cada ciclo</a:t>
-            </a:r>
-            <a:endParaRPr lang="en-US" sz="3300" dirty="0"/>
+              <a:t>Evolução do escopo no modelo espiral</a:t>
+            </a:r>
+            <a:endParaRPr lang="en-US" sz="3000" dirty="0"/>
           </a:p>
         </p:txBody>
       </p:sp>
@@ -7253,7 +8237,7 @@
         <p:spPr>
           <a:xfrm>
             <a:off x="685800" y="6477000"/>
-            <a:ext cx="2857500" cy="209550"/>
+            <a:ext cx="2476500" cy="209550"/>
           </a:xfrm>
           <a:prstGeom prst="rect">
             <a:avLst/>
@@ -7269,14 +8253,14 @@
               <a:buNone/>
             </a:pPr>
             <a:r>
-              <a:rPr lang="en-US" sz="1125" b="1" dirty="0">
-                <a:solidFill>
-                  <a:schemeClr val="accent2"/>
+              <a:rPr lang="en-US" sz="1050" b="1" dirty="0">
+                <a:solidFill>
+                  <a:schemeClr val="tx2"/>
                 </a:solidFill>
               </a:rPr>
               <a:t>Gabriel</a:t>
             </a:r>
-            <a:endParaRPr lang="en-US" sz="1125" dirty="0"/>
+            <a:endParaRPr lang="en-US" sz="1050" dirty="0"/>
           </a:p>
         </p:txBody>
       </p:sp>
@@ -7317,6 +8301,14 @@
                       <a:pPr indent="0" marL="0">
                         <a:buNone/>
                       </a:pPr>
+                      <a:r>
+                        <a:rPr lang="en-US" sz="1425" b="1" dirty="0">
+                          <a:solidFill>
+                            <a:schemeClr val="tx1"/>
+                          </a:solidFill>
+                        </a:rPr>
+                        <a:t>Aspecto</a:t>
+                      </a:r>
                       <a:endParaRPr lang="en-US" sz="1425" dirty="0"/>
                     </a:p>
                   </a:txBody>
@@ -8962,7 +9954,7 @@
         </p:nvSpPr>
         <p:spPr>
           <a:xfrm>
-            <a:off x="685800" y="4152900"/>
+            <a:off x="685800" y="4191000"/>
             <a:ext cx="10820400" cy="666750"/>
           </a:xfrm>
           <a:prstGeom prst="rect">
@@ -8982,12 +9974,12 @@
               <a:buNone/>
             </a:pPr>
             <a:r>
-              <a:rPr lang="en-US" sz="1575" dirty="0">
+              <a:rPr lang="en-US" sz="1575" b="1" dirty="0">
                 <a:solidFill>
                   <a:schemeClr val="tx1"/>
                 </a:solidFill>
               </a:rPr>
-              <a:t>Motivos: sem dados rotulados para treinar uma CNN; a câmera integrada elimina o risco de compatibilidade; o cuidador precisa ser avisado </a:t>
+              <a:t>Justificativas:</a:t>
             </a:r>
             <a:pPr indent="0" marL="0">
               <a:lnSpc>
@@ -8996,12 +9988,12 @@
               <a:buNone/>
             </a:pPr>
             <a:r>
-              <a:rPr lang="en-US" sz="1575" b="1" dirty="0">
+              <a:rPr lang="en-US" sz="1575" dirty="0">
                 <a:solidFill>
                   <a:schemeClr val="tx1"/>
                 </a:solidFill>
               </a:rPr>
-              <a:t>à distância</a:t>
+              <a:t> ausência de conjunto de dados rotulado para treinar uma CNN; a câmera integrada elimina o risco de compatibilidade; requisito de notificação </a:t>
             </a:r>
             <a:pPr indent="0" marL="0">
               <a:lnSpc>
@@ -9010,12 +10002,26 @@
               <a:buNone/>
             </a:pPr>
             <a:r>
+              <a:rPr lang="en-US" sz="1575" b="1" dirty="0">
+                <a:solidFill>
+                  <a:schemeClr val="tx1"/>
+                </a:solidFill>
+              </a:rPr>
+              <a:t>remota</a:t>
+            </a:r>
+            <a:pPr indent="0" marL="0">
+              <a:lnSpc>
+                <a:spcPct val="112000"/>
+              </a:lnSpc>
+              <a:buNone/>
+            </a:pPr>
+            <a:r>
               <a:rPr lang="en-US" sz="1575" dirty="0">
                 <a:solidFill>
                   <a:schemeClr val="tx1"/>
                 </a:solidFill>
               </a:rPr>
-              <a:t>.</a:t>
+              <a:t> do cuidador.</a:t>
             </a:r>
             <a:endParaRPr lang="en-US" sz="1575" dirty="0"/>
           </a:p>
@@ -9049,7 +10055,7 @@
           <a:bodyPr lIns="0" tIns="0" rIns="0" bIns="0"/>
           <a:lstStyle>
             <a:lvl1pPr>
-              <a:defRPr sz="1125">
+              <a:defRPr sz="1050">
                 <a:solidFill>
                   <a:schemeClr val="tx2"/>
                 </a:solidFill>
@@ -9093,16 +10099,16 @@
       </p:grpSpPr>
       <p:sp>
         <p:nvSpPr>
-          <p:cNvPr id="2" name="Text 1"/>
+          <p:cNvPr id="2" name="Text 0"/>
           <p:cNvSpPr/>
           <p:nvPr>
-            <p:ph idx="101" type="body" hasCustomPrompt="1"/>
+            <p:ph idx="100" type="body" hasCustomPrompt="1"/>
           </p:nvPr>
         </p:nvSpPr>
         <p:spPr>
           <a:xfrm>
             <a:off x="685800" y="514350"/>
-            <a:ext cx="10820400" cy="228600"/>
+            <a:ext cx="10820400" cy="209550"/>
           </a:xfrm>
           <a:prstGeom prst="rect">
             <a:avLst/>
@@ -9118,29 +10124,29 @@
               <a:buNone/>
             </a:pPr>
             <a:r>
-              <a:rPr lang="en-US" sz="1350" b="1" spc="190" kern="0" dirty="0">
-                <a:solidFill>
-                  <a:schemeClr val="accent2"/>
+              <a:rPr lang="en-US" sz="1200" b="1" spc="150" kern="0" dirty="0">
+                <a:solidFill>
+                  <a:schemeClr val="tx2"/>
                 </a:solidFill>
               </a:rPr>
-              <a:t>HARDWARE</a:t>
-            </a:r>
-            <a:endParaRPr lang="en-US" sz="1350" dirty="0"/>
+              <a:t>2 · PROJETO</a:t>
+            </a:r>
+            <a:endParaRPr lang="en-US" sz="1200" dirty="0"/>
           </a:p>
         </p:txBody>
       </p:sp>
       <p:sp>
         <p:nvSpPr>
-          <p:cNvPr id="3" name="Text 1"/>
+          <p:cNvPr id="3" name="Text 0"/>
           <p:cNvSpPr/>
           <p:nvPr>
-            <p:ph idx="102" type="title" hasCustomPrompt="1"/>
+            <p:ph idx="101" type="title" hasCustomPrompt="1"/>
           </p:nvPr>
         </p:nvSpPr>
         <p:spPr>
           <a:xfrm>
             <a:off x="685800" y="762000"/>
-            <a:ext cx="10820400" cy="514350"/>
+            <a:ext cx="10820400" cy="495300"/>
           </a:xfrm>
           <a:prstGeom prst="rect">
             <a:avLst/>
@@ -9156,14 +10162,14 @@
               <a:buNone/>
             </a:pPr>
             <a:r>
-              <a:rPr lang="en-US" sz="3300" b="1" dirty="0">
+              <a:rPr lang="en-US" sz="3000" b="1" dirty="0">
                 <a:solidFill>
                   <a:schemeClr val="accent1"/>
                 </a:solidFill>
               </a:rPr>
-              <a:t>Uma placa comercial, sem eletrônica extra</a:t>
-            </a:r>
-            <a:endParaRPr lang="en-US" sz="3300" dirty="0"/>
+              <a:t>Arquitetura de hardware</a:t>
+            </a:r>
+            <a:endParaRPr lang="en-US" sz="3000" dirty="0"/>
           </a:p>
         </p:txBody>
       </p:sp>
@@ -9176,7 +10182,7 @@
         <p:spPr>
           <a:xfrm>
             <a:off x="685800" y="6477000"/>
-            <a:ext cx="2857500" cy="209550"/>
+            <a:ext cx="2476500" cy="209550"/>
           </a:xfrm>
           <a:prstGeom prst="rect">
             <a:avLst/>
@@ -9192,14 +10198,14 @@
               <a:buNone/>
             </a:pPr>
             <a:r>
-              <a:rPr lang="en-US" sz="1125" b="1" dirty="0">
-                <a:solidFill>
-                  <a:schemeClr val="accent2"/>
+              <a:rPr lang="en-US" sz="1050" b="1" dirty="0">
+                <a:solidFill>
+                  <a:schemeClr val="tx2"/>
                 </a:solidFill>
               </a:rPr>
               <a:t>Gabriel</a:t>
             </a:r>
-            <a:endParaRPr lang="en-US" sz="1125" dirty="0"/>
+            <a:endParaRPr lang="en-US" sz="1050" dirty="0"/>
           </a:p>
         </p:txBody>
       </p:sp>
@@ -9211,18 +10217,18 @@
         </p:nvSpPr>
         <p:spPr>
           <a:xfrm>
-            <a:off x="685800" y="1581150"/>
+            <a:off x="685800" y="1524000"/>
             <a:ext cx="2085975" cy="1000125"/>
           </a:xfrm>
           <a:prstGeom prst="roundRect">
             <a:avLst>
-              <a:gd name="adj" fmla="val 9524"/>
+              <a:gd name="adj" fmla="val 3810"/>
             </a:avLst>
           </a:prstGeom>
           <a:solidFill>
             <a:schemeClr val="bg1"/>
           </a:solidFill>
-          <a:ln w="19050">
+          <a:ln w="15875">
             <a:solidFill>
               <a:schemeClr val="accent1"/>
             </a:solidFill>
@@ -9269,7 +10275,7 @@
         </p:nvSpPr>
         <p:spPr>
           <a:xfrm>
-            <a:off x="2771775" y="1581150"/>
+            <a:off x="2771775" y="1524000"/>
             <a:ext cx="457200" cy="1000125"/>
           </a:xfrm>
           <a:prstGeom prst="rect">
@@ -9305,18 +10311,18 @@
         </p:nvSpPr>
         <p:spPr>
           <a:xfrm>
-            <a:off x="3228975" y="1581150"/>
+            <a:off x="3228975" y="1524000"/>
             <a:ext cx="2076450" cy="1000125"/>
           </a:xfrm>
           <a:prstGeom prst="roundRect">
             <a:avLst>
-              <a:gd name="adj" fmla="val 9524"/>
+              <a:gd name="adj" fmla="val 3810"/>
             </a:avLst>
           </a:prstGeom>
           <a:solidFill>
             <a:schemeClr val="bg1"/>
           </a:solidFill>
-          <a:ln w="19050">
+          <a:ln w="15875">
             <a:solidFill>
               <a:schemeClr val="accent1"/>
             </a:solidFill>
@@ -9377,7 +10383,7 @@
         </p:nvSpPr>
         <p:spPr>
           <a:xfrm>
-            <a:off x="5305425" y="1581150"/>
+            <a:off x="5305425" y="1524000"/>
             <a:ext cx="447675" cy="1000125"/>
           </a:xfrm>
           <a:prstGeom prst="rect">
@@ -9413,18 +10419,18 @@
         </p:nvSpPr>
         <p:spPr>
           <a:xfrm>
-            <a:off x="5753100" y="1581150"/>
+            <a:off x="5753100" y="1524000"/>
             <a:ext cx="3209925" cy="1000125"/>
           </a:xfrm>
           <a:prstGeom prst="roundRect">
             <a:avLst>
-              <a:gd name="adj" fmla="val 9524"/>
+              <a:gd name="adj" fmla="val 3810"/>
             </a:avLst>
           </a:prstGeom>
           <a:solidFill>
             <a:schemeClr val="bg2"/>
           </a:solidFill>
-          <a:ln w="19050">
+          <a:ln w="15875">
             <a:solidFill>
               <a:schemeClr val="accent1"/>
             </a:solidFill>
@@ -9485,7 +10491,7 @@
         </p:nvSpPr>
         <p:spPr>
           <a:xfrm>
-            <a:off x="8963025" y="1581150"/>
+            <a:off x="8963025" y="1524000"/>
             <a:ext cx="447675" cy="1000125"/>
           </a:xfrm>
           <a:prstGeom prst="rect">
@@ -9521,18 +10527,18 @@
         </p:nvSpPr>
         <p:spPr>
           <a:xfrm>
-            <a:off x="9410700" y="1581150"/>
+            <a:off x="9410700" y="1524000"/>
             <a:ext cx="2095500" cy="1000125"/>
           </a:xfrm>
           <a:prstGeom prst="roundRect">
             <a:avLst>
-              <a:gd name="adj" fmla="val 9524"/>
+              <a:gd name="adj" fmla="val 3810"/>
             </a:avLst>
           </a:prstGeom>
           <a:solidFill>
             <a:schemeClr val="bg1"/>
           </a:solidFill>
-          <a:ln w="19050">
+          <a:ln w="15875">
             <a:solidFill>
               <a:schemeClr val="accent1"/>
             </a:solidFill>
@@ -9579,7 +10585,43 @@
         </p:nvSpPr>
         <p:spPr>
           <a:xfrm>
-            <a:off x="685800" y="2857500"/>
+            <a:off x="685800" y="2609850"/>
+            <a:ext cx="10820400" cy="209550"/>
+          </a:xfrm>
+          <a:prstGeom prst="rect">
+            <a:avLst/>
+          </a:prstGeom>
+          <a:noFill/>
+          <a:ln/>
+        </p:spPr>
+        <p:txBody>
+          <a:bodyPr wrap="square" lIns="0" tIns="0" rIns="0" bIns="0" rtlCol="0" anchor="t"/>
+          <a:lstStyle/>
+          <a:p>
+            <a:pPr indent="0" marL="0">
+              <a:buNone/>
+            </a:pPr>
+            <a:r>
+              <a:rPr lang="en-US" sz="1200" dirty="0">
+                <a:solidFill>
+                  <a:schemeClr val="tx2"/>
+                </a:solidFill>
+              </a:rPr>
+              <a:t>Figura 1 — Diagrama de blocos do hardware (placa ESP32-CAM RoboCore com gravador integrado).</a:t>
+            </a:r>
+            <a:endParaRPr lang="en-US" sz="1200" dirty="0"/>
+          </a:p>
+        </p:txBody>
+      </p:sp>
+      <p:sp>
+        <p:nvSpPr>
+          <p:cNvPr id="13" name="Text 11"/>
+          <p:cNvSpPr txBox="1"/>
+          <p:nvPr/>
+        </p:nvSpPr>
+        <p:spPr>
+          <a:xfrm>
+            <a:off x="685800" y="3067050"/>
             <a:ext cx="5219700" cy="2476500"/>
           </a:xfrm>
           <a:prstGeom prst="rect">
@@ -9603,12 +10645,12 @@
               <a:buChar char="•"/>
             </a:pPr>
             <a:r>
-              <a:rPr lang="en-US" sz="1800" dirty="0">
+              <a:rPr lang="en-US" sz="1700" dirty="0">
                 <a:solidFill>
                   <a:schemeClr val="tx1"/>
                 </a:solidFill>
               </a:rPr>
-              <a:t>Conferida em bancada com o esptool: a placa tinha </a:t>
+              <a:t>Placa conferida em bancada com o esptool: </a:t>
             </a:r>
             <a:pPr indent="0" marL="0">
               <a:lnSpc>
@@ -9620,7 +10662,7 @@
               <a:buNone/>
             </a:pPr>
             <a:r>
-              <a:rPr lang="en-US" sz="1800" b="1" dirty="0">
+              <a:rPr lang="en-US" sz="1700" b="1" dirty="0">
                 <a:solidFill>
                   <a:schemeClr val="tx1"/>
                 </a:solidFill>
@@ -9637,14 +10679,14 @@
               <a:buNone/>
             </a:pPr>
             <a:r>
-              <a:rPr lang="en-US" sz="1800" dirty="0">
+              <a:rPr lang="en-US" sz="1700" dirty="0">
                 <a:solidFill>
                   <a:schemeClr val="tx1"/>
                 </a:solidFill>
               </a:rPr>
-              <a:t> do que o anúncio (16 MB de flash e PSRAM).</a:t>
-            </a:r>
-            <a:endParaRPr lang="en-US" sz="1800" dirty="0"/>
+              <a:t> do que o anunciado (16 MB de flash e PSRAM).</a:t>
+            </a:r>
+            <a:endParaRPr lang="en-US" sz="1700" dirty="0"/>
           </a:p>
           <a:p>
             <a:pPr marL="266700" indent="-266700">
@@ -9658,12 +10700,12 @@
               <a:buChar char="•"/>
             </a:pPr>
             <a:r>
-              <a:rPr lang="en-US" sz="1800" dirty="0">
+              <a:rPr lang="en-US" sz="1700" dirty="0">
                 <a:solidFill>
                   <a:schemeClr val="tx1"/>
                 </a:solidFill>
               </a:rPr>
-              <a:t>Câmera </a:t>
+              <a:t>A câmera </a:t>
             </a:r>
             <a:pPr indent="0" marL="0">
               <a:lnSpc>
@@ -9675,7 +10717,7 @@
               <a:buNone/>
             </a:pPr>
             <a:r>
-              <a:rPr lang="en-US" sz="1800" b="1" dirty="0">
+              <a:rPr lang="en-US" sz="1700" b="1" dirty="0">
                 <a:solidFill>
                   <a:schemeClr val="tx1"/>
                 </a:solidFill>
@@ -9692,26 +10734,26 @@
               <a:buNone/>
             </a:pPr>
             <a:r>
-              <a:rPr lang="en-US" sz="1800" dirty="0">
+              <a:rPr lang="en-US" sz="1700" dirty="0">
                 <a:solidFill>
                   <a:schemeClr val="tx1"/>
                 </a:solidFill>
               </a:rPr>
-              <a:t> seguia a pinagem AI-Thinker: o clock fica no GPIO21 (pinagem WROVER KIT).</a:t>
-            </a:r>
-            <a:endParaRPr lang="en-US" sz="1800" dirty="0"/>
+              <a:t> segue a pinagem AI-Thinker: o clock está no GPIO21 (pinagem WROVER KIT).</a:t>
+            </a:r>
+            <a:endParaRPr lang="en-US" sz="1700" dirty="0"/>
           </a:p>
         </p:txBody>
       </p:sp>
       <p:sp>
         <p:nvSpPr>
-          <p:cNvPr id="13" name="Text 11"/>
+          <p:cNvPr id="14" name="Text 12"/>
           <p:cNvSpPr txBox="1"/>
           <p:nvPr/>
         </p:nvSpPr>
         <p:spPr>
           <a:xfrm>
-            <a:off x="6286500" y="2857500"/>
+            <a:off x="6286500" y="3067050"/>
             <a:ext cx="5219700" cy="2476500"/>
           </a:xfrm>
           <a:prstGeom prst="rect">
@@ -9735,12 +10777,12 @@
               <a:buChar char="•"/>
             </a:pPr>
             <a:r>
-              <a:rPr lang="en-US" sz="1800" dirty="0">
+              <a:rPr lang="en-US" sz="1700" dirty="0">
                 <a:solidFill>
                   <a:schemeClr val="tx1"/>
                 </a:solidFill>
               </a:rPr>
-              <a:t>Pinagem escolhida por </a:t>
+              <a:t>Pinagem selecionada por </a:t>
             </a:r>
             <a:pPr indent="0" marL="0">
               <a:lnSpc>
@@ -9752,7 +10794,7 @@
               <a:buNone/>
             </a:pPr>
             <a:r>
-              <a:rPr lang="en-US" sz="1800" b="1" dirty="0">
+              <a:rPr lang="en-US" sz="1700" b="1" dirty="0">
                 <a:solidFill>
                   <a:schemeClr val="tx1"/>
                 </a:solidFill>
@@ -9769,14 +10811,14 @@
               <a:buNone/>
             </a:pPr>
             <a:r>
-              <a:rPr lang="en-US" sz="1800" dirty="0">
+              <a:rPr lang="en-US" sz="1700" dirty="0">
                 <a:solidFill>
                   <a:schemeClr val="tx1"/>
                 </a:solidFill>
               </a:rPr>
-              <a:t>, sem recompilar.</a:t>
-            </a:r>
-            <a:endParaRPr lang="en-US" sz="1800" dirty="0"/>
+              <a:t>, sem recompilação.</a:t>
+            </a:r>
+            <a:endParaRPr lang="en-US" sz="1700" dirty="0"/>
           </a:p>
           <a:p>
             <a:pPr marL="266700" indent="-266700">
@@ -9790,12 +10832,12 @@
               <a:buChar char="•"/>
             </a:pPr>
             <a:r>
-              <a:rPr lang="en-US" sz="1800" dirty="0">
+              <a:rPr lang="en-US" sz="1700" dirty="0">
                 <a:solidFill>
                   <a:schemeClr val="tx1"/>
                 </a:solidFill>
               </a:rPr>
-              <a:t>Fonte de 2 A: Wi-Fi e câmera juntos geram picos de corrente (risco de </a:t>
+              <a:t>Fonte de 2 A: Wi-Fi e câmera em operação simultânea geram picos de corrente (risco de </a:t>
             </a:r>
             <a:pPr indent="0" marL="0">
               <a:lnSpc>
@@ -9807,7 +10849,7 @@
               <a:buNone/>
             </a:pPr>
             <a:r>
-              <a:rPr lang="en-US" sz="1800" i="1" dirty="0">
+              <a:rPr lang="en-US" sz="1700" i="1" dirty="0">
                 <a:solidFill>
                   <a:schemeClr val="tx1"/>
                 </a:solidFill>
@@ -9824,14 +10866,14 @@
               <a:buNone/>
             </a:pPr>
             <a:r>
-              <a:rPr lang="en-US" sz="1800" dirty="0">
+              <a:rPr lang="en-US" sz="1700" dirty="0">
                 <a:solidFill>
                   <a:schemeClr val="tx1"/>
                 </a:solidFill>
               </a:rPr>
               <a:t>).</a:t>
             </a:r>
-            <a:endParaRPr lang="en-US" sz="1800" dirty="0"/>
+            <a:endParaRPr lang="en-US" sz="1700" dirty="0"/>
           </a:p>
           <a:p>
             <a:pPr marL="266700" indent="-266700">
@@ -9845,7 +10887,7 @@
               <a:buChar char="•"/>
             </a:pPr>
             <a:r>
-              <a:rPr lang="en-US" sz="1800" dirty="0">
+              <a:rPr lang="en-US" sz="1700" dirty="0">
                 <a:solidFill>
                   <a:schemeClr val="tx1"/>
                 </a:solidFill>
@@ -9862,7 +10904,7 @@
               <a:buNone/>
             </a:pPr>
             <a:r>
-              <a:rPr lang="en-US" sz="1800" b="1" dirty="0">
+              <a:rPr lang="en-US" sz="1700" b="1" dirty="0">
                 <a:solidFill>
                   <a:schemeClr val="tx1"/>
                 </a:solidFill>
@@ -9879,14 +10921,14 @@
               <a:buNone/>
             </a:pPr>
             <a:r>
-              <a:rPr lang="en-US" sz="1800" dirty="0">
+              <a:rPr lang="en-US" sz="1700" dirty="0">
                 <a:solidFill>
                   <a:schemeClr val="tx1"/>
                 </a:solidFill>
               </a:rPr>
               <a:t> sobre o compartimento.</a:t>
             </a:r>
-            <a:endParaRPr lang="en-US" sz="1800" dirty="0"/>
+            <a:endParaRPr lang="en-US" sz="1700" dirty="0"/>
           </a:p>
         </p:txBody>
       </p:sp>
@@ -9918,7 +10960,7 @@
           <a:bodyPr lIns="0" tIns="0" rIns="0" bIns="0"/>
           <a:lstStyle>
             <a:lvl1pPr>
-              <a:defRPr sz="1125">
+              <a:defRPr sz="1050">
                 <a:solidFill>
                   <a:schemeClr val="tx2"/>
                 </a:solidFill>
@@ -9962,16 +11004,16 @@
       </p:grpSpPr>
       <p:sp>
         <p:nvSpPr>
-          <p:cNvPr id="2" name="Text 1"/>
+          <p:cNvPr id="2" name="Text 0"/>
           <p:cNvSpPr/>
           <p:nvPr>
-            <p:ph idx="101" type="body" hasCustomPrompt="1"/>
+            <p:ph idx="100" type="body" hasCustomPrompt="1"/>
           </p:nvPr>
         </p:nvSpPr>
         <p:spPr>
           <a:xfrm>
             <a:off x="685800" y="514350"/>
-            <a:ext cx="10820400" cy="228600"/>
+            <a:ext cx="10820400" cy="209550"/>
           </a:xfrm>
           <a:prstGeom prst="rect">
             <a:avLst/>
@@ -9987,29 +11029,29 @@
               <a:buNone/>
             </a:pPr>
             <a:r>
-              <a:rPr lang="en-US" sz="1350" b="1" spc="190" kern="0" dirty="0">
-                <a:solidFill>
-                  <a:schemeClr val="accent2"/>
+              <a:rPr lang="en-US" sz="1200" b="1" spc="150" kern="0" dirty="0">
+                <a:solidFill>
+                  <a:schemeClr val="tx2"/>
                 </a:solidFill>
               </a:rPr>
-              <a:t>REQUISITOS</a:t>
-            </a:r>
-            <a:endParaRPr lang="en-US" sz="1350" dirty="0"/>
+              <a:t>2 · PROJETO</a:t>
+            </a:r>
+            <a:endParaRPr lang="en-US" sz="1200" dirty="0"/>
           </a:p>
         </p:txBody>
       </p:sp>
       <p:sp>
         <p:nvSpPr>
-          <p:cNvPr id="3" name="Text 1"/>
+          <p:cNvPr id="3" name="Text 0"/>
           <p:cNvSpPr/>
           <p:nvPr>
-            <p:ph idx="102" type="title" hasCustomPrompt="1"/>
+            <p:ph idx="101" type="title" hasCustomPrompt="1"/>
           </p:nvPr>
         </p:nvSpPr>
         <p:spPr>
           <a:xfrm>
             <a:off x="685800" y="762000"/>
-            <a:ext cx="10820400" cy="514350"/>
+            <a:ext cx="10820400" cy="495300"/>
           </a:xfrm>
           <a:prstGeom prst="rect">
             <a:avLst/>
@@ -10025,14 +11067,14 @@
               <a:buNone/>
             </a:pPr>
             <a:r>
-              <a:rPr lang="en-US" sz="3300" b="1" dirty="0">
+              <a:rPr lang="en-US" sz="3000" b="1" dirty="0">
                 <a:solidFill>
                   <a:schemeClr val="accent1"/>
                 </a:solidFill>
               </a:rPr>
-              <a:t>Requisitos revistos para o MVP autônomo</a:t>
-            </a:r>
-            <a:endParaRPr lang="en-US" sz="3300" dirty="0"/>
+              <a:t>Requisitos e situação atual</a:t>
+            </a:r>
+            <a:endParaRPr lang="en-US" sz="3000" dirty="0"/>
           </a:p>
         </p:txBody>
       </p:sp>
@@ -10045,7 +11087,7 @@
         <p:spPr>
           <a:xfrm>
             <a:off x="685800" y="6477000"/>
-            <a:ext cx="2857500" cy="209550"/>
+            <a:ext cx="2476500" cy="209550"/>
           </a:xfrm>
           <a:prstGeom prst="rect">
             <a:avLst/>
@@ -10061,58 +11103,14 @@
               <a:buNone/>
             </a:pPr>
             <a:r>
-              <a:rPr lang="en-US" sz="1125" b="1" dirty="0">
-                <a:solidFill>
-                  <a:schemeClr val="accent2"/>
+              <a:rPr lang="en-US" sz="1050" b="1" dirty="0">
+                <a:solidFill>
+                  <a:schemeClr val="tx2"/>
                 </a:solidFill>
               </a:rPr>
               <a:t>Juliana</a:t>
             </a:r>
-            <a:endParaRPr lang="en-US" sz="1125" dirty="0"/>
-          </a:p>
-        </p:txBody>
-      </p:sp>
-      <p:sp>
-        <p:nvSpPr>
-          <p:cNvPr id="5" name="Text 3"/>
-          <p:cNvSpPr/>
-          <p:nvPr/>
-        </p:nvSpPr>
-        <p:spPr>
-          <a:xfrm>
-            <a:off x="685800" y="1485900"/>
-            <a:ext cx="5219700" cy="3257550"/>
-          </a:xfrm>
-          <a:prstGeom prst="roundRect">
-            <a:avLst>
-              <a:gd name="adj" fmla="val 3509"/>
-            </a:avLst>
-          </a:prstGeom>
-          <a:solidFill>
-            <a:schemeClr val="bg1"/>
-          </a:solidFill>
-          <a:ln w="19050">
-            <a:solidFill>
-              <a:srgbClr val="C9D1DA"/>
-            </a:solidFill>
-          </a:ln>
-        </p:spPr>
-        <p:txBody>
-          <a:bodyPr wrap="square" lIns="203200" tIns="165100" rIns="203200" bIns="165100" rtlCol="0" anchor="t"/>
-          <a:lstStyle/>
-          <a:p>
-            <a:pPr algn="l" indent="0" marL="0">
-              <a:buNone/>
-            </a:pPr>
-            <a:r>
-              <a:rPr lang="en-US" sz="1725" b="1" dirty="0">
-                <a:solidFill>
-                  <a:schemeClr val="accent1"/>
-                </a:solidFill>
-              </a:rPr>
-              <a:t>Funcionais</a:t>
-            </a:r>
-            <a:endParaRPr lang="en-US" sz="1425" dirty="0"/>
+            <a:endParaRPr lang="en-US" sz="1050" dirty="0"/>
           </a:p>
         </p:txBody>
       </p:sp>
@@ -10131,18 +11129,19 @@
           </p:nvPr>
         </p:nvGraphicFramePr>
         <p:xfrm>
-          <a:off x="857250" y="2000250"/>
-          <a:ext cx="4876800" cy="914400"/>
+          <a:off x="685800" y="1485900"/>
+          <a:ext cx="5219700" cy="914400"/>
         </p:xfrm>
         <a:graphic>
           <a:graphicData uri="http://schemas.openxmlformats.org/drawingml/2006/table">
             <a:tbl>
               <a:tblPr/>
               <a:tblGrid>
-                <a:gridCol w="4114800"/>
-                <a:gridCol w="762000"/>
+                <a:gridCol w="666750"/>
+                <a:gridCol w="3352800"/>
+                <a:gridCol w="1200150"/>
               </a:tblGrid>
-              <a:tr h="361950">
+              <a:tr h="352425">
                 <a:tc>
                   <a:txBody>
                     <a:bodyPr/>
@@ -10152,105 +11151,47 @@
                         <a:buNone/>
                       </a:pPr>
                       <a:r>
-                        <a:rPr lang="en-US" sz="1425" dirty="0">
+                        <a:rPr lang="en-US" sz="1350" b="1" dirty="0">
                           <a:solidFill>
                             <a:schemeClr val="tx1"/>
                           </a:solidFill>
                         </a:rPr>
-                        <a:t>Configurar horário, Wi-Fi e Telegram pelo PC</a:t>
+                        <a:t>ID</a:t>
                       </a:r>
-                      <a:endParaRPr lang="en-US" sz="1425" dirty="0"/>
+                      <a:endParaRPr lang="en-US" sz="1350" dirty="0"/>
                     </a:p>
                   </a:txBody>
                   <a:tcPr marL="88900" marR="88900" marT="50800" marB="50800" anchor="ctr">
-                    <a:lnL w="38100" cap="flat" cmpd="sng" algn="ctr">
-                      <a:solidFill>
-                        <a:srgbClr val="FFFFFF"/>
+                    <a:lnL w="9525" cap="flat" cmpd="sng" algn="ctr">
+                      <a:solidFill>
+                        <a:srgbClr val="C9D1DA"/>
                       </a:solidFill>
                       <a:prstDash val="solid"/>
                       <a:round/>
                       <a:headEnd type="none" w="med" len="med"/>
                       <a:tailEnd type="none" w="med" len="med"/>
                     </a:lnL>
-                    <a:lnR w="38100" cap="flat" cmpd="sng" algn="ctr">
-                      <a:solidFill>
-                        <a:srgbClr val="FFFFFF"/>
+                    <a:lnR w="9525" cap="flat" cmpd="sng" algn="ctr">
+                      <a:solidFill>
+                        <a:srgbClr val="C9D1DA"/>
                       </a:solidFill>
                       <a:prstDash val="solid"/>
                       <a:round/>
                       <a:headEnd type="none" w="med" len="med"/>
                       <a:tailEnd type="none" w="med" len="med"/>
                     </a:lnR>
-                    <a:lnT w="38100" cap="flat" cmpd="sng" algn="ctr">
-                      <a:solidFill>
-                        <a:srgbClr val="FFFFFF"/>
+                    <a:lnT w="9525" cap="flat" cmpd="sng" algn="ctr">
+                      <a:solidFill>
+                        <a:srgbClr val="C9D1DA"/>
                       </a:solidFill>
                       <a:prstDash val="solid"/>
                       <a:round/>
                       <a:headEnd type="none" w="med" len="med"/>
                       <a:tailEnd type="none" w="med" len="med"/>
                     </a:lnT>
-                    <a:lnB w="38100" cap="flat" cmpd="sng" algn="ctr">
-                      <a:solidFill>
-                        <a:srgbClr val="FFFFFF"/>
-                      </a:solidFill>
-                      <a:prstDash val="solid"/>
-                      <a:round/>
-                      <a:headEnd type="none" w="med" len="med"/>
-                      <a:tailEnd type="none" w="med" len="med"/>
-                    </a:lnB>
-                  </a:tcPr>
-                </a:tc>
-                <a:tc>
-                  <a:txBody>
-                    <a:bodyPr/>
-                    <a:lstStyle/>
-                    <a:p>
-                      <a:pPr algn="ctr" indent="0" marL="0">
-                        <a:buNone/>
-                      </a:pPr>
-                      <a:r>
-                        <a:rPr lang="en-US" sz="1050" b="1" dirty="0">
-                          <a:solidFill>
-                            <a:schemeClr val="bg1"/>
-                          </a:solidFill>
-                        </a:rPr>
-                        <a:t>OK</a:t>
-                      </a:r>
-                      <a:endParaRPr lang="en-US" sz="1050" dirty="0"/>
-                    </a:p>
-                  </a:txBody>
-                  <a:tcPr marL="88900" marR="88900" marT="50800" marB="50800" anchor="ctr">
-                    <a:lnL w="38100" cap="flat" cmpd="sng" algn="ctr">
-                      <a:solidFill>
-                        <a:srgbClr val="FFFFFF"/>
-                      </a:solidFill>
-                      <a:prstDash val="solid"/>
-                      <a:round/>
-                      <a:headEnd type="none" w="med" len="med"/>
-                      <a:tailEnd type="none" w="med" len="med"/>
-                    </a:lnL>
-                    <a:lnR w="38100" cap="flat" cmpd="sng" algn="ctr">
-                      <a:solidFill>
-                        <a:srgbClr val="FFFFFF"/>
-                      </a:solidFill>
-                      <a:prstDash val="solid"/>
-                      <a:round/>
-                      <a:headEnd type="none" w="med" len="med"/>
-                      <a:tailEnd type="none" w="med" len="med"/>
-                    </a:lnR>
-                    <a:lnT w="38100" cap="flat" cmpd="sng" algn="ctr">
-                      <a:solidFill>
-                        <a:srgbClr val="FFFFFF"/>
-                      </a:solidFill>
-                      <a:prstDash val="solid"/>
-                      <a:round/>
-                      <a:headEnd type="none" w="med" len="med"/>
-                      <a:tailEnd type="none" w="med" len="med"/>
-                    </a:lnT>
-                    <a:lnB w="38100" cap="flat" cmpd="sng" algn="ctr">
-                      <a:solidFill>
-                        <a:srgbClr val="FFFFFF"/>
+                    <a:lnB w="9525" cap="flat" cmpd="sng" algn="ctr">
+                      <a:solidFill>
+                        <a:srgbClr val="C9D1DA"/>
                       </a:solidFill>
                       <a:prstDash val="solid"/>
                       <a:round/>
@@ -10258,12 +11199,10 @@
                       <a:tailEnd type="none" w="med" len="med"/>
                     </a:lnB>
                     <a:solidFill>
-                      <a:schemeClr val="accent3"/>
+                      <a:schemeClr val="bg2"/>
                     </a:solidFill>
                   </a:tcPr>
                 </a:tc>
-              </a:tr>
-              <a:tr h="361950">
                 <a:tc>
                   <a:txBody>
                     <a:bodyPr/>
@@ -10273,105 +11212,47 @@
                         <a:buNone/>
                       </a:pPr>
                       <a:r>
-                        <a:rPr lang="en-US" sz="1425" dirty="0">
+                        <a:rPr lang="en-US" sz="1350" b="1" dirty="0">
                           <a:solidFill>
                             <a:schemeClr val="tx1"/>
                           </a:solidFill>
                         </a:rPr>
-                        <a:t>Calibrar ROI e o vazio</a:t>
+                        <a:t>Requisito funcional</a:t>
                       </a:r>
-                      <a:endParaRPr lang="en-US" sz="1425" dirty="0"/>
+                      <a:endParaRPr lang="en-US" sz="1350" dirty="0"/>
                     </a:p>
                   </a:txBody>
                   <a:tcPr marL="88900" marR="88900" marT="50800" marB="50800" anchor="ctr">
-                    <a:lnL w="38100" cap="flat" cmpd="sng" algn="ctr">
-                      <a:solidFill>
-                        <a:srgbClr val="FFFFFF"/>
+                    <a:lnL w="9525" cap="flat" cmpd="sng" algn="ctr">
+                      <a:solidFill>
+                        <a:srgbClr val="C9D1DA"/>
                       </a:solidFill>
                       <a:prstDash val="solid"/>
                       <a:round/>
                       <a:headEnd type="none" w="med" len="med"/>
                       <a:tailEnd type="none" w="med" len="med"/>
                     </a:lnL>
-                    <a:lnR w="38100" cap="flat" cmpd="sng" algn="ctr">
-                      <a:solidFill>
-                        <a:srgbClr val="FFFFFF"/>
+                    <a:lnR w="9525" cap="flat" cmpd="sng" algn="ctr">
+                      <a:solidFill>
+                        <a:srgbClr val="C9D1DA"/>
                       </a:solidFill>
                       <a:prstDash val="solid"/>
                       <a:round/>
                       <a:headEnd type="none" w="med" len="med"/>
                       <a:tailEnd type="none" w="med" len="med"/>
                     </a:lnR>
-                    <a:lnT w="38100" cap="flat" cmpd="sng" algn="ctr">
-                      <a:solidFill>
-                        <a:srgbClr val="FFFFFF"/>
+                    <a:lnT w="9525" cap="flat" cmpd="sng" algn="ctr">
+                      <a:solidFill>
+                        <a:srgbClr val="C9D1DA"/>
                       </a:solidFill>
                       <a:prstDash val="solid"/>
                       <a:round/>
                       <a:headEnd type="none" w="med" len="med"/>
                       <a:tailEnd type="none" w="med" len="med"/>
                     </a:lnT>
-                    <a:lnB w="38100" cap="flat" cmpd="sng" algn="ctr">
-                      <a:solidFill>
-                        <a:srgbClr val="FFFFFF"/>
-                      </a:solidFill>
-                      <a:prstDash val="solid"/>
-                      <a:round/>
-                      <a:headEnd type="none" w="med" len="med"/>
-                      <a:tailEnd type="none" w="med" len="med"/>
-                    </a:lnB>
-                  </a:tcPr>
-                </a:tc>
-                <a:tc>
-                  <a:txBody>
-                    <a:bodyPr/>
-                    <a:lstStyle/>
-                    <a:p>
-                      <a:pPr algn="ctr" indent="0" marL="0">
-                        <a:buNone/>
-                      </a:pPr>
-                      <a:r>
-                        <a:rPr lang="en-US" sz="1050" b="1" dirty="0">
-                          <a:solidFill>
-                            <a:schemeClr val="bg1"/>
-                          </a:solidFill>
-                        </a:rPr>
-                        <a:t>OK</a:t>
-                      </a:r>
-                      <a:endParaRPr lang="en-US" sz="1050" dirty="0"/>
-                    </a:p>
-                  </a:txBody>
-                  <a:tcPr marL="88900" marR="88900" marT="50800" marB="50800" anchor="ctr">
-                    <a:lnL w="38100" cap="flat" cmpd="sng" algn="ctr">
-                      <a:solidFill>
-                        <a:srgbClr val="FFFFFF"/>
-                      </a:solidFill>
-                      <a:prstDash val="solid"/>
-                      <a:round/>
-                      <a:headEnd type="none" w="med" len="med"/>
-                      <a:tailEnd type="none" w="med" len="med"/>
-                    </a:lnL>
-                    <a:lnR w="38100" cap="flat" cmpd="sng" algn="ctr">
-                      <a:solidFill>
-                        <a:srgbClr val="FFFFFF"/>
-                      </a:solidFill>
-                      <a:prstDash val="solid"/>
-                      <a:round/>
-                      <a:headEnd type="none" w="med" len="med"/>
-                      <a:tailEnd type="none" w="med" len="med"/>
-                    </a:lnR>
-                    <a:lnT w="38100" cap="flat" cmpd="sng" algn="ctr">
-                      <a:solidFill>
-                        <a:srgbClr val="FFFFFF"/>
-                      </a:solidFill>
-                      <a:prstDash val="solid"/>
-                      <a:round/>
-                      <a:headEnd type="none" w="med" len="med"/>
-                      <a:tailEnd type="none" w="med" len="med"/>
-                    </a:lnT>
-                    <a:lnB w="38100" cap="flat" cmpd="sng" algn="ctr">
-                      <a:solidFill>
-                        <a:srgbClr val="FFFFFF"/>
+                    <a:lnB w="9525" cap="flat" cmpd="sng" algn="ctr">
+                      <a:solidFill>
+                        <a:srgbClr val="C9D1DA"/>
                       </a:solidFill>
                       <a:prstDash val="solid"/>
                       <a:round/>
@@ -10379,12 +11260,10 @@
                       <a:tailEnd type="none" w="med" len="med"/>
                     </a:lnB>
                     <a:solidFill>
-                      <a:schemeClr val="accent3"/>
+                      <a:schemeClr val="bg2"/>
                     </a:solidFill>
                   </a:tcPr>
                 </a:tc>
-              </a:tr>
-              <a:tr h="361950">
                 <a:tc>
                   <a:txBody>
                     <a:bodyPr/>
@@ -10394,105 +11273,47 @@
                         <a:buNone/>
                       </a:pPr>
                       <a:r>
-                        <a:rPr lang="en-US" sz="1425" dirty="0">
+                        <a:rPr lang="en-US" sz="1350" b="1" dirty="0">
                           <a:solidFill>
                             <a:schemeClr val="tx1"/>
                           </a:solidFill>
                         </a:rPr>
-                        <a:t>Qualquer comprimido, qualquer posição</a:t>
+                        <a:t>Situação</a:t>
                       </a:r>
-                      <a:endParaRPr lang="en-US" sz="1425" dirty="0"/>
+                      <a:endParaRPr lang="en-US" sz="1350" dirty="0"/>
                     </a:p>
                   </a:txBody>
                   <a:tcPr marL="88900" marR="88900" marT="50800" marB="50800" anchor="ctr">
-                    <a:lnL w="38100" cap="flat" cmpd="sng" algn="ctr">
-                      <a:solidFill>
-                        <a:srgbClr val="FFFFFF"/>
+                    <a:lnL w="9525" cap="flat" cmpd="sng" algn="ctr">
+                      <a:solidFill>
+                        <a:srgbClr val="C9D1DA"/>
                       </a:solidFill>
                       <a:prstDash val="solid"/>
                       <a:round/>
                       <a:headEnd type="none" w="med" len="med"/>
                       <a:tailEnd type="none" w="med" len="med"/>
                     </a:lnL>
-                    <a:lnR w="38100" cap="flat" cmpd="sng" algn="ctr">
-                      <a:solidFill>
-                        <a:srgbClr val="FFFFFF"/>
+                    <a:lnR w="9525" cap="flat" cmpd="sng" algn="ctr">
+                      <a:solidFill>
+                        <a:srgbClr val="C9D1DA"/>
                       </a:solidFill>
                       <a:prstDash val="solid"/>
                       <a:round/>
                       <a:headEnd type="none" w="med" len="med"/>
                       <a:tailEnd type="none" w="med" len="med"/>
                     </a:lnR>
-                    <a:lnT w="38100" cap="flat" cmpd="sng" algn="ctr">
-                      <a:solidFill>
-                        <a:srgbClr val="FFFFFF"/>
+                    <a:lnT w="9525" cap="flat" cmpd="sng" algn="ctr">
+                      <a:solidFill>
+                        <a:srgbClr val="C9D1DA"/>
                       </a:solidFill>
                       <a:prstDash val="solid"/>
                       <a:round/>
                       <a:headEnd type="none" w="med" len="med"/>
                       <a:tailEnd type="none" w="med" len="med"/>
                     </a:lnT>
-                    <a:lnB w="38100" cap="flat" cmpd="sng" algn="ctr">
-                      <a:solidFill>
-                        <a:srgbClr val="FFFFFF"/>
-                      </a:solidFill>
-                      <a:prstDash val="solid"/>
-                      <a:round/>
-                      <a:headEnd type="none" w="med" len="med"/>
-                      <a:tailEnd type="none" w="med" len="med"/>
-                    </a:lnB>
-                  </a:tcPr>
-                </a:tc>
-                <a:tc>
-                  <a:txBody>
-                    <a:bodyPr/>
-                    <a:lstStyle/>
-                    <a:p>
-                      <a:pPr algn="ctr" indent="0" marL="0">
-                        <a:buNone/>
-                      </a:pPr>
-                      <a:r>
-                        <a:rPr lang="en-US" sz="1050" b="1" dirty="0">
-                          <a:solidFill>
-                            <a:schemeClr val="bg1"/>
-                          </a:solidFill>
-                        </a:rPr>
-                        <a:t>OK</a:t>
-                      </a:r>
-                      <a:endParaRPr lang="en-US" sz="1050" dirty="0"/>
-                    </a:p>
-                  </a:txBody>
-                  <a:tcPr marL="88900" marR="88900" marT="50800" marB="50800" anchor="ctr">
-                    <a:lnL w="38100" cap="flat" cmpd="sng" algn="ctr">
-                      <a:solidFill>
-                        <a:srgbClr val="FFFFFF"/>
-                      </a:solidFill>
-                      <a:prstDash val="solid"/>
-                      <a:round/>
-                      <a:headEnd type="none" w="med" len="med"/>
-                      <a:tailEnd type="none" w="med" len="med"/>
-                    </a:lnL>
-                    <a:lnR w="38100" cap="flat" cmpd="sng" algn="ctr">
-                      <a:solidFill>
-                        <a:srgbClr val="FFFFFF"/>
-                      </a:solidFill>
-                      <a:prstDash val="solid"/>
-                      <a:round/>
-                      <a:headEnd type="none" w="med" len="med"/>
-                      <a:tailEnd type="none" w="med" len="med"/>
-                    </a:lnR>
-                    <a:lnT w="38100" cap="flat" cmpd="sng" algn="ctr">
-                      <a:solidFill>
-                        <a:srgbClr val="FFFFFF"/>
-                      </a:solidFill>
-                      <a:prstDash val="solid"/>
-                      <a:round/>
-                      <a:headEnd type="none" w="med" len="med"/>
-                      <a:tailEnd type="none" w="med" len="med"/>
-                    </a:lnT>
-                    <a:lnB w="38100" cap="flat" cmpd="sng" algn="ctr">
-                      <a:solidFill>
-                        <a:srgbClr val="FFFFFF"/>
+                    <a:lnB w="9525" cap="flat" cmpd="sng" algn="ctr">
+                      <a:solidFill>
+                        <a:srgbClr val="C9D1DA"/>
                       </a:solidFill>
                       <a:prstDash val="solid"/>
                       <a:round/>
@@ -10500,12 +11321,12 @@
                       <a:tailEnd type="none" w="med" len="med"/>
                     </a:lnB>
                     <a:solidFill>
-                      <a:schemeClr val="accent3"/>
+                      <a:schemeClr val="bg2"/>
                     </a:solidFill>
                   </a:tcPr>
                 </a:tc>
               </a:tr>
-              <a:tr h="361950">
+              <a:tr h="352425">
                 <a:tc>
                   <a:txBody>
                     <a:bodyPr/>
@@ -10515,47 +11336,47 @@
                         <a:buNone/>
                       </a:pPr>
                       <a:r>
-                        <a:rPr lang="en-US" sz="1425" dirty="0">
+                        <a:rPr lang="en-US" sz="1200" dirty="0">
                           <a:solidFill>
                             <a:schemeClr val="tx1"/>
                           </a:solidFill>
                         </a:rPr>
-                        <a:t>Verificação diária automática</a:t>
+                        <a:t>RF01</a:t>
                       </a:r>
-                      <a:endParaRPr lang="en-US" sz="1425" dirty="0"/>
+                      <a:endParaRPr lang="en-US" sz="1200" dirty="0"/>
                     </a:p>
                   </a:txBody>
                   <a:tcPr marL="88900" marR="88900" marT="50800" marB="50800" anchor="ctr">
-                    <a:lnL w="38100" cap="flat" cmpd="sng" algn="ctr">
-                      <a:solidFill>
-                        <a:srgbClr val="FFFFFF"/>
+                    <a:lnL w="9525" cap="flat" cmpd="sng" algn="ctr">
+                      <a:solidFill>
+                        <a:srgbClr val="C9D1DA"/>
                       </a:solidFill>
                       <a:prstDash val="solid"/>
                       <a:round/>
                       <a:headEnd type="none" w="med" len="med"/>
                       <a:tailEnd type="none" w="med" len="med"/>
                     </a:lnL>
-                    <a:lnR w="38100" cap="flat" cmpd="sng" algn="ctr">
-                      <a:solidFill>
-                        <a:srgbClr val="FFFFFF"/>
+                    <a:lnR w="9525" cap="flat" cmpd="sng" algn="ctr">
+                      <a:solidFill>
+                        <a:srgbClr val="C9D1DA"/>
                       </a:solidFill>
                       <a:prstDash val="solid"/>
                       <a:round/>
                       <a:headEnd type="none" w="med" len="med"/>
                       <a:tailEnd type="none" w="med" len="med"/>
                     </a:lnR>
-                    <a:lnT w="38100" cap="flat" cmpd="sng" algn="ctr">
-                      <a:solidFill>
-                        <a:srgbClr val="FFFFFF"/>
+                    <a:lnT w="9525" cap="flat" cmpd="sng" algn="ctr">
+                      <a:solidFill>
+                        <a:srgbClr val="C9D1DA"/>
                       </a:solidFill>
                       <a:prstDash val="solid"/>
                       <a:round/>
                       <a:headEnd type="none" w="med" len="med"/>
                       <a:tailEnd type="none" w="med" len="med"/>
                     </a:lnT>
-                    <a:lnB w="38100" cap="flat" cmpd="sng" algn="ctr">
-                      <a:solidFill>
-                        <a:srgbClr val="FFFFFF"/>
+                    <a:lnB w="9525" cap="flat" cmpd="sng" algn="ctr">
+                      <a:solidFill>
+                        <a:srgbClr val="C9D1DA"/>
                       </a:solidFill>
                       <a:prstDash val="solid"/>
                       <a:round/>
@@ -10564,69 +11385,6 @@
                     </a:lnB>
                   </a:tcPr>
                 </a:tc>
-                <a:tc>
-                  <a:txBody>
-                    <a:bodyPr/>
-                    <a:lstStyle/>
-                    <a:p>
-                      <a:pPr algn="ctr" indent="0" marL="0">
-                        <a:buNone/>
-                      </a:pPr>
-                      <a:r>
-                        <a:rPr lang="en-US" sz="1050" b="1" dirty="0">
-                          <a:solidFill>
-                            <a:schemeClr val="bg1"/>
-                          </a:solidFill>
-                        </a:rPr>
-                        <a:t>IMPL.</a:t>
-                      </a:r>
-                      <a:endParaRPr lang="en-US" sz="1050" dirty="0"/>
-                    </a:p>
-                  </a:txBody>
-                  <a:tcPr marL="88900" marR="88900" marT="50800" marB="50800" anchor="ctr">
-                    <a:lnL w="38100" cap="flat" cmpd="sng" algn="ctr">
-                      <a:solidFill>
-                        <a:srgbClr val="FFFFFF"/>
-                      </a:solidFill>
-                      <a:prstDash val="solid"/>
-                      <a:round/>
-                      <a:headEnd type="none" w="med" len="med"/>
-                      <a:tailEnd type="none" w="med" len="med"/>
-                    </a:lnL>
-                    <a:lnR w="38100" cap="flat" cmpd="sng" algn="ctr">
-                      <a:solidFill>
-                        <a:srgbClr val="FFFFFF"/>
-                      </a:solidFill>
-                      <a:prstDash val="solid"/>
-                      <a:round/>
-                      <a:headEnd type="none" w="med" len="med"/>
-                      <a:tailEnd type="none" w="med" len="med"/>
-                    </a:lnR>
-                    <a:lnT w="38100" cap="flat" cmpd="sng" algn="ctr">
-                      <a:solidFill>
-                        <a:srgbClr val="FFFFFF"/>
-                      </a:solidFill>
-                      <a:prstDash val="solid"/>
-                      <a:round/>
-                      <a:headEnd type="none" w="med" len="med"/>
-                      <a:tailEnd type="none" w="med" len="med"/>
-                    </a:lnT>
-                    <a:lnB w="38100" cap="flat" cmpd="sng" algn="ctr">
-                      <a:solidFill>
-                        <a:srgbClr val="FFFFFF"/>
-                      </a:solidFill>
-                      <a:prstDash val="solid"/>
-                      <a:round/>
-                      <a:headEnd type="none" w="med" len="med"/>
-                      <a:tailEnd type="none" w="med" len="med"/>
-                    </a:lnB>
-                    <a:solidFill>
-                      <a:schemeClr val="accent4"/>
-                    </a:solidFill>
-                  </a:tcPr>
-                </a:tc>
-              </a:tr>
-              <a:tr h="361950">
                 <a:tc>
                   <a:txBody>
                     <a:bodyPr/>
@@ -10636,47 +11394,47 @@
                         <a:buNone/>
                       </a:pPr>
                       <a:r>
-                        <a:rPr lang="en-US" sz="1425" dirty="0">
+                        <a:rPr lang="en-US" sz="1350" dirty="0">
                           <a:solidFill>
                             <a:schemeClr val="tx1"/>
                           </a:solidFill>
                         </a:rPr>
-                        <a:t>Retirada só com evidência persistente</a:t>
+                        <a:t>Configurar horário, Wi-Fi e Telegram</a:t>
                       </a:r>
-                      <a:endParaRPr lang="en-US" sz="1425" dirty="0"/>
+                      <a:endParaRPr lang="en-US" sz="1350" dirty="0"/>
                     </a:p>
                   </a:txBody>
                   <a:tcPr marL="88900" marR="88900" marT="50800" marB="50800" anchor="ctr">
-                    <a:lnL w="38100" cap="flat" cmpd="sng" algn="ctr">
-                      <a:solidFill>
-                        <a:srgbClr val="FFFFFF"/>
+                    <a:lnL w="9525" cap="flat" cmpd="sng" algn="ctr">
+                      <a:solidFill>
+                        <a:srgbClr val="C9D1DA"/>
                       </a:solidFill>
                       <a:prstDash val="solid"/>
                       <a:round/>
                       <a:headEnd type="none" w="med" len="med"/>
                       <a:tailEnd type="none" w="med" len="med"/>
                     </a:lnL>
-                    <a:lnR w="38100" cap="flat" cmpd="sng" algn="ctr">
-                      <a:solidFill>
-                        <a:srgbClr val="FFFFFF"/>
+                    <a:lnR w="9525" cap="flat" cmpd="sng" algn="ctr">
+                      <a:solidFill>
+                        <a:srgbClr val="C9D1DA"/>
                       </a:solidFill>
                       <a:prstDash val="solid"/>
                       <a:round/>
                       <a:headEnd type="none" w="med" len="med"/>
                       <a:tailEnd type="none" w="med" len="med"/>
                     </a:lnR>
-                    <a:lnT w="38100" cap="flat" cmpd="sng" algn="ctr">
-                      <a:solidFill>
-                        <a:srgbClr val="FFFFFF"/>
+                    <a:lnT w="9525" cap="flat" cmpd="sng" algn="ctr">
+                      <a:solidFill>
+                        <a:srgbClr val="C9D1DA"/>
                       </a:solidFill>
                       <a:prstDash val="solid"/>
                       <a:round/>
                       <a:headEnd type="none" w="med" len="med"/>
                       <a:tailEnd type="none" w="med" len="med"/>
                     </a:lnT>
-                    <a:lnB w="38100" cap="flat" cmpd="sng" algn="ctr">
-                      <a:solidFill>
-                        <a:srgbClr val="FFFFFF"/>
+                    <a:lnB w="9525" cap="flat" cmpd="sng" algn="ctr">
+                      <a:solidFill>
+                        <a:srgbClr val="C9D1DA"/>
                       </a:solidFill>
                       <a:prstDash val="solid"/>
                       <a:round/>
@@ -10685,69 +11443,6 @@
                     </a:lnB>
                   </a:tcPr>
                 </a:tc>
-                <a:tc>
-                  <a:txBody>
-                    <a:bodyPr/>
-                    <a:lstStyle/>
-                    <a:p>
-                      <a:pPr algn="ctr" indent="0" marL="0">
-                        <a:buNone/>
-                      </a:pPr>
-                      <a:r>
-                        <a:rPr lang="en-US" sz="1050" b="1" dirty="0">
-                          <a:solidFill>
-                            <a:schemeClr val="bg1"/>
-                          </a:solidFill>
-                        </a:rPr>
-                        <a:t>IMPL.</a:t>
-                      </a:r>
-                      <a:endParaRPr lang="en-US" sz="1050" dirty="0"/>
-                    </a:p>
-                  </a:txBody>
-                  <a:tcPr marL="88900" marR="88900" marT="50800" marB="50800" anchor="ctr">
-                    <a:lnL w="38100" cap="flat" cmpd="sng" algn="ctr">
-                      <a:solidFill>
-                        <a:srgbClr val="FFFFFF"/>
-                      </a:solidFill>
-                      <a:prstDash val="solid"/>
-                      <a:round/>
-                      <a:headEnd type="none" w="med" len="med"/>
-                      <a:tailEnd type="none" w="med" len="med"/>
-                    </a:lnL>
-                    <a:lnR w="38100" cap="flat" cmpd="sng" algn="ctr">
-                      <a:solidFill>
-                        <a:srgbClr val="FFFFFF"/>
-                      </a:solidFill>
-                      <a:prstDash val="solid"/>
-                      <a:round/>
-                      <a:headEnd type="none" w="med" len="med"/>
-                      <a:tailEnd type="none" w="med" len="med"/>
-                    </a:lnR>
-                    <a:lnT w="38100" cap="flat" cmpd="sng" algn="ctr">
-                      <a:solidFill>
-                        <a:srgbClr val="FFFFFF"/>
-                      </a:solidFill>
-                      <a:prstDash val="solid"/>
-                      <a:round/>
-                      <a:headEnd type="none" w="med" len="med"/>
-                      <a:tailEnd type="none" w="med" len="med"/>
-                    </a:lnT>
-                    <a:lnB w="38100" cap="flat" cmpd="sng" algn="ctr">
-                      <a:solidFill>
-                        <a:srgbClr val="FFFFFF"/>
-                      </a:solidFill>
-                      <a:prstDash val="solid"/>
-                      <a:round/>
-                      <a:headEnd type="none" w="med" len="med"/>
-                      <a:tailEnd type="none" w="med" len="med"/>
-                    </a:lnB>
-                    <a:solidFill>
-                      <a:schemeClr val="accent4"/>
-                    </a:solidFill>
-                  </a:tcPr>
-                </a:tc>
-              </a:tr>
-              <a:tr h="361950">
                 <a:tc>
                   <a:txBody>
                     <a:bodyPr/>
@@ -10757,118 +11452,57 @@
                         <a:buNone/>
                       </a:pPr>
                       <a:r>
-                        <a:rPr lang="en-US" sz="1425" dirty="0">
+                        <a:rPr lang="en-US" sz="1050" b="1" dirty="0">
                           <a:solidFill>
-                            <a:schemeClr val="tx1"/>
+                            <a:schemeClr val="accent3"/>
                           </a:solidFill>
                         </a:rPr>
-                        <a:t>Aviso remoto com foto</a:t>
-                      </a:r>
-                      <a:endParaRPr lang="en-US" sz="1425" dirty="0"/>
-                    </a:p>
-                  </a:txBody>
-                  <a:tcPr marL="88900" marR="88900" marT="50800" marB="50800" anchor="ctr">
-                    <a:lnL w="38100" cap="flat" cmpd="sng" algn="ctr">
-                      <a:solidFill>
-                        <a:srgbClr val="FFFFFF"/>
-                      </a:solidFill>
-                      <a:prstDash val="solid"/>
-                      <a:round/>
-                      <a:headEnd type="none" w="med" len="med"/>
-                      <a:tailEnd type="none" w="med" len="med"/>
-                    </a:lnL>
-                    <a:lnR w="38100" cap="flat" cmpd="sng" algn="ctr">
-                      <a:solidFill>
-                        <a:srgbClr val="FFFFFF"/>
-                      </a:solidFill>
-                      <a:prstDash val="solid"/>
-                      <a:round/>
-                      <a:headEnd type="none" w="med" len="med"/>
-                      <a:tailEnd type="none" w="med" len="med"/>
-                    </a:lnR>
-                    <a:lnT w="38100" cap="flat" cmpd="sng" algn="ctr">
-                      <a:solidFill>
-                        <a:srgbClr val="FFFFFF"/>
-                      </a:solidFill>
-                      <a:prstDash val="solid"/>
-                      <a:round/>
-                      <a:headEnd type="none" w="med" len="med"/>
-                      <a:tailEnd type="none" w="med" len="med"/>
-                    </a:lnT>
-                    <a:lnB w="38100" cap="flat" cmpd="sng" algn="ctr">
-                      <a:solidFill>
-                        <a:srgbClr val="FFFFFF"/>
-                      </a:solidFill>
-                      <a:prstDash val="solid"/>
-                      <a:round/>
-                      <a:headEnd type="none" w="med" len="med"/>
-                      <a:tailEnd type="none" w="med" len="med"/>
-                    </a:lnB>
-                  </a:tcPr>
-                </a:tc>
-                <a:tc>
-                  <a:txBody>
-                    <a:bodyPr/>
-                    <a:lstStyle/>
-                    <a:p>
-                      <a:pPr algn="ctr" indent="0" marL="0">
-                        <a:buNone/>
-                      </a:pPr>
-                      <a:r>
-                        <a:rPr lang="en-US" sz="1050" b="1" dirty="0">
-                          <a:solidFill>
-                            <a:schemeClr val="bg1"/>
-                          </a:solidFill>
-                        </a:rPr>
-                        <a:t>OK</a:t>
+                        <a:t>VERIFICADO</a:t>
                       </a:r>
                       <a:endParaRPr lang="en-US" sz="1050" dirty="0"/>
                     </a:p>
                   </a:txBody>
                   <a:tcPr marL="88900" marR="88900" marT="50800" marB="50800" anchor="ctr">
-                    <a:lnL w="38100" cap="flat" cmpd="sng" algn="ctr">
-                      <a:solidFill>
-                        <a:srgbClr val="FFFFFF"/>
+                    <a:lnL w="9525" cap="flat" cmpd="sng" algn="ctr">
+                      <a:solidFill>
+                        <a:srgbClr val="C9D1DA"/>
                       </a:solidFill>
                       <a:prstDash val="solid"/>
                       <a:round/>
                       <a:headEnd type="none" w="med" len="med"/>
                       <a:tailEnd type="none" w="med" len="med"/>
                     </a:lnL>
-                    <a:lnR w="38100" cap="flat" cmpd="sng" algn="ctr">
-                      <a:solidFill>
-                        <a:srgbClr val="FFFFFF"/>
+                    <a:lnR w="9525" cap="flat" cmpd="sng" algn="ctr">
+                      <a:solidFill>
+                        <a:srgbClr val="C9D1DA"/>
                       </a:solidFill>
                       <a:prstDash val="solid"/>
                       <a:round/>
                       <a:headEnd type="none" w="med" len="med"/>
                       <a:tailEnd type="none" w="med" len="med"/>
                     </a:lnR>
-                    <a:lnT w="38100" cap="flat" cmpd="sng" algn="ctr">
-                      <a:solidFill>
-                        <a:srgbClr val="FFFFFF"/>
+                    <a:lnT w="9525" cap="flat" cmpd="sng" algn="ctr">
+                      <a:solidFill>
+                        <a:srgbClr val="C9D1DA"/>
                       </a:solidFill>
                       <a:prstDash val="solid"/>
                       <a:round/>
                       <a:headEnd type="none" w="med" len="med"/>
                       <a:tailEnd type="none" w="med" len="med"/>
                     </a:lnT>
-                    <a:lnB w="38100" cap="flat" cmpd="sng" algn="ctr">
-                      <a:solidFill>
-                        <a:srgbClr val="FFFFFF"/>
+                    <a:lnB w="9525" cap="flat" cmpd="sng" algn="ctr">
+                      <a:solidFill>
+                        <a:srgbClr val="C9D1DA"/>
                       </a:solidFill>
                       <a:prstDash val="solid"/>
                       <a:round/>
                       <a:headEnd type="none" w="med" len="med"/>
                       <a:tailEnd type="none" w="med" len="med"/>
                     </a:lnB>
-                    <a:solidFill>
-                      <a:schemeClr val="accent3"/>
-                    </a:solidFill>
                   </a:tcPr>
                 </a:tc>
               </a:tr>
-              <a:tr h="361950">
+              <a:tr h="352425">
                 <a:tc>
                   <a:txBody>
                     <a:bodyPr/>
@@ -10878,47 +11512,47 @@
                         <a:buNone/>
                       </a:pPr>
                       <a:r>
-                        <a:rPr lang="en-US" sz="1425" dirty="0">
+                        <a:rPr lang="en-US" sz="1200" dirty="0">
                           <a:solidFill>
                             <a:schemeClr val="tx1"/>
                           </a:solidFill>
                         </a:rPr>
-                        <a:t>Reinício sem inferir retirada</a:t>
+                        <a:t>RF02</a:t>
                       </a:r>
-                      <a:endParaRPr lang="en-US" sz="1425" dirty="0"/>
+                      <a:endParaRPr lang="en-US" sz="1200" dirty="0"/>
                     </a:p>
                   </a:txBody>
                   <a:tcPr marL="88900" marR="88900" marT="50800" marB="50800" anchor="ctr">
-                    <a:lnL w="38100" cap="flat" cmpd="sng" algn="ctr">
-                      <a:solidFill>
-                        <a:srgbClr val="FFFFFF"/>
+                    <a:lnL w="9525" cap="flat" cmpd="sng" algn="ctr">
+                      <a:solidFill>
+                        <a:srgbClr val="C9D1DA"/>
                       </a:solidFill>
                       <a:prstDash val="solid"/>
                       <a:round/>
                       <a:headEnd type="none" w="med" len="med"/>
                       <a:tailEnd type="none" w="med" len="med"/>
                     </a:lnL>
-                    <a:lnR w="38100" cap="flat" cmpd="sng" algn="ctr">
-                      <a:solidFill>
-                        <a:srgbClr val="FFFFFF"/>
+                    <a:lnR w="9525" cap="flat" cmpd="sng" algn="ctr">
+                      <a:solidFill>
+                        <a:srgbClr val="C9D1DA"/>
                       </a:solidFill>
                       <a:prstDash val="solid"/>
                       <a:round/>
                       <a:headEnd type="none" w="med" len="med"/>
                       <a:tailEnd type="none" w="med" len="med"/>
                     </a:lnR>
-                    <a:lnT w="38100" cap="flat" cmpd="sng" algn="ctr">
-                      <a:solidFill>
-                        <a:srgbClr val="FFFFFF"/>
+                    <a:lnT w="9525" cap="flat" cmpd="sng" algn="ctr">
+                      <a:solidFill>
+                        <a:srgbClr val="C9D1DA"/>
                       </a:solidFill>
                       <a:prstDash val="solid"/>
                       <a:round/>
                       <a:headEnd type="none" w="med" len="med"/>
                       <a:tailEnd type="none" w="med" len="med"/>
                     </a:lnT>
-                    <a:lnB w="38100" cap="flat" cmpd="sng" algn="ctr">
-                      <a:solidFill>
-                        <a:srgbClr val="FFFFFF"/>
+                    <a:lnB w="9525" cap="flat" cmpd="sng" algn="ctr">
+                      <a:solidFill>
+                        <a:srgbClr val="C9D1DA"/>
                       </a:solidFill>
                       <a:prstDash val="solid"/>
                       <a:round/>
@@ -10932,60 +11566,995 @@
                     <a:bodyPr/>
                     <a:lstStyle/>
                     <a:p>
-                      <a:pPr algn="ctr" indent="0" marL="0">
+                      <a:pPr indent="0" marL="0">
+                        <a:buNone/>
+                      </a:pPr>
+                      <a:r>
+                        <a:rPr lang="en-US" sz="1350" dirty="0">
+                          <a:solidFill>
+                            <a:schemeClr val="tx1"/>
+                          </a:solidFill>
+                        </a:rPr>
+                        <a:t>Calibrar ROI e referência do vazio</a:t>
+                      </a:r>
+                      <a:endParaRPr lang="en-US" sz="1350" dirty="0"/>
+                    </a:p>
+                  </a:txBody>
+                  <a:tcPr marL="88900" marR="88900" marT="50800" marB="50800" anchor="ctr">
+                    <a:lnL w="9525" cap="flat" cmpd="sng" algn="ctr">
+                      <a:solidFill>
+                        <a:srgbClr val="C9D1DA"/>
+                      </a:solidFill>
+                      <a:prstDash val="solid"/>
+                      <a:round/>
+                      <a:headEnd type="none" w="med" len="med"/>
+                      <a:tailEnd type="none" w="med" len="med"/>
+                    </a:lnL>
+                    <a:lnR w="9525" cap="flat" cmpd="sng" algn="ctr">
+                      <a:solidFill>
+                        <a:srgbClr val="C9D1DA"/>
+                      </a:solidFill>
+                      <a:prstDash val="solid"/>
+                      <a:round/>
+                      <a:headEnd type="none" w="med" len="med"/>
+                      <a:tailEnd type="none" w="med" len="med"/>
+                    </a:lnR>
+                    <a:lnT w="9525" cap="flat" cmpd="sng" algn="ctr">
+                      <a:solidFill>
+                        <a:srgbClr val="C9D1DA"/>
+                      </a:solidFill>
+                      <a:prstDash val="solid"/>
+                      <a:round/>
+                      <a:headEnd type="none" w="med" len="med"/>
+                      <a:tailEnd type="none" w="med" len="med"/>
+                    </a:lnT>
+                    <a:lnB w="9525" cap="flat" cmpd="sng" algn="ctr">
+                      <a:solidFill>
+                        <a:srgbClr val="C9D1DA"/>
+                      </a:solidFill>
+                      <a:prstDash val="solid"/>
+                      <a:round/>
+                      <a:headEnd type="none" w="med" len="med"/>
+                      <a:tailEnd type="none" w="med" len="med"/>
+                    </a:lnB>
+                  </a:tcPr>
+                </a:tc>
+                <a:tc>
+                  <a:txBody>
+                    <a:bodyPr/>
+                    <a:lstStyle/>
+                    <a:p>
+                      <a:pPr indent="0" marL="0">
                         <a:buNone/>
                       </a:pPr>
                       <a:r>
                         <a:rPr lang="en-US" sz="1050" b="1" dirty="0">
                           <a:solidFill>
-                            <a:schemeClr val="bg1"/>
+                            <a:schemeClr val="accent3"/>
                           </a:solidFill>
                         </a:rPr>
-                        <a:t>OK</a:t>
+                        <a:t>VERIFICADO</a:t>
                       </a:r>
                       <a:endParaRPr lang="en-US" sz="1050" dirty="0"/>
                     </a:p>
                   </a:txBody>
                   <a:tcPr marL="88900" marR="88900" marT="50800" marB="50800" anchor="ctr">
-                    <a:lnL w="38100" cap="flat" cmpd="sng" algn="ctr">
-                      <a:solidFill>
-                        <a:srgbClr val="FFFFFF"/>
+                    <a:lnL w="9525" cap="flat" cmpd="sng" algn="ctr">
+                      <a:solidFill>
+                        <a:srgbClr val="C9D1DA"/>
                       </a:solidFill>
                       <a:prstDash val="solid"/>
                       <a:round/>
                       <a:headEnd type="none" w="med" len="med"/>
                       <a:tailEnd type="none" w="med" len="med"/>
                     </a:lnL>
-                    <a:lnR w="38100" cap="flat" cmpd="sng" algn="ctr">
-                      <a:solidFill>
-                        <a:srgbClr val="FFFFFF"/>
+                    <a:lnR w="9525" cap="flat" cmpd="sng" algn="ctr">
+                      <a:solidFill>
+                        <a:srgbClr val="C9D1DA"/>
                       </a:solidFill>
                       <a:prstDash val="solid"/>
                       <a:round/>
                       <a:headEnd type="none" w="med" len="med"/>
                       <a:tailEnd type="none" w="med" len="med"/>
                     </a:lnR>
-                    <a:lnT w="38100" cap="flat" cmpd="sng" algn="ctr">
-                      <a:solidFill>
-                        <a:srgbClr val="FFFFFF"/>
+                    <a:lnT w="9525" cap="flat" cmpd="sng" algn="ctr">
+                      <a:solidFill>
+                        <a:srgbClr val="C9D1DA"/>
                       </a:solidFill>
                       <a:prstDash val="solid"/>
                       <a:round/>
                       <a:headEnd type="none" w="med" len="med"/>
                       <a:tailEnd type="none" w="med" len="med"/>
                     </a:lnT>
-                    <a:lnB w="38100" cap="flat" cmpd="sng" algn="ctr">
-                      <a:solidFill>
-                        <a:srgbClr val="FFFFFF"/>
+                    <a:lnB w="9525" cap="flat" cmpd="sng" algn="ctr">
+                      <a:solidFill>
+                        <a:srgbClr val="C9D1DA"/>
                       </a:solidFill>
                       <a:prstDash val="solid"/>
                       <a:round/>
                       <a:headEnd type="none" w="med" len="med"/>
                       <a:tailEnd type="none" w="med" len="med"/>
                     </a:lnB>
-                    <a:solidFill>
-                      <a:schemeClr val="accent3"/>
-                    </a:solidFill>
+                  </a:tcPr>
+                </a:tc>
+              </a:tr>
+              <a:tr h="352425">
+                <a:tc>
+                  <a:txBody>
+                    <a:bodyPr/>
+                    <a:lstStyle/>
+                    <a:p>
+                      <a:pPr indent="0" marL="0">
+                        <a:buNone/>
+                      </a:pPr>
+                      <a:r>
+                        <a:rPr lang="en-US" sz="1200" dirty="0">
+                          <a:solidFill>
+                            <a:schemeClr val="tx1"/>
+                          </a:solidFill>
+                        </a:rPr>
+                        <a:t>RF03</a:t>
+                      </a:r>
+                      <a:endParaRPr lang="en-US" sz="1200" dirty="0"/>
+                    </a:p>
+                  </a:txBody>
+                  <a:tcPr marL="88900" marR="88900" marT="50800" marB="50800" anchor="ctr">
+                    <a:lnL w="9525" cap="flat" cmpd="sng" algn="ctr">
+                      <a:solidFill>
+                        <a:srgbClr val="C9D1DA"/>
+                      </a:solidFill>
+                      <a:prstDash val="solid"/>
+                      <a:round/>
+                      <a:headEnd type="none" w="med" len="med"/>
+                      <a:tailEnd type="none" w="med" len="med"/>
+                    </a:lnL>
+                    <a:lnR w="9525" cap="flat" cmpd="sng" algn="ctr">
+                      <a:solidFill>
+                        <a:srgbClr val="C9D1DA"/>
+                      </a:solidFill>
+                      <a:prstDash val="solid"/>
+                      <a:round/>
+                      <a:headEnd type="none" w="med" len="med"/>
+                      <a:tailEnd type="none" w="med" len="med"/>
+                    </a:lnR>
+                    <a:lnT w="9525" cap="flat" cmpd="sng" algn="ctr">
+                      <a:solidFill>
+                        <a:srgbClr val="C9D1DA"/>
+                      </a:solidFill>
+                      <a:prstDash val="solid"/>
+                      <a:round/>
+                      <a:headEnd type="none" w="med" len="med"/>
+                      <a:tailEnd type="none" w="med" len="med"/>
+                    </a:lnT>
+                    <a:lnB w="9525" cap="flat" cmpd="sng" algn="ctr">
+                      <a:solidFill>
+                        <a:srgbClr val="C9D1DA"/>
+                      </a:solidFill>
+                      <a:prstDash val="solid"/>
+                      <a:round/>
+                      <a:headEnd type="none" w="med" len="med"/>
+                      <a:tailEnd type="none" w="med" len="med"/>
+                    </a:lnB>
+                  </a:tcPr>
+                </a:tc>
+                <a:tc>
+                  <a:txBody>
+                    <a:bodyPr/>
+                    <a:lstStyle/>
+                    <a:p>
+                      <a:pPr indent="0" marL="0">
+                        <a:buNone/>
+                      </a:pPr>
+                      <a:r>
+                        <a:rPr lang="en-US" sz="1350" dirty="0">
+                          <a:solidFill>
+                            <a:schemeClr val="tx1"/>
+                          </a:solidFill>
+                        </a:rPr>
+                        <a:t>Verificação diária automática</a:t>
+                      </a:r>
+                      <a:endParaRPr lang="en-US" sz="1350" dirty="0"/>
+                    </a:p>
+                  </a:txBody>
+                  <a:tcPr marL="88900" marR="88900" marT="50800" marB="50800" anchor="ctr">
+                    <a:lnL w="9525" cap="flat" cmpd="sng" algn="ctr">
+                      <a:solidFill>
+                        <a:srgbClr val="C9D1DA"/>
+                      </a:solidFill>
+                      <a:prstDash val="solid"/>
+                      <a:round/>
+                      <a:headEnd type="none" w="med" len="med"/>
+                      <a:tailEnd type="none" w="med" len="med"/>
+                    </a:lnL>
+                    <a:lnR w="9525" cap="flat" cmpd="sng" algn="ctr">
+                      <a:solidFill>
+                        <a:srgbClr val="C9D1DA"/>
+                      </a:solidFill>
+                      <a:prstDash val="solid"/>
+                      <a:round/>
+                      <a:headEnd type="none" w="med" len="med"/>
+                      <a:tailEnd type="none" w="med" len="med"/>
+                    </a:lnR>
+                    <a:lnT w="9525" cap="flat" cmpd="sng" algn="ctr">
+                      <a:solidFill>
+                        <a:srgbClr val="C9D1DA"/>
+                      </a:solidFill>
+                      <a:prstDash val="solid"/>
+                      <a:round/>
+                      <a:headEnd type="none" w="med" len="med"/>
+                      <a:tailEnd type="none" w="med" len="med"/>
+                    </a:lnT>
+                    <a:lnB w="9525" cap="flat" cmpd="sng" algn="ctr">
+                      <a:solidFill>
+                        <a:srgbClr val="C9D1DA"/>
+                      </a:solidFill>
+                      <a:prstDash val="solid"/>
+                      <a:round/>
+                      <a:headEnd type="none" w="med" len="med"/>
+                      <a:tailEnd type="none" w="med" len="med"/>
+                    </a:lnB>
+                  </a:tcPr>
+                </a:tc>
+                <a:tc>
+                  <a:txBody>
+                    <a:bodyPr/>
+                    <a:lstStyle/>
+                    <a:p>
+                      <a:pPr indent="0" marL="0">
+                        <a:buNone/>
+                      </a:pPr>
+                      <a:r>
+                        <a:rPr lang="en-US" sz="1050" b="1" dirty="0">
+                          <a:solidFill>
+                            <a:schemeClr val="accent4"/>
+                          </a:solidFill>
+                        </a:rPr>
+                        <a:t>IMPLEMENTADO</a:t>
+                      </a:r>
+                      <a:endParaRPr lang="en-US" sz="1050" dirty="0"/>
+                    </a:p>
+                  </a:txBody>
+                  <a:tcPr marL="88900" marR="88900" marT="50800" marB="50800" anchor="ctr">
+                    <a:lnL w="9525" cap="flat" cmpd="sng" algn="ctr">
+                      <a:solidFill>
+                        <a:srgbClr val="C9D1DA"/>
+                      </a:solidFill>
+                      <a:prstDash val="solid"/>
+                      <a:round/>
+                      <a:headEnd type="none" w="med" len="med"/>
+                      <a:tailEnd type="none" w="med" len="med"/>
+                    </a:lnL>
+                    <a:lnR w="9525" cap="flat" cmpd="sng" algn="ctr">
+                      <a:solidFill>
+                        <a:srgbClr val="C9D1DA"/>
+                      </a:solidFill>
+                      <a:prstDash val="solid"/>
+                      <a:round/>
+                      <a:headEnd type="none" w="med" len="med"/>
+                      <a:tailEnd type="none" w="med" len="med"/>
+                    </a:lnR>
+                    <a:lnT w="9525" cap="flat" cmpd="sng" algn="ctr">
+                      <a:solidFill>
+                        <a:srgbClr val="C9D1DA"/>
+                      </a:solidFill>
+                      <a:prstDash val="solid"/>
+                      <a:round/>
+                      <a:headEnd type="none" w="med" len="med"/>
+                      <a:tailEnd type="none" w="med" len="med"/>
+                    </a:lnT>
+                    <a:lnB w="9525" cap="flat" cmpd="sng" algn="ctr">
+                      <a:solidFill>
+                        <a:srgbClr val="C9D1DA"/>
+                      </a:solidFill>
+                      <a:prstDash val="solid"/>
+                      <a:round/>
+                      <a:headEnd type="none" w="med" len="med"/>
+                      <a:tailEnd type="none" w="med" len="med"/>
+                    </a:lnB>
+                  </a:tcPr>
+                </a:tc>
+              </a:tr>
+              <a:tr h="352425">
+                <a:tc>
+                  <a:txBody>
+                    <a:bodyPr/>
+                    <a:lstStyle/>
+                    <a:p>
+                      <a:pPr indent="0" marL="0">
+                        <a:buNone/>
+                      </a:pPr>
+                      <a:r>
+                        <a:rPr lang="en-US" sz="1200" dirty="0">
+                          <a:solidFill>
+                            <a:schemeClr val="tx1"/>
+                          </a:solidFill>
+                        </a:rPr>
+                        <a:t>RF04</a:t>
+                      </a:r>
+                      <a:endParaRPr lang="en-US" sz="1200" dirty="0"/>
+                    </a:p>
+                  </a:txBody>
+                  <a:tcPr marL="88900" marR="88900" marT="50800" marB="50800" anchor="ctr">
+                    <a:lnL w="9525" cap="flat" cmpd="sng" algn="ctr">
+                      <a:solidFill>
+                        <a:srgbClr val="C9D1DA"/>
+                      </a:solidFill>
+                      <a:prstDash val="solid"/>
+                      <a:round/>
+                      <a:headEnd type="none" w="med" len="med"/>
+                      <a:tailEnd type="none" w="med" len="med"/>
+                    </a:lnL>
+                    <a:lnR w="9525" cap="flat" cmpd="sng" algn="ctr">
+                      <a:solidFill>
+                        <a:srgbClr val="C9D1DA"/>
+                      </a:solidFill>
+                      <a:prstDash val="solid"/>
+                      <a:round/>
+                      <a:headEnd type="none" w="med" len="med"/>
+                      <a:tailEnd type="none" w="med" len="med"/>
+                    </a:lnR>
+                    <a:lnT w="9525" cap="flat" cmpd="sng" algn="ctr">
+                      <a:solidFill>
+                        <a:srgbClr val="C9D1DA"/>
+                      </a:solidFill>
+                      <a:prstDash val="solid"/>
+                      <a:round/>
+                      <a:headEnd type="none" w="med" len="med"/>
+                      <a:tailEnd type="none" w="med" len="med"/>
+                    </a:lnT>
+                    <a:lnB w="9525" cap="flat" cmpd="sng" algn="ctr">
+                      <a:solidFill>
+                        <a:srgbClr val="C9D1DA"/>
+                      </a:solidFill>
+                      <a:prstDash val="solid"/>
+                      <a:round/>
+                      <a:headEnd type="none" w="med" len="med"/>
+                      <a:tailEnd type="none" w="med" len="med"/>
+                    </a:lnB>
+                  </a:tcPr>
+                </a:tc>
+                <a:tc>
+                  <a:txBody>
+                    <a:bodyPr/>
+                    <a:lstStyle/>
+                    <a:p>
+                      <a:pPr indent="0" marL="0">
+                        <a:buNone/>
+                      </a:pPr>
+                      <a:r>
+                        <a:rPr lang="en-US" sz="1350" dirty="0">
+                          <a:solidFill>
+                            <a:schemeClr val="tx1"/>
+                          </a:solidFill>
+                        </a:rPr>
+                        <a:t>Qualquer comprimido, qualquer posição</a:t>
+                      </a:r>
+                      <a:endParaRPr lang="en-US" sz="1350" dirty="0"/>
+                    </a:p>
+                  </a:txBody>
+                  <a:tcPr marL="88900" marR="88900" marT="50800" marB="50800" anchor="ctr">
+                    <a:lnL w="9525" cap="flat" cmpd="sng" algn="ctr">
+                      <a:solidFill>
+                        <a:srgbClr val="C9D1DA"/>
+                      </a:solidFill>
+                      <a:prstDash val="solid"/>
+                      <a:round/>
+                      <a:headEnd type="none" w="med" len="med"/>
+                      <a:tailEnd type="none" w="med" len="med"/>
+                    </a:lnL>
+                    <a:lnR w="9525" cap="flat" cmpd="sng" algn="ctr">
+                      <a:solidFill>
+                        <a:srgbClr val="C9D1DA"/>
+                      </a:solidFill>
+                      <a:prstDash val="solid"/>
+                      <a:round/>
+                      <a:headEnd type="none" w="med" len="med"/>
+                      <a:tailEnd type="none" w="med" len="med"/>
+                    </a:lnR>
+                    <a:lnT w="9525" cap="flat" cmpd="sng" algn="ctr">
+                      <a:solidFill>
+                        <a:srgbClr val="C9D1DA"/>
+                      </a:solidFill>
+                      <a:prstDash val="solid"/>
+                      <a:round/>
+                      <a:headEnd type="none" w="med" len="med"/>
+                      <a:tailEnd type="none" w="med" len="med"/>
+                    </a:lnT>
+                    <a:lnB w="9525" cap="flat" cmpd="sng" algn="ctr">
+                      <a:solidFill>
+                        <a:srgbClr val="C9D1DA"/>
+                      </a:solidFill>
+                      <a:prstDash val="solid"/>
+                      <a:round/>
+                      <a:headEnd type="none" w="med" len="med"/>
+                      <a:tailEnd type="none" w="med" len="med"/>
+                    </a:lnB>
+                  </a:tcPr>
+                </a:tc>
+                <a:tc>
+                  <a:txBody>
+                    <a:bodyPr/>
+                    <a:lstStyle/>
+                    <a:p>
+                      <a:pPr indent="0" marL="0">
+                        <a:buNone/>
+                      </a:pPr>
+                      <a:r>
+                        <a:rPr lang="en-US" sz="1050" b="1" dirty="0">
+                          <a:solidFill>
+                            <a:schemeClr val="accent3"/>
+                          </a:solidFill>
+                        </a:rPr>
+                        <a:t>VERIFICADO</a:t>
+                      </a:r>
+                      <a:endParaRPr lang="en-US" sz="1050" dirty="0"/>
+                    </a:p>
+                  </a:txBody>
+                  <a:tcPr marL="88900" marR="88900" marT="50800" marB="50800" anchor="ctr">
+                    <a:lnL w="9525" cap="flat" cmpd="sng" algn="ctr">
+                      <a:solidFill>
+                        <a:srgbClr val="C9D1DA"/>
+                      </a:solidFill>
+                      <a:prstDash val="solid"/>
+                      <a:round/>
+                      <a:headEnd type="none" w="med" len="med"/>
+                      <a:tailEnd type="none" w="med" len="med"/>
+                    </a:lnL>
+                    <a:lnR w="9525" cap="flat" cmpd="sng" algn="ctr">
+                      <a:solidFill>
+                        <a:srgbClr val="C9D1DA"/>
+                      </a:solidFill>
+                      <a:prstDash val="solid"/>
+                      <a:round/>
+                      <a:headEnd type="none" w="med" len="med"/>
+                      <a:tailEnd type="none" w="med" len="med"/>
+                    </a:lnR>
+                    <a:lnT w="9525" cap="flat" cmpd="sng" algn="ctr">
+                      <a:solidFill>
+                        <a:srgbClr val="C9D1DA"/>
+                      </a:solidFill>
+                      <a:prstDash val="solid"/>
+                      <a:round/>
+                      <a:headEnd type="none" w="med" len="med"/>
+                      <a:tailEnd type="none" w="med" len="med"/>
+                    </a:lnT>
+                    <a:lnB w="9525" cap="flat" cmpd="sng" algn="ctr">
+                      <a:solidFill>
+                        <a:srgbClr val="C9D1DA"/>
+                      </a:solidFill>
+                      <a:prstDash val="solid"/>
+                      <a:round/>
+                      <a:headEnd type="none" w="med" len="med"/>
+                      <a:tailEnd type="none" w="med" len="med"/>
+                    </a:lnB>
+                  </a:tcPr>
+                </a:tc>
+              </a:tr>
+              <a:tr h="352425">
+                <a:tc>
+                  <a:txBody>
+                    <a:bodyPr/>
+                    <a:lstStyle/>
+                    <a:p>
+                      <a:pPr indent="0" marL="0">
+                        <a:buNone/>
+                      </a:pPr>
+                      <a:r>
+                        <a:rPr lang="en-US" sz="1200" dirty="0">
+                          <a:solidFill>
+                            <a:schemeClr val="tx1"/>
+                          </a:solidFill>
+                        </a:rPr>
+                        <a:t>RF05</a:t>
+                      </a:r>
+                      <a:endParaRPr lang="en-US" sz="1200" dirty="0"/>
+                    </a:p>
+                  </a:txBody>
+                  <a:tcPr marL="88900" marR="88900" marT="50800" marB="50800" anchor="ctr">
+                    <a:lnL w="9525" cap="flat" cmpd="sng" algn="ctr">
+                      <a:solidFill>
+                        <a:srgbClr val="C9D1DA"/>
+                      </a:solidFill>
+                      <a:prstDash val="solid"/>
+                      <a:round/>
+                      <a:headEnd type="none" w="med" len="med"/>
+                      <a:tailEnd type="none" w="med" len="med"/>
+                    </a:lnL>
+                    <a:lnR w="9525" cap="flat" cmpd="sng" algn="ctr">
+                      <a:solidFill>
+                        <a:srgbClr val="C9D1DA"/>
+                      </a:solidFill>
+                      <a:prstDash val="solid"/>
+                      <a:round/>
+                      <a:headEnd type="none" w="med" len="med"/>
+                      <a:tailEnd type="none" w="med" len="med"/>
+                    </a:lnR>
+                    <a:lnT w="9525" cap="flat" cmpd="sng" algn="ctr">
+                      <a:solidFill>
+                        <a:srgbClr val="C9D1DA"/>
+                      </a:solidFill>
+                      <a:prstDash val="solid"/>
+                      <a:round/>
+                      <a:headEnd type="none" w="med" len="med"/>
+                      <a:tailEnd type="none" w="med" len="med"/>
+                    </a:lnT>
+                    <a:lnB w="9525" cap="flat" cmpd="sng" algn="ctr">
+                      <a:solidFill>
+                        <a:srgbClr val="C9D1DA"/>
+                      </a:solidFill>
+                      <a:prstDash val="solid"/>
+                      <a:round/>
+                      <a:headEnd type="none" w="med" len="med"/>
+                      <a:tailEnd type="none" w="med" len="med"/>
+                    </a:lnB>
+                  </a:tcPr>
+                </a:tc>
+                <a:tc>
+                  <a:txBody>
+                    <a:bodyPr/>
+                    <a:lstStyle/>
+                    <a:p>
+                      <a:pPr indent="0" marL="0">
+                        <a:buNone/>
+                      </a:pPr>
+                      <a:r>
+                        <a:rPr lang="en-US" sz="1350" dirty="0">
+                          <a:solidFill>
+                            <a:schemeClr val="tx1"/>
+                          </a:solidFill>
+                        </a:rPr>
+                        <a:t>Retirada só com evidência persistente</a:t>
+                      </a:r>
+                      <a:endParaRPr lang="en-US" sz="1350" dirty="0"/>
+                    </a:p>
+                  </a:txBody>
+                  <a:tcPr marL="88900" marR="88900" marT="50800" marB="50800" anchor="ctr">
+                    <a:lnL w="9525" cap="flat" cmpd="sng" algn="ctr">
+                      <a:solidFill>
+                        <a:srgbClr val="C9D1DA"/>
+                      </a:solidFill>
+                      <a:prstDash val="solid"/>
+                      <a:round/>
+                      <a:headEnd type="none" w="med" len="med"/>
+                      <a:tailEnd type="none" w="med" len="med"/>
+                    </a:lnL>
+                    <a:lnR w="9525" cap="flat" cmpd="sng" algn="ctr">
+                      <a:solidFill>
+                        <a:srgbClr val="C9D1DA"/>
+                      </a:solidFill>
+                      <a:prstDash val="solid"/>
+                      <a:round/>
+                      <a:headEnd type="none" w="med" len="med"/>
+                      <a:tailEnd type="none" w="med" len="med"/>
+                    </a:lnR>
+                    <a:lnT w="9525" cap="flat" cmpd="sng" algn="ctr">
+                      <a:solidFill>
+                        <a:srgbClr val="C9D1DA"/>
+                      </a:solidFill>
+                      <a:prstDash val="solid"/>
+                      <a:round/>
+                      <a:headEnd type="none" w="med" len="med"/>
+                      <a:tailEnd type="none" w="med" len="med"/>
+                    </a:lnT>
+                    <a:lnB w="9525" cap="flat" cmpd="sng" algn="ctr">
+                      <a:solidFill>
+                        <a:srgbClr val="C9D1DA"/>
+                      </a:solidFill>
+                      <a:prstDash val="solid"/>
+                      <a:round/>
+                      <a:headEnd type="none" w="med" len="med"/>
+                      <a:tailEnd type="none" w="med" len="med"/>
+                    </a:lnB>
+                  </a:tcPr>
+                </a:tc>
+                <a:tc>
+                  <a:txBody>
+                    <a:bodyPr/>
+                    <a:lstStyle/>
+                    <a:p>
+                      <a:pPr indent="0" marL="0">
+                        <a:buNone/>
+                      </a:pPr>
+                      <a:r>
+                        <a:rPr lang="en-US" sz="1050" b="1" dirty="0">
+                          <a:solidFill>
+                            <a:schemeClr val="accent4"/>
+                          </a:solidFill>
+                        </a:rPr>
+                        <a:t>IMPLEMENTADO</a:t>
+                      </a:r>
+                      <a:endParaRPr lang="en-US" sz="1050" dirty="0"/>
+                    </a:p>
+                  </a:txBody>
+                  <a:tcPr marL="88900" marR="88900" marT="50800" marB="50800" anchor="ctr">
+                    <a:lnL w="9525" cap="flat" cmpd="sng" algn="ctr">
+                      <a:solidFill>
+                        <a:srgbClr val="C9D1DA"/>
+                      </a:solidFill>
+                      <a:prstDash val="solid"/>
+                      <a:round/>
+                      <a:headEnd type="none" w="med" len="med"/>
+                      <a:tailEnd type="none" w="med" len="med"/>
+                    </a:lnL>
+                    <a:lnR w="9525" cap="flat" cmpd="sng" algn="ctr">
+                      <a:solidFill>
+                        <a:srgbClr val="C9D1DA"/>
+                      </a:solidFill>
+                      <a:prstDash val="solid"/>
+                      <a:round/>
+                      <a:headEnd type="none" w="med" len="med"/>
+                      <a:tailEnd type="none" w="med" len="med"/>
+                    </a:lnR>
+                    <a:lnT w="9525" cap="flat" cmpd="sng" algn="ctr">
+                      <a:solidFill>
+                        <a:srgbClr val="C9D1DA"/>
+                      </a:solidFill>
+                      <a:prstDash val="solid"/>
+                      <a:round/>
+                      <a:headEnd type="none" w="med" len="med"/>
+                      <a:tailEnd type="none" w="med" len="med"/>
+                    </a:lnT>
+                    <a:lnB w="9525" cap="flat" cmpd="sng" algn="ctr">
+                      <a:solidFill>
+                        <a:srgbClr val="C9D1DA"/>
+                      </a:solidFill>
+                      <a:prstDash val="solid"/>
+                      <a:round/>
+                      <a:headEnd type="none" w="med" len="med"/>
+                      <a:tailEnd type="none" w="med" len="med"/>
+                    </a:lnB>
+                  </a:tcPr>
+                </a:tc>
+              </a:tr>
+              <a:tr h="352425">
+                <a:tc>
+                  <a:txBody>
+                    <a:bodyPr/>
+                    <a:lstStyle/>
+                    <a:p>
+                      <a:pPr indent="0" marL="0">
+                        <a:buNone/>
+                      </a:pPr>
+                      <a:r>
+                        <a:rPr lang="en-US" sz="1200" dirty="0">
+                          <a:solidFill>
+                            <a:schemeClr val="tx1"/>
+                          </a:solidFill>
+                        </a:rPr>
+                        <a:t>RF10</a:t>
+                      </a:r>
+                      <a:endParaRPr lang="en-US" sz="1200" dirty="0"/>
+                    </a:p>
+                  </a:txBody>
+                  <a:tcPr marL="88900" marR="88900" marT="50800" marB="50800" anchor="ctr">
+                    <a:lnL w="9525" cap="flat" cmpd="sng" algn="ctr">
+                      <a:solidFill>
+                        <a:srgbClr val="C9D1DA"/>
+                      </a:solidFill>
+                      <a:prstDash val="solid"/>
+                      <a:round/>
+                      <a:headEnd type="none" w="med" len="med"/>
+                      <a:tailEnd type="none" w="med" len="med"/>
+                    </a:lnL>
+                    <a:lnR w="9525" cap="flat" cmpd="sng" algn="ctr">
+                      <a:solidFill>
+                        <a:srgbClr val="C9D1DA"/>
+                      </a:solidFill>
+                      <a:prstDash val="solid"/>
+                      <a:round/>
+                      <a:headEnd type="none" w="med" len="med"/>
+                      <a:tailEnd type="none" w="med" len="med"/>
+                    </a:lnR>
+                    <a:lnT w="9525" cap="flat" cmpd="sng" algn="ctr">
+                      <a:solidFill>
+                        <a:srgbClr val="C9D1DA"/>
+                      </a:solidFill>
+                      <a:prstDash val="solid"/>
+                      <a:round/>
+                      <a:headEnd type="none" w="med" len="med"/>
+                      <a:tailEnd type="none" w="med" len="med"/>
+                    </a:lnT>
+                    <a:lnB w="9525" cap="flat" cmpd="sng" algn="ctr">
+                      <a:solidFill>
+                        <a:srgbClr val="C9D1DA"/>
+                      </a:solidFill>
+                      <a:prstDash val="solid"/>
+                      <a:round/>
+                      <a:headEnd type="none" w="med" len="med"/>
+                      <a:tailEnd type="none" w="med" len="med"/>
+                    </a:lnB>
+                  </a:tcPr>
+                </a:tc>
+                <a:tc>
+                  <a:txBody>
+                    <a:bodyPr/>
+                    <a:lstStyle/>
+                    <a:p>
+                      <a:pPr indent="0" marL="0">
+                        <a:buNone/>
+                      </a:pPr>
+                      <a:r>
+                        <a:rPr lang="en-US" sz="1350" dirty="0">
+                          <a:solidFill>
+                            <a:schemeClr val="tx1"/>
+                          </a:solidFill>
+                        </a:rPr>
+                        <a:t>Reinício sem inferir retirada</a:t>
+                      </a:r>
+                      <a:endParaRPr lang="en-US" sz="1350" dirty="0"/>
+                    </a:p>
+                  </a:txBody>
+                  <a:tcPr marL="88900" marR="88900" marT="50800" marB="50800" anchor="ctr">
+                    <a:lnL w="9525" cap="flat" cmpd="sng" algn="ctr">
+                      <a:solidFill>
+                        <a:srgbClr val="C9D1DA"/>
+                      </a:solidFill>
+                      <a:prstDash val="solid"/>
+                      <a:round/>
+                      <a:headEnd type="none" w="med" len="med"/>
+                      <a:tailEnd type="none" w="med" len="med"/>
+                    </a:lnL>
+                    <a:lnR w="9525" cap="flat" cmpd="sng" algn="ctr">
+                      <a:solidFill>
+                        <a:srgbClr val="C9D1DA"/>
+                      </a:solidFill>
+                      <a:prstDash val="solid"/>
+                      <a:round/>
+                      <a:headEnd type="none" w="med" len="med"/>
+                      <a:tailEnd type="none" w="med" len="med"/>
+                    </a:lnR>
+                    <a:lnT w="9525" cap="flat" cmpd="sng" algn="ctr">
+                      <a:solidFill>
+                        <a:srgbClr val="C9D1DA"/>
+                      </a:solidFill>
+                      <a:prstDash val="solid"/>
+                      <a:round/>
+                      <a:headEnd type="none" w="med" len="med"/>
+                      <a:tailEnd type="none" w="med" len="med"/>
+                    </a:lnT>
+                    <a:lnB w="9525" cap="flat" cmpd="sng" algn="ctr">
+                      <a:solidFill>
+                        <a:srgbClr val="C9D1DA"/>
+                      </a:solidFill>
+                      <a:prstDash val="solid"/>
+                      <a:round/>
+                      <a:headEnd type="none" w="med" len="med"/>
+                      <a:tailEnd type="none" w="med" len="med"/>
+                    </a:lnB>
+                  </a:tcPr>
+                </a:tc>
+                <a:tc>
+                  <a:txBody>
+                    <a:bodyPr/>
+                    <a:lstStyle/>
+                    <a:p>
+                      <a:pPr indent="0" marL="0">
+                        <a:buNone/>
+                      </a:pPr>
+                      <a:r>
+                        <a:rPr lang="en-US" sz="1050" b="1" dirty="0">
+                          <a:solidFill>
+                            <a:schemeClr val="accent3"/>
+                          </a:solidFill>
+                        </a:rPr>
+                        <a:t>VERIFICADO</a:t>
+                      </a:r>
+                      <a:endParaRPr lang="en-US" sz="1050" dirty="0"/>
+                    </a:p>
+                  </a:txBody>
+                  <a:tcPr marL="88900" marR="88900" marT="50800" marB="50800" anchor="ctr">
+                    <a:lnL w="9525" cap="flat" cmpd="sng" algn="ctr">
+                      <a:solidFill>
+                        <a:srgbClr val="C9D1DA"/>
+                      </a:solidFill>
+                      <a:prstDash val="solid"/>
+                      <a:round/>
+                      <a:headEnd type="none" w="med" len="med"/>
+                      <a:tailEnd type="none" w="med" len="med"/>
+                    </a:lnL>
+                    <a:lnR w="9525" cap="flat" cmpd="sng" algn="ctr">
+                      <a:solidFill>
+                        <a:srgbClr val="C9D1DA"/>
+                      </a:solidFill>
+                      <a:prstDash val="solid"/>
+                      <a:round/>
+                      <a:headEnd type="none" w="med" len="med"/>
+                      <a:tailEnd type="none" w="med" len="med"/>
+                    </a:lnR>
+                    <a:lnT w="9525" cap="flat" cmpd="sng" algn="ctr">
+                      <a:solidFill>
+                        <a:srgbClr val="C9D1DA"/>
+                      </a:solidFill>
+                      <a:prstDash val="solid"/>
+                      <a:round/>
+                      <a:headEnd type="none" w="med" len="med"/>
+                      <a:tailEnd type="none" w="med" len="med"/>
+                    </a:lnT>
+                    <a:lnB w="9525" cap="flat" cmpd="sng" algn="ctr">
+                      <a:solidFill>
+                        <a:srgbClr val="C9D1DA"/>
+                      </a:solidFill>
+                      <a:prstDash val="solid"/>
+                      <a:round/>
+                      <a:headEnd type="none" w="med" len="med"/>
+                      <a:tailEnd type="none" w="med" len="med"/>
+                    </a:lnB>
+                  </a:tcPr>
+                </a:tc>
+              </a:tr>
+              <a:tr h="352425">
+                <a:tc>
+                  <a:txBody>
+                    <a:bodyPr/>
+                    <a:lstStyle/>
+                    <a:p>
+                      <a:pPr indent="0" marL="0">
+                        <a:buNone/>
+                      </a:pPr>
+                      <a:r>
+                        <a:rPr lang="en-US" sz="1200" dirty="0">
+                          <a:solidFill>
+                            <a:schemeClr val="tx1"/>
+                          </a:solidFill>
+                        </a:rPr>
+                        <a:t>RF12</a:t>
+                      </a:r>
+                      <a:endParaRPr lang="en-US" sz="1200" dirty="0"/>
+                    </a:p>
+                  </a:txBody>
+                  <a:tcPr marL="88900" marR="88900" marT="50800" marB="50800" anchor="ctr">
+                    <a:lnL w="9525" cap="flat" cmpd="sng" algn="ctr">
+                      <a:solidFill>
+                        <a:srgbClr val="C9D1DA"/>
+                      </a:solidFill>
+                      <a:prstDash val="solid"/>
+                      <a:round/>
+                      <a:headEnd type="none" w="med" len="med"/>
+                      <a:tailEnd type="none" w="med" len="med"/>
+                    </a:lnL>
+                    <a:lnR w="9525" cap="flat" cmpd="sng" algn="ctr">
+                      <a:solidFill>
+                        <a:srgbClr val="C9D1DA"/>
+                      </a:solidFill>
+                      <a:prstDash val="solid"/>
+                      <a:round/>
+                      <a:headEnd type="none" w="med" len="med"/>
+                      <a:tailEnd type="none" w="med" len="med"/>
+                    </a:lnR>
+                    <a:lnT w="9525" cap="flat" cmpd="sng" algn="ctr">
+                      <a:solidFill>
+                        <a:srgbClr val="C9D1DA"/>
+                      </a:solidFill>
+                      <a:prstDash val="solid"/>
+                      <a:round/>
+                      <a:headEnd type="none" w="med" len="med"/>
+                      <a:tailEnd type="none" w="med" len="med"/>
+                    </a:lnT>
+                    <a:lnB w="9525" cap="flat" cmpd="sng" algn="ctr">
+                      <a:solidFill>
+                        <a:srgbClr val="C9D1DA"/>
+                      </a:solidFill>
+                      <a:prstDash val="solid"/>
+                      <a:round/>
+                      <a:headEnd type="none" w="med" len="med"/>
+                      <a:tailEnd type="none" w="med" len="med"/>
+                    </a:lnB>
+                  </a:tcPr>
+                </a:tc>
+                <a:tc>
+                  <a:txBody>
+                    <a:bodyPr/>
+                    <a:lstStyle/>
+                    <a:p>
+                      <a:pPr indent="0" marL="0">
+                        <a:buNone/>
+                      </a:pPr>
+                      <a:r>
+                        <a:rPr lang="en-US" sz="1350" dirty="0">
+                          <a:solidFill>
+                            <a:schemeClr val="tx1"/>
+                          </a:solidFill>
+                        </a:rPr>
+                        <a:t>Notificação remota com foto</a:t>
+                      </a:r>
+                      <a:endParaRPr lang="en-US" sz="1350" dirty="0"/>
+                    </a:p>
+                  </a:txBody>
+                  <a:tcPr marL="88900" marR="88900" marT="50800" marB="50800" anchor="ctr">
+                    <a:lnL w="9525" cap="flat" cmpd="sng" algn="ctr">
+                      <a:solidFill>
+                        <a:srgbClr val="C9D1DA"/>
+                      </a:solidFill>
+                      <a:prstDash val="solid"/>
+                      <a:round/>
+                      <a:headEnd type="none" w="med" len="med"/>
+                      <a:tailEnd type="none" w="med" len="med"/>
+                    </a:lnL>
+                    <a:lnR w="9525" cap="flat" cmpd="sng" algn="ctr">
+                      <a:solidFill>
+                        <a:srgbClr val="C9D1DA"/>
+                      </a:solidFill>
+                      <a:prstDash val="solid"/>
+                      <a:round/>
+                      <a:headEnd type="none" w="med" len="med"/>
+                      <a:tailEnd type="none" w="med" len="med"/>
+                    </a:lnR>
+                    <a:lnT w="9525" cap="flat" cmpd="sng" algn="ctr">
+                      <a:solidFill>
+                        <a:srgbClr val="C9D1DA"/>
+                      </a:solidFill>
+                      <a:prstDash val="solid"/>
+                      <a:round/>
+                      <a:headEnd type="none" w="med" len="med"/>
+                      <a:tailEnd type="none" w="med" len="med"/>
+                    </a:lnT>
+                    <a:lnB w="9525" cap="flat" cmpd="sng" algn="ctr">
+                      <a:solidFill>
+                        <a:srgbClr val="C9D1DA"/>
+                      </a:solidFill>
+                      <a:prstDash val="solid"/>
+                      <a:round/>
+                      <a:headEnd type="none" w="med" len="med"/>
+                      <a:tailEnd type="none" w="med" len="med"/>
+                    </a:lnB>
+                  </a:tcPr>
+                </a:tc>
+                <a:tc>
+                  <a:txBody>
+                    <a:bodyPr/>
+                    <a:lstStyle/>
+                    <a:p>
+                      <a:pPr indent="0" marL="0">
+                        <a:buNone/>
+                      </a:pPr>
+                      <a:r>
+                        <a:rPr lang="en-US" sz="1050" b="1" dirty="0">
+                          <a:solidFill>
+                            <a:schemeClr val="accent3"/>
+                          </a:solidFill>
+                        </a:rPr>
+                        <a:t>VERIFICADO</a:t>
+                      </a:r>
+                      <a:endParaRPr lang="en-US" sz="1050" dirty="0"/>
+                    </a:p>
+                  </a:txBody>
+                  <a:tcPr marL="88900" marR="88900" marT="50800" marB="50800" anchor="ctr">
+                    <a:lnL w="9525" cap="flat" cmpd="sng" algn="ctr">
+                      <a:solidFill>
+                        <a:srgbClr val="C9D1DA"/>
+                      </a:solidFill>
+                      <a:prstDash val="solid"/>
+                      <a:round/>
+                      <a:headEnd type="none" w="med" len="med"/>
+                      <a:tailEnd type="none" w="med" len="med"/>
+                    </a:lnL>
+                    <a:lnR w="9525" cap="flat" cmpd="sng" algn="ctr">
+                      <a:solidFill>
+                        <a:srgbClr val="C9D1DA"/>
+                      </a:solidFill>
+                      <a:prstDash val="solid"/>
+                      <a:round/>
+                      <a:headEnd type="none" w="med" len="med"/>
+                      <a:tailEnd type="none" w="med" len="med"/>
+                    </a:lnR>
+                    <a:lnT w="9525" cap="flat" cmpd="sng" algn="ctr">
+                      <a:solidFill>
+                        <a:srgbClr val="C9D1DA"/>
+                      </a:solidFill>
+                      <a:prstDash val="solid"/>
+                      <a:round/>
+                      <a:headEnd type="none" w="med" len="med"/>
+                      <a:tailEnd type="none" w="med" len="med"/>
+                    </a:lnT>
+                    <a:lnB w="9525" cap="flat" cmpd="sng" algn="ctr">
+                      <a:solidFill>
+                        <a:srgbClr val="C9D1DA"/>
+                      </a:solidFill>
+                      <a:prstDash val="solid"/>
+                      <a:round/>
+                      <a:headEnd type="none" w="med" len="med"/>
+                      <a:tailEnd type="none" w="med" len="med"/>
+                    </a:lnB>
                   </a:tcPr>
                 </a:tc>
               </a:tr>
@@ -10993,50 +12562,6 @@
           </a:graphicData>
         </a:graphic>
       </p:graphicFrame>
-      <p:sp>
-        <p:nvSpPr>
-          <p:cNvPr id="7" name="Text 4"/>
-          <p:cNvSpPr/>
-          <p:nvPr/>
-        </p:nvSpPr>
-        <p:spPr>
-          <a:xfrm>
-            <a:off x="6286500" y="1485900"/>
-            <a:ext cx="5219700" cy="2895600"/>
-          </a:xfrm>
-          <a:prstGeom prst="roundRect">
-            <a:avLst>
-              <a:gd name="adj" fmla="val 3947"/>
-            </a:avLst>
-          </a:prstGeom>
-          <a:solidFill>
-            <a:schemeClr val="bg1"/>
-          </a:solidFill>
-          <a:ln w="19050">
-            <a:solidFill>
-              <a:srgbClr val="C9D1DA"/>
-            </a:solidFill>
-          </a:ln>
-        </p:spPr>
-        <p:txBody>
-          <a:bodyPr wrap="square" lIns="203200" tIns="165100" rIns="203200" bIns="165100" rtlCol="0" anchor="t"/>
-          <a:lstStyle/>
-          <a:p>
-            <a:pPr algn="l" indent="0" marL="0">
-              <a:buNone/>
-            </a:pPr>
-            <a:r>
-              <a:rPr lang="en-US" sz="1725" b="1" dirty="0">
-                <a:solidFill>
-                  <a:schemeClr val="accent1"/>
-                </a:solidFill>
-              </a:rPr>
-              <a:t>Não funcionais</a:t>
-            </a:r>
-            <a:endParaRPr lang="en-US" sz="1425" dirty="0"/>
-          </a:p>
-        </p:txBody>
-      </p:sp>
       <p:graphicFrame>
         <p:nvGraphicFramePr>
           <p:cNvPr id="11" name="Table 1"/>
@@ -11052,18 +12577,19 @@
           </p:nvPr>
         </p:nvGraphicFramePr>
         <p:xfrm>
-          <a:off x="6457950" y="2000250"/>
-          <a:ext cx="4876800" cy="914400"/>
+          <a:off x="6286500" y="1485900"/>
+          <a:ext cx="5219700" cy="914400"/>
         </p:xfrm>
         <a:graphic>
           <a:graphicData uri="http://schemas.openxmlformats.org/drawingml/2006/table">
             <a:tbl>
               <a:tblPr/>
               <a:tblGrid>
-                <a:gridCol w="4114800"/>
-                <a:gridCol w="762000"/>
+                <a:gridCol w="666750"/>
+                <a:gridCol w="3352800"/>
+                <a:gridCol w="1200150"/>
               </a:tblGrid>
-              <a:tr h="361950">
+              <a:tr h="352425">
                 <a:tc>
                   <a:txBody>
                     <a:bodyPr/>
@@ -11073,105 +12599,47 @@
                         <a:buNone/>
                       </a:pPr>
                       <a:r>
-                        <a:rPr lang="en-US" sz="1425" dirty="0">
+                        <a:rPr lang="en-US" sz="1350" b="1" dirty="0">
                           <a:solidFill>
                             <a:schemeClr val="tx1"/>
                           </a:solidFill>
                         </a:rPr>
-                        <a:t>Tudo processado no ESP32</a:t>
+                        <a:t>ID</a:t>
                       </a:r>
-                      <a:endParaRPr lang="en-US" sz="1425" dirty="0"/>
+                      <a:endParaRPr lang="en-US" sz="1350" dirty="0"/>
                     </a:p>
                   </a:txBody>
                   <a:tcPr marL="88900" marR="88900" marT="50800" marB="50800" anchor="ctr">
-                    <a:lnL w="38100" cap="flat" cmpd="sng" algn="ctr">
-                      <a:solidFill>
-                        <a:srgbClr val="FFFFFF"/>
+                    <a:lnL w="9525" cap="flat" cmpd="sng" algn="ctr">
+                      <a:solidFill>
+                        <a:srgbClr val="C9D1DA"/>
                       </a:solidFill>
                       <a:prstDash val="solid"/>
                       <a:round/>
                       <a:headEnd type="none" w="med" len="med"/>
                       <a:tailEnd type="none" w="med" len="med"/>
                     </a:lnL>
-                    <a:lnR w="38100" cap="flat" cmpd="sng" algn="ctr">
-                      <a:solidFill>
-                        <a:srgbClr val="FFFFFF"/>
+                    <a:lnR w="9525" cap="flat" cmpd="sng" algn="ctr">
+                      <a:solidFill>
+                        <a:srgbClr val="C9D1DA"/>
                       </a:solidFill>
                       <a:prstDash val="solid"/>
                       <a:round/>
                       <a:headEnd type="none" w="med" len="med"/>
                       <a:tailEnd type="none" w="med" len="med"/>
                     </a:lnR>
-                    <a:lnT w="38100" cap="flat" cmpd="sng" algn="ctr">
-                      <a:solidFill>
-                        <a:srgbClr val="FFFFFF"/>
+                    <a:lnT w="9525" cap="flat" cmpd="sng" algn="ctr">
+                      <a:solidFill>
+                        <a:srgbClr val="C9D1DA"/>
                       </a:solidFill>
                       <a:prstDash val="solid"/>
                       <a:round/>
                       <a:headEnd type="none" w="med" len="med"/>
                       <a:tailEnd type="none" w="med" len="med"/>
                     </a:lnT>
-                    <a:lnB w="38100" cap="flat" cmpd="sng" algn="ctr">
-                      <a:solidFill>
-                        <a:srgbClr val="FFFFFF"/>
-                      </a:solidFill>
-                      <a:prstDash val="solid"/>
-                      <a:round/>
-                      <a:headEnd type="none" w="med" len="med"/>
-                      <a:tailEnd type="none" w="med" len="med"/>
-                    </a:lnB>
-                  </a:tcPr>
-                </a:tc>
-                <a:tc>
-                  <a:txBody>
-                    <a:bodyPr/>
-                    <a:lstStyle/>
-                    <a:p>
-                      <a:pPr algn="ctr" indent="0" marL="0">
-                        <a:buNone/>
-                      </a:pPr>
-                      <a:r>
-                        <a:rPr lang="en-US" sz="1050" b="1" dirty="0">
-                          <a:solidFill>
-                            <a:schemeClr val="bg1"/>
-                          </a:solidFill>
-                        </a:rPr>
-                        <a:t>OK</a:t>
-                      </a:r>
-                      <a:endParaRPr lang="en-US" sz="1050" dirty="0"/>
-                    </a:p>
-                  </a:txBody>
-                  <a:tcPr marL="88900" marR="88900" marT="50800" marB="50800" anchor="ctr">
-                    <a:lnL w="38100" cap="flat" cmpd="sng" algn="ctr">
-                      <a:solidFill>
-                        <a:srgbClr val="FFFFFF"/>
-                      </a:solidFill>
-                      <a:prstDash val="solid"/>
-                      <a:round/>
-                      <a:headEnd type="none" w="med" len="med"/>
-                      <a:tailEnd type="none" w="med" len="med"/>
-                    </a:lnL>
-                    <a:lnR w="38100" cap="flat" cmpd="sng" algn="ctr">
-                      <a:solidFill>
-                        <a:srgbClr val="FFFFFF"/>
-                      </a:solidFill>
-                      <a:prstDash val="solid"/>
-                      <a:round/>
-                      <a:headEnd type="none" w="med" len="med"/>
-                      <a:tailEnd type="none" w="med" len="med"/>
-                    </a:lnR>
-                    <a:lnT w="38100" cap="flat" cmpd="sng" algn="ctr">
-                      <a:solidFill>
-                        <a:srgbClr val="FFFFFF"/>
-                      </a:solidFill>
-                      <a:prstDash val="solid"/>
-                      <a:round/>
-                      <a:headEnd type="none" w="med" len="med"/>
-                      <a:tailEnd type="none" w="med" len="med"/>
-                    </a:lnT>
-                    <a:lnB w="38100" cap="flat" cmpd="sng" algn="ctr">
-                      <a:solidFill>
-                        <a:srgbClr val="FFFFFF"/>
+                    <a:lnB w="9525" cap="flat" cmpd="sng" algn="ctr">
+                      <a:solidFill>
+                        <a:srgbClr val="C9D1DA"/>
                       </a:solidFill>
                       <a:prstDash val="solid"/>
                       <a:round/>
@@ -11179,12 +12647,10 @@
                       <a:tailEnd type="none" w="med" len="med"/>
                     </a:lnB>
                     <a:solidFill>
-                      <a:schemeClr val="accent3"/>
+                      <a:schemeClr val="bg2"/>
                     </a:solidFill>
                   </a:tcPr>
                 </a:tc>
-              </a:tr>
-              <a:tr h="361950">
                 <a:tc>
                   <a:txBody>
                     <a:bodyPr/>
@@ -11194,116 +12660,47 @@
                         <a:buNone/>
                       </a:pPr>
                       <a:r>
-                        <a:rPr lang="en-US" sz="1425" dirty="0">
+                        <a:rPr lang="en-US" sz="1350" b="1" dirty="0">
                           <a:solidFill>
                             <a:schemeClr val="tx1"/>
                           </a:solidFill>
                         </a:rPr>
-                        <a:t>Leitura ≤ 2 s → </a:t>
+                        <a:t>Requisito não funcional</a:t>
                       </a:r>
-                      <a:pPr indent="0" marL="0">
-                        <a:buNone/>
-                      </a:pPr>
-                      <a:r>
-                        <a:rPr lang="en-US" sz="1425" b="1" dirty="0">
-                          <a:solidFill>
-                            <a:schemeClr val="tx1"/>
-                          </a:solidFill>
-                        </a:rPr>
-                        <a:t>168–220 ms</a:t>
-                      </a:r>
-                      <a:endParaRPr lang="en-US" sz="1425" dirty="0"/>
+                      <a:endParaRPr lang="en-US" sz="1350" dirty="0"/>
                     </a:p>
                   </a:txBody>
                   <a:tcPr marL="88900" marR="88900" marT="50800" marB="50800" anchor="ctr">
-                    <a:lnL w="38100" cap="flat" cmpd="sng" algn="ctr">
-                      <a:solidFill>
-                        <a:srgbClr val="FFFFFF"/>
+                    <a:lnL w="9525" cap="flat" cmpd="sng" algn="ctr">
+                      <a:solidFill>
+                        <a:srgbClr val="C9D1DA"/>
                       </a:solidFill>
                       <a:prstDash val="solid"/>
                       <a:round/>
                       <a:headEnd type="none" w="med" len="med"/>
                       <a:tailEnd type="none" w="med" len="med"/>
                     </a:lnL>
-                    <a:lnR w="38100" cap="flat" cmpd="sng" algn="ctr">
-                      <a:solidFill>
-                        <a:srgbClr val="FFFFFF"/>
+                    <a:lnR w="9525" cap="flat" cmpd="sng" algn="ctr">
+                      <a:solidFill>
+                        <a:srgbClr val="C9D1DA"/>
                       </a:solidFill>
                       <a:prstDash val="solid"/>
                       <a:round/>
                       <a:headEnd type="none" w="med" len="med"/>
                       <a:tailEnd type="none" w="med" len="med"/>
                     </a:lnR>
-                    <a:lnT w="38100" cap="flat" cmpd="sng" algn="ctr">
-                      <a:solidFill>
-                        <a:srgbClr val="FFFFFF"/>
+                    <a:lnT w="9525" cap="flat" cmpd="sng" algn="ctr">
+                      <a:solidFill>
+                        <a:srgbClr val="C9D1DA"/>
                       </a:solidFill>
                       <a:prstDash val="solid"/>
                       <a:round/>
                       <a:headEnd type="none" w="med" len="med"/>
                       <a:tailEnd type="none" w="med" len="med"/>
                     </a:lnT>
-                    <a:lnB w="38100" cap="flat" cmpd="sng" algn="ctr">
-                      <a:solidFill>
-                        <a:srgbClr val="FFFFFF"/>
-                      </a:solidFill>
-                      <a:prstDash val="solid"/>
-                      <a:round/>
-                      <a:headEnd type="none" w="med" len="med"/>
-                      <a:tailEnd type="none" w="med" len="med"/>
-                    </a:lnB>
-                  </a:tcPr>
-                </a:tc>
-                <a:tc>
-                  <a:txBody>
-                    <a:bodyPr/>
-                    <a:lstStyle/>
-                    <a:p>
-                      <a:pPr algn="ctr" indent="0" marL="0">
-                        <a:buNone/>
-                      </a:pPr>
-                      <a:r>
-                        <a:rPr lang="en-US" sz="1050" b="1" dirty="0">
-                          <a:solidFill>
-                            <a:schemeClr val="bg1"/>
-                          </a:solidFill>
-                        </a:rPr>
-                        <a:t>OK</a:t>
-                      </a:r>
-                      <a:endParaRPr lang="en-US" sz="1050" dirty="0"/>
-                    </a:p>
-                  </a:txBody>
-                  <a:tcPr marL="88900" marR="88900" marT="50800" marB="50800" anchor="ctr">
-                    <a:lnL w="38100" cap="flat" cmpd="sng" algn="ctr">
-                      <a:solidFill>
-                        <a:srgbClr val="FFFFFF"/>
-                      </a:solidFill>
-                      <a:prstDash val="solid"/>
-                      <a:round/>
-                      <a:headEnd type="none" w="med" len="med"/>
-                      <a:tailEnd type="none" w="med" len="med"/>
-                    </a:lnL>
-                    <a:lnR w="38100" cap="flat" cmpd="sng" algn="ctr">
-                      <a:solidFill>
-                        <a:srgbClr val="FFFFFF"/>
-                      </a:solidFill>
-                      <a:prstDash val="solid"/>
-                      <a:round/>
-                      <a:headEnd type="none" w="med" len="med"/>
-                      <a:tailEnd type="none" w="med" len="med"/>
-                    </a:lnR>
-                    <a:lnT w="38100" cap="flat" cmpd="sng" algn="ctr">
-                      <a:solidFill>
-                        <a:srgbClr val="FFFFFF"/>
-                      </a:solidFill>
-                      <a:prstDash val="solid"/>
-                      <a:round/>
-                      <a:headEnd type="none" w="med" len="med"/>
-                      <a:tailEnd type="none" w="med" len="med"/>
-                    </a:lnT>
-                    <a:lnB w="38100" cap="flat" cmpd="sng" algn="ctr">
-                      <a:solidFill>
-                        <a:srgbClr val="FFFFFF"/>
+                    <a:lnB w="9525" cap="flat" cmpd="sng" algn="ctr">
+                      <a:solidFill>
+                        <a:srgbClr val="C9D1DA"/>
                       </a:solidFill>
                       <a:prstDash val="solid"/>
                       <a:round/>
@@ -11311,12 +12708,10 @@
                       <a:tailEnd type="none" w="med" len="med"/>
                     </a:lnB>
                     <a:solidFill>
-                      <a:schemeClr val="accent3"/>
+                      <a:schemeClr val="bg2"/>
                     </a:solidFill>
                   </a:tcPr>
                 </a:tc>
-              </a:tr>
-              <a:tr h="361950">
                 <a:tc>
                   <a:txBody>
                     <a:bodyPr/>
@@ -11326,105 +12721,47 @@
                         <a:buNone/>
                       </a:pPr>
                       <a:r>
-                        <a:rPr lang="en-US" sz="1425" dirty="0">
+                        <a:rPr lang="en-US" sz="1350" b="1" dirty="0">
                           <a:solidFill>
                             <a:schemeClr val="tx1"/>
                           </a:solidFill>
                         </a:rPr>
-                        <a:t>≥ 90% de acerto por classe</a:t>
+                        <a:t>Situação</a:t>
                       </a:r>
-                      <a:endParaRPr lang="en-US" sz="1425" dirty="0"/>
+                      <a:endParaRPr lang="en-US" sz="1350" dirty="0"/>
                     </a:p>
                   </a:txBody>
                   <a:tcPr marL="88900" marR="88900" marT="50800" marB="50800" anchor="ctr">
-                    <a:lnL w="38100" cap="flat" cmpd="sng" algn="ctr">
-                      <a:solidFill>
-                        <a:srgbClr val="FFFFFF"/>
+                    <a:lnL w="9525" cap="flat" cmpd="sng" algn="ctr">
+                      <a:solidFill>
+                        <a:srgbClr val="C9D1DA"/>
                       </a:solidFill>
                       <a:prstDash val="solid"/>
                       <a:round/>
                       <a:headEnd type="none" w="med" len="med"/>
                       <a:tailEnd type="none" w="med" len="med"/>
                     </a:lnL>
-                    <a:lnR w="38100" cap="flat" cmpd="sng" algn="ctr">
-                      <a:solidFill>
-                        <a:srgbClr val="FFFFFF"/>
+                    <a:lnR w="9525" cap="flat" cmpd="sng" algn="ctr">
+                      <a:solidFill>
+                        <a:srgbClr val="C9D1DA"/>
                       </a:solidFill>
                       <a:prstDash val="solid"/>
                       <a:round/>
                       <a:headEnd type="none" w="med" len="med"/>
                       <a:tailEnd type="none" w="med" len="med"/>
                     </a:lnR>
-                    <a:lnT w="38100" cap="flat" cmpd="sng" algn="ctr">
-                      <a:solidFill>
-                        <a:srgbClr val="FFFFFF"/>
+                    <a:lnT w="9525" cap="flat" cmpd="sng" algn="ctr">
+                      <a:solidFill>
+                        <a:srgbClr val="C9D1DA"/>
                       </a:solidFill>
                       <a:prstDash val="solid"/>
                       <a:round/>
                       <a:headEnd type="none" w="med" len="med"/>
                       <a:tailEnd type="none" w="med" len="med"/>
                     </a:lnT>
-                    <a:lnB w="38100" cap="flat" cmpd="sng" algn="ctr">
-                      <a:solidFill>
-                        <a:srgbClr val="FFFFFF"/>
-                      </a:solidFill>
-                      <a:prstDash val="solid"/>
-                      <a:round/>
-                      <a:headEnd type="none" w="med" len="med"/>
-                      <a:tailEnd type="none" w="med" len="med"/>
-                    </a:lnB>
-                  </a:tcPr>
-                </a:tc>
-                <a:tc>
-                  <a:txBody>
-                    <a:bodyPr/>
-                    <a:lstStyle/>
-                    <a:p>
-                      <a:pPr algn="ctr" indent="0" marL="0">
-                        <a:buNone/>
-                      </a:pPr>
-                      <a:r>
-                        <a:rPr lang="en-US" sz="1050" b="1" dirty="0">
-                          <a:solidFill>
-                            <a:schemeClr val="bg1"/>
-                          </a:solidFill>
-                        </a:rPr>
-                        <a:t>ENSAIO</a:t>
-                      </a:r>
-                      <a:endParaRPr lang="en-US" sz="1050" dirty="0"/>
-                    </a:p>
-                  </a:txBody>
-                  <a:tcPr marL="88900" marR="88900" marT="50800" marB="50800" anchor="ctr">
-                    <a:lnL w="38100" cap="flat" cmpd="sng" algn="ctr">
-                      <a:solidFill>
-                        <a:srgbClr val="FFFFFF"/>
-                      </a:solidFill>
-                      <a:prstDash val="solid"/>
-                      <a:round/>
-                      <a:headEnd type="none" w="med" len="med"/>
-                      <a:tailEnd type="none" w="med" len="med"/>
-                    </a:lnL>
-                    <a:lnR w="38100" cap="flat" cmpd="sng" algn="ctr">
-                      <a:solidFill>
-                        <a:srgbClr val="FFFFFF"/>
-                      </a:solidFill>
-                      <a:prstDash val="solid"/>
-                      <a:round/>
-                      <a:headEnd type="none" w="med" len="med"/>
-                      <a:tailEnd type="none" w="med" len="med"/>
-                    </a:lnR>
-                    <a:lnT w="38100" cap="flat" cmpd="sng" algn="ctr">
-                      <a:solidFill>
-                        <a:srgbClr val="FFFFFF"/>
-                      </a:solidFill>
-                      <a:prstDash val="solid"/>
-                      <a:round/>
-                      <a:headEnd type="none" w="med" len="med"/>
-                      <a:tailEnd type="none" w="med" len="med"/>
-                    </a:lnT>
-                    <a:lnB w="38100" cap="flat" cmpd="sng" algn="ctr">
-                      <a:solidFill>
-                        <a:srgbClr val="FFFFFF"/>
+                    <a:lnB w="9525" cap="flat" cmpd="sng" algn="ctr">
+                      <a:solidFill>
+                        <a:srgbClr val="C9D1DA"/>
                       </a:solidFill>
                       <a:prstDash val="solid"/>
                       <a:round/>
@@ -11432,12 +12769,12 @@
                       <a:tailEnd type="none" w="med" len="med"/>
                     </a:lnB>
                     <a:solidFill>
-                      <a:schemeClr val="accent6"/>
+                      <a:schemeClr val="bg2"/>
                     </a:solidFill>
                   </a:tcPr>
                 </a:tc>
               </a:tr>
-              <a:tr h="361950">
+              <a:tr h="352425">
                 <a:tc>
                   <a:txBody>
                     <a:bodyPr/>
@@ -11447,47 +12784,47 @@
                         <a:buNone/>
                       </a:pPr>
                       <a:r>
-                        <a:rPr lang="en-US" sz="1425" dirty="0">
+                        <a:rPr lang="en-US" sz="1200" dirty="0">
                           <a:solidFill>
                             <a:schemeClr val="tx1"/>
                           </a:solidFill>
                         </a:rPr>
-                        <a:t>20 ciclos sem reinício</a:t>
+                        <a:t>RNF01</a:t>
                       </a:r>
-                      <a:endParaRPr lang="en-US" sz="1425" dirty="0"/>
+                      <a:endParaRPr lang="en-US" sz="1200" dirty="0"/>
                     </a:p>
                   </a:txBody>
                   <a:tcPr marL="88900" marR="88900" marT="50800" marB="50800" anchor="ctr">
-                    <a:lnL w="38100" cap="flat" cmpd="sng" algn="ctr">
-                      <a:solidFill>
-                        <a:srgbClr val="FFFFFF"/>
+                    <a:lnL w="9525" cap="flat" cmpd="sng" algn="ctr">
+                      <a:solidFill>
+                        <a:srgbClr val="C9D1DA"/>
                       </a:solidFill>
                       <a:prstDash val="solid"/>
                       <a:round/>
                       <a:headEnd type="none" w="med" len="med"/>
                       <a:tailEnd type="none" w="med" len="med"/>
                     </a:lnL>
-                    <a:lnR w="38100" cap="flat" cmpd="sng" algn="ctr">
-                      <a:solidFill>
-                        <a:srgbClr val="FFFFFF"/>
+                    <a:lnR w="9525" cap="flat" cmpd="sng" algn="ctr">
+                      <a:solidFill>
+                        <a:srgbClr val="C9D1DA"/>
                       </a:solidFill>
                       <a:prstDash val="solid"/>
                       <a:round/>
                       <a:headEnd type="none" w="med" len="med"/>
                       <a:tailEnd type="none" w="med" len="med"/>
                     </a:lnR>
-                    <a:lnT w="38100" cap="flat" cmpd="sng" algn="ctr">
-                      <a:solidFill>
-                        <a:srgbClr val="FFFFFF"/>
+                    <a:lnT w="9525" cap="flat" cmpd="sng" algn="ctr">
+                      <a:solidFill>
+                        <a:srgbClr val="C9D1DA"/>
                       </a:solidFill>
                       <a:prstDash val="solid"/>
                       <a:round/>
                       <a:headEnd type="none" w="med" len="med"/>
                       <a:tailEnd type="none" w="med" len="med"/>
                     </a:lnT>
-                    <a:lnB w="38100" cap="flat" cmpd="sng" algn="ctr">
-                      <a:solidFill>
-                        <a:srgbClr val="FFFFFF"/>
+                    <a:lnB w="9525" cap="flat" cmpd="sng" algn="ctr">
+                      <a:solidFill>
+                        <a:srgbClr val="C9D1DA"/>
                       </a:solidFill>
                       <a:prstDash val="solid"/>
                       <a:round/>
@@ -11496,69 +12833,6 @@
                     </a:lnB>
                   </a:tcPr>
                 </a:tc>
-                <a:tc>
-                  <a:txBody>
-                    <a:bodyPr/>
-                    <a:lstStyle/>
-                    <a:p>
-                      <a:pPr algn="ctr" indent="0" marL="0">
-                        <a:buNone/>
-                      </a:pPr>
-                      <a:r>
-                        <a:rPr lang="en-US" sz="1050" b="1" dirty="0">
-                          <a:solidFill>
-                            <a:schemeClr val="bg1"/>
-                          </a:solidFill>
-                        </a:rPr>
-                        <a:t>ENSAIO</a:t>
-                      </a:r>
-                      <a:endParaRPr lang="en-US" sz="1050" dirty="0"/>
-                    </a:p>
-                  </a:txBody>
-                  <a:tcPr marL="88900" marR="88900" marT="50800" marB="50800" anchor="ctr">
-                    <a:lnL w="38100" cap="flat" cmpd="sng" algn="ctr">
-                      <a:solidFill>
-                        <a:srgbClr val="FFFFFF"/>
-                      </a:solidFill>
-                      <a:prstDash val="solid"/>
-                      <a:round/>
-                      <a:headEnd type="none" w="med" len="med"/>
-                      <a:tailEnd type="none" w="med" len="med"/>
-                    </a:lnL>
-                    <a:lnR w="38100" cap="flat" cmpd="sng" algn="ctr">
-                      <a:solidFill>
-                        <a:srgbClr val="FFFFFF"/>
-                      </a:solidFill>
-                      <a:prstDash val="solid"/>
-                      <a:round/>
-                      <a:headEnd type="none" w="med" len="med"/>
-                      <a:tailEnd type="none" w="med" len="med"/>
-                    </a:lnR>
-                    <a:lnT w="38100" cap="flat" cmpd="sng" algn="ctr">
-                      <a:solidFill>
-                        <a:srgbClr val="FFFFFF"/>
-                      </a:solidFill>
-                      <a:prstDash val="solid"/>
-                      <a:round/>
-                      <a:headEnd type="none" w="med" len="med"/>
-                      <a:tailEnd type="none" w="med" len="med"/>
-                    </a:lnT>
-                    <a:lnB w="38100" cap="flat" cmpd="sng" algn="ctr">
-                      <a:solidFill>
-                        <a:srgbClr val="FFFFFF"/>
-                      </a:solidFill>
-                      <a:prstDash val="solid"/>
-                      <a:round/>
-                      <a:headEnd type="none" w="med" len="med"/>
-                      <a:tailEnd type="none" w="med" len="med"/>
-                    </a:lnB>
-                    <a:solidFill>
-                      <a:schemeClr val="accent6"/>
-                    </a:solidFill>
-                  </a:tcPr>
-                </a:tc>
-              </a:tr>
-              <a:tr h="361950">
                 <a:tc>
                   <a:txBody>
                     <a:bodyPr/>
@@ -11568,47 +12842,47 @@
                         <a:buNone/>
                       </a:pPr>
                       <a:r>
-                        <a:rPr lang="en-US" sz="1425" dirty="0">
+                        <a:rPr lang="en-US" sz="1350" dirty="0">
                           <a:solidFill>
                             <a:schemeClr val="tx1"/>
                           </a:solidFill>
                         </a:rPr>
-                        <a:t>Senhas e token fora dos registros</a:t>
+                        <a:t>Processamento embarcado no ESP32</a:t>
                       </a:r>
-                      <a:endParaRPr lang="en-US" sz="1425" dirty="0"/>
+                      <a:endParaRPr lang="en-US" sz="1350" dirty="0"/>
                     </a:p>
                   </a:txBody>
                   <a:tcPr marL="88900" marR="88900" marT="50800" marB="50800" anchor="ctr">
-                    <a:lnL w="38100" cap="flat" cmpd="sng" algn="ctr">
-                      <a:solidFill>
-                        <a:srgbClr val="FFFFFF"/>
+                    <a:lnL w="9525" cap="flat" cmpd="sng" algn="ctr">
+                      <a:solidFill>
+                        <a:srgbClr val="C9D1DA"/>
                       </a:solidFill>
                       <a:prstDash val="solid"/>
                       <a:round/>
                       <a:headEnd type="none" w="med" len="med"/>
                       <a:tailEnd type="none" w="med" len="med"/>
                     </a:lnL>
-                    <a:lnR w="38100" cap="flat" cmpd="sng" algn="ctr">
-                      <a:solidFill>
-                        <a:srgbClr val="FFFFFF"/>
+                    <a:lnR w="9525" cap="flat" cmpd="sng" algn="ctr">
+                      <a:solidFill>
+                        <a:srgbClr val="C9D1DA"/>
                       </a:solidFill>
                       <a:prstDash val="solid"/>
                       <a:round/>
                       <a:headEnd type="none" w="med" len="med"/>
                       <a:tailEnd type="none" w="med" len="med"/>
                     </a:lnR>
-                    <a:lnT w="38100" cap="flat" cmpd="sng" algn="ctr">
-                      <a:solidFill>
-                        <a:srgbClr val="FFFFFF"/>
+                    <a:lnT w="9525" cap="flat" cmpd="sng" algn="ctr">
+                      <a:solidFill>
+                        <a:srgbClr val="C9D1DA"/>
                       </a:solidFill>
                       <a:prstDash val="solid"/>
                       <a:round/>
                       <a:headEnd type="none" w="med" len="med"/>
                       <a:tailEnd type="none" w="med" len="med"/>
                     </a:lnT>
-                    <a:lnB w="38100" cap="flat" cmpd="sng" algn="ctr">
-                      <a:solidFill>
-                        <a:srgbClr val="FFFFFF"/>
+                    <a:lnB w="9525" cap="flat" cmpd="sng" algn="ctr">
+                      <a:solidFill>
+                        <a:srgbClr val="C9D1DA"/>
                       </a:solidFill>
                       <a:prstDash val="solid"/>
                       <a:round/>
@@ -11617,69 +12891,6 @@
                     </a:lnB>
                   </a:tcPr>
                 </a:tc>
-                <a:tc>
-                  <a:txBody>
-                    <a:bodyPr/>
-                    <a:lstStyle/>
-                    <a:p>
-                      <a:pPr algn="ctr" indent="0" marL="0">
-                        <a:buNone/>
-                      </a:pPr>
-                      <a:r>
-                        <a:rPr lang="en-US" sz="1050" b="1" dirty="0">
-                          <a:solidFill>
-                            <a:schemeClr val="bg1"/>
-                          </a:solidFill>
-                        </a:rPr>
-                        <a:t>OK</a:t>
-                      </a:r>
-                      <a:endParaRPr lang="en-US" sz="1050" dirty="0"/>
-                    </a:p>
-                  </a:txBody>
-                  <a:tcPr marL="88900" marR="88900" marT="50800" marB="50800" anchor="ctr">
-                    <a:lnL w="38100" cap="flat" cmpd="sng" algn="ctr">
-                      <a:solidFill>
-                        <a:srgbClr val="FFFFFF"/>
-                      </a:solidFill>
-                      <a:prstDash val="solid"/>
-                      <a:round/>
-                      <a:headEnd type="none" w="med" len="med"/>
-                      <a:tailEnd type="none" w="med" len="med"/>
-                    </a:lnL>
-                    <a:lnR w="38100" cap="flat" cmpd="sng" algn="ctr">
-                      <a:solidFill>
-                        <a:srgbClr val="FFFFFF"/>
-                      </a:solidFill>
-                      <a:prstDash val="solid"/>
-                      <a:round/>
-                      <a:headEnd type="none" w="med" len="med"/>
-                      <a:tailEnd type="none" w="med" len="med"/>
-                    </a:lnR>
-                    <a:lnT w="38100" cap="flat" cmpd="sng" algn="ctr">
-                      <a:solidFill>
-                        <a:srgbClr val="FFFFFF"/>
-                      </a:solidFill>
-                      <a:prstDash val="solid"/>
-                      <a:round/>
-                      <a:headEnd type="none" w="med" len="med"/>
-                      <a:tailEnd type="none" w="med" len="med"/>
-                    </a:lnT>
-                    <a:lnB w="38100" cap="flat" cmpd="sng" algn="ctr">
-                      <a:solidFill>
-                        <a:srgbClr val="FFFFFF"/>
-                      </a:solidFill>
-                      <a:prstDash val="solid"/>
-                      <a:round/>
-                      <a:headEnd type="none" w="med" len="med"/>
-                      <a:tailEnd type="none" w="med" len="med"/>
-                    </a:lnB>
-                    <a:solidFill>
-                      <a:schemeClr val="accent3"/>
-                    </a:solidFill>
-                  </a:tcPr>
-                </a:tc>
-              </a:tr>
-              <a:tr h="361950">
                 <a:tc>
                   <a:txBody>
                     <a:bodyPr/>
@@ -11689,47 +12900,107 @@
                         <a:buNone/>
                       </a:pPr>
                       <a:r>
-                        <a:rPr lang="en-US" sz="1425" dirty="0">
+                        <a:rPr lang="en-US" sz="1050" b="1" dirty="0">
+                          <a:solidFill>
+                            <a:schemeClr val="accent3"/>
+                          </a:solidFill>
+                        </a:rPr>
+                        <a:t>VERIFICADO</a:t>
+                      </a:r>
+                      <a:endParaRPr lang="en-US" sz="1050" dirty="0"/>
+                    </a:p>
+                  </a:txBody>
+                  <a:tcPr marL="88900" marR="88900" marT="50800" marB="50800" anchor="ctr">
+                    <a:lnL w="9525" cap="flat" cmpd="sng" algn="ctr">
+                      <a:solidFill>
+                        <a:srgbClr val="C9D1DA"/>
+                      </a:solidFill>
+                      <a:prstDash val="solid"/>
+                      <a:round/>
+                      <a:headEnd type="none" w="med" len="med"/>
+                      <a:tailEnd type="none" w="med" len="med"/>
+                    </a:lnL>
+                    <a:lnR w="9525" cap="flat" cmpd="sng" algn="ctr">
+                      <a:solidFill>
+                        <a:srgbClr val="C9D1DA"/>
+                      </a:solidFill>
+                      <a:prstDash val="solid"/>
+                      <a:round/>
+                      <a:headEnd type="none" w="med" len="med"/>
+                      <a:tailEnd type="none" w="med" len="med"/>
+                    </a:lnR>
+                    <a:lnT w="9525" cap="flat" cmpd="sng" algn="ctr">
+                      <a:solidFill>
+                        <a:srgbClr val="C9D1DA"/>
+                      </a:solidFill>
+                      <a:prstDash val="solid"/>
+                      <a:round/>
+                      <a:headEnd type="none" w="med" len="med"/>
+                      <a:tailEnd type="none" w="med" len="med"/>
+                    </a:lnT>
+                    <a:lnB w="9525" cap="flat" cmpd="sng" algn="ctr">
+                      <a:solidFill>
+                        <a:srgbClr val="C9D1DA"/>
+                      </a:solidFill>
+                      <a:prstDash val="solid"/>
+                      <a:round/>
+                      <a:headEnd type="none" w="med" len="med"/>
+                      <a:tailEnd type="none" w="med" len="med"/>
+                    </a:lnB>
+                  </a:tcPr>
+                </a:tc>
+              </a:tr>
+              <a:tr h="352425">
+                <a:tc>
+                  <a:txBody>
+                    <a:bodyPr/>
+                    <a:lstStyle/>
+                    <a:p>
+                      <a:pPr indent="0" marL="0">
+                        <a:buNone/>
+                      </a:pPr>
+                      <a:r>
+                        <a:rPr lang="en-US" sz="1200" dirty="0">
                           <a:solidFill>
                             <a:schemeClr val="tx1"/>
                           </a:solidFill>
                         </a:rPr>
-                        <a:t>Ferramentas no Windows e no macOS</a:t>
+                        <a:t>RNF02</a:t>
                       </a:r>
-                      <a:endParaRPr lang="en-US" sz="1425" dirty="0"/>
+                      <a:endParaRPr lang="en-US" sz="1200" dirty="0"/>
                     </a:p>
                   </a:txBody>
                   <a:tcPr marL="88900" marR="88900" marT="50800" marB="50800" anchor="ctr">
-                    <a:lnL w="38100" cap="flat" cmpd="sng" algn="ctr">
-                      <a:solidFill>
-                        <a:srgbClr val="FFFFFF"/>
+                    <a:lnL w="9525" cap="flat" cmpd="sng" algn="ctr">
+                      <a:solidFill>
+                        <a:srgbClr val="C9D1DA"/>
                       </a:solidFill>
                       <a:prstDash val="solid"/>
                       <a:round/>
                       <a:headEnd type="none" w="med" len="med"/>
                       <a:tailEnd type="none" w="med" len="med"/>
                     </a:lnL>
-                    <a:lnR w="38100" cap="flat" cmpd="sng" algn="ctr">
-                      <a:solidFill>
-                        <a:srgbClr val="FFFFFF"/>
+                    <a:lnR w="9525" cap="flat" cmpd="sng" algn="ctr">
+                      <a:solidFill>
+                        <a:srgbClr val="C9D1DA"/>
                       </a:solidFill>
                       <a:prstDash val="solid"/>
                       <a:round/>
                       <a:headEnd type="none" w="med" len="med"/>
                       <a:tailEnd type="none" w="med" len="med"/>
                     </a:lnR>
-                    <a:lnT w="38100" cap="flat" cmpd="sng" algn="ctr">
-                      <a:solidFill>
-                        <a:srgbClr val="FFFFFF"/>
+                    <a:lnT w="9525" cap="flat" cmpd="sng" algn="ctr">
+                      <a:solidFill>
+                        <a:srgbClr val="C9D1DA"/>
                       </a:solidFill>
                       <a:prstDash val="solid"/>
                       <a:round/>
                       <a:headEnd type="none" w="med" len="med"/>
                       <a:tailEnd type="none" w="med" len="med"/>
                     </a:lnT>
-                    <a:lnB w="38100" cap="flat" cmpd="sng" algn="ctr">
-                      <a:solidFill>
-                        <a:srgbClr val="FFFFFF"/>
+                    <a:lnB w="9525" cap="flat" cmpd="sng" algn="ctr">
+                      <a:solidFill>
+                        <a:srgbClr val="C9D1DA"/>
                       </a:solidFill>
                       <a:prstDash val="solid"/>
                       <a:round/>
@@ -11743,60 +13014,841 @@
                     <a:bodyPr/>
                     <a:lstStyle/>
                     <a:p>
-                      <a:pPr algn="ctr" indent="0" marL="0">
+                      <a:pPr indent="0" marL="0">
+                        <a:buNone/>
+                      </a:pPr>
+                      <a:r>
+                        <a:rPr lang="en-US" sz="1350" dirty="0">
+                          <a:solidFill>
+                            <a:schemeClr val="tx1"/>
+                          </a:solidFill>
+                        </a:rPr>
+                        <a:t>Leitura ≤ 2 s (medido: </a:t>
+                      </a:r>
+                      <a:pPr indent="0" marL="0">
+                        <a:buNone/>
+                      </a:pPr>
+                      <a:r>
+                        <a:rPr lang="en-US" sz="1350" b="1" dirty="0">
+                          <a:solidFill>
+                            <a:schemeClr val="tx1"/>
+                          </a:solidFill>
+                        </a:rPr>
+                        <a:t>168–220 ms</a:t>
+                      </a:r>
+                      <a:pPr indent="0" marL="0">
+                        <a:buNone/>
+                      </a:pPr>
+                      <a:r>
+                        <a:rPr lang="en-US" sz="1350" dirty="0">
+                          <a:solidFill>
+                            <a:schemeClr val="tx1"/>
+                          </a:solidFill>
+                        </a:rPr>
+                        <a:t>)</a:t>
+                      </a:r>
+                      <a:endParaRPr lang="en-US" sz="1350" dirty="0"/>
+                    </a:p>
+                  </a:txBody>
+                  <a:tcPr marL="88900" marR="88900" marT="50800" marB="50800" anchor="ctr">
+                    <a:lnL w="9525" cap="flat" cmpd="sng" algn="ctr">
+                      <a:solidFill>
+                        <a:srgbClr val="C9D1DA"/>
+                      </a:solidFill>
+                      <a:prstDash val="solid"/>
+                      <a:round/>
+                      <a:headEnd type="none" w="med" len="med"/>
+                      <a:tailEnd type="none" w="med" len="med"/>
+                    </a:lnL>
+                    <a:lnR w="9525" cap="flat" cmpd="sng" algn="ctr">
+                      <a:solidFill>
+                        <a:srgbClr val="C9D1DA"/>
+                      </a:solidFill>
+                      <a:prstDash val="solid"/>
+                      <a:round/>
+                      <a:headEnd type="none" w="med" len="med"/>
+                      <a:tailEnd type="none" w="med" len="med"/>
+                    </a:lnR>
+                    <a:lnT w="9525" cap="flat" cmpd="sng" algn="ctr">
+                      <a:solidFill>
+                        <a:srgbClr val="C9D1DA"/>
+                      </a:solidFill>
+                      <a:prstDash val="solid"/>
+                      <a:round/>
+                      <a:headEnd type="none" w="med" len="med"/>
+                      <a:tailEnd type="none" w="med" len="med"/>
+                    </a:lnT>
+                    <a:lnB w="9525" cap="flat" cmpd="sng" algn="ctr">
+                      <a:solidFill>
+                        <a:srgbClr val="C9D1DA"/>
+                      </a:solidFill>
+                      <a:prstDash val="solid"/>
+                      <a:round/>
+                      <a:headEnd type="none" w="med" len="med"/>
+                      <a:tailEnd type="none" w="med" len="med"/>
+                    </a:lnB>
+                  </a:tcPr>
+                </a:tc>
+                <a:tc>
+                  <a:txBody>
+                    <a:bodyPr/>
+                    <a:lstStyle/>
+                    <a:p>
+                      <a:pPr indent="0" marL="0">
                         <a:buNone/>
                       </a:pPr>
                       <a:r>
                         <a:rPr lang="en-US" sz="1050" b="1" dirty="0">
                           <a:solidFill>
-                            <a:schemeClr val="bg1"/>
+                            <a:schemeClr val="accent3"/>
                           </a:solidFill>
                         </a:rPr>
-                        <a:t>OK</a:t>
+                        <a:t>VERIFICADO</a:t>
                       </a:r>
                       <a:endParaRPr lang="en-US" sz="1050" dirty="0"/>
                     </a:p>
                   </a:txBody>
                   <a:tcPr marL="88900" marR="88900" marT="50800" marB="50800" anchor="ctr">
-                    <a:lnL w="38100" cap="flat" cmpd="sng" algn="ctr">
-                      <a:solidFill>
-                        <a:srgbClr val="FFFFFF"/>
+                    <a:lnL w="9525" cap="flat" cmpd="sng" algn="ctr">
+                      <a:solidFill>
+                        <a:srgbClr val="C9D1DA"/>
                       </a:solidFill>
                       <a:prstDash val="solid"/>
                       <a:round/>
                       <a:headEnd type="none" w="med" len="med"/>
                       <a:tailEnd type="none" w="med" len="med"/>
                     </a:lnL>
-                    <a:lnR w="38100" cap="flat" cmpd="sng" algn="ctr">
-                      <a:solidFill>
-                        <a:srgbClr val="FFFFFF"/>
+                    <a:lnR w="9525" cap="flat" cmpd="sng" algn="ctr">
+                      <a:solidFill>
+                        <a:srgbClr val="C9D1DA"/>
                       </a:solidFill>
                       <a:prstDash val="solid"/>
                       <a:round/>
                       <a:headEnd type="none" w="med" len="med"/>
                       <a:tailEnd type="none" w="med" len="med"/>
                     </a:lnR>
-                    <a:lnT w="38100" cap="flat" cmpd="sng" algn="ctr">
-                      <a:solidFill>
-                        <a:srgbClr val="FFFFFF"/>
+                    <a:lnT w="9525" cap="flat" cmpd="sng" algn="ctr">
+                      <a:solidFill>
+                        <a:srgbClr val="C9D1DA"/>
                       </a:solidFill>
                       <a:prstDash val="solid"/>
                       <a:round/>
                       <a:headEnd type="none" w="med" len="med"/>
                       <a:tailEnd type="none" w="med" len="med"/>
                     </a:lnT>
-                    <a:lnB w="38100" cap="flat" cmpd="sng" algn="ctr">
-                      <a:solidFill>
-                        <a:srgbClr val="FFFFFF"/>
+                    <a:lnB w="9525" cap="flat" cmpd="sng" algn="ctr">
+                      <a:solidFill>
+                        <a:srgbClr val="C9D1DA"/>
                       </a:solidFill>
                       <a:prstDash val="solid"/>
                       <a:round/>
                       <a:headEnd type="none" w="med" len="med"/>
                       <a:tailEnd type="none" w="med" len="med"/>
                     </a:lnB>
-                    <a:solidFill>
-                      <a:schemeClr val="accent3"/>
-                    </a:solidFill>
+                  </a:tcPr>
+                </a:tc>
+              </a:tr>
+              <a:tr h="352425">
+                <a:tc>
+                  <a:txBody>
+                    <a:bodyPr/>
+                    <a:lstStyle/>
+                    <a:p>
+                      <a:pPr indent="0" marL="0">
+                        <a:buNone/>
+                      </a:pPr>
+                      <a:r>
+                        <a:rPr lang="en-US" sz="1200" dirty="0">
+                          <a:solidFill>
+                            <a:schemeClr val="tx1"/>
+                          </a:solidFill>
+                        </a:rPr>
+                        <a:t>RNF03</a:t>
+                      </a:r>
+                      <a:endParaRPr lang="en-US" sz="1200" dirty="0"/>
+                    </a:p>
+                  </a:txBody>
+                  <a:tcPr marL="88900" marR="88900" marT="50800" marB="50800" anchor="ctr">
+                    <a:lnL w="9525" cap="flat" cmpd="sng" algn="ctr">
+                      <a:solidFill>
+                        <a:srgbClr val="C9D1DA"/>
+                      </a:solidFill>
+                      <a:prstDash val="solid"/>
+                      <a:round/>
+                      <a:headEnd type="none" w="med" len="med"/>
+                      <a:tailEnd type="none" w="med" len="med"/>
+                    </a:lnL>
+                    <a:lnR w="9525" cap="flat" cmpd="sng" algn="ctr">
+                      <a:solidFill>
+                        <a:srgbClr val="C9D1DA"/>
+                      </a:solidFill>
+                      <a:prstDash val="solid"/>
+                      <a:round/>
+                      <a:headEnd type="none" w="med" len="med"/>
+                      <a:tailEnd type="none" w="med" len="med"/>
+                    </a:lnR>
+                    <a:lnT w="9525" cap="flat" cmpd="sng" algn="ctr">
+                      <a:solidFill>
+                        <a:srgbClr val="C9D1DA"/>
+                      </a:solidFill>
+                      <a:prstDash val="solid"/>
+                      <a:round/>
+                      <a:headEnd type="none" w="med" len="med"/>
+                      <a:tailEnd type="none" w="med" len="med"/>
+                    </a:lnT>
+                    <a:lnB w="9525" cap="flat" cmpd="sng" algn="ctr">
+                      <a:solidFill>
+                        <a:srgbClr val="C9D1DA"/>
+                      </a:solidFill>
+                      <a:prstDash val="solid"/>
+                      <a:round/>
+                      <a:headEnd type="none" w="med" len="med"/>
+                      <a:tailEnd type="none" w="med" len="med"/>
+                    </a:lnB>
+                  </a:tcPr>
+                </a:tc>
+                <a:tc>
+                  <a:txBody>
+                    <a:bodyPr/>
+                    <a:lstStyle/>
+                    <a:p>
+                      <a:pPr indent="0" marL="0">
+                        <a:buNone/>
+                      </a:pPr>
+                      <a:r>
+                        <a:rPr lang="en-US" sz="1350" dirty="0">
+                          <a:solidFill>
+                            <a:schemeClr val="tx1"/>
+                          </a:solidFill>
+                        </a:rPr>
+                        <a:t>≥ 90% de acerto por classe</a:t>
+                      </a:r>
+                      <a:endParaRPr lang="en-US" sz="1350" dirty="0"/>
+                    </a:p>
+                  </a:txBody>
+                  <a:tcPr marL="88900" marR="88900" marT="50800" marB="50800" anchor="ctr">
+                    <a:lnL w="9525" cap="flat" cmpd="sng" algn="ctr">
+                      <a:solidFill>
+                        <a:srgbClr val="C9D1DA"/>
+                      </a:solidFill>
+                      <a:prstDash val="solid"/>
+                      <a:round/>
+                      <a:headEnd type="none" w="med" len="med"/>
+                      <a:tailEnd type="none" w="med" len="med"/>
+                    </a:lnL>
+                    <a:lnR w="9525" cap="flat" cmpd="sng" algn="ctr">
+                      <a:solidFill>
+                        <a:srgbClr val="C9D1DA"/>
+                      </a:solidFill>
+                      <a:prstDash val="solid"/>
+                      <a:round/>
+                      <a:headEnd type="none" w="med" len="med"/>
+                      <a:tailEnd type="none" w="med" len="med"/>
+                    </a:lnR>
+                    <a:lnT w="9525" cap="flat" cmpd="sng" algn="ctr">
+                      <a:solidFill>
+                        <a:srgbClr val="C9D1DA"/>
+                      </a:solidFill>
+                      <a:prstDash val="solid"/>
+                      <a:round/>
+                      <a:headEnd type="none" w="med" len="med"/>
+                      <a:tailEnd type="none" w="med" len="med"/>
+                    </a:lnT>
+                    <a:lnB w="9525" cap="flat" cmpd="sng" algn="ctr">
+                      <a:solidFill>
+                        <a:srgbClr val="C9D1DA"/>
+                      </a:solidFill>
+                      <a:prstDash val="solid"/>
+                      <a:round/>
+                      <a:headEnd type="none" w="med" len="med"/>
+                      <a:tailEnd type="none" w="med" len="med"/>
+                    </a:lnB>
+                  </a:tcPr>
+                </a:tc>
+                <a:tc>
+                  <a:txBody>
+                    <a:bodyPr/>
+                    <a:lstStyle/>
+                    <a:p>
+                      <a:pPr indent="0" marL="0">
+                        <a:buNone/>
+                      </a:pPr>
+                      <a:r>
+                        <a:rPr lang="en-US" sz="1050" b="1" dirty="0">
+                          <a:solidFill>
+                            <a:schemeClr val="accent6"/>
+                          </a:solidFill>
+                        </a:rPr>
+                        <a:t>PENDENTE</a:t>
+                      </a:r>
+                      <a:endParaRPr lang="en-US" sz="1050" dirty="0"/>
+                    </a:p>
+                  </a:txBody>
+                  <a:tcPr marL="88900" marR="88900" marT="50800" marB="50800" anchor="ctr">
+                    <a:lnL w="9525" cap="flat" cmpd="sng" algn="ctr">
+                      <a:solidFill>
+                        <a:srgbClr val="C9D1DA"/>
+                      </a:solidFill>
+                      <a:prstDash val="solid"/>
+                      <a:round/>
+                      <a:headEnd type="none" w="med" len="med"/>
+                      <a:tailEnd type="none" w="med" len="med"/>
+                    </a:lnL>
+                    <a:lnR w="9525" cap="flat" cmpd="sng" algn="ctr">
+                      <a:solidFill>
+                        <a:srgbClr val="C9D1DA"/>
+                      </a:solidFill>
+                      <a:prstDash val="solid"/>
+                      <a:round/>
+                      <a:headEnd type="none" w="med" len="med"/>
+                      <a:tailEnd type="none" w="med" len="med"/>
+                    </a:lnR>
+                    <a:lnT w="9525" cap="flat" cmpd="sng" algn="ctr">
+                      <a:solidFill>
+                        <a:srgbClr val="C9D1DA"/>
+                      </a:solidFill>
+                      <a:prstDash val="solid"/>
+                      <a:round/>
+                      <a:headEnd type="none" w="med" len="med"/>
+                      <a:tailEnd type="none" w="med" len="med"/>
+                    </a:lnT>
+                    <a:lnB w="9525" cap="flat" cmpd="sng" algn="ctr">
+                      <a:solidFill>
+                        <a:srgbClr val="C9D1DA"/>
+                      </a:solidFill>
+                      <a:prstDash val="solid"/>
+                      <a:round/>
+                      <a:headEnd type="none" w="med" len="med"/>
+                      <a:tailEnd type="none" w="med" len="med"/>
+                    </a:lnB>
+                  </a:tcPr>
+                </a:tc>
+              </a:tr>
+              <a:tr h="352425">
+                <a:tc>
+                  <a:txBody>
+                    <a:bodyPr/>
+                    <a:lstStyle/>
+                    <a:p>
+                      <a:pPr indent="0" marL="0">
+                        <a:buNone/>
+                      </a:pPr>
+                      <a:r>
+                        <a:rPr lang="en-US" sz="1200" dirty="0">
+                          <a:solidFill>
+                            <a:schemeClr val="tx1"/>
+                          </a:solidFill>
+                        </a:rPr>
+                        <a:t>RNF06</a:t>
+                      </a:r>
+                      <a:endParaRPr lang="en-US" sz="1200" dirty="0"/>
+                    </a:p>
+                  </a:txBody>
+                  <a:tcPr marL="88900" marR="88900" marT="50800" marB="50800" anchor="ctr">
+                    <a:lnL w="9525" cap="flat" cmpd="sng" algn="ctr">
+                      <a:solidFill>
+                        <a:srgbClr val="C9D1DA"/>
+                      </a:solidFill>
+                      <a:prstDash val="solid"/>
+                      <a:round/>
+                      <a:headEnd type="none" w="med" len="med"/>
+                      <a:tailEnd type="none" w="med" len="med"/>
+                    </a:lnL>
+                    <a:lnR w="9525" cap="flat" cmpd="sng" algn="ctr">
+                      <a:solidFill>
+                        <a:srgbClr val="C9D1DA"/>
+                      </a:solidFill>
+                      <a:prstDash val="solid"/>
+                      <a:round/>
+                      <a:headEnd type="none" w="med" len="med"/>
+                      <a:tailEnd type="none" w="med" len="med"/>
+                    </a:lnR>
+                    <a:lnT w="9525" cap="flat" cmpd="sng" algn="ctr">
+                      <a:solidFill>
+                        <a:srgbClr val="C9D1DA"/>
+                      </a:solidFill>
+                      <a:prstDash val="solid"/>
+                      <a:round/>
+                      <a:headEnd type="none" w="med" len="med"/>
+                      <a:tailEnd type="none" w="med" len="med"/>
+                    </a:lnT>
+                    <a:lnB w="9525" cap="flat" cmpd="sng" algn="ctr">
+                      <a:solidFill>
+                        <a:srgbClr val="C9D1DA"/>
+                      </a:solidFill>
+                      <a:prstDash val="solid"/>
+                      <a:round/>
+                      <a:headEnd type="none" w="med" len="med"/>
+                      <a:tailEnd type="none" w="med" len="med"/>
+                    </a:lnB>
+                  </a:tcPr>
+                </a:tc>
+                <a:tc>
+                  <a:txBody>
+                    <a:bodyPr/>
+                    <a:lstStyle/>
+                    <a:p>
+                      <a:pPr indent="0" marL="0">
+                        <a:buNone/>
+                      </a:pPr>
+                      <a:r>
+                        <a:rPr lang="en-US" sz="1350" dirty="0">
+                          <a:solidFill>
+                            <a:schemeClr val="tx1"/>
+                          </a:solidFill>
+                        </a:rPr>
+                        <a:t>20 ciclos sem reinício</a:t>
+                      </a:r>
+                      <a:endParaRPr lang="en-US" sz="1350" dirty="0"/>
+                    </a:p>
+                  </a:txBody>
+                  <a:tcPr marL="88900" marR="88900" marT="50800" marB="50800" anchor="ctr">
+                    <a:lnL w="9525" cap="flat" cmpd="sng" algn="ctr">
+                      <a:solidFill>
+                        <a:srgbClr val="C9D1DA"/>
+                      </a:solidFill>
+                      <a:prstDash val="solid"/>
+                      <a:round/>
+                      <a:headEnd type="none" w="med" len="med"/>
+                      <a:tailEnd type="none" w="med" len="med"/>
+                    </a:lnL>
+                    <a:lnR w="9525" cap="flat" cmpd="sng" algn="ctr">
+                      <a:solidFill>
+                        <a:srgbClr val="C9D1DA"/>
+                      </a:solidFill>
+                      <a:prstDash val="solid"/>
+                      <a:round/>
+                      <a:headEnd type="none" w="med" len="med"/>
+                      <a:tailEnd type="none" w="med" len="med"/>
+                    </a:lnR>
+                    <a:lnT w="9525" cap="flat" cmpd="sng" algn="ctr">
+                      <a:solidFill>
+                        <a:srgbClr val="C9D1DA"/>
+                      </a:solidFill>
+                      <a:prstDash val="solid"/>
+                      <a:round/>
+                      <a:headEnd type="none" w="med" len="med"/>
+                      <a:tailEnd type="none" w="med" len="med"/>
+                    </a:lnT>
+                    <a:lnB w="9525" cap="flat" cmpd="sng" algn="ctr">
+                      <a:solidFill>
+                        <a:srgbClr val="C9D1DA"/>
+                      </a:solidFill>
+                      <a:prstDash val="solid"/>
+                      <a:round/>
+                      <a:headEnd type="none" w="med" len="med"/>
+                      <a:tailEnd type="none" w="med" len="med"/>
+                    </a:lnB>
+                  </a:tcPr>
+                </a:tc>
+                <a:tc>
+                  <a:txBody>
+                    <a:bodyPr/>
+                    <a:lstStyle/>
+                    <a:p>
+                      <a:pPr indent="0" marL="0">
+                        <a:buNone/>
+                      </a:pPr>
+                      <a:r>
+                        <a:rPr lang="en-US" sz="1050" b="1" dirty="0">
+                          <a:solidFill>
+                            <a:schemeClr val="accent6"/>
+                          </a:solidFill>
+                        </a:rPr>
+                        <a:t>PENDENTE</a:t>
+                      </a:r>
+                      <a:endParaRPr lang="en-US" sz="1050" dirty="0"/>
+                    </a:p>
+                  </a:txBody>
+                  <a:tcPr marL="88900" marR="88900" marT="50800" marB="50800" anchor="ctr">
+                    <a:lnL w="9525" cap="flat" cmpd="sng" algn="ctr">
+                      <a:solidFill>
+                        <a:srgbClr val="C9D1DA"/>
+                      </a:solidFill>
+                      <a:prstDash val="solid"/>
+                      <a:round/>
+                      <a:headEnd type="none" w="med" len="med"/>
+                      <a:tailEnd type="none" w="med" len="med"/>
+                    </a:lnL>
+                    <a:lnR w="9525" cap="flat" cmpd="sng" algn="ctr">
+                      <a:solidFill>
+                        <a:srgbClr val="C9D1DA"/>
+                      </a:solidFill>
+                      <a:prstDash val="solid"/>
+                      <a:round/>
+                      <a:headEnd type="none" w="med" len="med"/>
+                      <a:tailEnd type="none" w="med" len="med"/>
+                    </a:lnR>
+                    <a:lnT w="9525" cap="flat" cmpd="sng" algn="ctr">
+                      <a:solidFill>
+                        <a:srgbClr val="C9D1DA"/>
+                      </a:solidFill>
+                      <a:prstDash val="solid"/>
+                      <a:round/>
+                      <a:headEnd type="none" w="med" len="med"/>
+                      <a:tailEnd type="none" w="med" len="med"/>
+                    </a:lnT>
+                    <a:lnB w="9525" cap="flat" cmpd="sng" algn="ctr">
+                      <a:solidFill>
+                        <a:srgbClr val="C9D1DA"/>
+                      </a:solidFill>
+                      <a:prstDash val="solid"/>
+                      <a:round/>
+                      <a:headEnd type="none" w="med" len="med"/>
+                      <a:tailEnd type="none" w="med" len="med"/>
+                    </a:lnB>
+                  </a:tcPr>
+                </a:tc>
+              </a:tr>
+              <a:tr h="352425">
+                <a:tc>
+                  <a:txBody>
+                    <a:bodyPr/>
+                    <a:lstStyle/>
+                    <a:p>
+                      <a:pPr indent="0" marL="0">
+                        <a:buNone/>
+                      </a:pPr>
+                      <a:r>
+                        <a:rPr lang="en-US" sz="1200" dirty="0">
+                          <a:solidFill>
+                            <a:schemeClr val="tx1"/>
+                          </a:solidFill>
+                        </a:rPr>
+                        <a:t>RNF09</a:t>
+                      </a:r>
+                      <a:endParaRPr lang="en-US" sz="1200" dirty="0"/>
+                    </a:p>
+                  </a:txBody>
+                  <a:tcPr marL="88900" marR="88900" marT="50800" marB="50800" anchor="ctr">
+                    <a:lnL w="9525" cap="flat" cmpd="sng" algn="ctr">
+                      <a:solidFill>
+                        <a:srgbClr val="C9D1DA"/>
+                      </a:solidFill>
+                      <a:prstDash val="solid"/>
+                      <a:round/>
+                      <a:headEnd type="none" w="med" len="med"/>
+                      <a:tailEnd type="none" w="med" len="med"/>
+                    </a:lnL>
+                    <a:lnR w="9525" cap="flat" cmpd="sng" algn="ctr">
+                      <a:solidFill>
+                        <a:srgbClr val="C9D1DA"/>
+                      </a:solidFill>
+                      <a:prstDash val="solid"/>
+                      <a:round/>
+                      <a:headEnd type="none" w="med" len="med"/>
+                      <a:tailEnd type="none" w="med" len="med"/>
+                    </a:lnR>
+                    <a:lnT w="9525" cap="flat" cmpd="sng" algn="ctr">
+                      <a:solidFill>
+                        <a:srgbClr val="C9D1DA"/>
+                      </a:solidFill>
+                      <a:prstDash val="solid"/>
+                      <a:round/>
+                      <a:headEnd type="none" w="med" len="med"/>
+                      <a:tailEnd type="none" w="med" len="med"/>
+                    </a:lnT>
+                    <a:lnB w="9525" cap="flat" cmpd="sng" algn="ctr">
+                      <a:solidFill>
+                        <a:srgbClr val="C9D1DA"/>
+                      </a:solidFill>
+                      <a:prstDash val="solid"/>
+                      <a:round/>
+                      <a:headEnd type="none" w="med" len="med"/>
+                      <a:tailEnd type="none" w="med" len="med"/>
+                    </a:lnB>
+                  </a:tcPr>
+                </a:tc>
+                <a:tc>
+                  <a:txBody>
+                    <a:bodyPr/>
+                    <a:lstStyle/>
+                    <a:p>
+                      <a:pPr indent="0" marL="0">
+                        <a:buNone/>
+                      </a:pPr>
+                      <a:r>
+                        <a:rPr lang="en-US" sz="1350" dirty="0">
+                          <a:solidFill>
+                            <a:schemeClr val="tx1"/>
+                          </a:solidFill>
+                        </a:rPr>
+                        <a:t>Senhas e token fora dos registros</a:t>
+                      </a:r>
+                      <a:endParaRPr lang="en-US" sz="1350" dirty="0"/>
+                    </a:p>
+                  </a:txBody>
+                  <a:tcPr marL="88900" marR="88900" marT="50800" marB="50800" anchor="ctr">
+                    <a:lnL w="9525" cap="flat" cmpd="sng" algn="ctr">
+                      <a:solidFill>
+                        <a:srgbClr val="C9D1DA"/>
+                      </a:solidFill>
+                      <a:prstDash val="solid"/>
+                      <a:round/>
+                      <a:headEnd type="none" w="med" len="med"/>
+                      <a:tailEnd type="none" w="med" len="med"/>
+                    </a:lnL>
+                    <a:lnR w="9525" cap="flat" cmpd="sng" algn="ctr">
+                      <a:solidFill>
+                        <a:srgbClr val="C9D1DA"/>
+                      </a:solidFill>
+                      <a:prstDash val="solid"/>
+                      <a:round/>
+                      <a:headEnd type="none" w="med" len="med"/>
+                      <a:tailEnd type="none" w="med" len="med"/>
+                    </a:lnR>
+                    <a:lnT w="9525" cap="flat" cmpd="sng" algn="ctr">
+                      <a:solidFill>
+                        <a:srgbClr val="C9D1DA"/>
+                      </a:solidFill>
+                      <a:prstDash val="solid"/>
+                      <a:round/>
+                      <a:headEnd type="none" w="med" len="med"/>
+                      <a:tailEnd type="none" w="med" len="med"/>
+                    </a:lnT>
+                    <a:lnB w="9525" cap="flat" cmpd="sng" algn="ctr">
+                      <a:solidFill>
+                        <a:srgbClr val="C9D1DA"/>
+                      </a:solidFill>
+                      <a:prstDash val="solid"/>
+                      <a:round/>
+                      <a:headEnd type="none" w="med" len="med"/>
+                      <a:tailEnd type="none" w="med" len="med"/>
+                    </a:lnB>
+                  </a:tcPr>
+                </a:tc>
+                <a:tc>
+                  <a:txBody>
+                    <a:bodyPr/>
+                    <a:lstStyle/>
+                    <a:p>
+                      <a:pPr indent="0" marL="0">
+                        <a:buNone/>
+                      </a:pPr>
+                      <a:r>
+                        <a:rPr lang="en-US" sz="1050" b="1" dirty="0">
+                          <a:solidFill>
+                            <a:schemeClr val="accent3"/>
+                          </a:solidFill>
+                        </a:rPr>
+                        <a:t>VERIFICADO</a:t>
+                      </a:r>
+                      <a:endParaRPr lang="en-US" sz="1050" dirty="0"/>
+                    </a:p>
+                  </a:txBody>
+                  <a:tcPr marL="88900" marR="88900" marT="50800" marB="50800" anchor="ctr">
+                    <a:lnL w="9525" cap="flat" cmpd="sng" algn="ctr">
+                      <a:solidFill>
+                        <a:srgbClr val="C9D1DA"/>
+                      </a:solidFill>
+                      <a:prstDash val="solid"/>
+                      <a:round/>
+                      <a:headEnd type="none" w="med" len="med"/>
+                      <a:tailEnd type="none" w="med" len="med"/>
+                    </a:lnL>
+                    <a:lnR w="9525" cap="flat" cmpd="sng" algn="ctr">
+                      <a:solidFill>
+                        <a:srgbClr val="C9D1DA"/>
+                      </a:solidFill>
+                      <a:prstDash val="solid"/>
+                      <a:round/>
+                      <a:headEnd type="none" w="med" len="med"/>
+                      <a:tailEnd type="none" w="med" len="med"/>
+                    </a:lnR>
+                    <a:lnT w="9525" cap="flat" cmpd="sng" algn="ctr">
+                      <a:solidFill>
+                        <a:srgbClr val="C9D1DA"/>
+                      </a:solidFill>
+                      <a:prstDash val="solid"/>
+                      <a:round/>
+                      <a:headEnd type="none" w="med" len="med"/>
+                      <a:tailEnd type="none" w="med" len="med"/>
+                    </a:lnT>
+                    <a:lnB w="9525" cap="flat" cmpd="sng" algn="ctr">
+                      <a:solidFill>
+                        <a:srgbClr val="C9D1DA"/>
+                      </a:solidFill>
+                      <a:prstDash val="solid"/>
+                      <a:round/>
+                      <a:headEnd type="none" w="med" len="med"/>
+                      <a:tailEnd type="none" w="med" len="med"/>
+                    </a:lnB>
+                  </a:tcPr>
+                </a:tc>
+              </a:tr>
+              <a:tr h="352425">
+                <a:tc>
+                  <a:txBody>
+                    <a:bodyPr/>
+                    <a:lstStyle/>
+                    <a:p>
+                      <a:pPr indent="0" marL="0">
+                        <a:buNone/>
+                      </a:pPr>
+                      <a:r>
+                        <a:rPr lang="en-US" sz="1200" dirty="0">
+                          <a:solidFill>
+                            <a:schemeClr val="tx1"/>
+                          </a:solidFill>
+                        </a:rPr>
+                        <a:t>RNF12</a:t>
+                      </a:r>
+                      <a:endParaRPr lang="en-US" sz="1200" dirty="0"/>
+                    </a:p>
+                  </a:txBody>
+                  <a:tcPr marL="88900" marR="88900" marT="50800" marB="50800" anchor="ctr">
+                    <a:lnL w="9525" cap="flat" cmpd="sng" algn="ctr">
+                      <a:solidFill>
+                        <a:srgbClr val="C9D1DA"/>
+                      </a:solidFill>
+                      <a:prstDash val="solid"/>
+                      <a:round/>
+                      <a:headEnd type="none" w="med" len="med"/>
+                      <a:tailEnd type="none" w="med" len="med"/>
+                    </a:lnL>
+                    <a:lnR w="9525" cap="flat" cmpd="sng" algn="ctr">
+                      <a:solidFill>
+                        <a:srgbClr val="C9D1DA"/>
+                      </a:solidFill>
+                      <a:prstDash val="solid"/>
+                      <a:round/>
+                      <a:headEnd type="none" w="med" len="med"/>
+                      <a:tailEnd type="none" w="med" len="med"/>
+                    </a:lnR>
+                    <a:lnT w="9525" cap="flat" cmpd="sng" algn="ctr">
+                      <a:solidFill>
+                        <a:srgbClr val="C9D1DA"/>
+                      </a:solidFill>
+                      <a:prstDash val="solid"/>
+                      <a:round/>
+                      <a:headEnd type="none" w="med" len="med"/>
+                      <a:tailEnd type="none" w="med" len="med"/>
+                    </a:lnT>
+                    <a:lnB w="9525" cap="flat" cmpd="sng" algn="ctr">
+                      <a:solidFill>
+                        <a:srgbClr val="C9D1DA"/>
+                      </a:solidFill>
+                      <a:prstDash val="solid"/>
+                      <a:round/>
+                      <a:headEnd type="none" w="med" len="med"/>
+                      <a:tailEnd type="none" w="med" len="med"/>
+                    </a:lnB>
+                  </a:tcPr>
+                </a:tc>
+                <a:tc>
+                  <a:txBody>
+                    <a:bodyPr/>
+                    <a:lstStyle/>
+                    <a:p>
+                      <a:pPr indent="0" marL="0">
+                        <a:buNone/>
+                      </a:pPr>
+                      <a:r>
+                        <a:rPr lang="en-US" sz="1350" dirty="0">
+                          <a:solidFill>
+                            <a:schemeClr val="tx1"/>
+                          </a:solidFill>
+                        </a:rPr>
+                        <a:t>Ferramentas no Windows e no macOS</a:t>
+                      </a:r>
+                      <a:endParaRPr lang="en-US" sz="1350" dirty="0"/>
+                    </a:p>
+                  </a:txBody>
+                  <a:tcPr marL="88900" marR="88900" marT="50800" marB="50800" anchor="ctr">
+                    <a:lnL w="9525" cap="flat" cmpd="sng" algn="ctr">
+                      <a:solidFill>
+                        <a:srgbClr val="C9D1DA"/>
+                      </a:solidFill>
+                      <a:prstDash val="solid"/>
+                      <a:round/>
+                      <a:headEnd type="none" w="med" len="med"/>
+                      <a:tailEnd type="none" w="med" len="med"/>
+                    </a:lnL>
+                    <a:lnR w="9525" cap="flat" cmpd="sng" algn="ctr">
+                      <a:solidFill>
+                        <a:srgbClr val="C9D1DA"/>
+                      </a:solidFill>
+                      <a:prstDash val="solid"/>
+                      <a:round/>
+                      <a:headEnd type="none" w="med" len="med"/>
+                      <a:tailEnd type="none" w="med" len="med"/>
+                    </a:lnR>
+                    <a:lnT w="9525" cap="flat" cmpd="sng" algn="ctr">
+                      <a:solidFill>
+                        <a:srgbClr val="C9D1DA"/>
+                      </a:solidFill>
+                      <a:prstDash val="solid"/>
+                      <a:round/>
+                      <a:headEnd type="none" w="med" len="med"/>
+                      <a:tailEnd type="none" w="med" len="med"/>
+                    </a:lnT>
+                    <a:lnB w="9525" cap="flat" cmpd="sng" algn="ctr">
+                      <a:solidFill>
+                        <a:srgbClr val="C9D1DA"/>
+                      </a:solidFill>
+                      <a:prstDash val="solid"/>
+                      <a:round/>
+                      <a:headEnd type="none" w="med" len="med"/>
+                      <a:tailEnd type="none" w="med" len="med"/>
+                    </a:lnB>
+                  </a:tcPr>
+                </a:tc>
+                <a:tc>
+                  <a:txBody>
+                    <a:bodyPr/>
+                    <a:lstStyle/>
+                    <a:p>
+                      <a:pPr indent="0" marL="0">
+                        <a:buNone/>
+                      </a:pPr>
+                      <a:r>
+                        <a:rPr lang="en-US" sz="1050" b="1" dirty="0">
+                          <a:solidFill>
+                            <a:schemeClr val="accent3"/>
+                          </a:solidFill>
+                        </a:rPr>
+                        <a:t>VERIFICADO</a:t>
+                      </a:r>
+                      <a:endParaRPr lang="en-US" sz="1050" dirty="0"/>
+                    </a:p>
+                  </a:txBody>
+                  <a:tcPr marL="88900" marR="88900" marT="50800" marB="50800" anchor="ctr">
+                    <a:lnL w="9525" cap="flat" cmpd="sng" algn="ctr">
+                      <a:solidFill>
+                        <a:srgbClr val="C9D1DA"/>
+                      </a:solidFill>
+                      <a:prstDash val="solid"/>
+                      <a:round/>
+                      <a:headEnd type="none" w="med" len="med"/>
+                      <a:tailEnd type="none" w="med" len="med"/>
+                    </a:lnL>
+                    <a:lnR w="9525" cap="flat" cmpd="sng" algn="ctr">
+                      <a:solidFill>
+                        <a:srgbClr val="C9D1DA"/>
+                      </a:solidFill>
+                      <a:prstDash val="solid"/>
+                      <a:round/>
+                      <a:headEnd type="none" w="med" len="med"/>
+                      <a:tailEnd type="none" w="med" len="med"/>
+                    </a:lnR>
+                    <a:lnT w="9525" cap="flat" cmpd="sng" algn="ctr">
+                      <a:solidFill>
+                        <a:srgbClr val="C9D1DA"/>
+                      </a:solidFill>
+                      <a:prstDash val="solid"/>
+                      <a:round/>
+                      <a:headEnd type="none" w="med" len="med"/>
+                      <a:tailEnd type="none" w="med" len="med"/>
+                    </a:lnT>
+                    <a:lnB w="9525" cap="flat" cmpd="sng" algn="ctr">
+                      <a:solidFill>
+                        <a:srgbClr val="C9D1DA"/>
+                      </a:solidFill>
+                      <a:prstDash val="solid"/>
+                      <a:round/>
+                      <a:headEnd type="none" w="med" len="med"/>
+                      <a:tailEnd type="none" w="med" len="med"/>
+                    </a:lnB>
                   </a:tcPr>
                 </a:tc>
               </a:tr>
@@ -11804,6 +13856,42 @@
           </a:graphicData>
         </a:graphic>
       </p:graphicFrame>
+      <p:sp>
+        <p:nvSpPr>
+          <p:cNvPr id="7" name="Text 3"/>
+          <p:cNvSpPr txBox="1"/>
+          <p:nvPr/>
+        </p:nvSpPr>
+        <p:spPr>
+          <a:xfrm>
+            <a:off x="685800" y="4533900"/>
+            <a:ext cx="10820400" cy="419100"/>
+          </a:xfrm>
+          <a:prstGeom prst="rect">
+            <a:avLst/>
+          </a:prstGeom>
+          <a:noFill/>
+          <a:ln/>
+        </p:spPr>
+        <p:txBody>
+          <a:bodyPr wrap="square" lIns="0" tIns="0" rIns="0" bIns="0" rtlCol="0" anchor="t"/>
+          <a:lstStyle/>
+          <a:p>
+            <a:pPr indent="0" marL="0">
+              <a:buNone/>
+            </a:pPr>
+            <a:r>
+              <a:rPr lang="en-US" sz="1275" dirty="0">
+                <a:solidFill>
+                  <a:schemeClr val="tx2"/>
+                </a:solidFill>
+              </a:rPr>
+              <a:t>Identificadores conforme o Relatório Técnico (seção 3), que lista os 12 requisitos funcionais e os 12 não funcionais. Pendente = depende de ensaio previsto.</a:t>
+            </a:r>
+            <a:endParaRPr lang="en-US" sz="1275" dirty="0"/>
+          </a:p>
+        </p:txBody>
+      </p:sp>
       <p:sp>
         <p:nvSpPr>
           <p:cNvPr id="25" name="Slide Number Placeholder 0"/>
@@ -11832,7 +13920,7 @@
           <a:bodyPr lIns="0" tIns="0" rIns="0" bIns="0"/>
           <a:lstStyle>
             <a:lvl1pPr>
-              <a:defRPr sz="1125">
+              <a:defRPr sz="1050">
                 <a:solidFill>
                   <a:schemeClr val="tx2"/>
                 </a:solidFill>
@@ -11876,16 +13964,16 @@
       </p:grpSpPr>
       <p:sp>
         <p:nvSpPr>
-          <p:cNvPr id="2" name="Text 1"/>
+          <p:cNvPr id="2" name="Text 0"/>
           <p:cNvSpPr/>
           <p:nvPr>
-            <p:ph idx="101" type="body" hasCustomPrompt="1"/>
+            <p:ph idx="100" type="body" hasCustomPrompt="1"/>
           </p:nvPr>
         </p:nvSpPr>
         <p:spPr>
           <a:xfrm>
             <a:off x="685800" y="514350"/>
-            <a:ext cx="10820400" cy="228600"/>
+            <a:ext cx="10820400" cy="209550"/>
           </a:xfrm>
           <a:prstGeom prst="rect">
             <a:avLst/>
@@ -11901,29 +13989,29 @@
               <a:buNone/>
             </a:pPr>
             <a:r>
-              <a:rPr lang="en-US" sz="1350" b="1" spc="190" kern="0" dirty="0">
-                <a:solidFill>
-                  <a:schemeClr val="accent2"/>
+              <a:rPr lang="en-US" sz="1200" b="1" spc="150" kern="0" dirty="0">
+                <a:solidFill>
+                  <a:schemeClr val="tx2"/>
                 </a:solidFill>
               </a:rPr>
-              <a:t>SOFTWARE · FREERTOS + ESP-IDF 5.4.1</a:t>
-            </a:r>
-            <a:endParaRPr lang="en-US" sz="1350" dirty="0"/>
+              <a:t>2 · PROJETO</a:t>
+            </a:r>
+            <a:endParaRPr lang="en-US" sz="1200" dirty="0"/>
           </a:p>
         </p:txBody>
       </p:sp>
       <p:sp>
         <p:nvSpPr>
-          <p:cNvPr id="3" name="Text 1"/>
+          <p:cNvPr id="3" name="Text 0"/>
           <p:cNvSpPr/>
           <p:nvPr>
-            <p:ph idx="102" type="title" hasCustomPrompt="1"/>
+            <p:ph idx="101" type="title" hasCustomPrompt="1"/>
           </p:nvPr>
         </p:nvSpPr>
         <p:spPr>
           <a:xfrm>
             <a:off x="685800" y="762000"/>
-            <a:ext cx="10820400" cy="514350"/>
+            <a:ext cx="10820400" cy="495300"/>
           </a:xfrm>
           <a:prstGeom prst="rect">
             <a:avLst/>
@@ -11939,14 +14027,14 @@
               <a:buNone/>
             </a:pPr>
             <a:r>
-              <a:rPr lang="en-US" sz="3300" b="1" dirty="0">
+              <a:rPr lang="en-US" sz="3000" b="1" dirty="0">
                 <a:solidFill>
                   <a:schemeClr val="accent1"/>
                 </a:solidFill>
               </a:rPr>
-              <a:t>Arquitetura do firmware</a:t>
-            </a:r>
-            <a:endParaRPr lang="en-US" sz="3300" dirty="0"/>
+              <a:t>Arquitetura de software</a:t>
+            </a:r>
+            <a:endParaRPr lang="en-US" sz="3000" dirty="0"/>
           </a:p>
         </p:txBody>
       </p:sp>
@@ -11959,7 +14047,7 @@
         <p:spPr>
           <a:xfrm>
             <a:off x="685800" y="6477000"/>
-            <a:ext cx="2857500" cy="209550"/>
+            <a:ext cx="2476500" cy="209550"/>
           </a:xfrm>
           <a:prstGeom prst="rect">
             <a:avLst/>
@@ -11975,14 +14063,14 @@
               <a:buNone/>
             </a:pPr>
             <a:r>
-              <a:rPr lang="en-US" sz="1125" b="1" dirty="0">
-                <a:solidFill>
-                  <a:schemeClr val="accent2"/>
+              <a:rPr lang="en-US" sz="1050" b="1" dirty="0">
+                <a:solidFill>
+                  <a:schemeClr val="tx2"/>
                 </a:solidFill>
               </a:rPr>
               <a:t>Juliana</a:t>
             </a:r>
-            <a:endParaRPr lang="en-US" sz="1125" dirty="0"/>
+            <a:endParaRPr lang="en-US" sz="1050" dirty="0"/>
           </a:p>
         </p:txBody>
       </p:sp>
@@ -11995,7 +14083,7 @@
         <p:spPr>
           <a:xfrm>
             <a:off x="685800" y="1485900"/>
-            <a:ext cx="5219700" cy="3810000"/>
+            <a:ext cx="5219700" cy="4191000"/>
           </a:xfrm>
           <a:prstGeom prst="rect">
             <a:avLst/>
@@ -12018,12 +14106,12 @@
               <a:buChar char="•"/>
             </a:pPr>
             <a:r>
-              <a:rPr lang="en-US" sz="1800" b="1" dirty="0">
+              <a:rPr lang="en-US" sz="1700" b="1" dirty="0">
                 <a:solidFill>
                   <a:schemeClr val="tx1"/>
                 </a:solidFill>
               </a:rPr>
-              <a:t>Núcleo C++17</a:t>
+              <a:t>Núcleo em C++17</a:t>
             </a:r>
             <a:pPr indent="0" marL="0">
               <a:lnSpc>
@@ -12035,12 +14123,12 @@
               <a:buNone/>
             </a:pPr>
             <a:r>
-              <a:rPr lang="en-US" sz="1800" dirty="0">
+              <a:rPr lang="en-US" sz="1700" dirty="0">
                 <a:solidFill>
                   <a:schemeClr val="tx1"/>
                 </a:solidFill>
               </a:rPr>
-              <a:t> sem dependência de hardware: visão, agenda e máquina de estados. Testado no PC com </a:t>
+              <a:t> independente de hardware: visão, agenda e máquina de estados. Testado no PC com </a:t>
             </a:r>
             <a:pPr indent="0" marL="0">
               <a:lnSpc>
@@ -12052,7 +14140,7 @@
               <a:buNone/>
             </a:pPr>
             <a:r>
-              <a:rPr lang="en-US" sz="1800" b="1" dirty="0">
+              <a:rPr lang="en-US" sz="1700" b="1" dirty="0">
                 <a:solidFill>
                   <a:schemeClr val="tx1"/>
                 </a:solidFill>
@@ -12069,14 +14157,14 @@
               <a:buNone/>
             </a:pPr>
             <a:r>
-              <a:rPr lang="en-US" sz="1800" dirty="0">
+              <a:rPr lang="en-US" sz="1700" dirty="0">
                 <a:solidFill>
                   <a:schemeClr val="tx1"/>
                 </a:solidFill>
               </a:rPr>
               <a:t>.</a:t>
             </a:r>
-            <a:endParaRPr lang="en-US" sz="1800" dirty="0"/>
+            <a:endParaRPr lang="en-US" sz="1700" dirty="0"/>
           </a:p>
           <a:p>
             <a:pPr marL="266700" indent="-266700">
@@ -12090,14 +14178,14 @@
               <a:buChar char="•"/>
             </a:pPr>
             <a:r>
-              <a:rPr lang="en-US" sz="1800" dirty="0">
+              <a:rPr lang="en-US" sz="1700" dirty="0">
                 <a:solidFill>
                   <a:schemeClr val="tx1"/>
                 </a:solidFill>
               </a:rPr>
               <a:t>Módulos de plataforma: câmera, Wi-Fi/SNTP, Telegram, NVS e eventos.</a:t>
             </a:r>
-            <a:endParaRPr lang="en-US" sz="1800" dirty="0"/>
+            <a:endParaRPr lang="en-US" sz="1700" dirty="0"/>
           </a:p>
           <a:p>
             <a:pPr marL="266700" indent="-266700">
@@ -12111,12 +14199,12 @@
               <a:buChar char="•"/>
             </a:pPr>
             <a:r>
-              <a:rPr lang="en-US" sz="1800" dirty="0">
+              <a:rPr lang="en-US" sz="1700" dirty="0">
                 <a:solidFill>
                   <a:schemeClr val="tx1"/>
                 </a:solidFill>
               </a:rPr>
-              <a:t>Câmera iniciada </a:t>
+              <a:t>Câmera inicializada </a:t>
             </a:r>
             <a:pPr indent="0" marL="0">
               <a:lnSpc>
@@ -12128,7 +14216,7 @@
               <a:buNone/>
             </a:pPr>
             <a:r>
-              <a:rPr lang="en-US" sz="1800" b="1" dirty="0">
+              <a:rPr lang="en-US" sz="1700" b="1" dirty="0">
                 <a:solidFill>
                   <a:schemeClr val="tx1"/>
                 </a:solidFill>
@@ -12145,14 +14233,14 @@
               <a:buNone/>
             </a:pPr>
             <a:r>
-              <a:rPr lang="en-US" sz="1800" dirty="0">
+              <a:rPr lang="en-US" sz="1700" dirty="0">
                 <a:solidFill>
                   <a:schemeClr val="tx1"/>
                 </a:solidFill>
               </a:rPr>
               <a:t> do Wi-Fi, que fragmenta a memória interna.</a:t>
             </a:r>
-            <a:endParaRPr lang="en-US" sz="1800" dirty="0"/>
+            <a:endParaRPr lang="en-US" sz="1700" dirty="0"/>
           </a:p>
           <a:p>
             <a:pPr marL="266700" indent="-266700">
@@ -12166,14 +14254,35 @@
               <a:buChar char="•"/>
             </a:pPr>
             <a:r>
-              <a:rPr lang="en-US" sz="1800" dirty="0">
+              <a:rPr lang="en-US" sz="1700" dirty="0">
                 <a:solidFill>
                   <a:schemeClr val="tx1"/>
                 </a:solidFill>
               </a:rPr>
               <a:t>Watchdog de 30 s; reconexão do Wi-Fi com espera crescente.</a:t>
             </a:r>
-            <a:endParaRPr lang="en-US" sz="1800" dirty="0"/>
+            <a:endParaRPr lang="en-US" sz="1700" dirty="0"/>
+          </a:p>
+          <a:p>
+            <a:pPr marL="266700" indent="-266700">
+              <a:lnSpc>
+                <a:spcPct val="112000"/>
+              </a:lnSpc>
+              <a:spcAft>
+                <a:spcPts val="750"/>
+              </a:spcAft>
+              <a:buSzPct val="100000"/>
+              <a:buChar char="•"/>
+            </a:pPr>
+            <a:r>
+              <a:rPr lang="en-US" sz="1700" dirty="0">
+                <a:solidFill>
+                  <a:schemeClr val="tx1"/>
+                </a:solidFill>
+              </a:rPr>
+              <a:t>Envio de avisos desacoplado por fila: a rede não atrasa as capturas.</a:t>
+            </a:r>
+            <a:endParaRPr lang="en-US" sz="1700" dirty="0"/>
           </a:p>
         </p:txBody>
       </p:sp>
@@ -12964,8 +15073,8 @@
         </p:nvSpPr>
         <p:spPr>
           <a:xfrm>
-            <a:off x="6286500" y="3733800"/>
-            <a:ext cx="5219700" cy="247650"/>
+            <a:off x="6286500" y="3695700"/>
+            <a:ext cx="5219700" cy="209550"/>
           </a:xfrm>
           <a:prstGeom prst="rect">
             <a:avLst/>
@@ -12981,14 +15090,14 @@
               <a:buNone/>
             </a:pPr>
             <a:r>
-              <a:rPr lang="en-US" sz="1350" dirty="0">
+              <a:rPr lang="en-US" sz="1200" dirty="0">
                 <a:solidFill>
                   <a:schemeClr val="tx2"/>
                 </a:solidFill>
               </a:rPr>
-              <a:t>A rede nunca atrasa as capturas: o aviso entra numa fila.</a:t>
-            </a:r>
-            <a:endParaRPr lang="en-US" sz="1350" dirty="0"/>
+              <a:t>Tabela 1 — Tarefas do FreeRTOS (ESP-IDF 5.4.1).</a:t>
+            </a:r>
+            <a:endParaRPr lang="en-US" sz="1200" dirty="0"/>
           </a:p>
         </p:txBody>
       </p:sp>
@@ -13020,7 +15129,7 @@
           <a:bodyPr lIns="0" tIns="0" rIns="0" bIns="0"/>
           <a:lstStyle>
             <a:lvl1pPr>
-              <a:defRPr sz="1125">
+              <a:defRPr sz="1050">
                 <a:solidFill>
                   <a:schemeClr val="tx2"/>
                 </a:solidFill>
@@ -13064,16 +15173,16 @@
       </p:grpSpPr>
       <p:sp>
         <p:nvSpPr>
-          <p:cNvPr id="2" name="Text 1"/>
+          <p:cNvPr id="2" name="Text 0"/>
           <p:cNvSpPr/>
           <p:nvPr>
-            <p:ph idx="101" type="body" hasCustomPrompt="1"/>
+            <p:ph idx="100" type="body" hasCustomPrompt="1"/>
           </p:nvPr>
         </p:nvSpPr>
         <p:spPr>
           <a:xfrm>
             <a:off x="685800" y="514350"/>
-            <a:ext cx="10820400" cy="228600"/>
+            <a:ext cx="10820400" cy="209550"/>
           </a:xfrm>
           <a:prstGeom prst="rect">
             <a:avLst/>
@@ -13089,29 +15198,29 @@
               <a:buNone/>
             </a:pPr>
             <a:r>
-              <a:rPr lang="en-US" sz="1350" b="1" spc="190" kern="0" dirty="0">
-                <a:solidFill>
-                  <a:schemeClr val="accent2"/>
+              <a:rPr lang="en-US" sz="1200" b="1" spc="150" kern="0" dirty="0">
+                <a:solidFill>
+                  <a:schemeClr val="tx2"/>
                 </a:solidFill>
               </a:rPr>
-              <a:t>MÁQUINA DE ESTADOS E AGENDA</a:t>
-            </a:r>
-            <a:endParaRPr lang="en-US" sz="1350" dirty="0"/>
+              <a:t>2 · PROJETO</a:t>
+            </a:r>
+            <a:endParaRPr lang="en-US" sz="1200" dirty="0"/>
           </a:p>
         </p:txBody>
       </p:sp>
       <p:sp>
         <p:nvSpPr>
-          <p:cNvPr id="3" name="Text 1"/>
+          <p:cNvPr id="3" name="Text 0"/>
           <p:cNvSpPr/>
           <p:nvPr>
-            <p:ph idx="102" type="title" hasCustomPrompt="1"/>
+            <p:ph idx="101" type="title" hasCustomPrompt="1"/>
           </p:nvPr>
         </p:nvSpPr>
         <p:spPr>
           <a:xfrm>
             <a:off x="685800" y="762000"/>
-            <a:ext cx="10820400" cy="514350"/>
+            <a:ext cx="10820400" cy="495300"/>
           </a:xfrm>
           <a:prstGeom prst="rect">
             <a:avLst/>
@@ -13127,14 +15236,14 @@
               <a:buNone/>
             </a:pPr>
             <a:r>
-              <a:rPr lang="en-US" sz="3300" b="1" dirty="0">
+              <a:rPr lang="en-US" sz="3000" b="1" dirty="0">
                 <a:solidFill>
                   <a:schemeClr val="accent1"/>
                 </a:solidFill>
               </a:rPr>
-              <a:t>Ausência de dado nunca vira “retirada”</a:t>
-            </a:r>
-            <a:endParaRPr lang="en-US" sz="3300" dirty="0"/>
+              <a:t>Máquina de estados do ciclo diário</a:t>
+            </a:r>
+            <a:endParaRPr lang="en-US" sz="3000" dirty="0"/>
           </a:p>
         </p:txBody>
       </p:sp>
@@ -13147,7 +15256,7 @@
         <p:spPr>
           <a:xfrm>
             <a:off x="685800" y="6477000"/>
-            <a:ext cx="2857500" cy="209550"/>
+            <a:ext cx="2476500" cy="209550"/>
           </a:xfrm>
           <a:prstGeom prst="rect">
             <a:avLst/>
@@ -13163,14 +15272,14 @@
               <a:buNone/>
             </a:pPr>
             <a:r>
-              <a:rPr lang="en-US" sz="1125" b="1" dirty="0">
-                <a:solidFill>
-                  <a:schemeClr val="accent2"/>
+              <a:rPr lang="en-US" sz="1050" b="1" dirty="0">
+                <a:solidFill>
+                  <a:schemeClr val="tx2"/>
                 </a:solidFill>
               </a:rPr>
               <a:t>Juliana</a:t>
             </a:r>
-            <a:endParaRPr lang="en-US" sz="1125" dirty="0"/>
+            <a:endParaRPr lang="en-US" sz="1050" dirty="0"/>
           </a:p>
         </p:txBody>
       </p:sp>
@@ -13182,18 +15291,18 @@
         </p:nvSpPr>
         <p:spPr>
           <a:xfrm>
-            <a:off x="685800" y="1571625"/>
-            <a:ext cx="1952625" cy="1581150"/>
+            <a:off x="685800" y="1524000"/>
+            <a:ext cx="1952625" cy="1428750"/>
           </a:xfrm>
           <a:prstGeom prst="roundRect">
             <a:avLst>
-              <a:gd name="adj" fmla="val 6024"/>
+              <a:gd name="adj" fmla="val 2667"/>
             </a:avLst>
           </a:prstGeom>
           <a:solidFill>
             <a:schemeClr val="bg1"/>
           </a:solidFill>
-          <a:ln w="19050">
+          <a:ln w="15875">
             <a:solidFill>
               <a:schemeClr val="accent1"/>
             </a:solidFill>
@@ -13226,8 +15335,8 @@
         </p:nvSpPr>
         <p:spPr>
           <a:xfrm>
-            <a:off x="2638425" y="1571625"/>
-            <a:ext cx="447675" cy="1581150"/>
+            <a:off x="2638425" y="1524000"/>
+            <a:ext cx="447675" cy="1428750"/>
           </a:xfrm>
           <a:prstGeom prst="rect">
             <a:avLst/>
@@ -13262,18 +15371,18 @@
         </p:nvSpPr>
         <p:spPr>
           <a:xfrm>
-            <a:off x="3086100" y="1571625"/>
-            <a:ext cx="1952625" cy="1581150"/>
+            <a:off x="3086100" y="1524000"/>
+            <a:ext cx="1952625" cy="1428750"/>
           </a:xfrm>
           <a:prstGeom prst="roundRect">
             <a:avLst>
-              <a:gd name="adj" fmla="val 6024"/>
+              <a:gd name="adj" fmla="val 2667"/>
             </a:avLst>
           </a:prstGeom>
           <a:solidFill>
             <a:schemeClr val="bg1"/>
           </a:solidFill>
-          <a:ln w="19050">
+          <a:ln w="15875">
             <a:solidFill>
               <a:schemeClr val="accent1"/>
             </a:solidFill>
@@ -13320,8 +15429,8 @@
         </p:nvSpPr>
         <p:spPr>
           <a:xfrm>
-            <a:off x="5038725" y="1571625"/>
-            <a:ext cx="438150" cy="1581150"/>
+            <a:off x="5038725" y="1524000"/>
+            <a:ext cx="438150" cy="1428750"/>
           </a:xfrm>
           <a:prstGeom prst="rect">
             <a:avLst/>
@@ -13356,18 +15465,18 @@
         </p:nvSpPr>
         <p:spPr>
           <a:xfrm>
-            <a:off x="5476875" y="1571625"/>
-            <a:ext cx="1962150" cy="1581150"/>
+            <a:off x="5476875" y="1524000"/>
+            <a:ext cx="1962150" cy="1428750"/>
           </a:xfrm>
           <a:prstGeom prst="roundRect">
             <a:avLst>
-              <a:gd name="adj" fmla="val 6024"/>
+              <a:gd name="adj" fmla="val 2667"/>
             </a:avLst>
           </a:prstGeom>
           <a:solidFill>
             <a:schemeClr val="bg2"/>
           </a:solidFill>
-          <a:ln w="19050">
+          <a:ln w="15875">
             <a:solidFill>
               <a:schemeClr val="accent1"/>
             </a:solidFill>
@@ -13414,8 +15523,8 @@
         </p:nvSpPr>
         <p:spPr>
           <a:xfrm>
-            <a:off x="7439025" y="1571625"/>
-            <a:ext cx="438150" cy="1581150"/>
+            <a:off x="7439025" y="1524000"/>
+            <a:ext cx="438150" cy="1428750"/>
           </a:xfrm>
           <a:prstGeom prst="rect">
             <a:avLst/>
@@ -13450,18 +15559,18 @@
         </p:nvSpPr>
         <p:spPr>
           <a:xfrm>
-            <a:off x="7877175" y="1571625"/>
-            <a:ext cx="1771650" cy="876300"/>
+            <a:off x="7877175" y="1524000"/>
+            <a:ext cx="1771650" cy="704850"/>
           </a:xfrm>
           <a:prstGeom prst="roundRect">
             <a:avLst>
-              <a:gd name="adj" fmla="val 10870"/>
+              <a:gd name="adj" fmla="val 5405"/>
             </a:avLst>
           </a:prstGeom>
           <a:solidFill>
             <a:schemeClr val="bg1"/>
           </a:solidFill>
-          <a:ln w="19050">
+          <a:ln w="15875">
             <a:solidFill>
               <a:srgbClr val="C9D1DA"/>
             </a:solidFill>
@@ -13475,20 +15584,9 @@
               <a:buNone/>
             </a:pPr>
             <a:r>
-              <a:rPr lang="en-US" sz="1350" dirty="0">
-                <a:solidFill>
-                  <a:schemeClr val="tx1"/>
-                </a:solidFill>
-              </a:rPr>
-              <a:t>✅ </a:t>
-            </a:r>
-            <a:pPr algn="l" indent="0" marL="0">
-              <a:buNone/>
-            </a:pPr>
-            <a:r>
               <a:rPr lang="en-US" sz="1350" b="1" dirty="0">
                 <a:solidFill>
-                  <a:schemeClr val="tx1"/>
+                  <a:schemeClr val="accent1"/>
                 </a:solidFill>
               </a:rPr>
               <a:t>Removed</a:t>
@@ -13500,12 +15598,12 @@
               <a:buNone/>
             </a:pPr>
             <a:r>
-              <a:rPr lang="en-US" sz="1350" dirty="0">
+              <a:rPr lang="en-US" sz="1200" dirty="0">
                 <a:solidFill>
                   <a:schemeClr val="tx1"/>
                 </a:solidFill>
               </a:rPr>
-              <a:t>viu a dose, depois 2 vazios</a:t>
+              <a:t>dose vista, depois 2 leituras vazias</a:t>
             </a:r>
             <a:endParaRPr lang="en-US" sz="1425" dirty="0"/>
           </a:p>
@@ -13519,18 +15617,18 @@
         </p:nvSpPr>
         <p:spPr>
           <a:xfrm>
-            <a:off x="9734550" y="1571625"/>
-            <a:ext cx="1771650" cy="876300"/>
+            <a:off x="9734550" y="1524000"/>
+            <a:ext cx="1771650" cy="704850"/>
           </a:xfrm>
           <a:prstGeom prst="roundRect">
             <a:avLst>
-              <a:gd name="adj" fmla="val 10870"/>
+              <a:gd name="adj" fmla="val 5405"/>
             </a:avLst>
           </a:prstGeom>
           <a:solidFill>
             <a:schemeClr val="bg1"/>
           </a:solidFill>
-          <a:ln w="19050">
+          <a:ln w="15875">
             <a:solidFill>
               <a:srgbClr val="C9D1DA"/>
             </a:solidFill>
@@ -13544,20 +15642,9 @@
               <a:buNone/>
             </a:pPr>
             <a:r>
-              <a:rPr lang="en-US" sz="1350" dirty="0">
-                <a:solidFill>
-                  <a:schemeClr val="tx1"/>
-                </a:solidFill>
-              </a:rPr>
-              <a:t>🔔 </a:t>
-            </a:r>
-            <a:pPr algn="l" indent="0" marL="0">
-              <a:buNone/>
-            </a:pPr>
-            <a:r>
               <a:rPr lang="en-US" sz="1350" b="1" dirty="0">
                 <a:solidFill>
-                  <a:schemeClr val="tx1"/>
+                  <a:schemeClr val="accent1"/>
                 </a:solidFill>
               </a:rPr>
               <a:t>Alert</a:t>
@@ -13569,12 +15656,12 @@
               <a:buNone/>
             </a:pPr>
             <a:r>
-              <a:rPr lang="en-US" sz="1350" dirty="0">
+              <a:rPr lang="en-US" sz="1200" dirty="0">
                 <a:solidFill>
                   <a:schemeClr val="tx1"/>
                 </a:solidFill>
               </a:rPr>
-              <a:t>fim da janela, dose presente</a:t>
+              <a:t>fim da janela com a dose presente</a:t>
             </a:r>
             <a:endParaRPr lang="en-US" sz="1425" dirty="0"/>
           </a:p>
@@ -13588,18 +15675,18 @@
         </p:nvSpPr>
         <p:spPr>
           <a:xfrm>
-            <a:off x="7877175" y="2524125"/>
-            <a:ext cx="1771650" cy="628650"/>
+            <a:off x="7877175" y="2247900"/>
+            <a:ext cx="1771650" cy="704850"/>
           </a:xfrm>
           <a:prstGeom prst="roundRect">
             <a:avLst>
-              <a:gd name="adj" fmla="val 15152"/>
+              <a:gd name="adj" fmla="val 5405"/>
             </a:avLst>
           </a:prstGeom>
           <a:solidFill>
             <a:schemeClr val="bg1"/>
           </a:solidFill>
-          <a:ln w="19050">
+          <a:ln w="15875">
             <a:solidFill>
               <a:srgbClr val="C9D1DA"/>
             </a:solidFill>
@@ -13613,20 +15700,9 @@
               <a:buNone/>
             </a:pPr>
             <a:r>
-              <a:rPr lang="en-US" sz="1350" dirty="0">
-                <a:solidFill>
-                  <a:schemeClr val="tx1"/>
-                </a:solidFill>
-              </a:rPr>
-              <a:t>⚠️ </a:t>
-            </a:r>
-            <a:pPr algn="l" indent="0" marL="0">
-              <a:buNone/>
-            </a:pPr>
-            <a:r>
               <a:rPr lang="en-US" sz="1350" b="1" dirty="0">
                 <a:solidFill>
-                  <a:schemeClr val="tx1"/>
+                  <a:schemeClr val="accent1"/>
                 </a:solidFill>
               </a:rPr>
               <a:t>NotLoaded</a:t>
@@ -13638,12 +15714,12 @@
               <a:buNone/>
             </a:pPr>
             <a:r>
-              <a:rPr lang="en-US" sz="1350" dirty="0">
+              <a:rPr lang="en-US" sz="1200" dirty="0">
                 <a:solidFill>
                   <a:schemeClr val="tx1"/>
                 </a:solidFill>
               </a:rPr>
-              <a:t>já estava vazio</a:t>
+              <a:t>compartimento já estava vazio</a:t>
             </a:r>
             <a:endParaRPr lang="en-US" sz="1425" dirty="0"/>
           </a:p>
@@ -13657,18 +15733,18 @@
         </p:nvSpPr>
         <p:spPr>
           <a:xfrm>
-            <a:off x="9734550" y="2524125"/>
-            <a:ext cx="1771650" cy="628650"/>
+            <a:off x="9734550" y="2247900"/>
+            <a:ext cx="1771650" cy="704850"/>
           </a:xfrm>
           <a:prstGeom prst="roundRect">
             <a:avLst>
-              <a:gd name="adj" fmla="val 15152"/>
+              <a:gd name="adj" fmla="val 5405"/>
             </a:avLst>
           </a:prstGeom>
           <a:solidFill>
             <a:schemeClr val="bg1"/>
           </a:solidFill>
-          <a:ln w="19050">
+          <a:ln w="15875">
             <a:solidFill>
               <a:srgbClr val="C9D1DA"/>
             </a:solidFill>
@@ -13682,20 +15758,9 @@
               <a:buNone/>
             </a:pPr>
             <a:r>
-              <a:rPr lang="en-US" sz="1350" dirty="0">
-                <a:solidFill>
-                  <a:schemeClr val="tx1"/>
-                </a:solidFill>
-              </a:rPr>
-              <a:t>❌ </a:t>
-            </a:r>
-            <a:pPr algn="l" indent="0" marL="0">
-              <a:buNone/>
-            </a:pPr>
-            <a:r>
               <a:rPr lang="en-US" sz="1350" b="1" dirty="0">
                 <a:solidFill>
-                  <a:schemeClr val="tx1"/>
+                  <a:schemeClr val="accent1"/>
                 </a:solidFill>
               </a:rPr>
               <a:t>Fault</a:t>
@@ -13707,7 +15772,7 @@
               <a:buNone/>
             </a:pPr>
             <a:r>
-              <a:rPr lang="en-US" sz="1350" dirty="0">
+              <a:rPr lang="en-US" sz="1200" dirty="0">
                 <a:solidFill>
                   <a:schemeClr val="tx1"/>
                 </a:solidFill>
@@ -13726,8 +15791,44 @@
         </p:nvSpPr>
         <p:spPr>
           <a:xfrm>
-            <a:off x="685800" y="3333750"/>
-            <a:ext cx="10820400" cy="2095500"/>
+            <a:off x="685800" y="3048000"/>
+            <a:ext cx="10820400" cy="209550"/>
+          </a:xfrm>
+          <a:prstGeom prst="rect">
+            <a:avLst/>
+          </a:prstGeom>
+          <a:noFill/>
+          <a:ln/>
+        </p:spPr>
+        <p:txBody>
+          <a:bodyPr wrap="square" lIns="0" tIns="0" rIns="0" bIns="0" rtlCol="0" anchor="t"/>
+          <a:lstStyle/>
+          <a:p>
+            <a:pPr indent="0" marL="0">
+              <a:buNone/>
+            </a:pPr>
+            <a:r>
+              <a:rPr lang="en-US" sz="1200" dirty="0">
+                <a:solidFill>
+                  <a:schemeClr val="tx2"/>
+                </a:solidFill>
+              </a:rPr>
+              <a:t>Figura 2 — Estados do ciclo diário e condições de término da janela.</a:t>
+            </a:r>
+            <a:endParaRPr lang="en-US" sz="1200" dirty="0"/>
+          </a:p>
+        </p:txBody>
+      </p:sp>
+      <p:sp>
+        <p:nvSpPr>
+          <p:cNvPr id="16" name="Text 14"/>
+          <p:cNvSpPr txBox="1"/>
+          <p:nvPr/>
+        </p:nvSpPr>
+        <p:spPr>
+          <a:xfrm>
+            <a:off x="685800" y="3486150"/>
+            <a:ext cx="10820400" cy="2762250"/>
           </a:xfrm>
           <a:prstGeom prst="rect">
             <a:avLst/>
@@ -13744,54 +15845,37 @@
                 <a:spcPct val="112000"/>
               </a:lnSpc>
               <a:spcAft>
-                <a:spcPts val="750"/>
+                <a:spcPts val="600"/>
               </a:spcAft>
               <a:buSzPct val="100000"/>
               <a:buChar char="•"/>
             </a:pPr>
             <a:r>
-              <a:rPr lang="en-US" sz="1800" dirty="0">
+              <a:rPr lang="en-US" sz="1650" b="1" dirty="0">
                 <a:solidFill>
                   <a:schemeClr val="tx1"/>
                 </a:solidFill>
               </a:rPr>
-              <a:t>A presença é verificada </a:t>
+              <a:t>Princípio de projeto:</a:t>
             </a:r>
             <a:pPr indent="0" marL="0">
               <a:lnSpc>
                 <a:spcPct val="112000"/>
               </a:lnSpc>
               <a:spcAft>
-                <a:spcPts val="750"/>
+                <a:spcPts val="600"/>
               </a:spcAft>
               <a:buNone/>
             </a:pPr>
             <a:r>
-              <a:rPr lang="en-US" sz="1800" b="1" dirty="0">
+              <a:rPr lang="en-US" sz="1650" dirty="0">
                 <a:solidFill>
                   <a:schemeClr val="tx1"/>
                 </a:solidFill>
               </a:rPr>
-              <a:t>na janela</a:t>
-            </a:r>
-            <a:pPr indent="0" marL="0">
-              <a:lnSpc>
-                <a:spcPct val="112000"/>
-              </a:lnSpc>
-              <a:spcAft>
-                <a:spcPts val="750"/>
-              </a:spcAft>
-              <a:buNone/>
-            </a:pPr>
-            <a:r>
-              <a:rPr lang="en-US" sz="1800" dirty="0">
-                <a:solidFill>
-                  <a:schemeClr val="tx1"/>
-                </a:solidFill>
-              </a:rPr>
-              <a:t>: o cuidador repõe a dose quando quiser.</a:t>
-            </a:r>
-            <a:endParaRPr lang="en-US" sz="1800" dirty="0"/>
+              <a:t> ausência de dado nunca resulta em “retirada”; leva a Fault.</a:t>
+            </a:r>
+            <a:endParaRPr lang="en-US" sz="1700" dirty="0"/>
           </a:p>
           <a:p>
             <a:pPr marL="266700" indent="-266700">
@@ -13799,54 +15883,54 @@
                 <a:spcPct val="112000"/>
               </a:lnSpc>
               <a:spcAft>
-                <a:spcPts val="750"/>
+                <a:spcPts val="600"/>
               </a:spcAft>
               <a:buSzPct val="100000"/>
               <a:buChar char="•"/>
             </a:pPr>
             <a:r>
-              <a:rPr lang="en-US" sz="1800" dirty="0">
+              <a:rPr lang="en-US" sz="1650" dirty="0">
                 <a:solidFill>
                   <a:schemeClr val="tx1"/>
                 </a:solidFill>
               </a:rPr>
-              <a:t>Após o alerta, continua observando por 30 min → ✅ </a:t>
+              <a:t>A presença é verificada </a:t>
             </a:r>
             <a:pPr indent="0" marL="0">
               <a:lnSpc>
                 <a:spcPct val="112000"/>
               </a:lnSpc>
               <a:spcAft>
-                <a:spcPts val="750"/>
+                <a:spcPts val="600"/>
               </a:spcAft>
               <a:buNone/>
             </a:pPr>
             <a:r>
-              <a:rPr lang="en-US" sz="1800" b="1" dirty="0">
+              <a:rPr lang="en-US" sz="1650" b="1" dirty="0">
                 <a:solidFill>
                   <a:schemeClr val="tx1"/>
                 </a:solidFill>
               </a:rPr>
-              <a:t>retirada com atraso</a:t>
+              <a:t>dentro da janela</a:t>
             </a:r>
             <a:pPr indent="0" marL="0">
               <a:lnSpc>
                 <a:spcPct val="112000"/>
               </a:lnSpc>
               <a:spcAft>
-                <a:spcPts val="750"/>
+                <a:spcPts val="600"/>
               </a:spcAft>
               <a:buNone/>
             </a:pPr>
             <a:r>
-              <a:rPr lang="en-US" sz="1800" dirty="0">
+              <a:rPr lang="en-US" sz="1650" dirty="0">
                 <a:solidFill>
                   <a:schemeClr val="tx1"/>
                 </a:solidFill>
               </a:rPr>
-              <a:t>.</a:t>
-            </a:r>
-            <a:endParaRPr lang="en-US" sz="1800" dirty="0"/>
+              <a:t>: o cuidador pode repor a dose a qualquer momento.</a:t>
+            </a:r>
+            <a:endParaRPr lang="en-US" sz="1700" dirty="0"/>
           </a:p>
           <a:p>
             <a:pPr marL="266700" indent="-266700">
@@ -13854,54 +15938,109 @@
                 <a:spcPct val="112000"/>
               </a:lnSpc>
               <a:spcAft>
-                <a:spcPts val="750"/>
+                <a:spcPts val="600"/>
               </a:spcAft>
               <a:buSzPct val="100000"/>
               <a:buChar char="•"/>
             </a:pPr>
             <a:r>
-              <a:rPr lang="en-US" sz="1800" dirty="0">
+              <a:rPr lang="en-US" sz="1650" dirty="0">
                 <a:solidFill>
                   <a:schemeClr val="tx1"/>
                 </a:solidFill>
               </a:rPr>
-              <a:t>Hora pelo </a:t>
+              <a:t>Após o alerta, a observação continua por 30 min; uma retirada nesse período é registrada como </a:t>
             </a:r>
             <a:pPr indent="0" marL="0">
               <a:lnSpc>
                 <a:spcPct val="112000"/>
               </a:lnSpc>
               <a:spcAft>
-                <a:spcPts val="750"/>
+                <a:spcPts val="600"/>
               </a:spcAft>
               <a:buNone/>
             </a:pPr>
             <a:r>
-              <a:rPr lang="en-US" sz="1800" b="1" dirty="0">
+              <a:rPr lang="en-US" sz="1650" b="1" dirty="0">
                 <a:solidFill>
                   <a:schemeClr val="tx1"/>
                 </a:solidFill>
               </a:rPr>
-              <a:t>SNTP</a:t>
+              <a:t>retirada com atraso</a:t>
             </a:r>
             <a:pPr indent="0" marL="0">
               <a:lnSpc>
                 <a:spcPct val="112000"/>
               </a:lnSpc>
               <a:spcAft>
-                <a:spcPts val="750"/>
+                <a:spcPts val="600"/>
               </a:spcAft>
               <a:buNone/>
             </a:pPr>
             <a:r>
-              <a:rPr lang="en-US" sz="1800" dirty="0">
+              <a:rPr lang="en-US" sz="1650" dirty="0">
                 <a:solidFill>
                   <a:schemeClr val="tx1"/>
                 </a:solidFill>
               </a:rPr>
-              <a:t>; a janela do dia seguinte é armada sozinha; após reinício, a janela de hoje é retomada.</a:t>
-            </a:r>
-            <a:endParaRPr lang="en-US" sz="1800" dirty="0"/>
+              <a:t>.</a:t>
+            </a:r>
+            <a:endParaRPr lang="en-US" sz="1700" dirty="0"/>
+          </a:p>
+          <a:p>
+            <a:pPr marL="266700" indent="-266700">
+              <a:lnSpc>
+                <a:spcPct val="112000"/>
+              </a:lnSpc>
+              <a:spcAft>
+                <a:spcPts val="600"/>
+              </a:spcAft>
+              <a:buSzPct val="100000"/>
+              <a:buChar char="•"/>
+            </a:pPr>
+            <a:r>
+              <a:rPr lang="en-US" sz="1650" dirty="0">
+                <a:solidFill>
+                  <a:schemeClr val="tx1"/>
+                </a:solidFill>
+              </a:rPr>
+              <a:t>Hora obtida por </a:t>
+            </a:r>
+            <a:pPr indent="0" marL="0">
+              <a:lnSpc>
+                <a:spcPct val="112000"/>
+              </a:lnSpc>
+              <a:spcAft>
+                <a:spcPts val="600"/>
+              </a:spcAft>
+              <a:buNone/>
+            </a:pPr>
+            <a:r>
+              <a:rPr lang="en-US" sz="1650" b="1" dirty="0">
+                <a:solidFill>
+                  <a:schemeClr val="tx1"/>
+                </a:solidFill>
+              </a:rPr>
+              <a:t>SNTP</a:t>
+            </a:r>
+            <a:pPr indent="0" marL="0">
+              <a:lnSpc>
+                <a:spcPct val="112000"/>
+              </a:lnSpc>
+              <a:spcAft>
+                <a:spcPts val="600"/>
+              </a:spcAft>
+              <a:buNone/>
+            </a:pPr>
+            <a:r>
+              <a:rPr lang="en-US" sz="1650" dirty="0">
+                <a:solidFill>
+                  <a:schemeClr val="tx1"/>
+                </a:solidFill>
+              </a:rPr>
+              <a:t>; a janela do dia seguinte é armada automaticamente e, após reinício, a janela do dia é retomada.</a:t>
+            </a:r>
+            <a:endParaRPr lang="en-US" sz="1700" dirty="0"/>
           </a:p>
         </p:txBody>
       </p:sp>
@@ -13933,7 +16072,7 @@
           <a:bodyPr lIns="0" tIns="0" rIns="0" bIns="0"/>
           <a:lstStyle>
             <a:lvl1pPr>
-              <a:defRPr sz="1125">
+              <a:defRPr sz="1050">
                 <a:solidFill>
                   <a:schemeClr val="tx2"/>
                 </a:solidFill>
@@ -13977,16 +16116,16 @@
       </p:grpSpPr>
       <p:sp>
         <p:nvSpPr>
-          <p:cNvPr id="2" name="Text 1"/>
+          <p:cNvPr id="2" name="Text 0"/>
           <p:cNvSpPr/>
           <p:nvPr>
-            <p:ph idx="101" type="body" hasCustomPrompt="1"/>
+            <p:ph idx="100" type="body" hasCustomPrompt="1"/>
           </p:nvPr>
         </p:nvSpPr>
         <p:spPr>
           <a:xfrm>
             <a:off x="685800" y="514350"/>
-            <a:ext cx="10820400" cy="228600"/>
+            <a:ext cx="10820400" cy="209550"/>
           </a:xfrm>
           <a:prstGeom prst="rect">
             <a:avLst/>
@@ -14002,29 +16141,29 @@
               <a:buNone/>
             </a:pPr>
             <a:r>
-              <a:rPr lang="en-US" sz="1350" b="1" spc="190" kern="0" dirty="0">
-                <a:solidFill>
-                  <a:schemeClr val="accent2"/>
+              <a:rPr lang="en-US" sz="1200" b="1" spc="150" kern="0" dirty="0">
+                <a:solidFill>
+                  <a:schemeClr val="tx2"/>
                 </a:solidFill>
               </a:rPr>
-              <a:t>PROTOCOLOS E INTERFACE</a:t>
-            </a:r>
-            <a:endParaRPr lang="en-US" sz="1350" dirty="0"/>
+              <a:t>2 · PROJETO</a:t>
+            </a:r>
+            <a:endParaRPr lang="en-US" sz="1200" dirty="0"/>
           </a:p>
         </p:txBody>
       </p:sp>
       <p:sp>
         <p:nvSpPr>
-          <p:cNvPr id="3" name="Text 1"/>
+          <p:cNvPr id="3" name="Text 0"/>
           <p:cNvSpPr/>
           <p:nvPr>
-            <p:ph idx="102" type="title" hasCustomPrompt="1"/>
+            <p:ph idx="101" type="title" hasCustomPrompt="1"/>
           </p:nvPr>
         </p:nvSpPr>
         <p:spPr>
           <a:xfrm>
             <a:off x="685800" y="762000"/>
-            <a:ext cx="10820400" cy="514350"/>
+            <a:ext cx="10820400" cy="495300"/>
           </a:xfrm>
           <a:prstGeom prst="rect">
             <a:avLst/>
@@ -14040,14 +16179,14 @@
               <a:buNone/>
             </a:pPr>
             <a:r>
-              <a:rPr lang="en-US" sz="3300" b="1" dirty="0">
+              <a:rPr lang="en-US" sz="3000" b="1" dirty="0">
                 <a:solidFill>
                   <a:schemeClr val="accent1"/>
                 </a:solidFill>
               </a:rPr>
-              <a:t>Do painel no PC ao celular do cuidador</a:t>
-            </a:r>
-            <a:endParaRPr lang="en-US" sz="3300" dirty="0"/>
+              <a:t>Protocolos de comunicação e interface</a:t>
+            </a:r>
+            <a:endParaRPr lang="en-US" sz="3000" dirty="0"/>
           </a:p>
         </p:txBody>
       </p:sp>
@@ -14060,7 +16199,7 @@
         <p:spPr>
           <a:xfrm>
             <a:off x="685800" y="6477000"/>
-            <a:ext cx="2857500" cy="209550"/>
+            <a:ext cx="2476500" cy="209550"/>
           </a:xfrm>
           <a:prstGeom prst="rect">
             <a:avLst/>
@@ -14076,14 +16215,14 @@
               <a:buNone/>
             </a:pPr>
             <a:r>
-              <a:rPr lang="en-US" sz="1125" b="1" dirty="0">
-                <a:solidFill>
-                  <a:schemeClr val="accent2"/>
+              <a:rPr lang="en-US" sz="1050" b="1" dirty="0">
+                <a:solidFill>
+                  <a:schemeClr val="tx2"/>
                 </a:solidFill>
               </a:rPr>
               <a:t>Juliana</a:t>
             </a:r>
-            <a:endParaRPr lang="en-US" sz="1125" dirty="0"/>
+            <a:endParaRPr lang="en-US" sz="1050" dirty="0"/>
           </a:p>
         </p:txBody>
       </p:sp>
@@ -14939,7 +17078,7 @@
                   <a:schemeClr val="tx1"/>
                 </a:solidFill>
               </a:rPr>
-              <a:t>Painel (Python/Tkinter):</a:t>
+              <a:t>Painel de configuração (Python/Tkinter):</a:t>
             </a:r>
             <a:pPr indent="0" marL="0">
               <a:lnSpc>
@@ -14953,7 +17092,7 @@
                   <a:schemeClr val="tx1"/>
                 </a:solidFill>
               </a:rPr>
-              <a:t> Câmera · Agenda · Wi-Fi e Telegram. Roda no Windows e no macOS.</a:t>
+              <a:t> abas Câmera, Agenda e Wi-Fi/Telegram. Executa no Windows e no macOS.</a:t>
             </a:r>
             <a:endParaRPr lang="en-US" sz="1350" dirty="0"/>
           </a:p>
@@ -14968,11 +17107,11 @@
         <p:spPr>
           <a:xfrm>
             <a:off x="6286500" y="1485900"/>
-            <a:ext cx="5219700" cy="1028700"/>
+            <a:ext cx="5219700" cy="952500"/>
           </a:xfrm>
           <a:prstGeom prst="roundRect">
             <a:avLst>
-              <a:gd name="adj" fmla="val 11111"/>
+              <a:gd name="adj" fmla="val 8000"/>
             </a:avLst>
           </a:prstGeom>
           <a:solidFill>
@@ -14992,7 +17131,7 @@
               <a:buNone/>
             </a:pPr>
             <a:r>
-              <a:rPr lang="en-US" sz="1425" dirty="0">
+              <a:rPr lang="en-US" sz="1350" dirty="0">
                 <a:solidFill>
                   <a:schemeClr val="tx1"/>
                 </a:solidFill>
@@ -15003,35 +17142,35 @@
               <a:buNone/>
             </a:pPr>
             <a:r>
-              <a:rPr lang="en-US" sz="1425" b="1" dirty="0">
+              <a:rPr lang="en-US" sz="1350" b="1" dirty="0">
                 <a:solidFill>
                   <a:schemeClr val="tx1"/>
                 </a:solidFill>
               </a:rPr>
               <a:t>Auditor ligado</a:t>
             </a:r>
-            <a:endParaRPr lang="en-US" sz="1425" dirty="0"/>
+            <a:endParaRPr lang="en-US" sz="1350" dirty="0"/>
           </a:p>
           <a:p>
             <a:pPr algn="l" indent="0" marL="0">
               <a:buNone/>
             </a:pPr>
             <a:r>
-              <a:rPr lang="en-US" sz="1425" dirty="0">
+              <a:rPr lang="en-US" sz="1350" dirty="0">
                 <a:solidFill>
                   <a:schemeClr val="tx1"/>
                 </a:solidFill>
               </a:rPr>
               <a:t>🕒 Relógio: seg 12/10, 07:58 (internet)</a:t>
             </a:r>
-            <a:endParaRPr lang="en-US" sz="1425" dirty="0"/>
+            <a:endParaRPr lang="en-US" sz="1350" dirty="0"/>
           </a:p>
           <a:p>
             <a:pPr algn="l" indent="0" marL="0">
               <a:buNone/>
             </a:pPr>
             <a:r>
-              <a:rPr lang="en-US" sz="1425" dirty="0">
+              <a:rPr lang="en-US" sz="1350" dirty="0">
                 <a:solidFill>
                   <a:schemeClr val="tx1"/>
                 </a:solidFill>
@@ -15042,14 +17181,14 @@
               <a:buNone/>
             </a:pPr>
             <a:r>
-              <a:rPr lang="en-US" sz="1425" b="1" dirty="0">
+              <a:rPr lang="en-US" sz="1350" b="1" dirty="0">
                 <a:solidFill>
                   <a:schemeClr val="tx1"/>
                 </a:solidFill>
               </a:rPr>
               <a:t>seg 12/10 às 08:00</a:t>
             </a:r>
-            <a:endParaRPr lang="en-US" sz="1425" dirty="0"/>
+            <a:endParaRPr lang="en-US" sz="1350" dirty="0"/>
           </a:p>
         </p:txBody>
       </p:sp>
@@ -15061,12 +17200,12 @@
         </p:nvSpPr>
         <p:spPr>
           <a:xfrm>
-            <a:off x="6286500" y="2628900"/>
-            <a:ext cx="5219700" cy="762000"/>
+            <a:off x="6286500" y="2533650"/>
+            <a:ext cx="5219700" cy="704850"/>
           </a:xfrm>
           <a:prstGeom prst="roundRect">
             <a:avLst>
-              <a:gd name="adj" fmla="val 15000"/>
+              <a:gd name="adj" fmla="val 10811"/>
             </a:avLst>
           </a:prstGeom>
           <a:solidFill>
@@ -15086,7 +17225,7 @@
               <a:buNone/>
             </a:pPr>
             <a:r>
-              <a:rPr lang="en-US" sz="1425" dirty="0">
+              <a:rPr lang="en-US" sz="1350" dirty="0">
                 <a:solidFill>
                   <a:schemeClr val="tx1"/>
                 </a:solidFill>
@@ -15097,28 +17236,28 @@
               <a:buNone/>
             </a:pPr>
             <a:r>
-              <a:rPr lang="en-US" sz="1425" b="1" dirty="0">
+              <a:rPr lang="en-US" sz="1350" b="1" dirty="0">
                 <a:solidFill>
                   <a:schemeClr val="tx1"/>
                 </a:solidFill>
               </a:rPr>
               <a:t>Hora da dose: 08:00</a:t>
             </a:r>
-            <a:endParaRPr lang="en-US" sz="1425" dirty="0"/>
+            <a:endParaRPr lang="en-US" sz="1350" dirty="0"/>
           </a:p>
           <a:p>
             <a:pPr algn="l" indent="0" marL="0">
               <a:buNone/>
             </a:pPr>
             <a:r>
-              <a:rPr lang="en-US" sz="1425" dirty="0">
+              <a:rPr lang="en-US" sz="1350" dirty="0">
                 <a:solidFill>
                   <a:schemeClr val="tx1"/>
                 </a:solidFill>
               </a:rPr>
               <a:t>📷 Verificando o compartimento por até 30 min.</a:t>
             </a:r>
-            <a:endParaRPr lang="en-US" sz="1425" dirty="0"/>
+            <a:endParaRPr lang="en-US" sz="1350" dirty="0"/>
           </a:p>
         </p:txBody>
       </p:sp>
@@ -15130,12 +17269,12 @@
         </p:nvSpPr>
         <p:spPr>
           <a:xfrm>
-            <a:off x="6286500" y="3505200"/>
-            <a:ext cx="5219700" cy="723900"/>
+            <a:off x="6286500" y="3333750"/>
+            <a:ext cx="5219700" cy="704850"/>
           </a:xfrm>
           <a:prstGeom prst="roundRect">
             <a:avLst>
-              <a:gd name="adj" fmla="val 15789"/>
+              <a:gd name="adj" fmla="val 10811"/>
             </a:avLst>
           </a:prstGeom>
           <a:solidFill>
@@ -15155,7 +17294,7 @@
               <a:buNone/>
             </a:pPr>
             <a:r>
-              <a:rPr lang="en-US" sz="1425" dirty="0">
+              <a:rPr lang="en-US" sz="1350" dirty="0">
                 <a:solidFill>
                   <a:schemeClr val="tx1"/>
                 </a:solidFill>
@@ -15166,7 +17305,7 @@
               <a:buNone/>
             </a:pPr>
             <a:r>
-              <a:rPr lang="en-US" sz="1425" b="1" dirty="0">
+              <a:rPr lang="en-US" sz="1350" b="1" dirty="0">
                 <a:solidFill>
                   <a:schemeClr val="tx1"/>
                 </a:solidFill>
@@ -15177,7 +17316,7 @@
               <a:buNone/>
             </a:pPr>
             <a:r>
-              <a:rPr lang="en-US" sz="1425" dirty="0">
+              <a:rPr lang="en-US" sz="1350" dirty="0">
                 <a:solidFill>
                   <a:schemeClr val="tx1"/>
                 </a:solidFill>
@@ -15188,14 +17327,14 @@
               <a:buNone/>
             </a:pPr>
             <a:r>
-              <a:rPr lang="en-US" sz="1425" i="1" dirty="0">
+              <a:rPr lang="en-US" sz="1350" i="1" dirty="0">
                 <a:solidFill>
                   <a:schemeClr val="tx1"/>
                 </a:solidFill>
               </a:rPr>
               <a:t>+ foto</a:t>
             </a:r>
-            <a:endParaRPr lang="en-US" sz="1425" dirty="0"/>
+            <a:endParaRPr lang="en-US" sz="1350" dirty="0"/>
           </a:p>
         </p:txBody>
       </p:sp>
@@ -15207,12 +17346,12 @@
         </p:nvSpPr>
         <p:spPr>
           <a:xfrm>
-            <a:off x="6286500" y="4343400"/>
-            <a:ext cx="5219700" cy="495300"/>
+            <a:off x="6286500" y="4133850"/>
+            <a:ext cx="5219700" cy="476250"/>
           </a:xfrm>
           <a:prstGeom prst="roundRect">
             <a:avLst>
-              <a:gd name="adj" fmla="val 23077"/>
+              <a:gd name="adj" fmla="val 16000"/>
             </a:avLst>
           </a:prstGeom>
           <a:solidFill>
@@ -15232,7 +17371,7 @@
               <a:buNone/>
             </a:pPr>
             <a:r>
-              <a:rPr lang="en-US" sz="1425" dirty="0">
+              <a:rPr lang="en-US" sz="1350" dirty="0">
                 <a:solidFill>
                   <a:schemeClr val="tx1"/>
                 </a:solidFill>
@@ -15243,7 +17382,7 @@
               <a:buNone/>
             </a:pPr>
             <a:r>
-              <a:rPr lang="en-US" sz="1425" b="1" dirty="0">
+              <a:rPr lang="en-US" sz="1350" b="1" dirty="0">
                 <a:solidFill>
                   <a:schemeClr val="tx1"/>
                 </a:solidFill>
@@ -15254,14 +17393,50 @@
               <a:buNone/>
             </a:pPr>
             <a:r>
-              <a:rPr lang="en-US" sz="1425" dirty="0">
+              <a:rPr lang="en-US" sz="1350" dirty="0">
                 <a:solidFill>
                   <a:schemeClr val="tx1"/>
                 </a:solidFill>
               </a:rPr>
               <a:t> · 🕒 confirmada às 08:41</a:t>
             </a:r>
-            <a:endParaRPr lang="en-US" sz="1425" dirty="0"/>
+            <a:endParaRPr lang="en-US" sz="1350" dirty="0"/>
+          </a:p>
+        </p:txBody>
+      </p:sp>
+      <p:sp>
+        <p:nvSpPr>
+          <p:cNvPr id="11" name="Text 8"/>
+          <p:cNvSpPr txBox="1"/>
+          <p:nvPr/>
+        </p:nvSpPr>
+        <p:spPr>
+          <a:xfrm>
+            <a:off x="6286500" y="4705350"/>
+            <a:ext cx="5219700" cy="209550"/>
+          </a:xfrm>
+          <a:prstGeom prst="rect">
+            <a:avLst/>
+          </a:prstGeom>
+          <a:noFill/>
+          <a:ln/>
+        </p:spPr>
+        <p:txBody>
+          <a:bodyPr wrap="square" lIns="0" tIns="0" rIns="0" bIns="0" rtlCol="0" anchor="t"/>
+          <a:lstStyle/>
+          <a:p>
+            <a:pPr indent="0" marL="0">
+              <a:buNone/>
+            </a:pPr>
+            <a:r>
+              <a:rPr lang="en-US" sz="1200" dirty="0">
+                <a:solidFill>
+                  <a:schemeClr val="tx2"/>
+                </a:solidFill>
+              </a:rPr>
+              <a:t>Figura 3 — Mensagens enviadas ao cuidador pelo Telegram em um ciclo.</a:t>
+            </a:r>
+            <a:endParaRPr lang="en-US" sz="1200" dirty="0"/>
           </a:p>
         </p:txBody>
       </p:sp>
@@ -15293,7 +17468,7 @@
           <a:bodyPr lIns="0" tIns="0" rIns="0" bIns="0"/>
           <a:lstStyle>
             <a:lvl1pPr>
-              <a:defRPr sz="1125">
+              <a:defRPr sz="1050">
                 <a:solidFill>
                   <a:schemeClr val="tx2"/>
                 </a:solidFill>
@@ -15337,16 +17512,16 @@
       </p:grpSpPr>
       <p:sp>
         <p:nvSpPr>
-          <p:cNvPr id="2" name="Text 1"/>
+          <p:cNvPr id="2" name="Text 0"/>
           <p:cNvSpPr/>
           <p:nvPr>
-            <p:ph idx="101" type="body" hasCustomPrompt="1"/>
+            <p:ph idx="100" type="body" hasCustomPrompt="1"/>
           </p:nvPr>
         </p:nvSpPr>
         <p:spPr>
           <a:xfrm>
             <a:off x="685800" y="514350"/>
-            <a:ext cx="10820400" cy="228600"/>
+            <a:ext cx="10820400" cy="209550"/>
           </a:xfrm>
           <a:prstGeom prst="rect">
             <a:avLst/>
@@ -15362,29 +17537,29 @@
               <a:buNone/>
             </a:pPr>
             <a:r>
-              <a:rPr lang="en-US" sz="1350" b="1" spc="190" kern="0" dirty="0">
-                <a:solidFill>
-                  <a:schemeClr val="accent2"/>
+              <a:rPr lang="en-US" sz="1200" b="1" spc="150" kern="0" dirty="0">
+                <a:solidFill>
+                  <a:schemeClr val="tx2"/>
                 </a:solidFill>
               </a:rPr>
-              <a:t>VISÃO COMPUTACIONAL EMBARCADA</a:t>
-            </a:r>
-            <a:endParaRPr lang="en-US" sz="1350" dirty="0"/>
+              <a:t>2 · PROJETO</a:t>
+            </a:r>
+            <a:endParaRPr lang="en-US" sz="1200" dirty="0"/>
           </a:p>
         </p:txBody>
       </p:sp>
       <p:sp>
         <p:nvSpPr>
-          <p:cNvPr id="3" name="Text 1"/>
+          <p:cNvPr id="3" name="Text 0"/>
           <p:cNvSpPr/>
           <p:nvPr>
-            <p:ph idx="102" type="title" hasCustomPrompt="1"/>
+            <p:ph idx="101" type="title" hasCustomPrompt="1"/>
           </p:nvPr>
         </p:nvSpPr>
         <p:spPr>
           <a:xfrm>
             <a:off x="685800" y="762000"/>
-            <a:ext cx="10820400" cy="514350"/>
+            <a:ext cx="10820400" cy="495300"/>
           </a:xfrm>
           <a:prstGeom prst="rect">
             <a:avLst/>
@@ -15400,14 +17575,14 @@
               <a:buNone/>
             </a:pPr>
             <a:r>
-              <a:rPr lang="en-US" sz="3300" b="1" dirty="0">
+              <a:rPr lang="en-US" sz="3000" b="1" dirty="0">
                 <a:solidFill>
                   <a:schemeClr val="accent1"/>
                 </a:solidFill>
               </a:rPr>
-              <a:t>“O compartimento está diferente de vazio?”</a:t>
-            </a:r>
-            <a:endParaRPr lang="en-US" sz="3300" dirty="0"/>
+              <a:t>Visão computacional: subtração de fundo</a:t>
+            </a:r>
+            <a:endParaRPr lang="en-US" sz="3000" dirty="0"/>
           </a:p>
         </p:txBody>
       </p:sp>
@@ -15420,7 +17595,7 @@
         <p:spPr>
           <a:xfrm>
             <a:off x="685800" y="6477000"/>
-            <a:ext cx="2857500" cy="209550"/>
+            <a:ext cx="2476500" cy="209550"/>
           </a:xfrm>
           <a:prstGeom prst="rect">
             <a:avLst/>
@@ -15436,14 +17611,14 @@
               <a:buNone/>
             </a:pPr>
             <a:r>
-              <a:rPr lang="en-US" sz="1125" b="1" dirty="0">
-                <a:solidFill>
-                  <a:schemeClr val="accent2"/>
+              <a:rPr lang="en-US" sz="1050" b="1" dirty="0">
+                <a:solidFill>
+                  <a:schemeClr val="tx2"/>
                 </a:solidFill>
               </a:rPr>
               <a:t>Henrique</a:t>
             </a:r>
-            <a:endParaRPr lang="en-US" sz="1125" dirty="0"/>
+            <a:endParaRPr lang="en-US" sz="1050" dirty="0"/>
           </a:p>
         </p:txBody>
       </p:sp>
@@ -15456,7 +17631,7 @@
         <p:spPr>
           <a:xfrm>
             <a:off x="685800" y="1485900"/>
-            <a:ext cx="5467350" cy="2819400"/>
+            <a:ext cx="5467350" cy="4191000"/>
           </a:xfrm>
           <a:prstGeom prst="rect">
             <a:avLst/>
@@ -15473,7 +17648,7 @@
                 <a:spcPct val="112000"/>
               </a:lnSpc>
               <a:spcAft>
-                <a:spcPts val="600"/>
+                <a:spcPts val="750"/>
               </a:spcAft>
               <a:buSzPct val="100000"/>
               <a:buChar char="•"/>
@@ -15484,14 +17659,14 @@
                   <a:schemeClr val="tx1"/>
                 </a:solidFill>
               </a:rPr>
-              <a:t>JPEG 160 × 120 → cinza → ROI em </a:t>
+              <a:t>Quadro JPEG 160 × 120 → tons de cinza → ROI em </a:t>
             </a:r>
             <a:pPr indent="0" marL="0">
               <a:lnSpc>
                 <a:spcPct val="112000"/>
               </a:lnSpc>
               <a:spcAft>
-                <a:spcPts val="600"/>
+                <a:spcPts val="750"/>
               </a:spcAft>
               <a:buNone/>
             </a:pPr>
@@ -15508,7 +17683,7 @@
                 <a:spcPct val="112000"/>
               </a:lnSpc>
               <a:spcAft>
-                <a:spcPts val="600"/>
+                <a:spcPts val="750"/>
               </a:spcAft>
               <a:buNone/>
             </a:pPr>
@@ -15520,7 +17695,7 @@
               </a:rPr>
               <a:t> células; 2 quadros estáveis por leitura.</a:t>
             </a:r>
-            <a:endParaRPr lang="en-US" sz="1800" dirty="0"/>
+            <a:endParaRPr lang="en-US" sz="1700" dirty="0"/>
           </a:p>
           <a:p>
             <a:pPr marL="266700" indent="-266700">
@@ -15528,7 +17703,7 @@
                 <a:spcPct val="112000"/>
               </a:lnSpc>
               <a:spcAft>
-                <a:spcPts val="600"/>
+                <a:spcPts val="750"/>
               </a:spcAft>
               <a:buSzPct val="100000"/>
               <a:buChar char="•"/>
@@ -15546,7 +17721,7 @@
                 <a:spcPct val="112000"/>
               </a:lnSpc>
               <a:spcAft>
-                <a:spcPts val="600"/>
+                <a:spcPts val="750"/>
               </a:spcAft>
               <a:buNone/>
             </a:pPr>
@@ -15556,9 +17731,9 @@
                   <a:schemeClr val="tx1"/>
                 </a:solidFill>
               </a:rPr>
-              <a:t> só o vazio é calibrado; brilho global compensado pela mediana.</a:t>
-            </a:r>
-            <a:endParaRPr lang="en-US" sz="1800" dirty="0"/>
+              <a:t> apenas o compartimento vazio é calibrado; o brilho global é compensado pela mediana.</a:t>
+            </a:r>
+            <a:endParaRPr lang="en-US" sz="1700" dirty="0"/>
           </a:p>
           <a:p>
             <a:pPr marL="266700" indent="-266700">
@@ -15566,7 +17741,7 @@
                 <a:spcPct val="112000"/>
               </a:lnSpc>
               <a:spcAft>
-                <a:spcPts val="600"/>
+                <a:spcPts val="750"/>
               </a:spcAft>
               <a:buSzPct val="100000"/>
               <a:buChar char="•"/>
@@ -15577,14 +17752,14 @@
                   <a:schemeClr val="tx1"/>
                 </a:solidFill>
               </a:rPr>
-              <a:t>Células que mudam acima de max(20, ruído + 8) → </a:t>
+              <a:t>Célula alterada: diferença acima de max(20, ruído + 8). </a:t>
             </a:r>
             <a:pPr indent="0" marL="0">
               <a:lnSpc>
                 <a:spcPct val="112000"/>
               </a:lnSpc>
               <a:spcAft>
-                <a:spcPts val="600"/>
+                <a:spcPts val="750"/>
               </a:spcAft>
               <a:buNone/>
             </a:pPr>
@@ -15594,14 +17769,14 @@
                   <a:schemeClr val="tx1"/>
                 </a:solidFill>
               </a:rPr>
-              <a:t>mancha ≥ 6 células = dose</a:t>
+              <a:t>Mancha ≥ 6 células = dose presente</a:t>
             </a:r>
             <a:pPr indent="0" marL="0">
               <a:lnSpc>
                 <a:spcPct val="112000"/>
               </a:lnSpc>
               <a:spcAft>
-                <a:spcPts val="600"/>
+                <a:spcPts val="750"/>
               </a:spcAft>
               <a:buNone/>
             </a:pPr>
@@ -15613,7 +17788,7 @@
               </a:rPr>
               <a:t>.</a:t>
             </a:r>
-            <a:endParaRPr lang="en-US" sz="1800" dirty="0"/>
+            <a:endParaRPr lang="en-US" sz="1700" dirty="0"/>
           </a:p>
           <a:p>
             <a:pPr marL="266700" indent="-266700">
@@ -15621,7 +17796,7 @@
                 <a:spcPct val="112000"/>
               </a:lnSpc>
               <a:spcAft>
-                <a:spcPts val="600"/>
+                <a:spcPts val="750"/>
               </a:spcAft>
               <a:buSzPct val="100000"/>
               <a:buChar char="•"/>
@@ -15632,9 +17807,69 @@
                   <a:schemeClr val="tx1"/>
                 </a:solidFill>
               </a:rPr>
-              <a:t>Qualquer comprimido, em qualquer posição. Sem treinamento.</a:t>
-            </a:r>
-            <a:endParaRPr lang="en-US" sz="1800" dirty="0"/>
+              <a:t>Independe do comprimido e da posição; não requer treinamento.</a:t>
+            </a:r>
+            <a:endParaRPr lang="en-US" sz="1700" dirty="0"/>
+          </a:p>
+        </p:txBody>
+      </p:sp>
+      <p:pic>
+        <p:nvPicPr>
+          <p:cNvPr id="6" name="Image 0" descr="Referência vazia, compartimento com comprimido e células alteradas">    </p:cNvPr>
+          <p:cNvPicPr>
+            <a:picLocks noChangeAspect="1"/>
+          </p:cNvPicPr>
+          <p:nvPr/>
+        </p:nvPicPr>
+        <p:blipFill>
+          <a:blip r:embed="rId1"/>
+          <a:stretch>
+            <a:fillRect/>
+          </a:stretch>
+        </p:blipFill>
+        <p:spPr>
+          <a:xfrm>
+            <a:off x="6534150" y="1485900"/>
+            <a:ext cx="4972050" cy="1225985"/>
+          </a:xfrm>
+          <a:prstGeom prst="rect">
+            <a:avLst/>
+          </a:prstGeom>
+        </p:spPr>
+      </p:pic>
+      <p:sp>
+        <p:nvSpPr>
+          <p:cNvPr id="7" name="Text 4"/>
+          <p:cNvSpPr txBox="1"/>
+          <p:nvPr/>
+        </p:nvSpPr>
+        <p:spPr>
+          <a:xfrm>
+            <a:off x="6534150" y="2788085"/>
+            <a:ext cx="4972050" cy="209550"/>
+          </a:xfrm>
+          <a:prstGeom prst="rect">
+            <a:avLst/>
+          </a:prstGeom>
+          <a:noFill/>
+          <a:ln/>
+        </p:spPr>
+        <p:txBody>
+          <a:bodyPr wrap="square" lIns="0" tIns="0" rIns="0" bIns="0" rtlCol="0" anchor="t"/>
+          <a:lstStyle/>
+          <a:p>
+            <a:pPr indent="0" marL="0">
+              <a:buNone/>
+            </a:pPr>
+            <a:r>
+              <a:rPr lang="en-US" sz="1200" dirty="0">
+                <a:solidFill>
+                  <a:schemeClr val="tx2"/>
+                </a:solidFill>
+              </a:rPr>
+              <a:t>Figura 4 — Vazio, com comprimido e células alteradas (mancha de 37).</a:t>
+            </a:r>
+            <a:endParaRPr lang="en-US" sz="1200" dirty="0"/>
           </a:p>
         </p:txBody>
       </p:sp>
@@ -15653,17 +17888,17 @@
           </p:nvPr>
         </p:nvGraphicFramePr>
         <p:xfrm>
-          <a:off x="685800" y="4419600"/>
-          <a:ext cx="5467350" cy="914400"/>
+          <a:off x="6534150" y="3238500"/>
+          <a:ext cx="4972050" cy="914400"/>
         </p:xfrm>
         <a:graphic>
           <a:graphicData uri="http://schemas.openxmlformats.org/drawingml/2006/table">
             <a:tbl>
               <a:tblPr/>
               <a:tblGrid>
-                <a:gridCol w="1428750"/>
-                <a:gridCol w="1924050"/>
-                <a:gridCol w="2114550"/>
+                <a:gridCol w="1333500"/>
+                <a:gridCol w="1676400"/>
+                <a:gridCol w="1962150"/>
               </a:tblGrid>
               <a:tr h="314325">
                 <a:tc>
@@ -15680,7 +17915,7 @@
                             <a:schemeClr val="tx1"/>
                           </a:solidFill>
                         </a:rPr>
-                        <a:t>Teste (11/10)</a:t>
+                        <a:t>Ensaio (11/10)</a:t>
                       </a:r>
                       <a:endParaRPr lang="en-US" sz="1200" dirty="0"/>
                     </a:p>
@@ -16297,7 +18532,7 @@
                             <a:schemeClr val="tx1"/>
                           </a:solidFill>
                         </a:rPr>
-                        <a:t>inconclusivo ✘</a:t>
+                        <a:t>inconclusivo</a:t>
                       </a:r>
                       <a:endParaRPr lang="en-US" sz="1200" dirty="0"/>
                     </a:p>
@@ -16484,7 +18719,7 @@
                             <a:schemeClr val="tx1"/>
                           </a:solidFill>
                         </a:rPr>
-                        <a:t>inconclusivo ✘</a:t>
+                        <a:t>inconclusivo</a:t>
                       </a:r>
                       <a:endParaRPr lang="en-US" sz="1200" dirty="0"/>
                     </a:p>
@@ -16602,39 +18837,15 @@
           </a:graphicData>
         </a:graphic>
       </p:graphicFrame>
-      <p:pic>
-        <p:nvPicPr>
-          <p:cNvPr id="7" name="Image 0" descr="Vazio, com comprimido e mancha detectada">    </p:cNvPr>
-          <p:cNvPicPr>
-            <a:picLocks noChangeAspect="1"/>
-          </p:cNvPicPr>
-          <p:nvPr/>
-        </p:nvPicPr>
-        <p:blipFill>
-          <a:blip r:embed="rId1"/>
-          <a:stretch>
-            <a:fillRect/>
-          </a:stretch>
-        </p:blipFill>
-        <p:spPr>
-          <a:xfrm>
-            <a:off x="6534150" y="1485900"/>
-            <a:ext cx="4972050" cy="1225985"/>
-          </a:xfrm>
-          <a:prstGeom prst="rect">
-            <a:avLst/>
-          </a:prstGeom>
-        </p:spPr>
-      </p:pic>
       <p:sp>
         <p:nvSpPr>
-          <p:cNvPr id="8" name="Text 4"/>
+          <p:cNvPr id="9" name="Text 5"/>
           <p:cNvSpPr txBox="1"/>
           <p:nvPr/>
         </p:nvSpPr>
         <p:spPr>
           <a:xfrm>
-            <a:off x="6534150" y="2807135"/>
+            <a:off x="6534150" y="4914900"/>
             <a:ext cx="4972050" cy="209550"/>
           </a:xfrm>
           <a:prstGeom prst="rect">
@@ -16656,7 +18867,7 @@
                   <a:schemeClr val="tx2"/>
                 </a:solidFill>
               </a:rPr>
-              <a:t>Vazio · com comprimido · células alteradas (mancha de 37)</a:t>
+              <a:t>Tabela 2 — Classificação na placa antes e depois do novo critério.</a:t>
             </a:r>
             <a:endParaRPr lang="en-US" sz="1200" dirty="0"/>
           </a:p>
@@ -16690,7 +18901,7 @@
           <a:bodyPr lIns="0" tIns="0" rIns="0" bIns="0"/>
           <a:lstStyle>
             <a:lvl1pPr>
-              <a:defRPr sz="1125">
+              <a:defRPr sz="1050">
                 <a:solidFill>
                   <a:schemeClr val="tx2"/>
                 </a:solidFill>
@@ -16729,10 +18940,10 @@
         <a:srgbClr val="5B6672"/>
       </a:dk2>
       <a:lt2>
-        <a:srgbClr val="EEF4F9"/>
+        <a:srgbClr val="EEF2F6"/>
       </a:lt2>
       <a:accent1>
-        <a:srgbClr val="1F5F8B"/>
+        <a:srgbClr val="1B4F72"/>
       </a:accent1>
       <a:accent2>
         <a:srgbClr val="2A9D8F"/>
@@ -16750,7 +18961,7 @@
         <a:srgbClr val="6B7280"/>
       </a:accent6>
       <a:hlink>
-        <a:srgbClr val="1F5F8B"/>
+        <a:srgbClr val="1B4F72"/>
       </a:hlink>
       <a:folHlink>
         <a:srgbClr val="5B6672"/>
